--- a/dist/weeks-포트폴리오제작/포트폴리오제작_11주차_편집디자인2.pptx
+++ b/dist/weeks-포트폴리오제작/포트폴리오제작_11주차_편집디자인2.pptx
@@ -1658,7 +1658,7 @@
     <p:bg>
       <p:bgPr>
         <a:solidFill>
-          <a:srgbClr val="14161B"/>
+          <a:srgbClr val="FFFFFF"/>
         </a:solidFill>
       </p:bgPr>
     </p:bg>
@@ -1684,8 +1684,86 @@
         </p:nvSpPr>
         <p:spPr>
           <a:xfrm>
-            <a:off x="7223760" y="502920"/>
-            <a:ext cx="4572000" cy="5852160"/>
+            <a:off x="640080" y="274320"/>
+            <a:ext cx="3657600" cy="219456"/>
+          </a:xfrm>
+          <a:prstGeom prst="rect">
+            <a:avLst/>
+          </a:prstGeom>
+          <a:noFill/>
+          <a:ln/>
+        </p:spPr>
+        <p:txBody>
+          <a:bodyPr wrap="square" lIns="0" tIns="0" rIns="0" bIns="0" rtlCol="0" anchor="ctr"/>
+          <a:lstStyle/>
+          <a:p>
+            <a:pPr indent="0" marL="0">
+              <a:buNone/>
+            </a:pPr>
+            <a:r>
+              <a:rPr lang="en-US" sz="900" spc="120" kern="0" dirty="0">
+                <a:solidFill>
+                  <a:srgbClr val="8A8A8A"/>
+                </a:solidFill>
+                <a:latin typeface="Pretendard" pitchFamily="34" charset="0"/>
+                <a:ea typeface="Pretendard" pitchFamily="34" charset="-122"/>
+                <a:cs typeface="Pretendard" pitchFamily="34" charset="-120"/>
+              </a:rPr>
+              <a:t>포트폴리오제작</a:t>
+            </a:r>
+            <a:endParaRPr lang="en-US" sz="900" dirty="0"/>
+          </a:p>
+        </p:txBody>
+      </p:sp>
+      <p:sp>
+        <p:nvSpPr>
+          <p:cNvPr id="3" name="Text 1"/>
+          <p:cNvSpPr/>
+          <p:nvPr/>
+        </p:nvSpPr>
+        <p:spPr>
+          <a:xfrm>
+            <a:off x="4480560" y="274320"/>
+            <a:ext cx="4572000" cy="219456"/>
+          </a:xfrm>
+          <a:prstGeom prst="rect">
+            <a:avLst/>
+          </a:prstGeom>
+          <a:noFill/>
+          <a:ln/>
+        </p:spPr>
+        <p:txBody>
+          <a:bodyPr wrap="square" lIns="0" tIns="0" rIns="0" bIns="0" rtlCol="0" anchor="ctr"/>
+          <a:lstStyle/>
+          <a:p>
+            <a:pPr algn="ctr" indent="0" marL="0">
+              <a:buNone/>
+            </a:pPr>
+            <a:r>
+              <a:rPr lang="en-US" sz="900" spc="120" kern="0" dirty="0">
+                <a:solidFill>
+                  <a:srgbClr val="8A8A8A"/>
+                </a:solidFill>
+                <a:latin typeface="Pretendard" pitchFamily="34" charset="0"/>
+                <a:ea typeface="Pretendard" pitchFamily="34" charset="-122"/>
+                <a:cs typeface="Pretendard" pitchFamily="34" charset="-120"/>
+              </a:rPr>
+              <a:t>PHASE 3 완성과 발표</a:t>
+            </a:r>
+            <a:endParaRPr lang="en-US" sz="900" dirty="0"/>
+          </a:p>
+        </p:txBody>
+      </p:sp>
+      <p:sp>
+        <p:nvSpPr>
+          <p:cNvPr id="4" name="Text 2"/>
+          <p:cNvSpPr/>
+          <p:nvPr/>
+        </p:nvSpPr>
+        <p:spPr>
+          <a:xfrm>
+            <a:off x="8808415" y="274320"/>
+            <a:ext cx="2743200" cy="219456"/>
           </a:xfrm>
           <a:prstGeom prst="rect">
             <a:avLst/>
@@ -1701,48 +1779,181 @@
               <a:buNone/>
             </a:pPr>
             <a:r>
-              <a:rPr lang="en-US" sz="25500" dirty="0">
-                <a:solidFill>
-                  <a:srgbClr val="262A33"/>
-                </a:solidFill>
-                <a:latin typeface="Pretendard Thin" pitchFamily="34" charset="0"/>
-                <a:ea typeface="Pretendard Thin" pitchFamily="34" charset="-122"/>
-                <a:cs typeface="Pretendard Thin" pitchFamily="34" charset="-120"/>
+              <a:rPr lang="en-US" sz="900" spc="200" kern="0" dirty="0">
+                <a:solidFill>
+                  <a:srgbClr val="8A8A8A"/>
+                </a:solidFill>
+                <a:latin typeface="Pretendard" pitchFamily="34" charset="0"/>
+                <a:ea typeface="Pretendard" pitchFamily="34" charset="-122"/>
+                <a:cs typeface="Pretendard" pitchFamily="34" charset="-120"/>
+              </a:rPr>
+              <a:t>WEEK 11</a:t>
+            </a:r>
+            <a:endParaRPr lang="en-US" sz="900" dirty="0"/>
+          </a:p>
+        </p:txBody>
+      </p:sp>
+      <p:sp>
+        <p:nvSpPr>
+          <p:cNvPr id="5" name="Shape 3"/>
+          <p:cNvSpPr/>
+          <p:nvPr/>
+        </p:nvSpPr>
+        <p:spPr>
+          <a:xfrm>
+            <a:off x="640080" y="548640"/>
+            <a:ext cx="10911535" cy="7315"/>
+          </a:xfrm>
+          <a:prstGeom prst="rect">
+            <a:avLst/>
+          </a:prstGeom>
+          <a:solidFill>
+            <a:srgbClr val="DCDCDC"/>
+          </a:solidFill>
+          <a:ln w="12700">
+            <a:solidFill>
+              <a:srgbClr val="DCDCDC"/>
+            </a:solidFill>
+            <a:prstDash val="solid"/>
+          </a:ln>
+        </p:spPr>
+      </p:sp>
+      <p:sp>
+        <p:nvSpPr>
+          <p:cNvPr id="6" name="Text 4"/>
+          <p:cNvSpPr/>
+          <p:nvPr/>
+        </p:nvSpPr>
+        <p:spPr>
+          <a:xfrm>
+            <a:off x="7894015" y="713232"/>
+            <a:ext cx="3657600" cy="1517904"/>
+          </a:xfrm>
+          <a:prstGeom prst="rect">
+            <a:avLst/>
+          </a:prstGeom>
+          <a:noFill/>
+          <a:ln/>
+        </p:spPr>
+        <p:txBody>
+          <a:bodyPr wrap="square" lIns="0" tIns="0" rIns="0" bIns="0" rtlCol="0" anchor="ctr"/>
+          <a:lstStyle/>
+          <a:p>
+            <a:pPr algn="r" indent="0" marL="0">
+              <a:buNone/>
+            </a:pPr>
+            <a:r>
+              <a:rPr lang="en-US" sz="13200" dirty="0">
+                <a:solidFill>
+                  <a:srgbClr val="111111"/>
+                </a:solidFill>
+                <a:latin typeface="Pretendard Black" pitchFamily="34" charset="0"/>
+                <a:ea typeface="Pretendard Black" pitchFamily="34" charset="-122"/>
+                <a:cs typeface="Pretendard Black" pitchFamily="34" charset="-120"/>
               </a:rPr>
               <a:t>11</a:t>
             </a:r>
-            <a:endParaRPr lang="en-US" sz="25500" dirty="0"/>
-          </a:p>
-        </p:txBody>
-      </p:sp>
-      <p:sp>
-        <p:nvSpPr>
-          <p:cNvPr id="3" name="Text 1"/>
-          <p:cNvSpPr/>
-          <p:nvPr/>
-        </p:nvSpPr>
-        <p:spPr>
-          <a:xfrm>
-            <a:off x="640080" y="1481328"/>
-            <a:ext cx="6949440" cy="274320"/>
-          </a:xfrm>
-          <a:prstGeom prst="rect">
-            <a:avLst/>
-          </a:prstGeom>
-          <a:noFill/>
-          <a:ln/>
-        </p:spPr>
-        <p:txBody>
-          <a:bodyPr wrap="square" lIns="0" tIns="0" rIns="0" bIns="0" rtlCol="0" anchor="ctr"/>
-          <a:lstStyle/>
-          <a:p>
-            <a:pPr indent="0" marL="0">
-              <a:buNone/>
-            </a:pPr>
-            <a:r>
-              <a:rPr lang="en-US" sz="1200" b="1" spc="160" kern="0" dirty="0">
-                <a:solidFill>
-                  <a:srgbClr val="FF4A1C"/>
+            <a:endParaRPr lang="en-US" sz="13200" dirty="0"/>
+          </a:p>
+        </p:txBody>
+      </p:sp>
+      <p:sp>
+        <p:nvSpPr>
+          <p:cNvPr id="7" name="Shape 5"/>
+          <p:cNvSpPr/>
+          <p:nvPr/>
+        </p:nvSpPr>
+        <p:spPr>
+          <a:xfrm>
+            <a:off x="941832" y="877824"/>
+            <a:ext cx="0" cy="603504"/>
+          </a:xfrm>
+          <a:prstGeom prst="line">
+            <a:avLst/>
+          </a:prstGeom>
+          <a:noFill/>
+          <a:ln w="15875">
+            <a:solidFill>
+              <a:srgbClr val="111111"/>
+            </a:solidFill>
+            <a:prstDash val="solid"/>
+          </a:ln>
+        </p:spPr>
+      </p:sp>
+      <p:sp>
+        <p:nvSpPr>
+          <p:cNvPr id="8" name="Shape 6"/>
+          <p:cNvSpPr/>
+          <p:nvPr/>
+        </p:nvSpPr>
+        <p:spPr>
+          <a:xfrm>
+            <a:off x="640080" y="1239926"/>
+            <a:ext cx="301752" cy="241402"/>
+          </a:xfrm>
+          <a:prstGeom prst="line">
+            <a:avLst/>
+          </a:prstGeom>
+          <a:noFill/>
+          <a:ln w="15875">
+            <a:solidFill>
+              <a:srgbClr val="111111"/>
+            </a:solidFill>
+            <a:prstDash val="solid"/>
+          </a:ln>
+        </p:spPr>
+      </p:sp>
+      <p:sp>
+        <p:nvSpPr>
+          <p:cNvPr id="9" name="Shape 7"/>
+          <p:cNvSpPr/>
+          <p:nvPr/>
+        </p:nvSpPr>
+        <p:spPr>
+          <a:xfrm flipV="1">
+            <a:off x="941832" y="1239926"/>
+            <a:ext cx="301752" cy="241402"/>
+          </a:xfrm>
+          <a:prstGeom prst="line">
+            <a:avLst/>
+          </a:prstGeom>
+          <a:noFill/>
+          <a:ln w="15875">
+            <a:solidFill>
+              <a:srgbClr val="111111"/>
+            </a:solidFill>
+            <a:prstDash val="solid"/>
+          </a:ln>
+        </p:spPr>
+      </p:sp>
+      <p:sp>
+        <p:nvSpPr>
+          <p:cNvPr id="10" name="Text 8"/>
+          <p:cNvSpPr/>
+          <p:nvPr/>
+        </p:nvSpPr>
+        <p:spPr>
+          <a:xfrm>
+            <a:off x="640080" y="1901952"/>
+            <a:ext cx="7498080" cy="237744"/>
+          </a:xfrm>
+          <a:prstGeom prst="rect">
+            <a:avLst/>
+          </a:prstGeom>
+          <a:noFill/>
+          <a:ln/>
+        </p:spPr>
+        <p:txBody>
+          <a:bodyPr wrap="square" lIns="0" tIns="0" rIns="0" bIns="0" rtlCol="0" anchor="ctr"/>
+          <a:lstStyle/>
+          <a:p>
+            <a:pPr indent="0" marL="0">
+              <a:buNone/>
+            </a:pPr>
+            <a:r>
+              <a:rPr lang="en-US" sz="950" spc="260" kern="0" dirty="0">
+                <a:solidFill>
+                  <a:srgbClr val="8A8A8A"/>
                 </a:solidFill>
                 <a:latin typeface="Pretendard" pitchFamily="34" charset="0"/>
                 <a:ea typeface="Pretendard" pitchFamily="34" charset="-122"/>
@@ -1750,62 +1961,62 @@
               </a:rPr>
               <a:t>WEEK 11  ·  PHASE 3 완성과 발표</a:t>
             </a:r>
-            <a:endParaRPr lang="en-US" sz="1200" dirty="0"/>
-          </a:p>
-        </p:txBody>
-      </p:sp>
-      <p:sp>
-        <p:nvSpPr>
-          <p:cNvPr id="4" name="Text 2"/>
-          <p:cNvSpPr/>
-          <p:nvPr/>
-        </p:nvSpPr>
-        <p:spPr>
-          <a:xfrm>
-            <a:off x="640080" y="1737360"/>
-            <a:ext cx="7315200" cy="1225296"/>
-          </a:xfrm>
-          <a:prstGeom prst="rect">
-            <a:avLst/>
-          </a:prstGeom>
-          <a:noFill/>
-          <a:ln/>
-        </p:spPr>
-        <p:txBody>
-          <a:bodyPr wrap="square" lIns="0" tIns="0" rIns="0" bIns="0" rtlCol="0" anchor="ctr"/>
+            <a:endParaRPr lang="en-US" sz="950" dirty="0"/>
+          </a:p>
+        </p:txBody>
+      </p:sp>
+      <p:sp>
+        <p:nvSpPr>
+          <p:cNvPr id="11" name="Text 9"/>
+          <p:cNvSpPr/>
+          <p:nvPr/>
+        </p:nvSpPr>
+        <p:spPr>
+          <a:xfrm>
+            <a:off x="640080" y="2194560"/>
+            <a:ext cx="8595360" cy="1225296"/>
+          </a:xfrm>
+          <a:prstGeom prst="rect">
+            <a:avLst/>
+          </a:prstGeom>
+          <a:noFill/>
+          <a:ln/>
+        </p:spPr>
+        <p:txBody>
+          <a:bodyPr wrap="square" lIns="0" tIns="0" rIns="0" bIns="0" rtlCol="0" anchor="t"/>
           <a:lstStyle/>
           <a:p>
             <a:pPr indent="0" marL="0">
               <a:lnSpc>
-                <a:spcPct val="116000"/>
+                <a:spcPct val="112000"/>
               </a:lnSpc>
               <a:buNone/>
             </a:pPr>
             <a:r>
-              <a:rPr lang="en-US" sz="4200" b="1" dirty="0">
-                <a:solidFill>
-                  <a:srgbClr val="FFFFFF"/>
-                </a:solidFill>
-                <a:latin typeface="Pretendard" pitchFamily="34" charset="0"/>
-                <a:ea typeface="Pretendard" pitchFamily="34" charset="-122"/>
-                <a:cs typeface="Pretendard" pitchFamily="34" charset="-120"/>
+              <a:rPr lang="en-US" sz="4800" dirty="0">
+                <a:solidFill>
+                  <a:srgbClr val="111111"/>
+                </a:solidFill>
+                <a:latin typeface="Pretendard Black" pitchFamily="34" charset="0"/>
+                <a:ea typeface="Pretendard Black" pitchFamily="34" charset="-122"/>
+                <a:cs typeface="Pretendard Black" pitchFamily="34" charset="-120"/>
               </a:rPr>
               <a:t>편집디자인 실습 Ⅱ</a:t>
             </a:r>
-            <a:endParaRPr lang="en-US" sz="4200" dirty="0"/>
-          </a:p>
-        </p:txBody>
-      </p:sp>
-      <p:sp>
-        <p:nvSpPr>
-          <p:cNvPr id="5" name="Text 3"/>
-          <p:cNvSpPr/>
-          <p:nvPr/>
-        </p:nvSpPr>
-        <p:spPr>
-          <a:xfrm>
-            <a:off x="640080" y="3035808"/>
-            <a:ext cx="7132320" cy="640080"/>
+            <a:endParaRPr lang="en-US" sz="4800" dirty="0"/>
+          </a:p>
+        </p:txBody>
+      </p:sp>
+      <p:sp>
+        <p:nvSpPr>
+          <p:cNvPr id="12" name="Text 10"/>
+          <p:cNvSpPr/>
+          <p:nvPr/>
+        </p:nvSpPr>
+        <p:spPr>
+          <a:xfrm>
+            <a:off x="640080" y="3547872"/>
+            <a:ext cx="7863840" cy="694944"/>
           </a:xfrm>
           <a:prstGeom prst="rect">
             <a:avLst/>
@@ -1819,14 +2030,14 @@
           <a:p>
             <a:pPr indent="0" marL="0">
               <a:lnSpc>
-                <a:spcPct val="124000"/>
+                <a:spcPct val="130000"/>
               </a:lnSpc>
               <a:buNone/>
             </a:pPr>
             <a:r>
-              <a:rPr lang="en-US" sz="1700" dirty="0">
-                <a:solidFill>
-                  <a:srgbClr val="C9CDD6"/>
+              <a:rPr lang="en-US" sz="1600" dirty="0">
+                <a:solidFill>
+                  <a:srgbClr val="6E6E6E"/>
                 </a:solidFill>
                 <a:latin typeface="Pretendard Light" pitchFamily="34" charset="0"/>
                 <a:ea typeface="Pretendard Light" pitchFamily="34" charset="-122"/>
@@ -1834,19 +2045,19 @@
               </a:rPr>
               <a:t>컬러 시스템을 적용하고,</a:t>
             </a:r>
-            <a:endParaRPr lang="en-US" sz="1700" dirty="0"/>
+            <a:endParaRPr lang="en-US" sz="1600" dirty="0"/>
           </a:p>
           <a:p>
             <a:pPr indent="0" marL="0">
               <a:lnSpc>
-                <a:spcPct val="124000"/>
+                <a:spcPct val="130000"/>
               </a:lnSpc>
               <a:buNone/>
             </a:pPr>
             <a:r>
-              <a:rPr lang="en-US" sz="1700" dirty="0">
-                <a:solidFill>
-                  <a:srgbClr val="C9CDD6"/>
+              <a:rPr lang="en-US" sz="1600" dirty="0">
+                <a:solidFill>
+                  <a:srgbClr val="6E6E6E"/>
                 </a:solidFill>
                 <a:latin typeface="Pretendard Light" pitchFamily="34" charset="0"/>
                 <a:ea typeface="Pretendard Light" pitchFamily="34" charset="-122"/>
@@ -1854,30 +2065,30 @@
               </a:rPr>
               <a:t>이미지 보정과 배치를 완성합니다.</a:t>
             </a:r>
-            <a:endParaRPr lang="en-US" sz="1700" dirty="0"/>
-          </a:p>
-        </p:txBody>
-      </p:sp>
-      <p:sp>
-        <p:nvSpPr>
-          <p:cNvPr id="6" name="Shape 4"/>
-          <p:cNvSpPr/>
-          <p:nvPr/>
-        </p:nvSpPr>
-        <p:spPr>
-          <a:xfrm>
-            <a:off x="640080" y="3840480"/>
-            <a:ext cx="2926080" cy="9144"/>
+            <a:endParaRPr lang="en-US" sz="1600" dirty="0"/>
+          </a:p>
+        </p:txBody>
+      </p:sp>
+      <p:sp>
+        <p:nvSpPr>
+          <p:cNvPr id="13" name="Shape 11"/>
+          <p:cNvSpPr/>
+          <p:nvPr/>
+        </p:nvSpPr>
+        <p:spPr>
+          <a:xfrm>
+            <a:off x="640080" y="4443984"/>
+            <a:ext cx="2743200" cy="7315"/>
           </a:xfrm>
           <a:prstGeom prst="rect">
             <a:avLst/>
           </a:prstGeom>
           <a:solidFill>
-            <a:srgbClr val="3A3F4B"/>
+            <a:srgbClr val="111111"/>
           </a:solidFill>
           <a:ln w="12700">
             <a:solidFill>
-              <a:srgbClr val="3A3F4B"/>
+              <a:srgbClr val="111111"/>
             </a:solidFill>
             <a:prstDash val="solid"/>
           </a:ln>
@@ -1885,32 +2096,32 @@
       </p:sp>
       <p:sp>
         <p:nvSpPr>
-          <p:cNvPr id="7" name="Text 5"/>
-          <p:cNvSpPr/>
-          <p:nvPr/>
-        </p:nvSpPr>
-        <p:spPr>
-          <a:xfrm>
-            <a:off x="640080" y="4059936"/>
-            <a:ext cx="914400" cy="310896"/>
-          </a:xfrm>
-          <a:prstGeom prst="rect">
-            <a:avLst/>
-          </a:prstGeom>
-          <a:noFill/>
-          <a:ln/>
-        </p:spPr>
-        <p:txBody>
-          <a:bodyPr wrap="square" lIns="0" tIns="0" rIns="0" bIns="0" rtlCol="0" anchor="ctr"/>
-          <a:lstStyle/>
-          <a:p>
-            <a:pPr indent="0" marL="0">
-              <a:buNone/>
-            </a:pPr>
-            <a:r>
-              <a:rPr lang="en-US" sz="1100" b="1" dirty="0">
-                <a:solidFill>
-                  <a:srgbClr val="9AA0AA"/>
+          <p:cNvPr id="14" name="Text 12"/>
+          <p:cNvSpPr/>
+          <p:nvPr/>
+        </p:nvSpPr>
+        <p:spPr>
+          <a:xfrm>
+            <a:off x="640080" y="4645152"/>
+            <a:ext cx="914400" cy="292608"/>
+          </a:xfrm>
+          <a:prstGeom prst="rect">
+            <a:avLst/>
+          </a:prstGeom>
+          <a:noFill/>
+          <a:ln/>
+        </p:spPr>
+        <p:txBody>
+          <a:bodyPr wrap="square" lIns="0" tIns="0" rIns="0" bIns="0" rtlCol="0" anchor="ctr"/>
+          <a:lstStyle/>
+          <a:p>
+            <a:pPr indent="0" marL="0">
+              <a:buNone/>
+            </a:pPr>
+            <a:r>
+              <a:rPr lang="en-US" sz="950" spc="140" kern="0" dirty="0">
+                <a:solidFill>
+                  <a:srgbClr val="9B9B9B"/>
                 </a:solidFill>
                 <a:latin typeface="Pretendard" pitchFamily="34" charset="0"/>
                 <a:ea typeface="Pretendard" pitchFamily="34" charset="-122"/>
@@ -1918,38 +2129,38 @@
               </a:rPr>
               <a:t>과목</a:t>
             </a:r>
-            <a:endParaRPr lang="en-US" sz="1100" dirty="0"/>
-          </a:p>
-        </p:txBody>
-      </p:sp>
-      <p:sp>
-        <p:nvSpPr>
-          <p:cNvPr id="8" name="Text 6"/>
-          <p:cNvSpPr/>
-          <p:nvPr/>
-        </p:nvSpPr>
-        <p:spPr>
-          <a:xfrm>
-            <a:off x="1645920" y="4059936"/>
-            <a:ext cx="6400800" cy="310896"/>
-          </a:xfrm>
-          <a:prstGeom prst="rect">
-            <a:avLst/>
-          </a:prstGeom>
-          <a:noFill/>
-          <a:ln/>
-        </p:spPr>
-        <p:txBody>
-          <a:bodyPr wrap="square" lIns="0" tIns="0" rIns="0" bIns="0" rtlCol="0" anchor="ctr"/>
-          <a:lstStyle/>
-          <a:p>
-            <a:pPr indent="0" marL="0">
-              <a:buNone/>
-            </a:pPr>
-            <a:r>
-              <a:rPr lang="en-US" sz="1250" dirty="0">
-                <a:solidFill>
-                  <a:srgbClr val="DDE0E6"/>
+            <a:endParaRPr lang="en-US" sz="950" dirty="0"/>
+          </a:p>
+        </p:txBody>
+      </p:sp>
+      <p:sp>
+        <p:nvSpPr>
+          <p:cNvPr id="15" name="Text 13"/>
+          <p:cNvSpPr/>
+          <p:nvPr/>
+        </p:nvSpPr>
+        <p:spPr>
+          <a:xfrm>
+            <a:off x="1645920" y="4645152"/>
+            <a:ext cx="7680960" cy="292608"/>
+          </a:xfrm>
+          <a:prstGeom prst="rect">
+            <a:avLst/>
+          </a:prstGeom>
+          <a:noFill/>
+          <a:ln/>
+        </p:spPr>
+        <p:txBody>
+          <a:bodyPr wrap="square" lIns="0" tIns="0" rIns="0" bIns="0" rtlCol="0" anchor="ctr"/>
+          <a:lstStyle/>
+          <a:p>
+            <a:pPr indent="0" marL="0">
+              <a:buNone/>
+            </a:pPr>
+            <a:r>
+              <a:rPr lang="en-US" sz="1200" dirty="0">
+                <a:solidFill>
+                  <a:srgbClr val="1F1F1F"/>
                 </a:solidFill>
                 <a:latin typeface="Pretendard" pitchFamily="34" charset="0"/>
                 <a:ea typeface="Pretendard" pitchFamily="34" charset="-122"/>
@@ -1957,38 +2168,38 @@
               </a:rPr>
               <a:t>포트폴리오제작 · 실내·산업디자인학과 3학년</a:t>
             </a:r>
-            <a:endParaRPr lang="en-US" sz="1250" dirty="0"/>
-          </a:p>
-        </p:txBody>
-      </p:sp>
-      <p:sp>
-        <p:nvSpPr>
-          <p:cNvPr id="9" name="Text 7"/>
-          <p:cNvSpPr/>
-          <p:nvPr/>
-        </p:nvSpPr>
-        <p:spPr>
-          <a:xfrm>
-            <a:off x="640080" y="4443984"/>
-            <a:ext cx="914400" cy="310896"/>
-          </a:xfrm>
-          <a:prstGeom prst="rect">
-            <a:avLst/>
-          </a:prstGeom>
-          <a:noFill/>
-          <a:ln/>
-        </p:spPr>
-        <p:txBody>
-          <a:bodyPr wrap="square" lIns="0" tIns="0" rIns="0" bIns="0" rtlCol="0" anchor="ctr"/>
-          <a:lstStyle/>
-          <a:p>
-            <a:pPr indent="0" marL="0">
-              <a:buNone/>
-            </a:pPr>
-            <a:r>
-              <a:rPr lang="en-US" sz="1100" b="1" dirty="0">
-                <a:solidFill>
-                  <a:srgbClr val="9AA0AA"/>
+            <a:endParaRPr lang="en-US" sz="1200" dirty="0"/>
+          </a:p>
+        </p:txBody>
+      </p:sp>
+      <p:sp>
+        <p:nvSpPr>
+          <p:cNvPr id="16" name="Text 14"/>
+          <p:cNvSpPr/>
+          <p:nvPr/>
+        </p:nvSpPr>
+        <p:spPr>
+          <a:xfrm>
+            <a:off x="640080" y="5029200"/>
+            <a:ext cx="914400" cy="292608"/>
+          </a:xfrm>
+          <a:prstGeom prst="rect">
+            <a:avLst/>
+          </a:prstGeom>
+          <a:noFill/>
+          <a:ln/>
+        </p:spPr>
+        <p:txBody>
+          <a:bodyPr wrap="square" lIns="0" tIns="0" rIns="0" bIns="0" rtlCol="0" anchor="ctr"/>
+          <a:lstStyle/>
+          <a:p>
+            <a:pPr indent="0" marL="0">
+              <a:buNone/>
+            </a:pPr>
+            <a:r>
+              <a:rPr lang="en-US" sz="950" spc="140" kern="0" dirty="0">
+                <a:solidFill>
+                  <a:srgbClr val="9B9B9B"/>
                 </a:solidFill>
                 <a:latin typeface="Pretendard" pitchFamily="34" charset="0"/>
                 <a:ea typeface="Pretendard" pitchFamily="34" charset="-122"/>
@@ -1996,38 +2207,38 @@
               </a:rPr>
               <a:t>오늘</a:t>
             </a:r>
-            <a:endParaRPr lang="en-US" sz="1100" dirty="0"/>
-          </a:p>
-        </p:txBody>
-      </p:sp>
-      <p:sp>
-        <p:nvSpPr>
-          <p:cNvPr id="10" name="Text 8"/>
-          <p:cNvSpPr/>
-          <p:nvPr/>
-        </p:nvSpPr>
-        <p:spPr>
-          <a:xfrm>
-            <a:off x="1645920" y="4443984"/>
-            <a:ext cx="6400800" cy="310896"/>
-          </a:xfrm>
-          <a:prstGeom prst="rect">
-            <a:avLst/>
-          </a:prstGeom>
-          <a:noFill/>
-          <a:ln/>
-        </p:spPr>
-        <p:txBody>
-          <a:bodyPr wrap="square" lIns="0" tIns="0" rIns="0" bIns="0" rtlCol="0" anchor="ctr"/>
-          <a:lstStyle/>
-          <a:p>
-            <a:pPr indent="0" marL="0">
-              <a:buNone/>
-            </a:pPr>
-            <a:r>
-              <a:rPr lang="en-US" sz="1250" dirty="0">
-                <a:solidFill>
-                  <a:srgbClr val="DDE0E6"/>
+            <a:endParaRPr lang="en-US" sz="950" dirty="0"/>
+          </a:p>
+        </p:txBody>
+      </p:sp>
+      <p:sp>
+        <p:nvSpPr>
+          <p:cNvPr id="17" name="Text 15"/>
+          <p:cNvSpPr/>
+          <p:nvPr/>
+        </p:nvSpPr>
+        <p:spPr>
+          <a:xfrm>
+            <a:off x="1645920" y="5029200"/>
+            <a:ext cx="7680960" cy="292608"/>
+          </a:xfrm>
+          <a:prstGeom prst="rect">
+            <a:avLst/>
+          </a:prstGeom>
+          <a:noFill/>
+          <a:ln/>
+        </p:spPr>
+        <p:txBody>
+          <a:bodyPr wrap="square" lIns="0" tIns="0" rIns="0" bIns="0" rtlCol="0" anchor="ctr"/>
+          <a:lstStyle/>
+          <a:p>
+            <a:pPr indent="0" marL="0">
+              <a:buNone/>
+            </a:pPr>
+            <a:r>
+              <a:rPr lang="en-US" sz="1200" dirty="0">
+                <a:solidFill>
+                  <a:srgbClr val="1F1F1F"/>
                 </a:solidFill>
                 <a:latin typeface="Pretendard" pitchFamily="34" charset="0"/>
                 <a:ea typeface="Pretendard" pitchFamily="34" charset="-122"/>
@@ -2035,38 +2246,38 @@
               </a:rPr>
               <a:t>90분 — 강의 20분 · 이미지 보정·배치 실습 60분</a:t>
             </a:r>
-            <a:endParaRPr lang="en-US" sz="1250" dirty="0"/>
-          </a:p>
-        </p:txBody>
-      </p:sp>
-      <p:sp>
-        <p:nvSpPr>
-          <p:cNvPr id="11" name="Text 9"/>
-          <p:cNvSpPr/>
-          <p:nvPr/>
-        </p:nvSpPr>
-        <p:spPr>
-          <a:xfrm>
-            <a:off x="640080" y="4828032"/>
-            <a:ext cx="914400" cy="310896"/>
-          </a:xfrm>
-          <a:prstGeom prst="rect">
-            <a:avLst/>
-          </a:prstGeom>
-          <a:noFill/>
-          <a:ln/>
-        </p:spPr>
-        <p:txBody>
-          <a:bodyPr wrap="square" lIns="0" tIns="0" rIns="0" bIns="0" rtlCol="0" anchor="ctr"/>
-          <a:lstStyle/>
-          <a:p>
-            <a:pPr indent="0" marL="0">
-              <a:buNone/>
-            </a:pPr>
-            <a:r>
-              <a:rPr lang="en-US" sz="1100" b="1" dirty="0">
-                <a:solidFill>
-                  <a:srgbClr val="9AA0AA"/>
+            <a:endParaRPr lang="en-US" sz="1200" dirty="0"/>
+          </a:p>
+        </p:txBody>
+      </p:sp>
+      <p:sp>
+        <p:nvSpPr>
+          <p:cNvPr id="18" name="Text 16"/>
+          <p:cNvSpPr/>
+          <p:nvPr/>
+        </p:nvSpPr>
+        <p:spPr>
+          <a:xfrm>
+            <a:off x="640080" y="5413248"/>
+            <a:ext cx="914400" cy="292608"/>
+          </a:xfrm>
+          <a:prstGeom prst="rect">
+            <a:avLst/>
+          </a:prstGeom>
+          <a:noFill/>
+          <a:ln/>
+        </p:spPr>
+        <p:txBody>
+          <a:bodyPr wrap="square" lIns="0" tIns="0" rIns="0" bIns="0" rtlCol="0" anchor="ctr"/>
+          <a:lstStyle/>
+          <a:p>
+            <a:pPr indent="0" marL="0">
+              <a:buNone/>
+            </a:pPr>
+            <a:r>
+              <a:rPr lang="en-US" sz="950" spc="140" kern="0" dirty="0">
+                <a:solidFill>
+                  <a:srgbClr val="9B9B9B"/>
                 </a:solidFill>
                 <a:latin typeface="Pretendard" pitchFamily="34" charset="0"/>
                 <a:ea typeface="Pretendard" pitchFamily="34" charset="-122"/>
@@ -2074,38 +2285,38 @@
               </a:rPr>
               <a:t>제출물</a:t>
             </a:r>
-            <a:endParaRPr lang="en-US" sz="1100" dirty="0"/>
-          </a:p>
-        </p:txBody>
-      </p:sp>
-      <p:sp>
-        <p:nvSpPr>
-          <p:cNvPr id="12" name="Text 10"/>
-          <p:cNvSpPr/>
-          <p:nvPr/>
-        </p:nvSpPr>
-        <p:spPr>
-          <a:xfrm>
-            <a:off x="1645920" y="4828032"/>
-            <a:ext cx="6400800" cy="310896"/>
-          </a:xfrm>
-          <a:prstGeom prst="rect">
-            <a:avLst/>
-          </a:prstGeom>
-          <a:noFill/>
-          <a:ln/>
-        </p:spPr>
-        <p:txBody>
-          <a:bodyPr wrap="square" lIns="0" tIns="0" rIns="0" bIns="0" rtlCol="0" anchor="ctr"/>
-          <a:lstStyle/>
-          <a:p>
-            <a:pPr indent="0" marL="0">
-              <a:buNone/>
-            </a:pPr>
-            <a:r>
-              <a:rPr lang="en-US" sz="1250" dirty="0">
-                <a:solidFill>
-                  <a:srgbClr val="DDE0E6"/>
+            <a:endParaRPr lang="en-US" sz="950" dirty="0"/>
+          </a:p>
+        </p:txBody>
+      </p:sp>
+      <p:sp>
+        <p:nvSpPr>
+          <p:cNvPr id="19" name="Text 17"/>
+          <p:cNvSpPr/>
+          <p:nvPr/>
+        </p:nvSpPr>
+        <p:spPr>
+          <a:xfrm>
+            <a:off x="1645920" y="5413248"/>
+            <a:ext cx="7680960" cy="292608"/>
+          </a:xfrm>
+          <a:prstGeom prst="rect">
+            <a:avLst/>
+          </a:prstGeom>
+          <a:noFill/>
+          <a:ln/>
+        </p:spPr>
+        <p:txBody>
+          <a:bodyPr wrap="square" lIns="0" tIns="0" rIns="0" bIns="0" rtlCol="0" anchor="ctr"/>
+          <a:lstStyle/>
+          <a:p>
+            <a:pPr indent="0" marL="0">
+              <a:buNone/>
+            </a:pPr>
+            <a:r>
+              <a:rPr lang="en-US" sz="1200" dirty="0">
+                <a:solidFill>
+                  <a:srgbClr val="1F1F1F"/>
                 </a:solidFill>
                 <a:latin typeface="Pretendard" pitchFamily="34" charset="0"/>
                 <a:ea typeface="Pretendard" pitchFamily="34" charset="-122"/>
@@ -2113,9 +2324,73 @@
               </a:rPr>
               <a:t>포트폴리오 페이지 3장 추가</a:t>
             </a:r>
-            <a:endParaRPr lang="en-US" sz="1250" dirty="0"/>
-          </a:p>
-        </p:txBody>
+            <a:endParaRPr lang="en-US" sz="1200" dirty="0"/>
+          </a:p>
+        </p:txBody>
+      </p:sp>
+      <p:sp>
+        <p:nvSpPr>
+          <p:cNvPr id="20" name="Text 18"/>
+          <p:cNvSpPr/>
+          <p:nvPr/>
+        </p:nvSpPr>
+        <p:spPr>
+          <a:xfrm rot="16200000">
+            <a:off x="10436047" y="3291840"/>
+            <a:ext cx="2743200" cy="274320"/>
+          </a:xfrm>
+          <a:prstGeom prst="rect">
+            <a:avLst/>
+          </a:prstGeom>
+          <a:noFill/>
+          <a:ln/>
+        </p:spPr>
+        <p:txBody>
+          <a:bodyPr wrap="square" lIns="0" tIns="0" rIns="0" bIns="0" rtlCol="0" anchor="ctr"/>
+          <a:lstStyle/>
+          <a:p>
+            <a:pPr algn="ctr" indent="0" marL="0">
+              <a:buNone/>
+            </a:pPr>
+            <a:r>
+              <a:rPr lang="en-US" sz="850" spc="260" kern="0" dirty="0">
+                <a:solidFill>
+                  <a:srgbClr val="9B9B9B"/>
+                </a:solidFill>
+                <a:latin typeface="Pretendard" pitchFamily="34" charset="0"/>
+                <a:ea typeface="Pretendard" pitchFamily="34" charset="-122"/>
+                <a:cs typeface="Pretendard" pitchFamily="34" charset="-120"/>
+              </a:rPr>
+              <a:t>WONKWANG UNIV · 2026-2</a:t>
+            </a:r>
+            <a:endParaRPr lang="en-US" sz="850" dirty="0"/>
+          </a:p>
+        </p:txBody>
+      </p:sp>
+      <p:sp>
+        <p:nvSpPr>
+          <p:cNvPr id="21" name="Shape 19"/>
+          <p:cNvSpPr/>
+          <p:nvPr/>
+        </p:nvSpPr>
+        <p:spPr>
+          <a:xfrm>
+            <a:off x="640080" y="6291072"/>
+            <a:ext cx="10911535" cy="7315"/>
+          </a:xfrm>
+          <a:prstGeom prst="rect">
+            <a:avLst/>
+          </a:prstGeom>
+          <a:solidFill>
+            <a:srgbClr val="DCDCDC"/>
+          </a:solidFill>
+          <a:ln w="12700">
+            <a:solidFill>
+              <a:srgbClr val="DCDCDC"/>
+            </a:solidFill>
+            <a:prstDash val="solid"/>
+          </a:ln>
+        </p:spPr>
       </p:sp>
     </p:spTree>
   </p:cSld>
@@ -2157,34 +2432,34 @@
         </p:nvSpPr>
         <p:spPr>
           <a:xfrm>
-            <a:off x="640080" y="566928"/>
-            <a:ext cx="10911535" cy="237744"/>
-          </a:xfrm>
-          <a:prstGeom prst="rect">
-            <a:avLst/>
-          </a:prstGeom>
-          <a:noFill/>
-          <a:ln/>
-        </p:spPr>
-        <p:txBody>
-          <a:bodyPr wrap="square" lIns="0" tIns="0" rIns="0" bIns="0" rtlCol="0" anchor="ctr"/>
-          <a:lstStyle/>
-          <a:p>
-            <a:pPr indent="0" marL="0">
-              <a:buNone/>
-            </a:pPr>
-            <a:r>
-              <a:rPr lang="en-US" sz="1100" b="1" spc="140" kern="0" dirty="0">
-                <a:solidFill>
-                  <a:srgbClr val="FF4A1C"/>
-                </a:solidFill>
-                <a:latin typeface="Pretendard" pitchFamily="34" charset="0"/>
-                <a:ea typeface="Pretendard" pitchFamily="34" charset="-122"/>
-                <a:cs typeface="Pretendard" pitchFamily="34" charset="-120"/>
-              </a:rPr>
-              <a:t>HOMEWORK</a:t>
-            </a:r>
-            <a:endParaRPr lang="en-US" sz="1100" dirty="0"/>
+            <a:off x="640080" y="274320"/>
+            <a:ext cx="3657600" cy="219456"/>
+          </a:xfrm>
+          <a:prstGeom prst="rect">
+            <a:avLst/>
+          </a:prstGeom>
+          <a:noFill/>
+          <a:ln/>
+        </p:spPr>
+        <p:txBody>
+          <a:bodyPr wrap="square" lIns="0" tIns="0" rIns="0" bIns="0" rtlCol="0" anchor="ctr"/>
+          <a:lstStyle/>
+          <a:p>
+            <a:pPr indent="0" marL="0">
+              <a:buNone/>
+            </a:pPr>
+            <a:r>
+              <a:rPr lang="en-US" sz="900" spc="120" kern="0" dirty="0">
+                <a:solidFill>
+                  <a:srgbClr val="8A8A8A"/>
+                </a:solidFill>
+                <a:latin typeface="Pretendard" pitchFamily="34" charset="0"/>
+                <a:ea typeface="Pretendard" pitchFamily="34" charset="-122"/>
+                <a:cs typeface="Pretendard" pitchFamily="34" charset="-120"/>
+              </a:rPr>
+              <a:t>포트폴리오제작</a:t>
+            </a:r>
+            <a:endParaRPr lang="en-US" sz="900" dirty="0"/>
           </a:p>
         </p:txBody>
       </p:sp>
@@ -2196,34 +2471,34 @@
         </p:nvSpPr>
         <p:spPr>
           <a:xfrm>
-            <a:off x="640080" y="859536"/>
-            <a:ext cx="10911535" cy="512064"/>
-          </a:xfrm>
-          <a:prstGeom prst="rect">
-            <a:avLst/>
-          </a:prstGeom>
-          <a:noFill/>
-          <a:ln/>
-        </p:spPr>
-        <p:txBody>
-          <a:bodyPr wrap="square" lIns="0" tIns="0" rIns="0" bIns="0" rtlCol="0" anchor="ctr"/>
-          <a:lstStyle/>
-          <a:p>
-            <a:pPr indent="0" marL="0">
-              <a:buNone/>
-            </a:pPr>
-            <a:r>
-              <a:rPr lang="en-US" sz="2800" b="1" dirty="0">
-                <a:solidFill>
-                  <a:srgbClr val="14161B"/>
-                </a:solidFill>
-                <a:latin typeface="Pretendard" pitchFamily="34" charset="0"/>
-                <a:ea typeface="Pretendard" pitchFamily="34" charset="-122"/>
-                <a:cs typeface="Pretendard" pitchFamily="34" charset="-120"/>
-              </a:rPr>
-              <a:t>과제와 다음 주</a:t>
-            </a:r>
-            <a:endParaRPr lang="en-US" sz="2800" dirty="0"/>
+            <a:off x="4480560" y="274320"/>
+            <a:ext cx="4572000" cy="219456"/>
+          </a:xfrm>
+          <a:prstGeom prst="rect">
+            <a:avLst/>
+          </a:prstGeom>
+          <a:noFill/>
+          <a:ln/>
+        </p:spPr>
+        <p:txBody>
+          <a:bodyPr wrap="square" lIns="0" tIns="0" rIns="0" bIns="0" rtlCol="0" anchor="ctr"/>
+          <a:lstStyle/>
+          <a:p>
+            <a:pPr algn="ctr" indent="0" marL="0">
+              <a:buNone/>
+            </a:pPr>
+            <a:r>
+              <a:rPr lang="en-US" sz="900" spc="120" kern="0" dirty="0">
+                <a:solidFill>
+                  <a:srgbClr val="8A8A8A"/>
+                </a:solidFill>
+                <a:latin typeface="Pretendard" pitchFamily="34" charset="0"/>
+                <a:ea typeface="Pretendard" pitchFamily="34" charset="-122"/>
+                <a:cs typeface="Pretendard" pitchFamily="34" charset="-120"/>
+              </a:rPr>
+              <a:t>PHASE 3 완성과 발표</a:t>
+            </a:r>
+            <a:endParaRPr lang="en-US" sz="900" dirty="0"/>
           </a:p>
         </p:txBody>
       </p:sp>
@@ -2235,34 +2510,34 @@
         </p:nvSpPr>
         <p:spPr>
           <a:xfrm>
-            <a:off x="640080" y="1371600"/>
-            <a:ext cx="10911535" cy="237744"/>
-          </a:xfrm>
-          <a:prstGeom prst="rect">
-            <a:avLst/>
-          </a:prstGeom>
-          <a:noFill/>
-          <a:ln/>
-        </p:spPr>
-        <p:txBody>
-          <a:bodyPr wrap="square" lIns="0" tIns="0" rIns="0" bIns="0" rtlCol="0" anchor="ctr"/>
-          <a:lstStyle/>
-          <a:p>
-            <a:pPr indent="0" marL="0">
-              <a:buNone/>
-            </a:pPr>
-            <a:r>
-              <a:rPr lang="en-US" sz="1200" dirty="0">
-                <a:solidFill>
-                  <a:srgbClr val="6B7280"/>
-                </a:solidFill>
-                <a:latin typeface="Pretendard" pitchFamily="34" charset="0"/>
-                <a:ea typeface="Pretendard" pitchFamily="34" charset="-122"/>
-                <a:cs typeface="Pretendard" pitchFamily="34" charset="-120"/>
-              </a:rPr>
-              <a:t>12주차는 온라인 포트폴리오를 만듭니다.</a:t>
-            </a:r>
-            <a:endParaRPr lang="en-US" sz="1200" dirty="0"/>
+            <a:off x="8808415" y="274320"/>
+            <a:ext cx="2743200" cy="219456"/>
+          </a:xfrm>
+          <a:prstGeom prst="rect">
+            <a:avLst/>
+          </a:prstGeom>
+          <a:noFill/>
+          <a:ln/>
+        </p:spPr>
+        <p:txBody>
+          <a:bodyPr wrap="square" lIns="0" tIns="0" rIns="0" bIns="0" rtlCol="0" anchor="ctr"/>
+          <a:lstStyle/>
+          <a:p>
+            <a:pPr algn="r" indent="0" marL="0">
+              <a:buNone/>
+            </a:pPr>
+            <a:r>
+              <a:rPr lang="en-US" sz="900" spc="200" kern="0" dirty="0">
+                <a:solidFill>
+                  <a:srgbClr val="8A8A8A"/>
+                </a:solidFill>
+                <a:latin typeface="Pretendard" pitchFamily="34" charset="0"/>
+                <a:ea typeface="Pretendard" pitchFamily="34" charset="-122"/>
+                <a:cs typeface="Pretendard" pitchFamily="34" charset="-120"/>
+              </a:rPr>
+              <a:t>WEEK 11</a:t>
+            </a:r>
+            <a:endParaRPr lang="en-US" sz="900" dirty="0"/>
           </a:p>
         </p:txBody>
       </p:sp>
@@ -2274,20 +2549,18 @@
         </p:nvSpPr>
         <p:spPr>
           <a:xfrm>
-            <a:off x="640080" y="1719072"/>
-            <a:ext cx="6309360" cy="896112"/>
-          </a:xfrm>
-          <a:prstGeom prst="roundRect">
-            <a:avLst>
-              <a:gd name="adj" fmla="val 8163"/>
-            </a:avLst>
+            <a:off x="640080" y="548640"/>
+            <a:ext cx="10911535" cy="7315"/>
+          </a:xfrm>
+          <a:prstGeom prst="rect">
+            <a:avLst/>
           </a:prstGeom>
           <a:solidFill>
-            <a:srgbClr val="F4F5F7"/>
+            <a:srgbClr val="DCDCDC"/>
           </a:solidFill>
           <a:ln w="12700">
             <a:solidFill>
-              <a:srgbClr val="E4E6EB"/>
+              <a:srgbClr val="DCDCDC"/>
             </a:solidFill>
             <a:prstDash val="solid"/>
           </a:ln>
@@ -2295,26 +2568,141 @@
       </p:sp>
       <p:sp>
         <p:nvSpPr>
-          <p:cNvPr id="6" name="Shape 4"/>
-          <p:cNvSpPr/>
-          <p:nvPr/>
-        </p:nvSpPr>
-        <p:spPr>
-          <a:xfrm>
-            <a:off x="969264" y="1993392"/>
-            <a:ext cx="329184" cy="329184"/>
-          </a:xfrm>
-          <a:prstGeom prst="roundRect">
-            <a:avLst>
-              <a:gd name="adj" fmla="val 16667"/>
-            </a:avLst>
+          <p:cNvPr id="6" name="Text 4"/>
+          <p:cNvSpPr/>
+          <p:nvPr/>
+        </p:nvSpPr>
+        <p:spPr>
+          <a:xfrm>
+            <a:off x="640080" y="640080"/>
+            <a:ext cx="10911535" cy="219456"/>
+          </a:xfrm>
+          <a:prstGeom prst="rect">
+            <a:avLst/>
+          </a:prstGeom>
+          <a:noFill/>
+          <a:ln/>
+        </p:spPr>
+        <p:txBody>
+          <a:bodyPr wrap="square" lIns="0" tIns="0" rIns="0" bIns="0" rtlCol="0" anchor="ctr"/>
+          <a:lstStyle/>
+          <a:p>
+            <a:pPr indent="0" marL="0">
+              <a:buNone/>
+            </a:pPr>
+            <a:r>
+              <a:rPr lang="en-US" sz="950" spc="260" kern="0" dirty="0">
+                <a:solidFill>
+                  <a:srgbClr val="8A8A8A"/>
+                </a:solidFill>
+                <a:latin typeface="Pretendard" pitchFamily="34" charset="0"/>
+                <a:ea typeface="Pretendard" pitchFamily="34" charset="-122"/>
+                <a:cs typeface="Pretendard" pitchFamily="34" charset="-120"/>
+              </a:rPr>
+              <a:t>HOMEWORK</a:t>
+            </a:r>
+            <a:endParaRPr lang="en-US" sz="950" dirty="0"/>
+          </a:p>
+        </p:txBody>
+      </p:sp>
+      <p:sp>
+        <p:nvSpPr>
+          <p:cNvPr id="7" name="Text 5"/>
+          <p:cNvSpPr/>
+          <p:nvPr/>
+        </p:nvSpPr>
+        <p:spPr>
+          <a:xfrm>
+            <a:off x="640080" y="859536"/>
+            <a:ext cx="10911535" cy="475488"/>
+          </a:xfrm>
+          <a:prstGeom prst="rect">
+            <a:avLst/>
+          </a:prstGeom>
+          <a:noFill/>
+          <a:ln/>
+        </p:spPr>
+        <p:txBody>
+          <a:bodyPr wrap="square" lIns="0" tIns="0" rIns="0" bIns="0" rtlCol="0" anchor="ctr"/>
+          <a:lstStyle/>
+          <a:p>
+            <a:pPr indent="0" marL="0">
+              <a:buNone/>
+            </a:pPr>
+            <a:r>
+              <a:rPr lang="en-US" sz="3000" dirty="0">
+                <a:solidFill>
+                  <a:srgbClr val="111111"/>
+                </a:solidFill>
+                <a:latin typeface="Pretendard Black" pitchFamily="34" charset="0"/>
+                <a:ea typeface="Pretendard Black" pitchFamily="34" charset="-122"/>
+                <a:cs typeface="Pretendard Black" pitchFamily="34" charset="-120"/>
+              </a:rPr>
+              <a:t>과제와 다음 주</a:t>
+            </a:r>
+            <a:endParaRPr lang="en-US" sz="3000" dirty="0"/>
+          </a:p>
+        </p:txBody>
+      </p:sp>
+      <p:sp>
+        <p:nvSpPr>
+          <p:cNvPr id="8" name="Text 6"/>
+          <p:cNvSpPr/>
+          <p:nvPr/>
+        </p:nvSpPr>
+        <p:spPr>
+          <a:xfrm>
+            <a:off x="640080" y="1371600"/>
+            <a:ext cx="10911535" cy="219456"/>
+          </a:xfrm>
+          <a:prstGeom prst="rect">
+            <a:avLst/>
+          </a:prstGeom>
+          <a:noFill/>
+          <a:ln/>
+        </p:spPr>
+        <p:txBody>
+          <a:bodyPr wrap="square" lIns="0" tIns="0" rIns="0" bIns="0" rtlCol="0" anchor="ctr"/>
+          <a:lstStyle/>
+          <a:p>
+            <a:pPr indent="0" marL="0">
+              <a:buNone/>
+            </a:pPr>
+            <a:r>
+              <a:rPr lang="en-US" sz="1150" dirty="0">
+                <a:solidFill>
+                  <a:srgbClr val="6E6E6E"/>
+                </a:solidFill>
+                <a:latin typeface="Pretendard" pitchFamily="34" charset="0"/>
+                <a:ea typeface="Pretendard" pitchFamily="34" charset="-122"/>
+                <a:cs typeface="Pretendard" pitchFamily="34" charset="-120"/>
+              </a:rPr>
+              <a:t>12주차는 온라인 포트폴리오를 만듭니다.</a:t>
+            </a:r>
+            <a:endParaRPr lang="en-US" sz="1150" dirty="0"/>
+          </a:p>
+        </p:txBody>
+      </p:sp>
+      <p:sp>
+        <p:nvSpPr>
+          <p:cNvPr id="9" name="Shape 7"/>
+          <p:cNvSpPr/>
+          <p:nvPr/>
+        </p:nvSpPr>
+        <p:spPr>
+          <a:xfrm>
+            <a:off x="640080" y="1719072"/>
+            <a:ext cx="6309360" cy="896112"/>
+          </a:xfrm>
+          <a:prstGeom prst="rect">
+            <a:avLst/>
           </a:prstGeom>
           <a:solidFill>
-            <a:srgbClr val="FF4A1C"/>
+            <a:srgbClr val="FFFFFF"/>
           </a:solidFill>
-          <a:ln w="6350">
+          <a:ln w="12700">
             <a:solidFill>
-              <a:srgbClr val="FF4A1C"/>
+              <a:srgbClr val="DCDCDC"/>
             </a:solidFill>
             <a:prstDash val="solid"/>
           </a:ln>
@@ -2322,7 +2710,7 @@
       </p:sp>
       <p:sp>
         <p:nvSpPr>
-          <p:cNvPr id="7" name="Text 5"/>
+          <p:cNvPr id="10" name="Shape 8"/>
           <p:cNvSpPr/>
           <p:nvPr/>
         </p:nvSpPr>
@@ -2331,6 +2719,31 @@
             <a:off x="969264" y="1993392"/>
             <a:ext cx="329184" cy="329184"/>
           </a:xfrm>
+          <a:prstGeom prst="ellipse">
+            <a:avLst/>
+          </a:prstGeom>
+          <a:solidFill>
+            <a:srgbClr val="111111"/>
+          </a:solidFill>
+          <a:ln w="12700">
+            <a:solidFill>
+              <a:srgbClr val="111111"/>
+            </a:solidFill>
+            <a:prstDash val="solid"/>
+          </a:ln>
+        </p:spPr>
+      </p:sp>
+      <p:sp>
+        <p:nvSpPr>
+          <p:cNvPr id="11" name="Text 9"/>
+          <p:cNvSpPr/>
+          <p:nvPr/>
+        </p:nvSpPr>
+        <p:spPr>
+          <a:xfrm>
+            <a:off x="969264" y="1993392"/>
+            <a:ext cx="329184" cy="329184"/>
+          </a:xfrm>
           <a:prstGeom prst="rect">
             <a:avLst/>
           </a:prstGeom>
@@ -2361,7 +2774,7 @@
       </p:sp>
       <p:sp>
         <p:nvSpPr>
-          <p:cNvPr id="8" name="Text 6"/>
+          <p:cNvPr id="12" name="Text 10"/>
           <p:cNvSpPr/>
           <p:nvPr/>
         </p:nvSpPr>
@@ -2384,13 +2797,13 @@
               <a:buNone/>
             </a:pPr>
             <a:r>
-              <a:rPr lang="en-US" sz="1400" b="1" dirty="0">
-                <a:solidFill>
-                  <a:srgbClr val="14161B"/>
-                </a:solidFill>
-                <a:latin typeface="Pretendard" pitchFamily="34" charset="0"/>
-                <a:ea typeface="Pretendard" pitchFamily="34" charset="-122"/>
-                <a:cs typeface="Pretendard" pitchFamily="34" charset="-120"/>
+              <a:rPr lang="en-US" sz="1400" dirty="0">
+                <a:solidFill>
+                  <a:srgbClr val="111111"/>
+                </a:solidFill>
+                <a:latin typeface="Pretendard Black" pitchFamily="34" charset="0"/>
+                <a:ea typeface="Pretendard Black" pitchFamily="34" charset="-122"/>
+                <a:cs typeface="Pretendard Black" pitchFamily="34" charset="-120"/>
               </a:rPr>
               <a:t>포트폴리오 페이지 3장 추가</a:t>
             </a:r>
@@ -2400,7 +2813,7 @@
       </p:sp>
       <p:sp>
         <p:nvSpPr>
-          <p:cNvPr id="9" name="Text 7"/>
+          <p:cNvPr id="13" name="Text 11"/>
           <p:cNvSpPr/>
           <p:nvPr/>
         </p:nvSpPr>
@@ -2428,7 +2841,7 @@
             <a:r>
               <a:rPr lang="en-US" sz="1100" dirty="0">
                 <a:solidFill>
-                  <a:srgbClr val="6B7280"/>
+                  <a:srgbClr val="6E6E6E"/>
                 </a:solidFill>
                 <a:latin typeface="Pretendard" pitchFamily="34" charset="0"/>
                 <a:ea typeface="Pretendard" pitchFamily="34" charset="-122"/>
@@ -2442,7 +2855,7 @@
       </p:sp>
       <p:sp>
         <p:nvSpPr>
-          <p:cNvPr id="10" name="Shape 8"/>
+          <p:cNvPr id="14" name="Shape 12"/>
           <p:cNvSpPr/>
           <p:nvPr/>
         </p:nvSpPr>
@@ -2451,17 +2864,15 @@
             <a:off x="640080" y="2743200"/>
             <a:ext cx="6309360" cy="896112"/>
           </a:xfrm>
-          <a:prstGeom prst="roundRect">
-            <a:avLst>
-              <a:gd name="adj" fmla="val 8163"/>
-            </a:avLst>
+          <a:prstGeom prst="rect">
+            <a:avLst/>
           </a:prstGeom>
           <a:solidFill>
-            <a:srgbClr val="F4F5F7"/>
+            <a:srgbClr val="FFFFFF"/>
           </a:solidFill>
           <a:ln w="12700">
             <a:solidFill>
-              <a:srgbClr val="E4E6EB"/>
+              <a:srgbClr val="DCDCDC"/>
             </a:solidFill>
             <a:prstDash val="solid"/>
           </a:ln>
@@ -2469,7 +2880,7 @@
       </p:sp>
       <p:sp>
         <p:nvSpPr>
-          <p:cNvPr id="11" name="Shape 9"/>
+          <p:cNvPr id="15" name="Shape 13"/>
           <p:cNvSpPr/>
           <p:nvPr/>
         </p:nvSpPr>
@@ -2478,17 +2889,15 @@
             <a:off x="969264" y="3017520"/>
             <a:ext cx="329184" cy="329184"/>
           </a:xfrm>
-          <a:prstGeom prst="roundRect">
-            <a:avLst>
-              <a:gd name="adj" fmla="val 16667"/>
-            </a:avLst>
+          <a:prstGeom prst="ellipse">
+            <a:avLst/>
           </a:prstGeom>
           <a:solidFill>
-            <a:srgbClr val="FF4A1C"/>
+            <a:srgbClr val="111111"/>
           </a:solidFill>
-          <a:ln w="6350">
+          <a:ln w="12700">
             <a:solidFill>
-              <a:srgbClr val="FF4A1C"/>
+              <a:srgbClr val="111111"/>
             </a:solidFill>
             <a:prstDash val="solid"/>
           </a:ln>
@@ -2496,7 +2905,7 @@
       </p:sp>
       <p:sp>
         <p:nvSpPr>
-          <p:cNvPr id="12" name="Text 10"/>
+          <p:cNvPr id="16" name="Text 14"/>
           <p:cNvSpPr/>
           <p:nvPr/>
         </p:nvSpPr>
@@ -2535,7 +2944,7 @@
       </p:sp>
       <p:sp>
         <p:nvSpPr>
-          <p:cNvPr id="13" name="Text 11"/>
+          <p:cNvPr id="17" name="Text 15"/>
           <p:cNvSpPr/>
           <p:nvPr/>
         </p:nvSpPr>
@@ -2558,13 +2967,13 @@
               <a:buNone/>
             </a:pPr>
             <a:r>
-              <a:rPr lang="en-US" sz="1400" b="1" dirty="0">
-                <a:solidFill>
-                  <a:srgbClr val="14161B"/>
-                </a:solidFill>
-                <a:latin typeface="Pretendard" pitchFamily="34" charset="0"/>
-                <a:ea typeface="Pretendard" pitchFamily="34" charset="-122"/>
-                <a:cs typeface="Pretendard" pitchFamily="34" charset="-120"/>
+              <a:rPr lang="en-US" sz="1400" dirty="0">
+                <a:solidFill>
+                  <a:srgbClr val="111111"/>
+                </a:solidFill>
+                <a:latin typeface="Pretendard Black" pitchFamily="34" charset="0"/>
+                <a:ea typeface="Pretendard Black" pitchFamily="34" charset="-122"/>
+                <a:cs typeface="Pretendard Black" pitchFamily="34" charset="-120"/>
               </a:rPr>
               <a:t>플랫폼 후보 정하기</a:t>
             </a:r>
@@ -2574,7 +2983,7 @@
       </p:sp>
       <p:sp>
         <p:nvSpPr>
-          <p:cNvPr id="14" name="Text 12"/>
+          <p:cNvPr id="18" name="Text 16"/>
           <p:cNvSpPr/>
           <p:nvPr/>
         </p:nvSpPr>
@@ -2602,7 +3011,7 @@
             <a:r>
               <a:rPr lang="en-US" sz="1100" dirty="0">
                 <a:solidFill>
-                  <a:srgbClr val="6B7280"/>
+                  <a:srgbClr val="6E6E6E"/>
                 </a:solidFill>
                 <a:latin typeface="Pretendard" pitchFamily="34" charset="0"/>
                 <a:ea typeface="Pretendard" pitchFamily="34" charset="-122"/>
@@ -2616,65 +3025,24 @@
       </p:sp>
       <p:sp>
         <p:nvSpPr>
-          <p:cNvPr id="15" name="Text 13"/>
-          <p:cNvSpPr/>
-          <p:nvPr/>
-        </p:nvSpPr>
-        <p:spPr>
-          <a:xfrm>
-            <a:off x="640080" y="3822192"/>
-            <a:ext cx="6309360" cy="329184"/>
-          </a:xfrm>
-          <a:prstGeom prst="rect">
-            <a:avLst/>
-          </a:prstGeom>
-          <a:noFill/>
-          <a:ln/>
-        </p:spPr>
-        <p:txBody>
-          <a:bodyPr wrap="square" lIns="0" tIns="0" rIns="0" bIns="0" rtlCol="0" anchor="ctr"/>
-          <a:lstStyle/>
-          <a:p>
-            <a:pPr indent="0" marL="0">
-              <a:buNone/>
-            </a:pPr>
-            <a:r>
-              <a:rPr lang="en-US" sz="1200" b="1" dirty="0">
-                <a:solidFill>
-                  <a:srgbClr val="FF4A1C"/>
-                </a:solidFill>
-                <a:latin typeface="Pretendard" pitchFamily="34" charset="0"/>
-                <a:ea typeface="Pretendard" pitchFamily="34" charset="-122"/>
-                <a:cs typeface="Pretendard" pitchFamily="34" charset="-120"/>
-              </a:rPr>
-              <a:t>제출 — 12주차 수업 전까지 · 총 6장 제출</a:t>
-            </a:r>
-            <a:endParaRPr lang="en-US" sz="1200" dirty="0"/>
-          </a:p>
-        </p:txBody>
-      </p:sp>
-      <p:sp>
-        <p:nvSpPr>
-          <p:cNvPr id="16" name="Shape 14"/>
-          <p:cNvSpPr/>
-          <p:nvPr/>
-        </p:nvSpPr>
-        <p:spPr>
-          <a:xfrm>
-            <a:off x="7351776" y="1719072"/>
-            <a:ext cx="4199839" cy="3803904"/>
-          </a:xfrm>
-          <a:prstGeom prst="roundRect">
-            <a:avLst>
-              <a:gd name="adj" fmla="val 1923"/>
-            </a:avLst>
+          <p:cNvPr id="19" name="Shape 17"/>
+          <p:cNvSpPr/>
+          <p:nvPr/>
+        </p:nvSpPr>
+        <p:spPr>
+          <a:xfrm>
+            <a:off x="640080" y="3785616"/>
+            <a:ext cx="6309360" cy="7315"/>
+          </a:xfrm>
+          <a:prstGeom prst="rect">
+            <a:avLst/>
           </a:prstGeom>
           <a:solidFill>
-            <a:srgbClr val="14161B"/>
+            <a:srgbClr val="111111"/>
           </a:solidFill>
           <a:ln w="12700">
             <a:solidFill>
-              <a:srgbClr val="14161B"/>
+              <a:srgbClr val="111111"/>
             </a:solidFill>
             <a:prstDash val="solid"/>
           </a:ln>
@@ -2682,7 +3050,71 @@
       </p:sp>
       <p:sp>
         <p:nvSpPr>
-          <p:cNvPr id="17" name="Text 15"/>
+          <p:cNvPr id="20" name="Text 18"/>
+          <p:cNvSpPr/>
+          <p:nvPr/>
+        </p:nvSpPr>
+        <p:spPr>
+          <a:xfrm>
+            <a:off x="640080" y="3877056"/>
+            <a:ext cx="6309360" cy="329184"/>
+          </a:xfrm>
+          <a:prstGeom prst="rect">
+            <a:avLst/>
+          </a:prstGeom>
+          <a:noFill/>
+          <a:ln/>
+        </p:spPr>
+        <p:txBody>
+          <a:bodyPr wrap="square" lIns="0" tIns="0" rIns="0" bIns="0" rtlCol="0" anchor="ctr"/>
+          <a:lstStyle/>
+          <a:p>
+            <a:pPr indent="0" marL="0">
+              <a:buNone/>
+            </a:pPr>
+            <a:r>
+              <a:rPr lang="en-US" sz="1200" b="1" dirty="0">
+                <a:solidFill>
+                  <a:srgbClr val="111111"/>
+                </a:solidFill>
+                <a:latin typeface="Pretendard" pitchFamily="34" charset="0"/>
+                <a:ea typeface="Pretendard" pitchFamily="34" charset="-122"/>
+                <a:cs typeface="Pretendard" pitchFamily="34" charset="-120"/>
+              </a:rPr>
+              <a:t>제출 — 12주차 수업 전까지 · 총 6장 제출</a:t>
+            </a:r>
+            <a:endParaRPr lang="en-US" sz="1200" dirty="0"/>
+          </a:p>
+        </p:txBody>
+      </p:sp>
+      <p:sp>
+        <p:nvSpPr>
+          <p:cNvPr id="21" name="Shape 19"/>
+          <p:cNvSpPr/>
+          <p:nvPr/>
+        </p:nvSpPr>
+        <p:spPr>
+          <a:xfrm>
+            <a:off x="7351776" y="1719072"/>
+            <a:ext cx="4199839" cy="3803904"/>
+          </a:xfrm>
+          <a:prstGeom prst="rect">
+            <a:avLst/>
+          </a:prstGeom>
+          <a:solidFill>
+            <a:srgbClr val="111111"/>
+          </a:solidFill>
+          <a:ln w="12700">
+            <a:solidFill>
+              <a:srgbClr val="111111"/>
+            </a:solidFill>
+            <a:prstDash val="solid"/>
+          </a:ln>
+        </p:spPr>
+      </p:sp>
+      <p:sp>
+        <p:nvSpPr>
+          <p:cNvPr id="22" name="Text 20"/>
           <p:cNvSpPr/>
           <p:nvPr/>
         </p:nvSpPr>
@@ -2705,9 +3137,9 @@
               <a:buNone/>
             </a:pPr>
             <a:r>
-              <a:rPr lang="en-US" sz="1000" b="1" spc="140" kern="0" dirty="0">
-                <a:solidFill>
-                  <a:srgbClr val="FF4A1C"/>
+              <a:rPr lang="en-US" sz="950" spc="260" kern="0" dirty="0">
+                <a:solidFill>
+                  <a:srgbClr val="9A9A9A"/>
                 </a:solidFill>
                 <a:latin typeface="Pretendard" pitchFamily="34" charset="0"/>
                 <a:ea typeface="Pretendard" pitchFamily="34" charset="-122"/>
@@ -2715,13 +3147,13 @@
               </a:rPr>
               <a:t>NEXT WEEK</a:t>
             </a:r>
-            <a:endParaRPr lang="en-US" sz="1000" dirty="0"/>
-          </a:p>
-        </p:txBody>
-      </p:sp>
-      <p:sp>
-        <p:nvSpPr>
-          <p:cNvPr id="18" name="Text 16"/>
+            <a:endParaRPr lang="en-US" sz="950" dirty="0"/>
+          </a:p>
+        </p:txBody>
+      </p:sp>
+      <p:sp>
+        <p:nvSpPr>
+          <p:cNvPr id="23" name="Text 21"/>
           <p:cNvSpPr/>
           <p:nvPr/>
         </p:nvSpPr>
@@ -2760,7 +3192,7 @@
       </p:sp>
       <p:sp>
         <p:nvSpPr>
-          <p:cNvPr id="19" name="Text 17"/>
+          <p:cNvPr id="24" name="Text 22"/>
           <p:cNvSpPr/>
           <p:nvPr/>
         </p:nvSpPr>
@@ -2786,13 +3218,13 @@
               <a:buNone/>
             </a:pPr>
             <a:r>
-              <a:rPr lang="en-US" sz="1700" b="1" dirty="0">
+              <a:rPr lang="en-US" sz="1700" dirty="0">
                 <a:solidFill>
                   <a:srgbClr val="FFFFFF"/>
                 </a:solidFill>
-                <a:latin typeface="Pretendard" pitchFamily="34" charset="0"/>
-                <a:ea typeface="Pretendard" pitchFamily="34" charset="-122"/>
-                <a:cs typeface="Pretendard" pitchFamily="34" charset="-120"/>
+                <a:latin typeface="Pretendard Black" pitchFamily="34" charset="0"/>
+                <a:ea typeface="Pretendard Black" pitchFamily="34" charset="-122"/>
+                <a:cs typeface="Pretendard Black" pitchFamily="34" charset="-120"/>
               </a:rPr>
               <a:t>온라인 포트폴리오 제작 실습</a:t>
             </a:r>
@@ -2802,24 +3234,24 @@
       </p:sp>
       <p:sp>
         <p:nvSpPr>
-          <p:cNvPr id="20" name="Shape 18"/>
+          <p:cNvPr id="25" name="Shape 23"/>
           <p:cNvSpPr/>
           <p:nvPr/>
         </p:nvSpPr>
         <p:spPr>
           <a:xfrm>
             <a:off x="7735824" y="3346704"/>
-            <a:ext cx="3431743" cy="9144"/>
+            <a:ext cx="3431743" cy="7315"/>
           </a:xfrm>
           <a:prstGeom prst="rect">
             <a:avLst/>
           </a:prstGeom>
           <a:solidFill>
-            <a:srgbClr val="3A3F4B"/>
+            <a:srgbClr val="333333"/>
           </a:solidFill>
           <a:ln w="12700">
             <a:solidFill>
-              <a:srgbClr val="3A3F4B"/>
+              <a:srgbClr val="333333"/>
             </a:solidFill>
             <a:prstDash val="solid"/>
           </a:ln>
@@ -2827,7 +3259,7 @@
       </p:sp>
       <p:sp>
         <p:nvSpPr>
-          <p:cNvPr id="21" name="Text 19"/>
+          <p:cNvPr id="26" name="Text 24"/>
           <p:cNvSpPr/>
           <p:nvPr/>
         </p:nvSpPr>
@@ -2859,7 +3291,7 @@
             <a:r>
               <a:rPr lang="en-US" sz="1150" dirty="0">
                 <a:solidFill>
-                  <a:srgbClr val="DDE0E6"/>
+                  <a:srgbClr val="DDDDDD"/>
                 </a:solidFill>
                 <a:latin typeface="Pretendard" pitchFamily="34" charset="0"/>
                 <a:ea typeface="Pretendard" pitchFamily="34" charset="-122"/>
@@ -2883,7 +3315,7 @@
             <a:r>
               <a:rPr lang="en-US" sz="1150" dirty="0">
                 <a:solidFill>
-                  <a:srgbClr val="DDE0E6"/>
+                  <a:srgbClr val="DDDDDD"/>
                 </a:solidFill>
                 <a:latin typeface="Pretendard" pitchFamily="34" charset="0"/>
                 <a:ea typeface="Pretendard" pitchFamily="34" charset="-122"/>
@@ -2907,7 +3339,7 @@
             <a:r>
               <a:rPr lang="en-US" sz="1150" dirty="0">
                 <a:solidFill>
-                  <a:srgbClr val="DDE0E6"/>
+                  <a:srgbClr val="DDDDDD"/>
                 </a:solidFill>
                 <a:latin typeface="Pretendard" pitchFamily="34" charset="0"/>
                 <a:ea typeface="Pretendard" pitchFamily="34" charset="-122"/>
@@ -2931,7 +3363,7 @@
             <a:r>
               <a:rPr lang="en-US" sz="1150" dirty="0">
                 <a:solidFill>
-                  <a:srgbClr val="DDE0E6"/>
+                  <a:srgbClr val="DDDDDD"/>
                 </a:solidFill>
                 <a:latin typeface="Pretendard" pitchFamily="34" charset="0"/>
                 <a:ea typeface="Pretendard" pitchFamily="34" charset="-122"/>
@@ -2945,24 +3377,24 @@
       </p:sp>
       <p:sp>
         <p:nvSpPr>
-          <p:cNvPr id="22" name="Shape 20"/>
+          <p:cNvPr id="27" name="Shape 25"/>
           <p:cNvSpPr/>
           <p:nvPr/>
         </p:nvSpPr>
         <p:spPr>
           <a:xfrm>
             <a:off x="7735824" y="4700016"/>
-            <a:ext cx="3431743" cy="9144"/>
+            <a:ext cx="3431743" cy="7315"/>
           </a:xfrm>
           <a:prstGeom prst="rect">
             <a:avLst/>
           </a:prstGeom>
           <a:solidFill>
-            <a:srgbClr val="3A3F4B"/>
+            <a:srgbClr val="333333"/>
           </a:solidFill>
           <a:ln w="12700">
             <a:solidFill>
-              <a:srgbClr val="3A3F4B"/>
+              <a:srgbClr val="333333"/>
             </a:solidFill>
             <a:prstDash val="solid"/>
           </a:ln>
@@ -2970,7 +3402,7 @@
       </p:sp>
       <p:sp>
         <p:nvSpPr>
-          <p:cNvPr id="23" name="Text 21"/>
+          <p:cNvPr id="28" name="Text 26"/>
           <p:cNvSpPr/>
           <p:nvPr/>
         </p:nvSpPr>
@@ -2993,9 +3425,9 @@
               <a:buNone/>
             </a:pPr>
             <a:r>
-              <a:rPr lang="en-US" sz="950" b="1" spc="100" kern="0" dirty="0">
-                <a:solidFill>
-                  <a:srgbClr val="9AA0AA"/>
+              <a:rPr lang="en-US" sz="900" spc="160" kern="0" dirty="0">
+                <a:solidFill>
+                  <a:srgbClr val="9B9B9B"/>
                 </a:solidFill>
                 <a:latin typeface="Pretendard" pitchFamily="34" charset="0"/>
                 <a:ea typeface="Pretendard" pitchFamily="34" charset="-122"/>
@@ -3003,13 +3435,13 @@
               </a:rPr>
               <a:t>미리 준비할 것</a:t>
             </a:r>
-            <a:endParaRPr lang="en-US" sz="950" dirty="0"/>
-          </a:p>
-        </p:txBody>
-      </p:sp>
-      <p:sp>
-        <p:nvSpPr>
-          <p:cNvPr id="24" name="Text 22"/>
+            <a:endParaRPr lang="en-US" sz="900" dirty="0"/>
+          </a:p>
+        </p:txBody>
+      </p:sp>
+      <p:sp>
+        <p:nvSpPr>
+          <p:cNvPr id="29" name="Text 27"/>
           <p:cNvSpPr/>
           <p:nvPr/>
         </p:nvSpPr>
@@ -3037,7 +3469,7 @@
             <a:r>
               <a:rPr lang="en-US" sz="1100" b="1" dirty="0">
                 <a:solidFill>
-                  <a:srgbClr val="FF4A1C"/>
+                  <a:srgbClr val="FFFFFF"/>
                 </a:solidFill>
                 <a:latin typeface="Pretendard" pitchFamily="34" charset="0"/>
                 <a:ea typeface="Pretendard" pitchFamily="34" charset="-122"/>
@@ -3051,32 +3483,57 @@
       </p:sp>
       <p:sp>
         <p:nvSpPr>
-          <p:cNvPr id="25" name="Text 23"/>
-          <p:cNvSpPr/>
-          <p:nvPr/>
-        </p:nvSpPr>
-        <p:spPr>
-          <a:xfrm>
-            <a:off x="640080" y="6345936"/>
-            <a:ext cx="7772400" cy="256032"/>
-          </a:xfrm>
-          <a:prstGeom prst="rect">
-            <a:avLst/>
-          </a:prstGeom>
-          <a:noFill/>
-          <a:ln/>
-        </p:spPr>
-        <p:txBody>
-          <a:bodyPr wrap="square" lIns="0" tIns="0" rIns="0" bIns="0" rtlCol="0" anchor="ctr"/>
-          <a:lstStyle/>
-          <a:p>
-            <a:pPr indent="0" marL="0">
-              <a:buNone/>
-            </a:pPr>
-            <a:r>
-              <a:rPr lang="en-US" sz="900" dirty="0">
-                <a:solidFill>
-                  <a:srgbClr val="9AA0AA"/>
+          <p:cNvPr id="30" name="Shape 28"/>
+          <p:cNvSpPr/>
+          <p:nvPr/>
+        </p:nvSpPr>
+        <p:spPr>
+          <a:xfrm>
+            <a:off x="640080" y="6291072"/>
+            <a:ext cx="10911535" cy="7315"/>
+          </a:xfrm>
+          <a:prstGeom prst="rect">
+            <a:avLst/>
+          </a:prstGeom>
+          <a:solidFill>
+            <a:srgbClr val="DCDCDC"/>
+          </a:solidFill>
+          <a:ln w="12700">
+            <a:solidFill>
+              <a:srgbClr val="DCDCDC"/>
+            </a:solidFill>
+            <a:prstDash val="solid"/>
+          </a:ln>
+        </p:spPr>
+      </p:sp>
+      <p:sp>
+        <p:nvSpPr>
+          <p:cNvPr id="31" name="Text 29"/>
+          <p:cNvSpPr/>
+          <p:nvPr/>
+        </p:nvSpPr>
+        <p:spPr>
+          <a:xfrm>
+            <a:off x="640080" y="6382512"/>
+            <a:ext cx="7772400" cy="237744"/>
+          </a:xfrm>
+          <a:prstGeom prst="rect">
+            <a:avLst/>
+          </a:prstGeom>
+          <a:noFill/>
+          <a:ln/>
+        </p:spPr>
+        <p:txBody>
+          <a:bodyPr wrap="square" lIns="0" tIns="0" rIns="0" bIns="0" rtlCol="0" anchor="ctr"/>
+          <a:lstStyle/>
+          <a:p>
+            <a:pPr indent="0" marL="0">
+              <a:buNone/>
+            </a:pPr>
+            <a:r>
+              <a:rPr lang="en-US" sz="850" spc="40" kern="0" dirty="0">
+                <a:solidFill>
+                  <a:srgbClr val="9B9B9B"/>
                 </a:solidFill>
                 <a:latin typeface="Pretendard" pitchFamily="34" charset="0"/>
                 <a:ea typeface="Pretendard" pitchFamily="34" charset="-122"/>
@@ -3084,20 +3541,20 @@
               </a:rPr>
               <a:t>포트폴리오제작 · 11주차 편집디자인 실습 Ⅱ</a:t>
             </a:r>
-            <a:endParaRPr lang="en-US" sz="900" dirty="0"/>
-          </a:p>
-        </p:txBody>
-      </p:sp>
-      <p:sp>
-        <p:nvSpPr>
-          <p:cNvPr id="26" name="Text 24"/>
-          <p:cNvSpPr/>
-          <p:nvPr/>
-        </p:nvSpPr>
-        <p:spPr>
-          <a:xfrm>
-            <a:off x="10454335" y="6345936"/>
-            <a:ext cx="1097280" cy="256032"/>
+            <a:endParaRPr lang="en-US" sz="850" dirty="0"/>
+          </a:p>
+        </p:txBody>
+      </p:sp>
+      <p:sp>
+        <p:nvSpPr>
+          <p:cNvPr id="32" name="Text 30"/>
+          <p:cNvSpPr/>
+          <p:nvPr/>
+        </p:nvSpPr>
+        <p:spPr>
+          <a:xfrm>
+            <a:off x="10271455" y="6382512"/>
+            <a:ext cx="1280160" cy="237744"/>
           </a:xfrm>
           <a:prstGeom prst="rect">
             <a:avLst/>
@@ -3113,17 +3570,17 @@
               <a:buNone/>
             </a:pPr>
             <a:r>
-              <a:rPr lang="en-US" sz="900" dirty="0">
-                <a:solidFill>
-                  <a:srgbClr val="9AA0AA"/>
-                </a:solidFill>
-                <a:latin typeface="Pretendard" pitchFamily="34" charset="0"/>
-                <a:ea typeface="Pretendard" pitchFamily="34" charset="-122"/>
-                <a:cs typeface="Pretendard" pitchFamily="34" charset="-120"/>
-              </a:rPr>
-              <a:t>07</a:t>
-            </a:r>
-            <a:endParaRPr lang="en-US" sz="900" dirty="0"/>
+              <a:rPr lang="en-US" sz="850" spc="140" kern="0" dirty="0">
+                <a:solidFill>
+                  <a:srgbClr val="9B9B9B"/>
+                </a:solidFill>
+                <a:latin typeface="Pretendard" pitchFamily="34" charset="0"/>
+                <a:ea typeface="Pretendard" pitchFamily="34" charset="-122"/>
+                <a:cs typeface="Pretendard" pitchFamily="34" charset="-120"/>
+              </a:rPr>
+              <a:t>P.07</a:t>
+            </a:r>
+            <a:endParaRPr lang="en-US" sz="850" dirty="0"/>
           </a:p>
         </p:txBody>
       </p:sp>
@@ -3167,34 +3624,34 @@
         </p:nvSpPr>
         <p:spPr>
           <a:xfrm>
-            <a:off x="640080" y="566928"/>
-            <a:ext cx="10911535" cy="237744"/>
-          </a:xfrm>
-          <a:prstGeom prst="rect">
-            <a:avLst/>
-          </a:prstGeom>
-          <a:noFill/>
-          <a:ln/>
-        </p:spPr>
-        <p:txBody>
-          <a:bodyPr wrap="square" lIns="0" tIns="0" rIns="0" bIns="0" rtlCol="0" anchor="ctr"/>
-          <a:lstStyle/>
-          <a:p>
-            <a:pPr indent="0" marL="0">
-              <a:buNone/>
-            </a:pPr>
-            <a:r>
-              <a:rPr lang="en-US" sz="1100" b="1" spc="140" kern="0" dirty="0">
-                <a:solidFill>
-                  <a:srgbClr val="FF4A1C"/>
-                </a:solidFill>
-                <a:latin typeface="Pretendard" pitchFamily="34" charset="0"/>
-                <a:ea typeface="Pretendard" pitchFamily="34" charset="-122"/>
-                <a:cs typeface="Pretendard" pitchFamily="34" charset="-120"/>
-              </a:rPr>
-              <a:t>TODAY</a:t>
-            </a:r>
-            <a:endParaRPr lang="en-US" sz="1100" dirty="0"/>
+            <a:off x="640080" y="274320"/>
+            <a:ext cx="3657600" cy="219456"/>
+          </a:xfrm>
+          <a:prstGeom prst="rect">
+            <a:avLst/>
+          </a:prstGeom>
+          <a:noFill/>
+          <a:ln/>
+        </p:spPr>
+        <p:txBody>
+          <a:bodyPr wrap="square" lIns="0" tIns="0" rIns="0" bIns="0" rtlCol="0" anchor="ctr"/>
+          <a:lstStyle/>
+          <a:p>
+            <a:pPr indent="0" marL="0">
+              <a:buNone/>
+            </a:pPr>
+            <a:r>
+              <a:rPr lang="en-US" sz="900" spc="120" kern="0" dirty="0">
+                <a:solidFill>
+                  <a:srgbClr val="8A8A8A"/>
+                </a:solidFill>
+                <a:latin typeface="Pretendard" pitchFamily="34" charset="0"/>
+                <a:ea typeface="Pretendard" pitchFamily="34" charset="-122"/>
+                <a:cs typeface="Pretendard" pitchFamily="34" charset="-120"/>
+              </a:rPr>
+              <a:t>포트폴리오제작</a:t>
+            </a:r>
+            <a:endParaRPr lang="en-US" sz="900" dirty="0"/>
           </a:p>
         </p:txBody>
       </p:sp>
@@ -3206,34 +3663,34 @@
         </p:nvSpPr>
         <p:spPr>
           <a:xfrm>
-            <a:off x="640080" y="859536"/>
-            <a:ext cx="10911535" cy="512064"/>
-          </a:xfrm>
-          <a:prstGeom prst="rect">
-            <a:avLst/>
-          </a:prstGeom>
-          <a:noFill/>
-          <a:ln/>
-        </p:spPr>
-        <p:txBody>
-          <a:bodyPr wrap="square" lIns="0" tIns="0" rIns="0" bIns="0" rtlCol="0" anchor="ctr"/>
-          <a:lstStyle/>
-          <a:p>
-            <a:pPr indent="0" marL="0">
-              <a:buNone/>
-            </a:pPr>
-            <a:r>
-              <a:rPr lang="en-US" sz="2800" b="1" dirty="0">
-                <a:solidFill>
-                  <a:srgbClr val="14161B"/>
-                </a:solidFill>
-                <a:latin typeface="Pretendard" pitchFamily="34" charset="0"/>
-                <a:ea typeface="Pretendard" pitchFamily="34" charset="-122"/>
-                <a:cs typeface="Pretendard" pitchFamily="34" charset="-120"/>
-              </a:rPr>
-              <a:t>오늘의 90분</a:t>
-            </a:r>
-            <a:endParaRPr lang="en-US" sz="2800" dirty="0"/>
+            <a:off x="4480560" y="274320"/>
+            <a:ext cx="4572000" cy="219456"/>
+          </a:xfrm>
+          <a:prstGeom prst="rect">
+            <a:avLst/>
+          </a:prstGeom>
+          <a:noFill/>
+          <a:ln/>
+        </p:spPr>
+        <p:txBody>
+          <a:bodyPr wrap="square" lIns="0" tIns="0" rIns="0" bIns="0" rtlCol="0" anchor="ctr"/>
+          <a:lstStyle/>
+          <a:p>
+            <a:pPr algn="ctr" indent="0" marL="0">
+              <a:buNone/>
+            </a:pPr>
+            <a:r>
+              <a:rPr lang="en-US" sz="900" spc="120" kern="0" dirty="0">
+                <a:solidFill>
+                  <a:srgbClr val="8A8A8A"/>
+                </a:solidFill>
+                <a:latin typeface="Pretendard" pitchFamily="34" charset="0"/>
+                <a:ea typeface="Pretendard" pitchFamily="34" charset="-122"/>
+                <a:cs typeface="Pretendard" pitchFamily="34" charset="-120"/>
+              </a:rPr>
+              <a:t>PHASE 3 완성과 발표</a:t>
+            </a:r>
+            <a:endParaRPr lang="en-US" sz="900" dirty="0"/>
           </a:p>
         </p:txBody>
       </p:sp>
@@ -3245,125 +3702,8 @@
         </p:nvSpPr>
         <p:spPr>
           <a:xfrm>
-            <a:off x="640080" y="1371600"/>
-            <a:ext cx="10911535" cy="237744"/>
-          </a:xfrm>
-          <a:prstGeom prst="rect">
-            <a:avLst/>
-          </a:prstGeom>
-          <a:noFill/>
-          <a:ln/>
-        </p:spPr>
-        <p:txBody>
-          <a:bodyPr wrap="square" lIns="0" tIns="0" rIns="0" bIns="0" rtlCol="0" anchor="ctr"/>
-          <a:lstStyle/>
-          <a:p>
-            <a:pPr indent="0" marL="0">
-              <a:buNone/>
-            </a:pPr>
-            <a:r>
-              <a:rPr lang="en-US" sz="1200" dirty="0">
-                <a:solidFill>
-                  <a:srgbClr val="6B7280"/>
-                </a:solidFill>
-                <a:latin typeface="Pretendard" pitchFamily="34" charset="0"/>
-                <a:ea typeface="Pretendard" pitchFamily="34" charset="-122"/>
-                <a:cs typeface="Pretendard" pitchFamily="34" charset="-120"/>
-              </a:rPr>
-              <a:t>강의 20분 · 이미지 보정·배치 실습 60분</a:t>
-            </a:r>
-            <a:endParaRPr lang="en-US" sz="1200" dirty="0"/>
-          </a:p>
-        </p:txBody>
-      </p:sp>
-      <p:sp>
-        <p:nvSpPr>
-          <p:cNvPr id="5" name="Text 3"/>
-          <p:cNvSpPr/>
-          <p:nvPr/>
-        </p:nvSpPr>
-        <p:spPr>
-          <a:xfrm>
-            <a:off x="640080" y="1719072"/>
-            <a:ext cx="1600200" cy="932688"/>
-          </a:xfrm>
-          <a:prstGeom prst="rect">
-            <a:avLst/>
-          </a:prstGeom>
-          <a:noFill/>
-          <a:ln/>
-        </p:spPr>
-        <p:txBody>
-          <a:bodyPr wrap="square" lIns="0" tIns="0" rIns="0" bIns="0" rtlCol="0" anchor="ctr"/>
-          <a:lstStyle/>
-          <a:p>
-            <a:pPr indent="0" marL="0">
-              <a:buNone/>
-            </a:pPr>
-            <a:r>
-              <a:rPr lang="en-US" sz="1100" b="1" dirty="0">
-                <a:solidFill>
-                  <a:srgbClr val="FF4A1C"/>
-                </a:solidFill>
-                <a:latin typeface="Pretendard" pitchFamily="34" charset="0"/>
-                <a:ea typeface="Pretendard" pitchFamily="34" charset="-122"/>
-                <a:cs typeface="Pretendard" pitchFamily="34" charset="-120"/>
-              </a:rPr>
-              <a:t>00:00–00:20</a:t>
-            </a:r>
-            <a:endParaRPr lang="en-US" sz="1100" dirty="0"/>
-          </a:p>
-        </p:txBody>
-      </p:sp>
-      <p:sp>
-        <p:nvSpPr>
-          <p:cNvPr id="6" name="Text 4"/>
-          <p:cNvSpPr/>
-          <p:nvPr/>
-        </p:nvSpPr>
-        <p:spPr>
-          <a:xfrm>
-            <a:off x="2377440" y="1719072"/>
-            <a:ext cx="6888175" cy="932688"/>
-          </a:xfrm>
-          <a:prstGeom prst="rect">
-            <a:avLst/>
-          </a:prstGeom>
-          <a:noFill/>
-          <a:ln/>
-        </p:spPr>
-        <p:txBody>
-          <a:bodyPr wrap="square" lIns="0" tIns="0" rIns="0" bIns="0" rtlCol="0" anchor="ctr"/>
-          <a:lstStyle/>
-          <a:p>
-            <a:pPr indent="0" marL="0">
-              <a:buNone/>
-            </a:pPr>
-            <a:r>
-              <a:rPr lang="en-US" sz="1300" b="1" dirty="0">
-                <a:solidFill>
-                  <a:srgbClr val="14161B"/>
-                </a:solidFill>
-                <a:latin typeface="Pretendard" pitchFamily="34" charset="0"/>
-                <a:ea typeface="Pretendard" pitchFamily="34" charset="-122"/>
-                <a:cs typeface="Pretendard" pitchFamily="34" charset="-120"/>
-              </a:rPr>
-              <a:t>컬러 시스템 적용 강의</a:t>
-            </a:r>
-            <a:endParaRPr lang="en-US" sz="1300" dirty="0"/>
-          </a:p>
-        </p:txBody>
-      </p:sp>
-      <p:sp>
-        <p:nvSpPr>
-          <p:cNvPr id="7" name="Text 5"/>
-          <p:cNvSpPr/>
-          <p:nvPr/>
-        </p:nvSpPr>
-        <p:spPr>
-          <a:xfrm>
-            <a:off x="9265615" y="1719072"/>
-            <a:ext cx="2286000" cy="932688"/>
+            <a:off x="8808415" y="274320"/>
+            <a:ext cx="2743200" cy="219456"/>
           </a:xfrm>
           <a:prstGeom prst="rect">
             <a:avLst/>
@@ -3379,40 +3719,40 @@
               <a:buNone/>
             </a:pPr>
             <a:r>
-              <a:rPr lang="en-US" sz="1100" dirty="0">
-                <a:solidFill>
-                  <a:srgbClr val="6B7280"/>
-                </a:solidFill>
-                <a:latin typeface="Pretendard" pitchFamily="34" charset="0"/>
-                <a:ea typeface="Pretendard" pitchFamily="34" charset="-122"/>
-                <a:cs typeface="Pretendard" pitchFamily="34" charset="-120"/>
-              </a:rPr>
-              <a:t>강의</a:t>
-            </a:r>
-            <a:endParaRPr lang="en-US" sz="1100" dirty="0"/>
-          </a:p>
-        </p:txBody>
-      </p:sp>
-      <p:sp>
-        <p:nvSpPr>
-          <p:cNvPr id="8" name="Shape 6"/>
-          <p:cNvSpPr/>
-          <p:nvPr/>
-        </p:nvSpPr>
-        <p:spPr>
-          <a:xfrm>
-            <a:off x="640080" y="2633472"/>
-            <a:ext cx="10911535" cy="9144"/>
+              <a:rPr lang="en-US" sz="900" spc="200" kern="0" dirty="0">
+                <a:solidFill>
+                  <a:srgbClr val="8A8A8A"/>
+                </a:solidFill>
+                <a:latin typeface="Pretendard" pitchFamily="34" charset="0"/>
+                <a:ea typeface="Pretendard" pitchFamily="34" charset="-122"/>
+                <a:cs typeface="Pretendard" pitchFamily="34" charset="-120"/>
+              </a:rPr>
+              <a:t>WEEK 11</a:t>
+            </a:r>
+            <a:endParaRPr lang="en-US" sz="900" dirty="0"/>
+          </a:p>
+        </p:txBody>
+      </p:sp>
+      <p:sp>
+        <p:nvSpPr>
+          <p:cNvPr id="5" name="Shape 3"/>
+          <p:cNvSpPr/>
+          <p:nvPr/>
+        </p:nvSpPr>
+        <p:spPr>
+          <a:xfrm>
+            <a:off x="640080" y="548640"/>
+            <a:ext cx="10911535" cy="7315"/>
           </a:xfrm>
           <a:prstGeom prst="rect">
             <a:avLst/>
           </a:prstGeom>
           <a:solidFill>
-            <a:srgbClr val="E4E6EB"/>
+            <a:srgbClr val="DCDCDC"/>
           </a:solidFill>
           <a:ln w="12700">
             <a:solidFill>
-              <a:srgbClr val="E4E6EB"/>
+              <a:srgbClr val="DCDCDC"/>
             </a:solidFill>
             <a:prstDash val="solid"/>
           </a:ln>
@@ -3420,141 +3760,141 @@
       </p:sp>
       <p:sp>
         <p:nvSpPr>
-          <p:cNvPr id="9" name="Text 7"/>
-          <p:cNvSpPr/>
-          <p:nvPr/>
-        </p:nvSpPr>
-        <p:spPr>
-          <a:xfrm>
-            <a:off x="640080" y="2651760"/>
-            <a:ext cx="1600200" cy="932688"/>
-          </a:xfrm>
-          <a:prstGeom prst="rect">
-            <a:avLst/>
-          </a:prstGeom>
-          <a:noFill/>
-          <a:ln/>
-        </p:spPr>
-        <p:txBody>
-          <a:bodyPr wrap="square" lIns="0" tIns="0" rIns="0" bIns="0" rtlCol="0" anchor="ctr"/>
-          <a:lstStyle/>
-          <a:p>
-            <a:pPr indent="0" marL="0">
-              <a:buNone/>
-            </a:pPr>
-            <a:r>
-              <a:rPr lang="en-US" sz="1100" b="1" dirty="0">
-                <a:solidFill>
-                  <a:srgbClr val="FF4A1C"/>
-                </a:solidFill>
-                <a:latin typeface="Pretendard" pitchFamily="34" charset="0"/>
-                <a:ea typeface="Pretendard" pitchFamily="34" charset="-122"/>
-                <a:cs typeface="Pretendard" pitchFamily="34" charset="-120"/>
-              </a:rPr>
-              <a:t>00:20–01:20</a:t>
-            </a:r>
-            <a:endParaRPr lang="en-US" sz="1100" dirty="0"/>
-          </a:p>
-        </p:txBody>
-      </p:sp>
-      <p:sp>
-        <p:nvSpPr>
-          <p:cNvPr id="10" name="Text 8"/>
-          <p:cNvSpPr/>
-          <p:nvPr/>
-        </p:nvSpPr>
-        <p:spPr>
-          <a:xfrm>
-            <a:off x="2377440" y="2651760"/>
-            <a:ext cx="6888175" cy="932688"/>
-          </a:xfrm>
-          <a:prstGeom prst="rect">
-            <a:avLst/>
-          </a:prstGeom>
-          <a:noFill/>
-          <a:ln/>
-        </p:spPr>
-        <p:txBody>
-          <a:bodyPr wrap="square" lIns="0" tIns="0" rIns="0" bIns="0" rtlCol="0" anchor="ctr"/>
-          <a:lstStyle/>
-          <a:p>
-            <a:pPr indent="0" marL="0">
-              <a:buNone/>
-            </a:pPr>
-            <a:r>
-              <a:rPr lang="en-US" sz="1300" b="1" dirty="0">
-                <a:solidFill>
-                  <a:srgbClr val="14161B"/>
-                </a:solidFill>
-                <a:latin typeface="Pretendard" pitchFamily="34" charset="0"/>
-                <a:ea typeface="Pretendard" pitchFamily="34" charset="-122"/>
-                <a:cs typeface="Pretendard" pitchFamily="34" charset="-120"/>
-              </a:rPr>
-              <a:t>이미지 보정 · 배치 실습</a:t>
-            </a:r>
-            <a:endParaRPr lang="en-US" sz="1300" dirty="0"/>
-          </a:p>
-        </p:txBody>
-      </p:sp>
-      <p:sp>
-        <p:nvSpPr>
-          <p:cNvPr id="11" name="Text 9"/>
-          <p:cNvSpPr/>
-          <p:nvPr/>
-        </p:nvSpPr>
-        <p:spPr>
-          <a:xfrm>
-            <a:off x="9265615" y="2651760"/>
-            <a:ext cx="2286000" cy="932688"/>
-          </a:xfrm>
-          <a:prstGeom prst="rect">
-            <a:avLst/>
-          </a:prstGeom>
-          <a:noFill/>
-          <a:ln/>
-        </p:spPr>
-        <p:txBody>
-          <a:bodyPr wrap="square" lIns="0" tIns="0" rIns="0" bIns="0" rtlCol="0" anchor="ctr"/>
-          <a:lstStyle/>
-          <a:p>
-            <a:pPr algn="r" indent="0" marL="0">
-              <a:buNone/>
-            </a:pPr>
-            <a:r>
-              <a:rPr lang="en-US" sz="1100" dirty="0">
-                <a:solidFill>
-                  <a:srgbClr val="6B7280"/>
-                </a:solidFill>
-                <a:latin typeface="Pretendard" pitchFamily="34" charset="0"/>
-                <a:ea typeface="Pretendard" pitchFamily="34" charset="-122"/>
-                <a:cs typeface="Pretendard" pitchFamily="34" charset="-120"/>
-              </a:rPr>
-              <a:t>개인 워크 + 순회</a:t>
-            </a:r>
-            <a:endParaRPr lang="en-US" sz="1100" dirty="0"/>
-          </a:p>
-        </p:txBody>
-      </p:sp>
-      <p:sp>
-        <p:nvSpPr>
-          <p:cNvPr id="12" name="Shape 10"/>
-          <p:cNvSpPr/>
-          <p:nvPr/>
-        </p:nvSpPr>
-        <p:spPr>
-          <a:xfrm>
-            <a:off x="640080" y="3566160"/>
-            <a:ext cx="10911535" cy="9144"/>
+          <p:cNvPr id="6" name="Text 4"/>
+          <p:cNvSpPr/>
+          <p:nvPr/>
+        </p:nvSpPr>
+        <p:spPr>
+          <a:xfrm>
+            <a:off x="640080" y="640080"/>
+            <a:ext cx="10911535" cy="219456"/>
+          </a:xfrm>
+          <a:prstGeom prst="rect">
+            <a:avLst/>
+          </a:prstGeom>
+          <a:noFill/>
+          <a:ln/>
+        </p:spPr>
+        <p:txBody>
+          <a:bodyPr wrap="square" lIns="0" tIns="0" rIns="0" bIns="0" rtlCol="0" anchor="ctr"/>
+          <a:lstStyle/>
+          <a:p>
+            <a:pPr indent="0" marL="0">
+              <a:buNone/>
+            </a:pPr>
+            <a:r>
+              <a:rPr lang="en-US" sz="950" spc="260" kern="0" dirty="0">
+                <a:solidFill>
+                  <a:srgbClr val="8A8A8A"/>
+                </a:solidFill>
+                <a:latin typeface="Pretendard" pitchFamily="34" charset="0"/>
+                <a:ea typeface="Pretendard" pitchFamily="34" charset="-122"/>
+                <a:cs typeface="Pretendard" pitchFamily="34" charset="-120"/>
+              </a:rPr>
+              <a:t>TODAY</a:t>
+            </a:r>
+            <a:endParaRPr lang="en-US" sz="950" dirty="0"/>
+          </a:p>
+        </p:txBody>
+      </p:sp>
+      <p:sp>
+        <p:nvSpPr>
+          <p:cNvPr id="7" name="Text 5"/>
+          <p:cNvSpPr/>
+          <p:nvPr/>
+        </p:nvSpPr>
+        <p:spPr>
+          <a:xfrm>
+            <a:off x="640080" y="859536"/>
+            <a:ext cx="10911535" cy="475488"/>
+          </a:xfrm>
+          <a:prstGeom prst="rect">
+            <a:avLst/>
+          </a:prstGeom>
+          <a:noFill/>
+          <a:ln/>
+        </p:spPr>
+        <p:txBody>
+          <a:bodyPr wrap="square" lIns="0" tIns="0" rIns="0" bIns="0" rtlCol="0" anchor="ctr"/>
+          <a:lstStyle/>
+          <a:p>
+            <a:pPr indent="0" marL="0">
+              <a:buNone/>
+            </a:pPr>
+            <a:r>
+              <a:rPr lang="en-US" sz="3000" dirty="0">
+                <a:solidFill>
+                  <a:srgbClr val="111111"/>
+                </a:solidFill>
+                <a:latin typeface="Pretendard Black" pitchFamily="34" charset="0"/>
+                <a:ea typeface="Pretendard Black" pitchFamily="34" charset="-122"/>
+                <a:cs typeface="Pretendard Black" pitchFamily="34" charset="-120"/>
+              </a:rPr>
+              <a:t>오늘의 90분</a:t>
+            </a:r>
+            <a:endParaRPr lang="en-US" sz="3000" dirty="0"/>
+          </a:p>
+        </p:txBody>
+      </p:sp>
+      <p:sp>
+        <p:nvSpPr>
+          <p:cNvPr id="8" name="Text 6"/>
+          <p:cNvSpPr/>
+          <p:nvPr/>
+        </p:nvSpPr>
+        <p:spPr>
+          <a:xfrm>
+            <a:off x="640080" y="1371600"/>
+            <a:ext cx="10911535" cy="219456"/>
+          </a:xfrm>
+          <a:prstGeom prst="rect">
+            <a:avLst/>
+          </a:prstGeom>
+          <a:noFill/>
+          <a:ln/>
+        </p:spPr>
+        <p:txBody>
+          <a:bodyPr wrap="square" lIns="0" tIns="0" rIns="0" bIns="0" rtlCol="0" anchor="ctr"/>
+          <a:lstStyle/>
+          <a:p>
+            <a:pPr indent="0" marL="0">
+              <a:buNone/>
+            </a:pPr>
+            <a:r>
+              <a:rPr lang="en-US" sz="1150" dirty="0">
+                <a:solidFill>
+                  <a:srgbClr val="6E6E6E"/>
+                </a:solidFill>
+                <a:latin typeface="Pretendard" pitchFamily="34" charset="0"/>
+                <a:ea typeface="Pretendard" pitchFamily="34" charset="-122"/>
+                <a:cs typeface="Pretendard" pitchFamily="34" charset="-120"/>
+              </a:rPr>
+              <a:t>강의 20분 · 이미지 보정·배치 실습 60분</a:t>
+            </a:r>
+            <a:endParaRPr lang="en-US" sz="1150" dirty="0"/>
+          </a:p>
+        </p:txBody>
+      </p:sp>
+      <p:sp>
+        <p:nvSpPr>
+          <p:cNvPr id="9" name="Shape 7"/>
+          <p:cNvSpPr/>
+          <p:nvPr/>
+        </p:nvSpPr>
+        <p:spPr>
+          <a:xfrm>
+            <a:off x="640080" y="1682496"/>
+            <a:ext cx="10911535" cy="7315"/>
           </a:xfrm>
           <a:prstGeom prst="rect">
             <a:avLst/>
           </a:prstGeom>
           <a:solidFill>
-            <a:srgbClr val="E4E6EB"/>
+            <a:srgbClr val="111111"/>
           </a:solidFill>
           <a:ln w="12700">
             <a:solidFill>
-              <a:srgbClr val="E4E6EB"/>
+              <a:srgbClr val="111111"/>
             </a:solidFill>
             <a:prstDash val="solid"/>
           </a:ln>
@@ -3562,13 +3902,13 @@
       </p:sp>
       <p:sp>
         <p:nvSpPr>
-          <p:cNvPr id="13" name="Text 11"/>
-          <p:cNvSpPr/>
-          <p:nvPr/>
-        </p:nvSpPr>
-        <p:spPr>
-          <a:xfrm>
-            <a:off x="640080" y="3584448"/>
+          <p:cNvPr id="10" name="Text 8"/>
+          <p:cNvSpPr/>
+          <p:nvPr/>
+        </p:nvSpPr>
+        <p:spPr>
+          <a:xfrm>
+            <a:off x="640080" y="1719072"/>
             <a:ext cx="1600200" cy="932688"/>
           </a:xfrm>
           <a:prstGeom prst="rect">
@@ -3585,29 +3925,29 @@
               <a:buNone/>
             </a:pPr>
             <a:r>
-              <a:rPr lang="en-US" sz="1100" b="1" dirty="0">
-                <a:solidFill>
-                  <a:srgbClr val="FF4A1C"/>
-                </a:solidFill>
-                <a:latin typeface="Pretendard" pitchFamily="34" charset="0"/>
-                <a:ea typeface="Pretendard" pitchFamily="34" charset="-122"/>
-                <a:cs typeface="Pretendard" pitchFamily="34" charset="-120"/>
-              </a:rPr>
-              <a:t>01:20–01:30</a:t>
-            </a:r>
-            <a:endParaRPr lang="en-US" sz="1100" dirty="0"/>
-          </a:p>
-        </p:txBody>
-      </p:sp>
-      <p:sp>
-        <p:nvSpPr>
-          <p:cNvPr id="14" name="Text 12"/>
-          <p:cNvSpPr/>
-          <p:nvPr/>
-        </p:nvSpPr>
-        <p:spPr>
-          <a:xfrm>
-            <a:off x="2377440" y="3584448"/>
+              <a:rPr lang="en-US" sz="1050" b="1" spc="60" kern="0" dirty="0">
+                <a:solidFill>
+                  <a:srgbClr val="111111"/>
+                </a:solidFill>
+                <a:latin typeface="Pretendard" pitchFamily="34" charset="0"/>
+                <a:ea typeface="Pretendard" pitchFamily="34" charset="-122"/>
+                <a:cs typeface="Pretendard" pitchFamily="34" charset="-120"/>
+              </a:rPr>
+              <a:t>00:00–00:20</a:t>
+            </a:r>
+            <a:endParaRPr lang="en-US" sz="1050" dirty="0"/>
+          </a:p>
+        </p:txBody>
+      </p:sp>
+      <p:sp>
+        <p:nvSpPr>
+          <p:cNvPr id="11" name="Text 9"/>
+          <p:cNvSpPr/>
+          <p:nvPr/>
+        </p:nvSpPr>
+        <p:spPr>
+          <a:xfrm>
+            <a:off x="2377440" y="1719072"/>
             <a:ext cx="6888175" cy="932688"/>
           </a:xfrm>
           <a:prstGeom prst="rect">
@@ -3626,13 +3966,13 @@
             <a:r>
               <a:rPr lang="en-US" sz="1300" b="1" dirty="0">
                 <a:solidFill>
-                  <a:srgbClr val="14161B"/>
-                </a:solidFill>
-                <a:latin typeface="Pretendard" pitchFamily="34" charset="0"/>
-                <a:ea typeface="Pretendard" pitchFamily="34" charset="-122"/>
-                <a:cs typeface="Pretendard" pitchFamily="34" charset="-120"/>
-              </a:rPr>
-              <a:t>진행 확인 · 과제 안내</a:t>
+                  <a:srgbClr val="111111"/>
+                </a:solidFill>
+                <a:latin typeface="Pretendard" pitchFamily="34" charset="0"/>
+                <a:ea typeface="Pretendard" pitchFamily="34" charset="-122"/>
+                <a:cs typeface="Pretendard" pitchFamily="34" charset="-120"/>
+              </a:rPr>
+              <a:t>컬러 시스템 적용 강의</a:t>
             </a:r>
             <a:endParaRPr lang="en-US" sz="1300" dirty="0"/>
           </a:p>
@@ -3640,13 +3980,13 @@
       </p:sp>
       <p:sp>
         <p:nvSpPr>
-          <p:cNvPr id="15" name="Text 13"/>
-          <p:cNvSpPr/>
-          <p:nvPr/>
-        </p:nvSpPr>
-        <p:spPr>
-          <a:xfrm>
-            <a:off x="9265615" y="3584448"/>
+          <p:cNvPr id="12" name="Text 10"/>
+          <p:cNvSpPr/>
+          <p:nvPr/>
+        </p:nvSpPr>
+        <p:spPr>
+          <a:xfrm>
+            <a:off x="9265615" y="1719072"/>
             <a:ext cx="2286000" cy="932688"/>
           </a:xfrm>
           <a:prstGeom prst="rect">
@@ -3663,42 +4003,40 @@
               <a:buNone/>
             </a:pPr>
             <a:r>
-              <a:rPr lang="en-US" sz="1100" dirty="0">
-                <a:solidFill>
-                  <a:srgbClr val="6B7280"/>
-                </a:solidFill>
-                <a:latin typeface="Pretendard" pitchFamily="34" charset="0"/>
-                <a:ea typeface="Pretendard" pitchFamily="34" charset="-122"/>
-                <a:cs typeface="Pretendard" pitchFamily="34" charset="-120"/>
-              </a:rPr>
-              <a:t>개별 확인</a:t>
-            </a:r>
-            <a:endParaRPr lang="en-US" sz="1100" dirty="0"/>
-          </a:p>
-        </p:txBody>
-      </p:sp>
-      <p:sp>
-        <p:nvSpPr>
-          <p:cNvPr id="16" name="Shape 14"/>
-          <p:cNvSpPr/>
-          <p:nvPr/>
-        </p:nvSpPr>
-        <p:spPr>
-          <a:xfrm>
-            <a:off x="640080" y="4828032"/>
-            <a:ext cx="10911535" cy="969264"/>
-          </a:xfrm>
-          <a:prstGeom prst="roundRect">
-            <a:avLst>
-              <a:gd name="adj" fmla="val 7547"/>
-            </a:avLst>
+              <a:rPr lang="en-US" sz="1050" dirty="0">
+                <a:solidFill>
+                  <a:srgbClr val="6E6E6E"/>
+                </a:solidFill>
+                <a:latin typeface="Pretendard" pitchFamily="34" charset="0"/>
+                <a:ea typeface="Pretendard" pitchFamily="34" charset="-122"/>
+                <a:cs typeface="Pretendard" pitchFamily="34" charset="-120"/>
+              </a:rPr>
+              <a:t>강의</a:t>
+            </a:r>
+            <a:endParaRPr lang="en-US" sz="1050" dirty="0"/>
+          </a:p>
+        </p:txBody>
+      </p:sp>
+      <p:sp>
+        <p:nvSpPr>
+          <p:cNvPr id="13" name="Shape 11"/>
+          <p:cNvSpPr/>
+          <p:nvPr/>
+        </p:nvSpPr>
+        <p:spPr>
+          <a:xfrm>
+            <a:off x="640080" y="2633472"/>
+            <a:ext cx="10911535" cy="7315"/>
+          </a:xfrm>
+          <a:prstGeom prst="rect">
+            <a:avLst/>
           </a:prstGeom>
           <a:solidFill>
-            <a:srgbClr val="14161B"/>
+            <a:srgbClr val="DCDCDC"/>
           </a:solidFill>
           <a:ln w="12700">
             <a:solidFill>
-              <a:srgbClr val="14161B"/>
+              <a:srgbClr val="DCDCDC"/>
             </a:solidFill>
             <a:prstDash val="solid"/>
           </a:ln>
@@ -3706,32 +4044,316 @@
       </p:sp>
       <p:sp>
         <p:nvSpPr>
-          <p:cNvPr id="17" name="Text 15"/>
-          <p:cNvSpPr/>
-          <p:nvPr/>
-        </p:nvSpPr>
-        <p:spPr>
-          <a:xfrm>
-            <a:off x="1097280" y="4992624"/>
-            <a:ext cx="2743200" cy="274320"/>
-          </a:xfrm>
-          <a:prstGeom prst="rect">
-            <a:avLst/>
-          </a:prstGeom>
-          <a:noFill/>
-          <a:ln/>
-        </p:spPr>
-        <p:txBody>
-          <a:bodyPr wrap="square" lIns="0" tIns="0" rIns="0" bIns="0" rtlCol="0" anchor="ctr"/>
-          <a:lstStyle/>
-          <a:p>
-            <a:pPr indent="0" marL="0">
-              <a:buNone/>
-            </a:pPr>
-            <a:r>
-              <a:rPr lang="en-US" sz="1050" b="1" spc="120" kern="0" dirty="0">
-                <a:solidFill>
-                  <a:srgbClr val="FF4A1C"/>
+          <p:cNvPr id="14" name="Text 12"/>
+          <p:cNvSpPr/>
+          <p:nvPr/>
+        </p:nvSpPr>
+        <p:spPr>
+          <a:xfrm>
+            <a:off x="640080" y="2651760"/>
+            <a:ext cx="1600200" cy="932688"/>
+          </a:xfrm>
+          <a:prstGeom prst="rect">
+            <a:avLst/>
+          </a:prstGeom>
+          <a:noFill/>
+          <a:ln/>
+        </p:spPr>
+        <p:txBody>
+          <a:bodyPr wrap="square" lIns="0" tIns="0" rIns="0" bIns="0" rtlCol="0" anchor="ctr"/>
+          <a:lstStyle/>
+          <a:p>
+            <a:pPr indent="0" marL="0">
+              <a:buNone/>
+            </a:pPr>
+            <a:r>
+              <a:rPr lang="en-US" sz="1050" b="1" spc="60" kern="0" dirty="0">
+                <a:solidFill>
+                  <a:srgbClr val="111111"/>
+                </a:solidFill>
+                <a:latin typeface="Pretendard" pitchFamily="34" charset="0"/>
+                <a:ea typeface="Pretendard" pitchFamily="34" charset="-122"/>
+                <a:cs typeface="Pretendard" pitchFamily="34" charset="-120"/>
+              </a:rPr>
+              <a:t>00:20–01:20</a:t>
+            </a:r>
+            <a:endParaRPr lang="en-US" sz="1050" dirty="0"/>
+          </a:p>
+        </p:txBody>
+      </p:sp>
+      <p:sp>
+        <p:nvSpPr>
+          <p:cNvPr id="15" name="Text 13"/>
+          <p:cNvSpPr/>
+          <p:nvPr/>
+        </p:nvSpPr>
+        <p:spPr>
+          <a:xfrm>
+            <a:off x="2377440" y="2651760"/>
+            <a:ext cx="6888175" cy="932688"/>
+          </a:xfrm>
+          <a:prstGeom prst="rect">
+            <a:avLst/>
+          </a:prstGeom>
+          <a:noFill/>
+          <a:ln/>
+        </p:spPr>
+        <p:txBody>
+          <a:bodyPr wrap="square" lIns="0" tIns="0" rIns="0" bIns="0" rtlCol="0" anchor="ctr"/>
+          <a:lstStyle/>
+          <a:p>
+            <a:pPr indent="0" marL="0">
+              <a:buNone/>
+            </a:pPr>
+            <a:r>
+              <a:rPr lang="en-US" sz="1300" b="1" dirty="0">
+                <a:solidFill>
+                  <a:srgbClr val="111111"/>
+                </a:solidFill>
+                <a:latin typeface="Pretendard" pitchFamily="34" charset="0"/>
+                <a:ea typeface="Pretendard" pitchFamily="34" charset="-122"/>
+                <a:cs typeface="Pretendard" pitchFamily="34" charset="-120"/>
+              </a:rPr>
+              <a:t>이미지 보정 · 배치 실습</a:t>
+            </a:r>
+            <a:endParaRPr lang="en-US" sz="1300" dirty="0"/>
+          </a:p>
+        </p:txBody>
+      </p:sp>
+      <p:sp>
+        <p:nvSpPr>
+          <p:cNvPr id="16" name="Text 14"/>
+          <p:cNvSpPr/>
+          <p:nvPr/>
+        </p:nvSpPr>
+        <p:spPr>
+          <a:xfrm>
+            <a:off x="9265615" y="2651760"/>
+            <a:ext cx="2286000" cy="932688"/>
+          </a:xfrm>
+          <a:prstGeom prst="rect">
+            <a:avLst/>
+          </a:prstGeom>
+          <a:noFill/>
+          <a:ln/>
+        </p:spPr>
+        <p:txBody>
+          <a:bodyPr wrap="square" lIns="0" tIns="0" rIns="0" bIns="0" rtlCol="0" anchor="ctr"/>
+          <a:lstStyle/>
+          <a:p>
+            <a:pPr algn="r" indent="0" marL="0">
+              <a:buNone/>
+            </a:pPr>
+            <a:r>
+              <a:rPr lang="en-US" sz="1050" dirty="0">
+                <a:solidFill>
+                  <a:srgbClr val="6E6E6E"/>
+                </a:solidFill>
+                <a:latin typeface="Pretendard" pitchFamily="34" charset="0"/>
+                <a:ea typeface="Pretendard" pitchFamily="34" charset="-122"/>
+                <a:cs typeface="Pretendard" pitchFamily="34" charset="-120"/>
+              </a:rPr>
+              <a:t>개인 워크 + 순회</a:t>
+            </a:r>
+            <a:endParaRPr lang="en-US" sz="1050" dirty="0"/>
+          </a:p>
+        </p:txBody>
+      </p:sp>
+      <p:sp>
+        <p:nvSpPr>
+          <p:cNvPr id="17" name="Shape 15"/>
+          <p:cNvSpPr/>
+          <p:nvPr/>
+        </p:nvSpPr>
+        <p:spPr>
+          <a:xfrm>
+            <a:off x="640080" y="3566160"/>
+            <a:ext cx="10911535" cy="7315"/>
+          </a:xfrm>
+          <a:prstGeom prst="rect">
+            <a:avLst/>
+          </a:prstGeom>
+          <a:solidFill>
+            <a:srgbClr val="DCDCDC"/>
+          </a:solidFill>
+          <a:ln w="12700">
+            <a:solidFill>
+              <a:srgbClr val="DCDCDC"/>
+            </a:solidFill>
+            <a:prstDash val="solid"/>
+          </a:ln>
+        </p:spPr>
+      </p:sp>
+      <p:sp>
+        <p:nvSpPr>
+          <p:cNvPr id="18" name="Text 16"/>
+          <p:cNvSpPr/>
+          <p:nvPr/>
+        </p:nvSpPr>
+        <p:spPr>
+          <a:xfrm>
+            <a:off x="640080" y="3584448"/>
+            <a:ext cx="1600200" cy="932688"/>
+          </a:xfrm>
+          <a:prstGeom prst="rect">
+            <a:avLst/>
+          </a:prstGeom>
+          <a:noFill/>
+          <a:ln/>
+        </p:spPr>
+        <p:txBody>
+          <a:bodyPr wrap="square" lIns="0" tIns="0" rIns="0" bIns="0" rtlCol="0" anchor="ctr"/>
+          <a:lstStyle/>
+          <a:p>
+            <a:pPr indent="0" marL="0">
+              <a:buNone/>
+            </a:pPr>
+            <a:r>
+              <a:rPr lang="en-US" sz="1050" b="1" spc="60" kern="0" dirty="0">
+                <a:solidFill>
+                  <a:srgbClr val="111111"/>
+                </a:solidFill>
+                <a:latin typeface="Pretendard" pitchFamily="34" charset="0"/>
+                <a:ea typeface="Pretendard" pitchFamily="34" charset="-122"/>
+                <a:cs typeface="Pretendard" pitchFamily="34" charset="-120"/>
+              </a:rPr>
+              <a:t>01:20–01:30</a:t>
+            </a:r>
+            <a:endParaRPr lang="en-US" sz="1050" dirty="0"/>
+          </a:p>
+        </p:txBody>
+      </p:sp>
+      <p:sp>
+        <p:nvSpPr>
+          <p:cNvPr id="19" name="Text 17"/>
+          <p:cNvSpPr/>
+          <p:nvPr/>
+        </p:nvSpPr>
+        <p:spPr>
+          <a:xfrm>
+            <a:off x="2377440" y="3584448"/>
+            <a:ext cx="6888175" cy="932688"/>
+          </a:xfrm>
+          <a:prstGeom prst="rect">
+            <a:avLst/>
+          </a:prstGeom>
+          <a:noFill/>
+          <a:ln/>
+        </p:spPr>
+        <p:txBody>
+          <a:bodyPr wrap="square" lIns="0" tIns="0" rIns="0" bIns="0" rtlCol="0" anchor="ctr"/>
+          <a:lstStyle/>
+          <a:p>
+            <a:pPr indent="0" marL="0">
+              <a:buNone/>
+            </a:pPr>
+            <a:r>
+              <a:rPr lang="en-US" sz="1300" b="1" dirty="0">
+                <a:solidFill>
+                  <a:srgbClr val="111111"/>
+                </a:solidFill>
+                <a:latin typeface="Pretendard" pitchFamily="34" charset="0"/>
+                <a:ea typeface="Pretendard" pitchFamily="34" charset="-122"/>
+                <a:cs typeface="Pretendard" pitchFamily="34" charset="-120"/>
+              </a:rPr>
+              <a:t>진행 확인 · 과제 안내</a:t>
+            </a:r>
+            <a:endParaRPr lang="en-US" sz="1300" dirty="0"/>
+          </a:p>
+        </p:txBody>
+      </p:sp>
+      <p:sp>
+        <p:nvSpPr>
+          <p:cNvPr id="20" name="Text 18"/>
+          <p:cNvSpPr/>
+          <p:nvPr/>
+        </p:nvSpPr>
+        <p:spPr>
+          <a:xfrm>
+            <a:off x="9265615" y="3584448"/>
+            <a:ext cx="2286000" cy="932688"/>
+          </a:xfrm>
+          <a:prstGeom prst="rect">
+            <a:avLst/>
+          </a:prstGeom>
+          <a:noFill/>
+          <a:ln/>
+        </p:spPr>
+        <p:txBody>
+          <a:bodyPr wrap="square" lIns="0" tIns="0" rIns="0" bIns="0" rtlCol="0" anchor="ctr"/>
+          <a:lstStyle/>
+          <a:p>
+            <a:pPr algn="r" indent="0" marL="0">
+              <a:buNone/>
+            </a:pPr>
+            <a:r>
+              <a:rPr lang="en-US" sz="1050" dirty="0">
+                <a:solidFill>
+                  <a:srgbClr val="6E6E6E"/>
+                </a:solidFill>
+                <a:latin typeface="Pretendard" pitchFamily="34" charset="0"/>
+                <a:ea typeface="Pretendard" pitchFamily="34" charset="-122"/>
+                <a:cs typeface="Pretendard" pitchFamily="34" charset="-120"/>
+              </a:rPr>
+              <a:t>개별 확인</a:t>
+            </a:r>
+            <a:endParaRPr lang="en-US" sz="1050" dirty="0"/>
+          </a:p>
+        </p:txBody>
+      </p:sp>
+      <p:sp>
+        <p:nvSpPr>
+          <p:cNvPr id="21" name="Shape 19"/>
+          <p:cNvSpPr/>
+          <p:nvPr/>
+        </p:nvSpPr>
+        <p:spPr>
+          <a:xfrm>
+            <a:off x="640080" y="4828032"/>
+            <a:ext cx="10911535" cy="969264"/>
+          </a:xfrm>
+          <a:prstGeom prst="rect">
+            <a:avLst/>
+          </a:prstGeom>
+          <a:solidFill>
+            <a:srgbClr val="111111"/>
+          </a:solidFill>
+          <a:ln w="12700">
+            <a:solidFill>
+              <a:srgbClr val="111111"/>
+            </a:solidFill>
+            <a:prstDash val="solid"/>
+          </a:ln>
+        </p:spPr>
+      </p:sp>
+      <p:sp>
+        <p:nvSpPr>
+          <p:cNvPr id="22" name="Text 20"/>
+          <p:cNvSpPr/>
+          <p:nvPr/>
+        </p:nvSpPr>
+        <p:spPr>
+          <a:xfrm>
+            <a:off x="1097280" y="5010912"/>
+            <a:ext cx="2743200" cy="256032"/>
+          </a:xfrm>
+          <a:prstGeom prst="rect">
+            <a:avLst/>
+          </a:prstGeom>
+          <a:noFill/>
+          <a:ln/>
+        </p:spPr>
+        <p:txBody>
+          <a:bodyPr wrap="square" lIns="0" tIns="0" rIns="0" bIns="0" rtlCol="0" anchor="ctr"/>
+          <a:lstStyle/>
+          <a:p>
+            <a:pPr indent="0" marL="0">
+              <a:buNone/>
+            </a:pPr>
+            <a:r>
+              <a:rPr lang="en-US" sz="950" spc="240" kern="0" dirty="0">
+                <a:solidFill>
+                  <a:srgbClr val="9A9A9A"/>
                 </a:solidFill>
                 <a:latin typeface="Pretendard" pitchFamily="34" charset="0"/>
                 <a:ea typeface="Pretendard" pitchFamily="34" charset="-122"/>
@@ -3739,20 +4361,20 @@
               </a:rPr>
               <a:t>오늘 끝나면</a:t>
             </a:r>
-            <a:endParaRPr lang="en-US" sz="1050" dirty="0"/>
-          </a:p>
-        </p:txBody>
-      </p:sp>
-      <p:sp>
-        <p:nvSpPr>
-          <p:cNvPr id="18" name="Text 16"/>
-          <p:cNvSpPr/>
-          <p:nvPr/>
-        </p:nvSpPr>
-        <p:spPr>
-          <a:xfrm>
-            <a:off x="1097280" y="5266944"/>
-            <a:ext cx="9997135" cy="402336"/>
+            <a:endParaRPr lang="en-US" sz="950" dirty="0"/>
+          </a:p>
+        </p:txBody>
+      </p:sp>
+      <p:sp>
+        <p:nvSpPr>
+          <p:cNvPr id="23" name="Text 21"/>
+          <p:cNvSpPr/>
+          <p:nvPr/>
+        </p:nvSpPr>
+        <p:spPr>
+          <a:xfrm>
+            <a:off x="1097280" y="5285232"/>
+            <a:ext cx="9997135" cy="365760"/>
           </a:xfrm>
           <a:prstGeom prst="rect">
             <a:avLst/>
@@ -3766,18 +4388,18 @@
           <a:p>
             <a:pPr indent="0" marL="0">
               <a:lnSpc>
-                <a:spcPct val="124000"/>
+                <a:spcPct val="126000"/>
               </a:lnSpc>
               <a:buNone/>
             </a:pPr>
             <a:r>
-              <a:rPr lang="en-US" sz="1600" b="1" dirty="0">
+              <a:rPr lang="en-US" sz="1600" dirty="0">
                 <a:solidFill>
                   <a:srgbClr val="FFFFFF"/>
                 </a:solidFill>
-                <a:latin typeface="Pretendard" pitchFamily="34" charset="0"/>
-                <a:ea typeface="Pretendard" pitchFamily="34" charset="-122"/>
-                <a:cs typeface="Pretendard" pitchFamily="34" charset="-120"/>
+                <a:latin typeface="Pretendard Black" pitchFamily="34" charset="0"/>
+                <a:ea typeface="Pretendard Black" pitchFamily="34" charset="-122"/>
+                <a:cs typeface="Pretendard Black" pitchFamily="34" charset="-120"/>
               </a:rPr>
               <a:t>이미지 톤이 정리되고, 페이지가 한 벌로 보이기 시작합니다.</a:t>
             </a:r>
@@ -3787,32 +4409,57 @@
       </p:sp>
       <p:sp>
         <p:nvSpPr>
-          <p:cNvPr id="19" name="Text 17"/>
-          <p:cNvSpPr/>
-          <p:nvPr/>
-        </p:nvSpPr>
-        <p:spPr>
-          <a:xfrm>
-            <a:off x="640080" y="6345936"/>
-            <a:ext cx="7772400" cy="256032"/>
-          </a:xfrm>
-          <a:prstGeom prst="rect">
-            <a:avLst/>
-          </a:prstGeom>
-          <a:noFill/>
-          <a:ln/>
-        </p:spPr>
-        <p:txBody>
-          <a:bodyPr wrap="square" lIns="0" tIns="0" rIns="0" bIns="0" rtlCol="0" anchor="ctr"/>
-          <a:lstStyle/>
-          <a:p>
-            <a:pPr indent="0" marL="0">
-              <a:buNone/>
-            </a:pPr>
-            <a:r>
-              <a:rPr lang="en-US" sz="900" dirty="0">
-                <a:solidFill>
-                  <a:srgbClr val="9AA0AA"/>
+          <p:cNvPr id="24" name="Shape 22"/>
+          <p:cNvSpPr/>
+          <p:nvPr/>
+        </p:nvSpPr>
+        <p:spPr>
+          <a:xfrm>
+            <a:off x="640080" y="6291072"/>
+            <a:ext cx="10911535" cy="7315"/>
+          </a:xfrm>
+          <a:prstGeom prst="rect">
+            <a:avLst/>
+          </a:prstGeom>
+          <a:solidFill>
+            <a:srgbClr val="DCDCDC"/>
+          </a:solidFill>
+          <a:ln w="12700">
+            <a:solidFill>
+              <a:srgbClr val="DCDCDC"/>
+            </a:solidFill>
+            <a:prstDash val="solid"/>
+          </a:ln>
+        </p:spPr>
+      </p:sp>
+      <p:sp>
+        <p:nvSpPr>
+          <p:cNvPr id="25" name="Text 23"/>
+          <p:cNvSpPr/>
+          <p:nvPr/>
+        </p:nvSpPr>
+        <p:spPr>
+          <a:xfrm>
+            <a:off x="640080" y="6382512"/>
+            <a:ext cx="7772400" cy="237744"/>
+          </a:xfrm>
+          <a:prstGeom prst="rect">
+            <a:avLst/>
+          </a:prstGeom>
+          <a:noFill/>
+          <a:ln/>
+        </p:spPr>
+        <p:txBody>
+          <a:bodyPr wrap="square" lIns="0" tIns="0" rIns="0" bIns="0" rtlCol="0" anchor="ctr"/>
+          <a:lstStyle/>
+          <a:p>
+            <a:pPr indent="0" marL="0">
+              <a:buNone/>
+            </a:pPr>
+            <a:r>
+              <a:rPr lang="en-US" sz="850" spc="40" kern="0" dirty="0">
+                <a:solidFill>
+                  <a:srgbClr val="9B9B9B"/>
                 </a:solidFill>
                 <a:latin typeface="Pretendard" pitchFamily="34" charset="0"/>
                 <a:ea typeface="Pretendard" pitchFamily="34" charset="-122"/>
@@ -3820,20 +4467,20 @@
               </a:rPr>
               <a:t>포트폴리오제작 · 11주차 편집디자인 실습 Ⅱ</a:t>
             </a:r>
-            <a:endParaRPr lang="en-US" sz="900" dirty="0"/>
-          </a:p>
-        </p:txBody>
-      </p:sp>
-      <p:sp>
-        <p:nvSpPr>
-          <p:cNvPr id="20" name="Text 18"/>
-          <p:cNvSpPr/>
-          <p:nvPr/>
-        </p:nvSpPr>
-        <p:spPr>
-          <a:xfrm>
-            <a:off x="10454335" y="6345936"/>
-            <a:ext cx="1097280" cy="256032"/>
+            <a:endParaRPr lang="en-US" sz="850" dirty="0"/>
+          </a:p>
+        </p:txBody>
+      </p:sp>
+      <p:sp>
+        <p:nvSpPr>
+          <p:cNvPr id="26" name="Text 24"/>
+          <p:cNvSpPr/>
+          <p:nvPr/>
+        </p:nvSpPr>
+        <p:spPr>
+          <a:xfrm>
+            <a:off x="10271455" y="6382512"/>
+            <a:ext cx="1280160" cy="237744"/>
           </a:xfrm>
           <a:prstGeom prst="rect">
             <a:avLst/>
@@ -3849,17 +4496,17 @@
               <a:buNone/>
             </a:pPr>
             <a:r>
-              <a:rPr lang="en-US" sz="900" dirty="0">
-                <a:solidFill>
-                  <a:srgbClr val="9AA0AA"/>
-                </a:solidFill>
-                <a:latin typeface="Pretendard" pitchFamily="34" charset="0"/>
-                <a:ea typeface="Pretendard" pitchFamily="34" charset="-122"/>
-                <a:cs typeface="Pretendard" pitchFamily="34" charset="-120"/>
-              </a:rPr>
-              <a:t>01</a:t>
-            </a:r>
-            <a:endParaRPr lang="en-US" sz="900" dirty="0"/>
+              <a:rPr lang="en-US" sz="850" spc="140" kern="0" dirty="0">
+                <a:solidFill>
+                  <a:srgbClr val="9B9B9B"/>
+                </a:solidFill>
+                <a:latin typeface="Pretendard" pitchFamily="34" charset="0"/>
+                <a:ea typeface="Pretendard" pitchFamily="34" charset="-122"/>
+                <a:cs typeface="Pretendard" pitchFamily="34" charset="-120"/>
+              </a:rPr>
+              <a:t>P.01</a:t>
+            </a:r>
+            <a:endParaRPr lang="en-US" sz="850" dirty="0"/>
           </a:p>
         </p:txBody>
       </p:sp>
@@ -3903,34 +4550,34 @@
         </p:nvSpPr>
         <p:spPr>
           <a:xfrm>
-            <a:off x="640080" y="566928"/>
-            <a:ext cx="10911535" cy="237744"/>
-          </a:xfrm>
-          <a:prstGeom prst="rect">
-            <a:avLst/>
-          </a:prstGeom>
-          <a:noFill/>
-          <a:ln/>
-        </p:spPr>
-        <p:txBody>
-          <a:bodyPr wrap="square" lIns="0" tIns="0" rIns="0" bIns="0" rtlCol="0" anchor="ctr"/>
-          <a:lstStyle/>
-          <a:p>
-            <a:pPr indent="0" marL="0">
-              <a:buNone/>
-            </a:pPr>
-            <a:r>
-              <a:rPr lang="en-US" sz="1100" b="1" spc="140" kern="0" dirty="0">
-                <a:solidFill>
-                  <a:srgbClr val="FF4A1C"/>
-                </a:solidFill>
-                <a:latin typeface="Pretendard" pitchFamily="34" charset="0"/>
-                <a:ea typeface="Pretendard" pitchFamily="34" charset="-122"/>
-                <a:cs typeface="Pretendard" pitchFamily="34" charset="-120"/>
-              </a:rPr>
-              <a:t>OBJECTIVES</a:t>
-            </a:r>
-            <a:endParaRPr lang="en-US" sz="1100" dirty="0"/>
+            <a:off x="640080" y="274320"/>
+            <a:ext cx="3657600" cy="219456"/>
+          </a:xfrm>
+          <a:prstGeom prst="rect">
+            <a:avLst/>
+          </a:prstGeom>
+          <a:noFill/>
+          <a:ln/>
+        </p:spPr>
+        <p:txBody>
+          <a:bodyPr wrap="square" lIns="0" tIns="0" rIns="0" bIns="0" rtlCol="0" anchor="ctr"/>
+          <a:lstStyle/>
+          <a:p>
+            <a:pPr indent="0" marL="0">
+              <a:buNone/>
+            </a:pPr>
+            <a:r>
+              <a:rPr lang="en-US" sz="900" spc="120" kern="0" dirty="0">
+                <a:solidFill>
+                  <a:srgbClr val="8A8A8A"/>
+                </a:solidFill>
+                <a:latin typeface="Pretendard" pitchFamily="34" charset="0"/>
+                <a:ea typeface="Pretendard" pitchFamily="34" charset="-122"/>
+                <a:cs typeface="Pretendard" pitchFamily="34" charset="-120"/>
+              </a:rPr>
+              <a:t>포트폴리오제작</a:t>
+            </a:r>
+            <a:endParaRPr lang="en-US" sz="900" dirty="0"/>
           </a:p>
         </p:txBody>
       </p:sp>
@@ -3942,59 +4589,96 @@
         </p:nvSpPr>
         <p:spPr>
           <a:xfrm>
-            <a:off x="640080" y="859536"/>
-            <a:ext cx="10911535" cy="512064"/>
-          </a:xfrm>
-          <a:prstGeom prst="rect">
-            <a:avLst/>
-          </a:prstGeom>
-          <a:noFill/>
-          <a:ln/>
-        </p:spPr>
-        <p:txBody>
-          <a:bodyPr wrap="square" lIns="0" tIns="0" rIns="0" bIns="0" rtlCol="0" anchor="ctr"/>
-          <a:lstStyle/>
-          <a:p>
-            <a:pPr indent="0" marL="0">
-              <a:buNone/>
-            </a:pPr>
-            <a:r>
-              <a:rPr lang="en-US" sz="2800" b="1" dirty="0">
-                <a:solidFill>
-                  <a:srgbClr val="14161B"/>
-                </a:solidFill>
-                <a:latin typeface="Pretendard" pitchFamily="34" charset="0"/>
-                <a:ea typeface="Pretendard" pitchFamily="34" charset="-122"/>
-                <a:cs typeface="Pretendard" pitchFamily="34" charset="-120"/>
-              </a:rPr>
-              <a:t>오늘 끝나면 여러분은</a:t>
-            </a:r>
-            <a:endParaRPr lang="en-US" sz="2800" dirty="0"/>
-          </a:p>
-        </p:txBody>
-      </p:sp>
-      <p:sp>
-        <p:nvSpPr>
-          <p:cNvPr id="4" name="Shape 2"/>
-          <p:cNvSpPr/>
-          <p:nvPr/>
-        </p:nvSpPr>
-        <p:spPr>
-          <a:xfrm>
-            <a:off x="640080" y="1810512"/>
-            <a:ext cx="310896" cy="310896"/>
-          </a:xfrm>
-          <a:prstGeom prst="roundRect">
-            <a:avLst>
-              <a:gd name="adj" fmla="val 17647"/>
-            </a:avLst>
+            <a:off x="4480560" y="274320"/>
+            <a:ext cx="4572000" cy="219456"/>
+          </a:xfrm>
+          <a:prstGeom prst="rect">
+            <a:avLst/>
+          </a:prstGeom>
+          <a:noFill/>
+          <a:ln/>
+        </p:spPr>
+        <p:txBody>
+          <a:bodyPr wrap="square" lIns="0" tIns="0" rIns="0" bIns="0" rtlCol="0" anchor="ctr"/>
+          <a:lstStyle/>
+          <a:p>
+            <a:pPr algn="ctr" indent="0" marL="0">
+              <a:buNone/>
+            </a:pPr>
+            <a:r>
+              <a:rPr lang="en-US" sz="900" spc="120" kern="0" dirty="0">
+                <a:solidFill>
+                  <a:srgbClr val="8A8A8A"/>
+                </a:solidFill>
+                <a:latin typeface="Pretendard" pitchFamily="34" charset="0"/>
+                <a:ea typeface="Pretendard" pitchFamily="34" charset="-122"/>
+                <a:cs typeface="Pretendard" pitchFamily="34" charset="-120"/>
+              </a:rPr>
+              <a:t>PHASE 3 완성과 발표</a:t>
+            </a:r>
+            <a:endParaRPr lang="en-US" sz="900" dirty="0"/>
+          </a:p>
+        </p:txBody>
+      </p:sp>
+      <p:sp>
+        <p:nvSpPr>
+          <p:cNvPr id="4" name="Text 2"/>
+          <p:cNvSpPr/>
+          <p:nvPr/>
+        </p:nvSpPr>
+        <p:spPr>
+          <a:xfrm>
+            <a:off x="8808415" y="274320"/>
+            <a:ext cx="2743200" cy="219456"/>
+          </a:xfrm>
+          <a:prstGeom prst="rect">
+            <a:avLst/>
+          </a:prstGeom>
+          <a:noFill/>
+          <a:ln/>
+        </p:spPr>
+        <p:txBody>
+          <a:bodyPr wrap="square" lIns="0" tIns="0" rIns="0" bIns="0" rtlCol="0" anchor="ctr"/>
+          <a:lstStyle/>
+          <a:p>
+            <a:pPr algn="r" indent="0" marL="0">
+              <a:buNone/>
+            </a:pPr>
+            <a:r>
+              <a:rPr lang="en-US" sz="900" spc="200" kern="0" dirty="0">
+                <a:solidFill>
+                  <a:srgbClr val="8A8A8A"/>
+                </a:solidFill>
+                <a:latin typeface="Pretendard" pitchFamily="34" charset="0"/>
+                <a:ea typeface="Pretendard" pitchFamily="34" charset="-122"/>
+                <a:cs typeface="Pretendard" pitchFamily="34" charset="-120"/>
+              </a:rPr>
+              <a:t>WEEK 11</a:t>
+            </a:r>
+            <a:endParaRPr lang="en-US" sz="900" dirty="0"/>
+          </a:p>
+        </p:txBody>
+      </p:sp>
+      <p:sp>
+        <p:nvSpPr>
+          <p:cNvPr id="5" name="Shape 3"/>
+          <p:cNvSpPr/>
+          <p:nvPr/>
+        </p:nvSpPr>
+        <p:spPr>
+          <a:xfrm>
+            <a:off x="640080" y="548640"/>
+            <a:ext cx="10911535" cy="7315"/>
+          </a:xfrm>
+          <a:prstGeom prst="rect">
+            <a:avLst/>
           </a:prstGeom>
           <a:solidFill>
-            <a:srgbClr val="14161B"/>
+            <a:srgbClr val="DCDCDC"/>
           </a:solidFill>
-          <a:ln w="6350">
+          <a:ln w="12700">
             <a:solidFill>
-              <a:srgbClr val="14161B"/>
+              <a:srgbClr val="DCDCDC"/>
             </a:solidFill>
             <a:prstDash val="solid"/>
           </a:ln>
@@ -4002,79 +4686,40 @@
       </p:sp>
       <p:sp>
         <p:nvSpPr>
-          <p:cNvPr id="5" name="Text 3"/>
-          <p:cNvSpPr/>
-          <p:nvPr/>
-        </p:nvSpPr>
-        <p:spPr>
-          <a:xfrm>
-            <a:off x="640080" y="1810512"/>
-            <a:ext cx="310896" cy="310896"/>
-          </a:xfrm>
-          <a:prstGeom prst="rect">
-            <a:avLst/>
-          </a:prstGeom>
-          <a:noFill/>
-          <a:ln/>
-        </p:spPr>
-        <p:txBody>
-          <a:bodyPr wrap="square" lIns="0" tIns="0" rIns="0" bIns="0" rtlCol="0" anchor="ctr"/>
-          <a:lstStyle/>
-          <a:p>
-            <a:pPr algn="ctr" indent="0" marL="0">
-              <a:buNone/>
-            </a:pPr>
-            <a:r>
-              <a:rPr lang="en-US" sz="1050" b="1" dirty="0">
-                <a:solidFill>
-                  <a:srgbClr val="FFFFFF"/>
-                </a:solidFill>
-                <a:latin typeface="Pretendard" pitchFamily="34" charset="0"/>
-                <a:ea typeface="Pretendard" pitchFamily="34" charset="-122"/>
-                <a:cs typeface="Pretendard" pitchFamily="34" charset="-120"/>
-              </a:rPr>
-              <a:t>1</a:t>
-            </a:r>
-            <a:endParaRPr lang="en-US" sz="1050" dirty="0"/>
-          </a:p>
-        </p:txBody>
-      </p:sp>
-      <p:sp>
-        <p:nvSpPr>
           <p:cNvPr id="6" name="Text 4"/>
           <p:cNvSpPr/>
           <p:nvPr/>
         </p:nvSpPr>
         <p:spPr>
           <a:xfrm>
-            <a:off x="1188720" y="1719072"/>
-            <a:ext cx="9875520" cy="310896"/>
-          </a:xfrm>
-          <a:prstGeom prst="rect">
-            <a:avLst/>
-          </a:prstGeom>
-          <a:noFill/>
-          <a:ln/>
-        </p:spPr>
-        <p:txBody>
-          <a:bodyPr wrap="square" lIns="0" tIns="0" rIns="0" bIns="0" rtlCol="0" anchor="ctr"/>
-          <a:lstStyle/>
-          <a:p>
-            <a:pPr indent="0" marL="0">
-              <a:buNone/>
-            </a:pPr>
-            <a:r>
-              <a:rPr lang="en-US" sz="1450" b="1" dirty="0">
-                <a:solidFill>
-                  <a:srgbClr val="14161B"/>
-                </a:solidFill>
-                <a:latin typeface="Pretendard" pitchFamily="34" charset="0"/>
-                <a:ea typeface="Pretendard" pitchFamily="34" charset="-122"/>
-                <a:cs typeface="Pretendard" pitchFamily="34" charset="-120"/>
-              </a:rPr>
-              <a:t>컬러를 규칙대로 쓸 수 있다</a:t>
-            </a:r>
-            <a:endParaRPr lang="en-US" sz="1450" dirty="0"/>
+            <a:off x="640080" y="640080"/>
+            <a:ext cx="10911535" cy="219456"/>
+          </a:xfrm>
+          <a:prstGeom prst="rect">
+            <a:avLst/>
+          </a:prstGeom>
+          <a:noFill/>
+          <a:ln/>
+        </p:spPr>
+        <p:txBody>
+          <a:bodyPr wrap="square" lIns="0" tIns="0" rIns="0" bIns="0" rtlCol="0" anchor="ctr"/>
+          <a:lstStyle/>
+          <a:p>
+            <a:pPr indent="0" marL="0">
+              <a:buNone/>
+            </a:pPr>
+            <a:r>
+              <a:rPr lang="en-US" sz="950" spc="260" kern="0" dirty="0">
+                <a:solidFill>
+                  <a:srgbClr val="8A8A8A"/>
+                </a:solidFill>
+                <a:latin typeface="Pretendard" pitchFamily="34" charset="0"/>
+                <a:ea typeface="Pretendard" pitchFamily="34" charset="-122"/>
+                <a:cs typeface="Pretendard" pitchFamily="34" charset="-120"/>
+              </a:rPr>
+              <a:t>OBJECTIVES</a:t>
+            </a:r>
+            <a:endParaRPr lang="en-US" sz="950" dirty="0"/>
           </a:p>
         </p:txBody>
       </p:sp>
@@ -4086,34 +4731,34 @@
         </p:nvSpPr>
         <p:spPr>
           <a:xfrm>
-            <a:off x="1188720" y="2029968"/>
-            <a:ext cx="9875520" cy="292608"/>
-          </a:xfrm>
-          <a:prstGeom prst="rect">
-            <a:avLst/>
-          </a:prstGeom>
-          <a:noFill/>
-          <a:ln/>
-        </p:spPr>
-        <p:txBody>
-          <a:bodyPr wrap="square" lIns="0" tIns="0" rIns="0" bIns="0" rtlCol="0" anchor="ctr"/>
-          <a:lstStyle/>
-          <a:p>
-            <a:pPr indent="0" marL="0">
-              <a:buNone/>
-            </a:pPr>
-            <a:r>
-              <a:rPr lang="en-US" sz="1100" dirty="0">
-                <a:solidFill>
-                  <a:srgbClr val="6B7280"/>
-                </a:solidFill>
-                <a:latin typeface="Pretendard" pitchFamily="34" charset="0"/>
-                <a:ea typeface="Pretendard" pitchFamily="34" charset="-122"/>
-                <a:cs typeface="Pretendard" pitchFamily="34" charset="-120"/>
-              </a:rPr>
-              <a:t>9주차에 정한 세 색을 예외 없이 적용합니다</a:t>
-            </a:r>
-            <a:endParaRPr lang="en-US" sz="1100" dirty="0"/>
+            <a:off x="640080" y="859536"/>
+            <a:ext cx="10911535" cy="475488"/>
+          </a:xfrm>
+          <a:prstGeom prst="rect">
+            <a:avLst/>
+          </a:prstGeom>
+          <a:noFill/>
+          <a:ln/>
+        </p:spPr>
+        <p:txBody>
+          <a:bodyPr wrap="square" lIns="0" tIns="0" rIns="0" bIns="0" rtlCol="0" anchor="ctr"/>
+          <a:lstStyle/>
+          <a:p>
+            <a:pPr indent="0" marL="0">
+              <a:buNone/>
+            </a:pPr>
+            <a:r>
+              <a:rPr lang="en-US" sz="3000" dirty="0">
+                <a:solidFill>
+                  <a:srgbClr val="111111"/>
+                </a:solidFill>
+                <a:latin typeface="Pretendard Black" pitchFamily="34" charset="0"/>
+                <a:ea typeface="Pretendard Black" pitchFamily="34" charset="-122"/>
+                <a:cs typeface="Pretendard Black" pitchFamily="34" charset="-120"/>
+              </a:rPr>
+              <a:t>오늘 끝나면 여러분은</a:t>
+            </a:r>
+            <a:endParaRPr lang="en-US" sz="3000" dirty="0"/>
           </a:p>
         </p:txBody>
       </p:sp>
@@ -4125,18 +4770,18 @@
         </p:nvSpPr>
         <p:spPr>
           <a:xfrm>
-            <a:off x="640080" y="2505456"/>
-            <a:ext cx="10911535" cy="9144"/>
+            <a:off x="640080" y="1664208"/>
+            <a:ext cx="10911535" cy="7315"/>
           </a:xfrm>
           <a:prstGeom prst="rect">
             <a:avLst/>
           </a:prstGeom>
           <a:solidFill>
-            <a:srgbClr val="E4E6EB"/>
+            <a:srgbClr val="111111"/>
           </a:solidFill>
           <a:ln w="12700">
             <a:solidFill>
-              <a:srgbClr val="E4E6EB"/>
+              <a:srgbClr val="111111"/>
             </a:solidFill>
             <a:prstDash val="solid"/>
           </a:ln>
@@ -4150,20 +4795,18 @@
         </p:nvSpPr>
         <p:spPr>
           <a:xfrm>
-            <a:off x="640080" y="2670048"/>
+            <a:off x="640080" y="1810512"/>
             <a:ext cx="310896" cy="310896"/>
           </a:xfrm>
-          <a:prstGeom prst="roundRect">
-            <a:avLst>
-              <a:gd name="adj" fmla="val 17647"/>
-            </a:avLst>
+          <a:prstGeom prst="ellipse">
+            <a:avLst/>
           </a:prstGeom>
           <a:solidFill>
-            <a:srgbClr val="14161B"/>
+            <a:srgbClr val="FFFFFF"/>
           </a:solidFill>
-          <a:ln w="6350">
+          <a:ln w="12700">
             <a:solidFill>
-              <a:srgbClr val="14161B"/>
+              <a:srgbClr val="111111"/>
             </a:solidFill>
             <a:prstDash val="solid"/>
           </a:ln>
@@ -4177,135 +4820,135 @@
         </p:nvSpPr>
         <p:spPr>
           <a:xfrm>
+            <a:off x="640080" y="1810512"/>
+            <a:ext cx="310896" cy="310896"/>
+          </a:xfrm>
+          <a:prstGeom prst="rect">
+            <a:avLst/>
+          </a:prstGeom>
+          <a:noFill/>
+          <a:ln/>
+        </p:spPr>
+        <p:txBody>
+          <a:bodyPr wrap="square" lIns="0" tIns="0" rIns="0" bIns="0" rtlCol="0" anchor="ctr"/>
+          <a:lstStyle/>
+          <a:p>
+            <a:pPr algn="ctr" indent="0" marL="0">
+              <a:buNone/>
+            </a:pPr>
+            <a:r>
+              <a:rPr lang="en-US" sz="1000" b="1" dirty="0">
+                <a:solidFill>
+                  <a:srgbClr val="111111"/>
+                </a:solidFill>
+                <a:latin typeface="Pretendard" pitchFamily="34" charset="0"/>
+                <a:ea typeface="Pretendard" pitchFamily="34" charset="-122"/>
+                <a:cs typeface="Pretendard" pitchFamily="34" charset="-120"/>
+              </a:rPr>
+              <a:t>1</a:t>
+            </a:r>
+            <a:endParaRPr lang="en-US" sz="1000" dirty="0"/>
+          </a:p>
+        </p:txBody>
+      </p:sp>
+      <p:sp>
+        <p:nvSpPr>
+          <p:cNvPr id="11" name="Text 9"/>
+          <p:cNvSpPr/>
+          <p:nvPr/>
+        </p:nvSpPr>
+        <p:spPr>
+          <a:xfrm>
+            <a:off x="1188720" y="1719072"/>
+            <a:ext cx="9875520" cy="310896"/>
+          </a:xfrm>
+          <a:prstGeom prst="rect">
+            <a:avLst/>
+          </a:prstGeom>
+          <a:noFill/>
+          <a:ln/>
+        </p:spPr>
+        <p:txBody>
+          <a:bodyPr wrap="square" lIns="0" tIns="0" rIns="0" bIns="0" rtlCol="0" anchor="ctr"/>
+          <a:lstStyle/>
+          <a:p>
+            <a:pPr indent="0" marL="0">
+              <a:buNone/>
+            </a:pPr>
+            <a:r>
+              <a:rPr lang="en-US" sz="1450" dirty="0">
+                <a:solidFill>
+                  <a:srgbClr val="111111"/>
+                </a:solidFill>
+                <a:latin typeface="Pretendard Black" pitchFamily="34" charset="0"/>
+                <a:ea typeface="Pretendard Black" pitchFamily="34" charset="-122"/>
+                <a:cs typeface="Pretendard Black" pitchFamily="34" charset="-120"/>
+              </a:rPr>
+              <a:t>컬러를 규칙대로 쓸 수 있다</a:t>
+            </a:r>
+            <a:endParaRPr lang="en-US" sz="1450" dirty="0"/>
+          </a:p>
+        </p:txBody>
+      </p:sp>
+      <p:sp>
+        <p:nvSpPr>
+          <p:cNvPr id="12" name="Text 10"/>
+          <p:cNvSpPr/>
+          <p:nvPr/>
+        </p:nvSpPr>
+        <p:spPr>
+          <a:xfrm>
+            <a:off x="1188720" y="2029968"/>
+            <a:ext cx="9875520" cy="292608"/>
+          </a:xfrm>
+          <a:prstGeom prst="rect">
+            <a:avLst/>
+          </a:prstGeom>
+          <a:noFill/>
+          <a:ln/>
+        </p:spPr>
+        <p:txBody>
+          <a:bodyPr wrap="square" lIns="0" tIns="0" rIns="0" bIns="0" rtlCol="0" anchor="ctr"/>
+          <a:lstStyle/>
+          <a:p>
+            <a:pPr indent="0" marL="0">
+              <a:buNone/>
+            </a:pPr>
+            <a:r>
+              <a:rPr lang="en-US" sz="1100" dirty="0">
+                <a:solidFill>
+                  <a:srgbClr val="6E6E6E"/>
+                </a:solidFill>
+                <a:latin typeface="Pretendard" pitchFamily="34" charset="0"/>
+                <a:ea typeface="Pretendard" pitchFamily="34" charset="-122"/>
+                <a:cs typeface="Pretendard" pitchFamily="34" charset="-120"/>
+              </a:rPr>
+              <a:t>9주차에 정한 세 색을 예외 없이 적용합니다</a:t>
+            </a:r>
+            <a:endParaRPr lang="en-US" sz="1100" dirty="0"/>
+          </a:p>
+        </p:txBody>
+      </p:sp>
+      <p:sp>
+        <p:nvSpPr>
+          <p:cNvPr id="13" name="Shape 11"/>
+          <p:cNvSpPr/>
+          <p:nvPr/>
+        </p:nvSpPr>
+        <p:spPr>
+          <a:xfrm>
             <a:off x="640080" y="2670048"/>
-            <a:ext cx="310896" cy="310896"/>
-          </a:xfrm>
-          <a:prstGeom prst="rect">
-            <a:avLst/>
-          </a:prstGeom>
-          <a:noFill/>
-          <a:ln/>
-        </p:spPr>
-        <p:txBody>
-          <a:bodyPr wrap="square" lIns="0" tIns="0" rIns="0" bIns="0" rtlCol="0" anchor="ctr"/>
-          <a:lstStyle/>
-          <a:p>
-            <a:pPr algn="ctr" indent="0" marL="0">
-              <a:buNone/>
-            </a:pPr>
-            <a:r>
-              <a:rPr lang="en-US" sz="1050" b="1" dirty="0">
-                <a:solidFill>
-                  <a:srgbClr val="FFFFFF"/>
-                </a:solidFill>
-                <a:latin typeface="Pretendard" pitchFamily="34" charset="0"/>
-                <a:ea typeface="Pretendard" pitchFamily="34" charset="-122"/>
-                <a:cs typeface="Pretendard" pitchFamily="34" charset="-120"/>
-              </a:rPr>
-              <a:t>2</a:t>
-            </a:r>
-            <a:endParaRPr lang="en-US" sz="1050" dirty="0"/>
-          </a:p>
-        </p:txBody>
-      </p:sp>
-      <p:sp>
-        <p:nvSpPr>
-          <p:cNvPr id="11" name="Text 9"/>
-          <p:cNvSpPr/>
-          <p:nvPr/>
-        </p:nvSpPr>
-        <p:spPr>
-          <a:xfrm>
-            <a:off x="1188720" y="2578608"/>
-            <a:ext cx="9875520" cy="310896"/>
-          </a:xfrm>
-          <a:prstGeom prst="rect">
-            <a:avLst/>
-          </a:prstGeom>
-          <a:noFill/>
-          <a:ln/>
-        </p:spPr>
-        <p:txBody>
-          <a:bodyPr wrap="square" lIns="0" tIns="0" rIns="0" bIns="0" rtlCol="0" anchor="ctr"/>
-          <a:lstStyle/>
-          <a:p>
-            <a:pPr indent="0" marL="0">
-              <a:buNone/>
-            </a:pPr>
-            <a:r>
-              <a:rPr lang="en-US" sz="1450" b="1" dirty="0">
-                <a:solidFill>
-                  <a:srgbClr val="14161B"/>
-                </a:solidFill>
-                <a:latin typeface="Pretendard" pitchFamily="34" charset="0"/>
-                <a:ea typeface="Pretendard" pitchFamily="34" charset="-122"/>
-                <a:cs typeface="Pretendard" pitchFamily="34" charset="-120"/>
-              </a:rPr>
-              <a:t>이미지 톤을 통일할 수 있다</a:t>
-            </a:r>
-            <a:endParaRPr lang="en-US" sz="1450" dirty="0"/>
-          </a:p>
-        </p:txBody>
-      </p:sp>
-      <p:sp>
-        <p:nvSpPr>
-          <p:cNvPr id="12" name="Text 10"/>
-          <p:cNvSpPr/>
-          <p:nvPr/>
-        </p:nvSpPr>
-        <p:spPr>
-          <a:xfrm>
-            <a:off x="1188720" y="2889504"/>
-            <a:ext cx="9875520" cy="292608"/>
-          </a:xfrm>
-          <a:prstGeom prst="rect">
-            <a:avLst/>
-          </a:prstGeom>
-          <a:noFill/>
-          <a:ln/>
-        </p:spPr>
-        <p:txBody>
-          <a:bodyPr wrap="square" lIns="0" tIns="0" rIns="0" bIns="0" rtlCol="0" anchor="ctr"/>
-          <a:lstStyle/>
-          <a:p>
-            <a:pPr indent="0" marL="0">
-              <a:buNone/>
-            </a:pPr>
-            <a:r>
-              <a:rPr lang="en-US" sz="1100" dirty="0">
-                <a:solidFill>
-                  <a:srgbClr val="6B7280"/>
-                </a:solidFill>
-                <a:latin typeface="Pretendard" pitchFamily="34" charset="0"/>
-                <a:ea typeface="Pretendard" pitchFamily="34" charset="-122"/>
-                <a:cs typeface="Pretendard" pitchFamily="34" charset="-120"/>
-              </a:rPr>
-              <a:t>출처가 다른 이미지들이 한 벌로 보이게 만드는 일</a:t>
-            </a:r>
-            <a:endParaRPr lang="en-US" sz="1100" dirty="0"/>
-          </a:p>
-        </p:txBody>
-      </p:sp>
-      <p:sp>
-        <p:nvSpPr>
-          <p:cNvPr id="13" name="Shape 11"/>
-          <p:cNvSpPr/>
-          <p:nvPr/>
-        </p:nvSpPr>
-        <p:spPr>
-          <a:xfrm>
-            <a:off x="640080" y="3364992"/>
-            <a:ext cx="10911535" cy="9144"/>
+            <a:ext cx="10911535" cy="7315"/>
           </a:xfrm>
           <a:prstGeom prst="rect">
             <a:avLst/>
           </a:prstGeom>
           <a:solidFill>
-            <a:srgbClr val="E4E6EB"/>
+            <a:srgbClr val="DCDCDC"/>
           </a:solidFill>
           <a:ln w="12700">
             <a:solidFill>
-              <a:srgbClr val="E4E6EB"/>
+              <a:srgbClr val="DCDCDC"/>
             </a:solidFill>
             <a:prstDash val="solid"/>
           </a:ln>
@@ -4319,20 +4962,18 @@
         </p:nvSpPr>
         <p:spPr>
           <a:xfrm>
-            <a:off x="640080" y="3529584"/>
+            <a:off x="640080" y="2834640"/>
             <a:ext cx="310896" cy="310896"/>
           </a:xfrm>
-          <a:prstGeom prst="roundRect">
-            <a:avLst>
-              <a:gd name="adj" fmla="val 17647"/>
-            </a:avLst>
+          <a:prstGeom prst="ellipse">
+            <a:avLst/>
           </a:prstGeom>
           <a:solidFill>
-            <a:srgbClr val="14161B"/>
+            <a:srgbClr val="FFFFFF"/>
           </a:solidFill>
-          <a:ln w="6350">
+          <a:ln w="12700">
             <a:solidFill>
-              <a:srgbClr val="14161B"/>
+              <a:srgbClr val="111111"/>
             </a:solidFill>
             <a:prstDash val="solid"/>
           </a:ln>
@@ -4346,7 +4987,7 @@
         </p:nvSpPr>
         <p:spPr>
           <a:xfrm>
-            <a:off x="640080" y="3529584"/>
+            <a:off x="640080" y="2834640"/>
             <a:ext cx="310896" cy="310896"/>
           </a:xfrm>
           <a:prstGeom prst="rect">
@@ -4363,9 +5004,176 @@
               <a:buNone/>
             </a:pPr>
             <a:r>
-              <a:rPr lang="en-US" sz="1050" b="1" dirty="0">
-                <a:solidFill>
-                  <a:srgbClr val="FFFFFF"/>
+              <a:rPr lang="en-US" sz="1000" b="1" dirty="0">
+                <a:solidFill>
+                  <a:srgbClr val="111111"/>
+                </a:solidFill>
+                <a:latin typeface="Pretendard" pitchFamily="34" charset="0"/>
+                <a:ea typeface="Pretendard" pitchFamily="34" charset="-122"/>
+                <a:cs typeface="Pretendard" pitchFamily="34" charset="-120"/>
+              </a:rPr>
+              <a:t>2</a:t>
+            </a:r>
+            <a:endParaRPr lang="en-US" sz="1000" dirty="0"/>
+          </a:p>
+        </p:txBody>
+      </p:sp>
+      <p:sp>
+        <p:nvSpPr>
+          <p:cNvPr id="16" name="Text 14"/>
+          <p:cNvSpPr/>
+          <p:nvPr/>
+        </p:nvSpPr>
+        <p:spPr>
+          <a:xfrm>
+            <a:off x="1188720" y="2743200"/>
+            <a:ext cx="9875520" cy="310896"/>
+          </a:xfrm>
+          <a:prstGeom prst="rect">
+            <a:avLst/>
+          </a:prstGeom>
+          <a:noFill/>
+          <a:ln/>
+        </p:spPr>
+        <p:txBody>
+          <a:bodyPr wrap="square" lIns="0" tIns="0" rIns="0" bIns="0" rtlCol="0" anchor="ctr"/>
+          <a:lstStyle/>
+          <a:p>
+            <a:pPr indent="0" marL="0">
+              <a:buNone/>
+            </a:pPr>
+            <a:r>
+              <a:rPr lang="en-US" sz="1450" dirty="0">
+                <a:solidFill>
+                  <a:srgbClr val="111111"/>
+                </a:solidFill>
+                <a:latin typeface="Pretendard Black" pitchFamily="34" charset="0"/>
+                <a:ea typeface="Pretendard Black" pitchFamily="34" charset="-122"/>
+                <a:cs typeface="Pretendard Black" pitchFamily="34" charset="-120"/>
+              </a:rPr>
+              <a:t>이미지 톤을 통일할 수 있다</a:t>
+            </a:r>
+            <a:endParaRPr lang="en-US" sz="1450" dirty="0"/>
+          </a:p>
+        </p:txBody>
+      </p:sp>
+      <p:sp>
+        <p:nvSpPr>
+          <p:cNvPr id="17" name="Text 15"/>
+          <p:cNvSpPr/>
+          <p:nvPr/>
+        </p:nvSpPr>
+        <p:spPr>
+          <a:xfrm>
+            <a:off x="1188720" y="3054096"/>
+            <a:ext cx="9875520" cy="292608"/>
+          </a:xfrm>
+          <a:prstGeom prst="rect">
+            <a:avLst/>
+          </a:prstGeom>
+          <a:noFill/>
+          <a:ln/>
+        </p:spPr>
+        <p:txBody>
+          <a:bodyPr wrap="square" lIns="0" tIns="0" rIns="0" bIns="0" rtlCol="0" anchor="ctr"/>
+          <a:lstStyle/>
+          <a:p>
+            <a:pPr indent="0" marL="0">
+              <a:buNone/>
+            </a:pPr>
+            <a:r>
+              <a:rPr lang="en-US" sz="1100" dirty="0">
+                <a:solidFill>
+                  <a:srgbClr val="6E6E6E"/>
+                </a:solidFill>
+                <a:latin typeface="Pretendard" pitchFamily="34" charset="0"/>
+                <a:ea typeface="Pretendard" pitchFamily="34" charset="-122"/>
+                <a:cs typeface="Pretendard" pitchFamily="34" charset="-120"/>
+              </a:rPr>
+              <a:t>출처가 다른 이미지들이 한 벌로 보이게 만드는 일</a:t>
+            </a:r>
+            <a:endParaRPr lang="en-US" sz="1100" dirty="0"/>
+          </a:p>
+        </p:txBody>
+      </p:sp>
+      <p:sp>
+        <p:nvSpPr>
+          <p:cNvPr id="18" name="Shape 16"/>
+          <p:cNvSpPr/>
+          <p:nvPr/>
+        </p:nvSpPr>
+        <p:spPr>
+          <a:xfrm>
+            <a:off x="640080" y="3694176"/>
+            <a:ext cx="10911535" cy="7315"/>
+          </a:xfrm>
+          <a:prstGeom prst="rect">
+            <a:avLst/>
+          </a:prstGeom>
+          <a:solidFill>
+            <a:srgbClr val="DCDCDC"/>
+          </a:solidFill>
+          <a:ln w="12700">
+            <a:solidFill>
+              <a:srgbClr val="DCDCDC"/>
+            </a:solidFill>
+            <a:prstDash val="solid"/>
+          </a:ln>
+        </p:spPr>
+      </p:sp>
+      <p:sp>
+        <p:nvSpPr>
+          <p:cNvPr id="19" name="Shape 17"/>
+          <p:cNvSpPr/>
+          <p:nvPr/>
+        </p:nvSpPr>
+        <p:spPr>
+          <a:xfrm>
+            <a:off x="640080" y="3858768"/>
+            <a:ext cx="310896" cy="310896"/>
+          </a:xfrm>
+          <a:prstGeom prst="ellipse">
+            <a:avLst/>
+          </a:prstGeom>
+          <a:solidFill>
+            <a:srgbClr val="FFFFFF"/>
+          </a:solidFill>
+          <a:ln w="12700">
+            <a:solidFill>
+              <a:srgbClr val="111111"/>
+            </a:solidFill>
+            <a:prstDash val="solid"/>
+          </a:ln>
+        </p:spPr>
+      </p:sp>
+      <p:sp>
+        <p:nvSpPr>
+          <p:cNvPr id="20" name="Text 18"/>
+          <p:cNvSpPr/>
+          <p:nvPr/>
+        </p:nvSpPr>
+        <p:spPr>
+          <a:xfrm>
+            <a:off x="640080" y="3858768"/>
+            <a:ext cx="310896" cy="310896"/>
+          </a:xfrm>
+          <a:prstGeom prst="rect">
+            <a:avLst/>
+          </a:prstGeom>
+          <a:noFill/>
+          <a:ln/>
+        </p:spPr>
+        <p:txBody>
+          <a:bodyPr wrap="square" lIns="0" tIns="0" rIns="0" bIns="0" rtlCol="0" anchor="ctr"/>
+          <a:lstStyle/>
+          <a:p>
+            <a:pPr algn="ctr" indent="0" marL="0">
+              <a:buNone/>
+            </a:pPr>
+            <a:r>
+              <a:rPr lang="en-US" sz="1000" b="1" dirty="0">
+                <a:solidFill>
+                  <a:srgbClr val="111111"/>
                 </a:solidFill>
                 <a:latin typeface="Pretendard" pitchFamily="34" charset="0"/>
                 <a:ea typeface="Pretendard" pitchFamily="34" charset="-122"/>
@@ -4373,19 +5181,19 @@
               </a:rPr>
               <a:t>3</a:t>
             </a:r>
-            <a:endParaRPr lang="en-US" sz="1050" dirty="0"/>
-          </a:p>
-        </p:txBody>
-      </p:sp>
-      <p:sp>
-        <p:nvSpPr>
-          <p:cNvPr id="16" name="Text 14"/>
-          <p:cNvSpPr/>
-          <p:nvPr/>
-        </p:nvSpPr>
-        <p:spPr>
-          <a:xfrm>
-            <a:off x="1188720" y="3438144"/>
+            <a:endParaRPr lang="en-US" sz="1000" dirty="0"/>
+          </a:p>
+        </p:txBody>
+      </p:sp>
+      <p:sp>
+        <p:nvSpPr>
+          <p:cNvPr id="21" name="Text 19"/>
+          <p:cNvSpPr/>
+          <p:nvPr/>
+        </p:nvSpPr>
+        <p:spPr>
+          <a:xfrm>
+            <a:off x="1188720" y="3767328"/>
             <a:ext cx="9875520" cy="310896"/>
           </a:xfrm>
           <a:prstGeom prst="rect">
@@ -4402,13 +5210,13 @@
               <a:buNone/>
             </a:pPr>
             <a:r>
-              <a:rPr lang="en-US" sz="1450" b="1" dirty="0">
-                <a:solidFill>
-                  <a:srgbClr val="14161B"/>
-                </a:solidFill>
-                <a:latin typeface="Pretendard" pitchFamily="34" charset="0"/>
-                <a:ea typeface="Pretendard" pitchFamily="34" charset="-122"/>
-                <a:cs typeface="Pretendard" pitchFamily="34" charset="-120"/>
+              <a:rPr lang="en-US" sz="1450" dirty="0">
+                <a:solidFill>
+                  <a:srgbClr val="111111"/>
+                </a:solidFill>
+                <a:latin typeface="Pretendard Black" pitchFamily="34" charset="0"/>
+                <a:ea typeface="Pretendard Black" pitchFamily="34" charset="-122"/>
+                <a:cs typeface="Pretendard Black" pitchFamily="34" charset="-120"/>
               </a:rPr>
               <a:t>이미지와 텍스트의 균형을 잡을 수 있다</a:t>
             </a:r>
@@ -4418,13 +5226,13 @@
       </p:sp>
       <p:sp>
         <p:nvSpPr>
-          <p:cNvPr id="17" name="Text 15"/>
-          <p:cNvSpPr/>
-          <p:nvPr/>
-        </p:nvSpPr>
-        <p:spPr>
-          <a:xfrm>
-            <a:off x="1188720" y="3749040"/>
+          <p:cNvPr id="22" name="Text 20"/>
+          <p:cNvSpPr/>
+          <p:nvPr/>
+        </p:nvSpPr>
+        <p:spPr>
+          <a:xfrm>
+            <a:off x="1188720" y="4078224"/>
             <a:ext cx="9875520" cy="292608"/>
           </a:xfrm>
           <a:prstGeom prst="rect">
@@ -4443,7 +5251,7 @@
             <a:r>
               <a:rPr lang="en-US" sz="1100" dirty="0">
                 <a:solidFill>
-                  <a:srgbClr val="6B7280"/>
+                  <a:srgbClr val="6E6E6E"/>
                 </a:solidFill>
                 <a:latin typeface="Pretendard" pitchFamily="34" charset="0"/>
                 <a:ea typeface="Pretendard" pitchFamily="34" charset="-122"/>
@@ -4457,32 +5265,57 @@
       </p:sp>
       <p:sp>
         <p:nvSpPr>
-          <p:cNvPr id="18" name="Text 16"/>
-          <p:cNvSpPr/>
-          <p:nvPr/>
-        </p:nvSpPr>
-        <p:spPr>
-          <a:xfrm>
-            <a:off x="640080" y="6345936"/>
-            <a:ext cx="7772400" cy="256032"/>
-          </a:xfrm>
-          <a:prstGeom prst="rect">
-            <a:avLst/>
-          </a:prstGeom>
-          <a:noFill/>
-          <a:ln/>
-        </p:spPr>
-        <p:txBody>
-          <a:bodyPr wrap="square" lIns="0" tIns="0" rIns="0" bIns="0" rtlCol="0" anchor="ctr"/>
-          <a:lstStyle/>
-          <a:p>
-            <a:pPr indent="0" marL="0">
-              <a:buNone/>
-            </a:pPr>
-            <a:r>
-              <a:rPr lang="en-US" sz="900" dirty="0">
-                <a:solidFill>
-                  <a:srgbClr val="9AA0AA"/>
+          <p:cNvPr id="23" name="Shape 21"/>
+          <p:cNvSpPr/>
+          <p:nvPr/>
+        </p:nvSpPr>
+        <p:spPr>
+          <a:xfrm>
+            <a:off x="640080" y="6291072"/>
+            <a:ext cx="10911535" cy="7315"/>
+          </a:xfrm>
+          <a:prstGeom prst="rect">
+            <a:avLst/>
+          </a:prstGeom>
+          <a:solidFill>
+            <a:srgbClr val="DCDCDC"/>
+          </a:solidFill>
+          <a:ln w="12700">
+            <a:solidFill>
+              <a:srgbClr val="DCDCDC"/>
+            </a:solidFill>
+            <a:prstDash val="solid"/>
+          </a:ln>
+        </p:spPr>
+      </p:sp>
+      <p:sp>
+        <p:nvSpPr>
+          <p:cNvPr id="24" name="Text 22"/>
+          <p:cNvSpPr/>
+          <p:nvPr/>
+        </p:nvSpPr>
+        <p:spPr>
+          <a:xfrm>
+            <a:off x="640080" y="6382512"/>
+            <a:ext cx="7772400" cy="237744"/>
+          </a:xfrm>
+          <a:prstGeom prst="rect">
+            <a:avLst/>
+          </a:prstGeom>
+          <a:noFill/>
+          <a:ln/>
+        </p:spPr>
+        <p:txBody>
+          <a:bodyPr wrap="square" lIns="0" tIns="0" rIns="0" bIns="0" rtlCol="0" anchor="ctr"/>
+          <a:lstStyle/>
+          <a:p>
+            <a:pPr indent="0" marL="0">
+              <a:buNone/>
+            </a:pPr>
+            <a:r>
+              <a:rPr lang="en-US" sz="850" spc="40" kern="0" dirty="0">
+                <a:solidFill>
+                  <a:srgbClr val="9B9B9B"/>
                 </a:solidFill>
                 <a:latin typeface="Pretendard" pitchFamily="34" charset="0"/>
                 <a:ea typeface="Pretendard" pitchFamily="34" charset="-122"/>
@@ -4490,20 +5323,20 @@
               </a:rPr>
               <a:t>포트폴리오제작 · 11주차 편집디자인 실습 Ⅱ</a:t>
             </a:r>
-            <a:endParaRPr lang="en-US" sz="900" dirty="0"/>
-          </a:p>
-        </p:txBody>
-      </p:sp>
-      <p:sp>
-        <p:nvSpPr>
-          <p:cNvPr id="19" name="Text 17"/>
-          <p:cNvSpPr/>
-          <p:nvPr/>
-        </p:nvSpPr>
-        <p:spPr>
-          <a:xfrm>
-            <a:off x="10454335" y="6345936"/>
-            <a:ext cx="1097280" cy="256032"/>
+            <a:endParaRPr lang="en-US" sz="850" dirty="0"/>
+          </a:p>
+        </p:txBody>
+      </p:sp>
+      <p:sp>
+        <p:nvSpPr>
+          <p:cNvPr id="25" name="Text 23"/>
+          <p:cNvSpPr/>
+          <p:nvPr/>
+        </p:nvSpPr>
+        <p:spPr>
+          <a:xfrm>
+            <a:off x="10271455" y="6382512"/>
+            <a:ext cx="1280160" cy="237744"/>
           </a:xfrm>
           <a:prstGeom prst="rect">
             <a:avLst/>
@@ -4519,17 +5352,17 @@
               <a:buNone/>
             </a:pPr>
             <a:r>
-              <a:rPr lang="en-US" sz="900" dirty="0">
-                <a:solidFill>
-                  <a:srgbClr val="9AA0AA"/>
-                </a:solidFill>
-                <a:latin typeface="Pretendard" pitchFamily="34" charset="0"/>
-                <a:ea typeface="Pretendard" pitchFamily="34" charset="-122"/>
-                <a:cs typeface="Pretendard" pitchFamily="34" charset="-120"/>
-              </a:rPr>
-              <a:t>02</a:t>
-            </a:r>
-            <a:endParaRPr lang="en-US" sz="900" dirty="0"/>
+              <a:rPr lang="en-US" sz="850" spc="140" kern="0" dirty="0">
+                <a:solidFill>
+                  <a:srgbClr val="9B9B9B"/>
+                </a:solidFill>
+                <a:latin typeface="Pretendard" pitchFamily="34" charset="0"/>
+                <a:ea typeface="Pretendard" pitchFamily="34" charset="-122"/>
+                <a:cs typeface="Pretendard" pitchFamily="34" charset="-120"/>
+              </a:rPr>
+              <a:t>P.02</a:t>
+            </a:r>
+            <a:endParaRPr lang="en-US" sz="850" dirty="0"/>
           </a:p>
         </p:txBody>
       </p:sp>
@@ -4547,7 +5380,7 @@
     <p:bg>
       <p:bgPr>
         <a:solidFill>
-          <a:srgbClr val="14161B"/>
+          <a:srgbClr val="111111"/>
         </a:solidFill>
       </p:bgPr>
     </p:bg>
@@ -4573,8 +5406,86 @@
         </p:nvSpPr>
         <p:spPr>
           <a:xfrm>
-            <a:off x="7711135" y="914400"/>
-            <a:ext cx="3840480" cy="5029200"/>
+            <a:off x="640080" y="274320"/>
+            <a:ext cx="3657600" cy="219456"/>
+          </a:xfrm>
+          <a:prstGeom prst="rect">
+            <a:avLst/>
+          </a:prstGeom>
+          <a:noFill/>
+          <a:ln/>
+        </p:spPr>
+        <p:txBody>
+          <a:bodyPr wrap="square" lIns="0" tIns="0" rIns="0" bIns="0" rtlCol="0" anchor="ctr"/>
+          <a:lstStyle/>
+          <a:p>
+            <a:pPr indent="0" marL="0">
+              <a:buNone/>
+            </a:pPr>
+            <a:r>
+              <a:rPr lang="en-US" sz="900" spc="120" kern="0" dirty="0">
+                <a:solidFill>
+                  <a:srgbClr val="9A9A9A"/>
+                </a:solidFill>
+                <a:latin typeface="Pretendard" pitchFamily="34" charset="0"/>
+                <a:ea typeface="Pretendard" pitchFamily="34" charset="-122"/>
+                <a:cs typeface="Pretendard" pitchFamily="34" charset="-120"/>
+              </a:rPr>
+              <a:t>포트폴리오제작</a:t>
+            </a:r>
+            <a:endParaRPr lang="en-US" sz="900" dirty="0"/>
+          </a:p>
+        </p:txBody>
+      </p:sp>
+      <p:sp>
+        <p:nvSpPr>
+          <p:cNvPr id="3" name="Text 1"/>
+          <p:cNvSpPr/>
+          <p:nvPr/>
+        </p:nvSpPr>
+        <p:spPr>
+          <a:xfrm>
+            <a:off x="4480560" y="274320"/>
+            <a:ext cx="4572000" cy="219456"/>
+          </a:xfrm>
+          <a:prstGeom prst="rect">
+            <a:avLst/>
+          </a:prstGeom>
+          <a:noFill/>
+          <a:ln/>
+        </p:spPr>
+        <p:txBody>
+          <a:bodyPr wrap="square" lIns="0" tIns="0" rIns="0" bIns="0" rtlCol="0" anchor="ctr"/>
+          <a:lstStyle/>
+          <a:p>
+            <a:pPr algn="ctr" indent="0" marL="0">
+              <a:buNone/>
+            </a:pPr>
+            <a:r>
+              <a:rPr lang="en-US" sz="900" spc="120" kern="0" dirty="0">
+                <a:solidFill>
+                  <a:srgbClr val="9A9A9A"/>
+                </a:solidFill>
+                <a:latin typeface="Pretendard" pitchFamily="34" charset="0"/>
+                <a:ea typeface="Pretendard" pitchFamily="34" charset="-122"/>
+                <a:cs typeface="Pretendard" pitchFamily="34" charset="-120"/>
+              </a:rPr>
+              <a:t>PHASE 3 완성과 발표</a:t>
+            </a:r>
+            <a:endParaRPr lang="en-US" sz="900" dirty="0"/>
+          </a:p>
+        </p:txBody>
+      </p:sp>
+      <p:sp>
+        <p:nvSpPr>
+          <p:cNvPr id="4" name="Text 2"/>
+          <p:cNvSpPr/>
+          <p:nvPr/>
+        </p:nvSpPr>
+        <p:spPr>
+          <a:xfrm>
+            <a:off x="8808415" y="274320"/>
+            <a:ext cx="2743200" cy="219456"/>
           </a:xfrm>
           <a:prstGeom prst="rect">
             <a:avLst/>
@@ -4590,48 +5501,181 @@
               <a:buNone/>
             </a:pPr>
             <a:r>
-              <a:rPr lang="en-US" sz="25500" dirty="0">
-                <a:solidFill>
-                  <a:srgbClr val="262A33"/>
-                </a:solidFill>
-                <a:latin typeface="Pretendard Thin" pitchFamily="34" charset="0"/>
-                <a:ea typeface="Pretendard Thin" pitchFamily="34" charset="-122"/>
-                <a:cs typeface="Pretendard Thin" pitchFamily="34" charset="-120"/>
+              <a:rPr lang="en-US" sz="900" spc="200" kern="0" dirty="0">
+                <a:solidFill>
+                  <a:srgbClr val="9A9A9A"/>
+                </a:solidFill>
+                <a:latin typeface="Pretendard" pitchFamily="34" charset="0"/>
+                <a:ea typeface="Pretendard" pitchFamily="34" charset="-122"/>
+                <a:cs typeface="Pretendard" pitchFamily="34" charset="-120"/>
+              </a:rPr>
+              <a:t>WEEK 11</a:t>
+            </a:r>
+            <a:endParaRPr lang="en-US" sz="900" dirty="0"/>
+          </a:p>
+        </p:txBody>
+      </p:sp>
+      <p:sp>
+        <p:nvSpPr>
+          <p:cNvPr id="5" name="Shape 3"/>
+          <p:cNvSpPr/>
+          <p:nvPr/>
+        </p:nvSpPr>
+        <p:spPr>
+          <a:xfrm>
+            <a:off x="640080" y="548640"/>
+            <a:ext cx="10911535" cy="7315"/>
+          </a:xfrm>
+          <a:prstGeom prst="rect">
+            <a:avLst/>
+          </a:prstGeom>
+          <a:solidFill>
+            <a:srgbClr val="333333"/>
+          </a:solidFill>
+          <a:ln w="12700">
+            <a:solidFill>
+              <a:srgbClr val="333333"/>
+            </a:solidFill>
+            <a:prstDash val="solid"/>
+          </a:ln>
+        </p:spPr>
+      </p:sp>
+      <p:sp>
+        <p:nvSpPr>
+          <p:cNvPr id="6" name="Text 4"/>
+          <p:cNvSpPr/>
+          <p:nvPr/>
+        </p:nvSpPr>
+        <p:spPr>
+          <a:xfrm>
+            <a:off x="7345375" y="1737360"/>
+            <a:ext cx="4206240" cy="3291840"/>
+          </a:xfrm>
+          <a:prstGeom prst="rect">
+            <a:avLst/>
+          </a:prstGeom>
+          <a:noFill/>
+          <a:ln/>
+        </p:spPr>
+        <p:txBody>
+          <a:bodyPr wrap="square" lIns="0" tIns="0" rIns="0" bIns="0" rtlCol="0" anchor="ctr"/>
+          <a:lstStyle/>
+          <a:p>
+            <a:pPr algn="r" indent="0" marL="0">
+              <a:buNone/>
+            </a:pPr>
+            <a:r>
+              <a:rPr lang="en-US" sz="20000" dirty="0">
+                <a:solidFill>
+                  <a:srgbClr val="1B1B1B"/>
+                </a:solidFill>
+                <a:latin typeface="Pretendard Black" pitchFamily="34" charset="0"/>
+                <a:ea typeface="Pretendard Black" pitchFamily="34" charset="-122"/>
+                <a:cs typeface="Pretendard Black" pitchFamily="34" charset="-120"/>
               </a:rPr>
               <a:t>01</a:t>
             </a:r>
-            <a:endParaRPr lang="en-US" sz="25500" dirty="0"/>
-          </a:p>
-        </p:txBody>
-      </p:sp>
-      <p:sp>
-        <p:nvSpPr>
-          <p:cNvPr id="3" name="Text 1"/>
-          <p:cNvSpPr/>
-          <p:nvPr/>
-        </p:nvSpPr>
-        <p:spPr>
-          <a:xfrm>
-            <a:off x="640080" y="2487168"/>
-            <a:ext cx="7315200" cy="274320"/>
-          </a:xfrm>
-          <a:prstGeom prst="rect">
-            <a:avLst/>
-          </a:prstGeom>
-          <a:noFill/>
-          <a:ln/>
-        </p:spPr>
-        <p:txBody>
-          <a:bodyPr wrap="square" lIns="0" tIns="0" rIns="0" bIns="0" rtlCol="0" anchor="ctr"/>
-          <a:lstStyle/>
-          <a:p>
-            <a:pPr indent="0" marL="0">
-              <a:buNone/>
-            </a:pPr>
-            <a:r>
-              <a:rPr lang="en-US" sz="1100" b="1" spc="200" kern="0" dirty="0">
-                <a:solidFill>
-                  <a:srgbClr val="FF4A1C"/>
+            <a:endParaRPr lang="en-US" sz="20000" dirty="0"/>
+          </a:p>
+        </p:txBody>
+      </p:sp>
+      <p:sp>
+        <p:nvSpPr>
+          <p:cNvPr id="7" name="Shape 5"/>
+          <p:cNvSpPr/>
+          <p:nvPr/>
+        </p:nvSpPr>
+        <p:spPr>
+          <a:xfrm>
+            <a:off x="941832" y="1371600"/>
+            <a:ext cx="0" cy="603504"/>
+          </a:xfrm>
+          <a:prstGeom prst="line">
+            <a:avLst/>
+          </a:prstGeom>
+          <a:noFill/>
+          <a:ln w="15875">
+            <a:solidFill>
+              <a:srgbClr val="FFFFFF"/>
+            </a:solidFill>
+            <a:prstDash val="solid"/>
+          </a:ln>
+        </p:spPr>
+      </p:sp>
+      <p:sp>
+        <p:nvSpPr>
+          <p:cNvPr id="8" name="Shape 6"/>
+          <p:cNvSpPr/>
+          <p:nvPr/>
+        </p:nvSpPr>
+        <p:spPr>
+          <a:xfrm>
+            <a:off x="640080" y="1733702"/>
+            <a:ext cx="301752" cy="241402"/>
+          </a:xfrm>
+          <a:prstGeom prst="line">
+            <a:avLst/>
+          </a:prstGeom>
+          <a:noFill/>
+          <a:ln w="15875">
+            <a:solidFill>
+              <a:srgbClr val="FFFFFF"/>
+            </a:solidFill>
+            <a:prstDash val="solid"/>
+          </a:ln>
+        </p:spPr>
+      </p:sp>
+      <p:sp>
+        <p:nvSpPr>
+          <p:cNvPr id="9" name="Shape 7"/>
+          <p:cNvSpPr/>
+          <p:nvPr/>
+        </p:nvSpPr>
+        <p:spPr>
+          <a:xfrm flipV="1">
+            <a:off x="941832" y="1733702"/>
+            <a:ext cx="301752" cy="241402"/>
+          </a:xfrm>
+          <a:prstGeom prst="line">
+            <a:avLst/>
+          </a:prstGeom>
+          <a:noFill/>
+          <a:ln w="15875">
+            <a:solidFill>
+              <a:srgbClr val="FFFFFF"/>
+            </a:solidFill>
+            <a:prstDash val="solid"/>
+          </a:ln>
+        </p:spPr>
+      </p:sp>
+      <p:sp>
+        <p:nvSpPr>
+          <p:cNvPr id="10" name="Text 8"/>
+          <p:cNvSpPr/>
+          <p:nvPr/>
+        </p:nvSpPr>
+        <p:spPr>
+          <a:xfrm>
+            <a:off x="640080" y="2615184"/>
+            <a:ext cx="7863840" cy="256032"/>
+          </a:xfrm>
+          <a:prstGeom prst="rect">
+            <a:avLst/>
+          </a:prstGeom>
+          <a:noFill/>
+          <a:ln/>
+        </p:spPr>
+        <p:txBody>
+          <a:bodyPr wrap="square" lIns="0" tIns="0" rIns="0" bIns="0" rtlCol="0" anchor="ctr"/>
+          <a:lstStyle/>
+          <a:p>
+            <a:pPr indent="0" marL="0">
+              <a:buNone/>
+            </a:pPr>
+            <a:r>
+              <a:rPr lang="en-US" sz="950" spc="280" kern="0" dirty="0">
+                <a:solidFill>
+                  <a:srgbClr val="9A9A9A"/>
                 </a:solidFill>
                 <a:latin typeface="Pretendard" pitchFamily="34" charset="0"/>
                 <a:ea typeface="Pretendard" pitchFamily="34" charset="-122"/>
@@ -4639,59 +5683,84 @@
               </a:rPr>
               <a:t>PART 01</a:t>
             </a:r>
-            <a:endParaRPr lang="en-US" sz="1100" dirty="0"/>
-          </a:p>
-        </p:txBody>
-      </p:sp>
-      <p:sp>
-        <p:nvSpPr>
-          <p:cNvPr id="4" name="Text 2"/>
-          <p:cNvSpPr/>
-          <p:nvPr/>
-        </p:nvSpPr>
-        <p:spPr>
-          <a:xfrm>
-            <a:off x="640080" y="2834640"/>
-            <a:ext cx="7315200" cy="731520"/>
-          </a:xfrm>
-          <a:prstGeom prst="rect">
-            <a:avLst/>
-          </a:prstGeom>
-          <a:noFill/>
-          <a:ln/>
-        </p:spPr>
-        <p:txBody>
-          <a:bodyPr wrap="square" lIns="0" tIns="0" rIns="0" bIns="0" rtlCol="0" anchor="ctr"/>
-          <a:lstStyle/>
-          <a:p>
-            <a:pPr indent="0" marL="0">
-              <a:buNone/>
-            </a:pPr>
-            <a:r>
-              <a:rPr lang="en-US" sz="4200" b="1" dirty="0">
+            <a:endParaRPr lang="en-US" sz="950" dirty="0"/>
+          </a:p>
+        </p:txBody>
+      </p:sp>
+      <p:sp>
+        <p:nvSpPr>
+          <p:cNvPr id="11" name="Text 9"/>
+          <p:cNvSpPr/>
+          <p:nvPr/>
+        </p:nvSpPr>
+        <p:spPr>
+          <a:xfrm>
+            <a:off x="640080" y="2889504"/>
+            <a:ext cx="7863840" cy="786384"/>
+          </a:xfrm>
+          <a:prstGeom prst="rect">
+            <a:avLst/>
+          </a:prstGeom>
+          <a:noFill/>
+          <a:ln/>
+        </p:spPr>
+        <p:txBody>
+          <a:bodyPr wrap="square" lIns="0" tIns="0" rIns="0" bIns="0" rtlCol="0" anchor="ctr"/>
+          <a:lstStyle/>
+          <a:p>
+            <a:pPr indent="0" marL="0">
+              <a:buNone/>
+            </a:pPr>
+            <a:r>
+              <a:rPr lang="en-US" sz="4600" dirty="0">
                 <a:solidFill>
                   <a:srgbClr val="FFFFFF"/>
                 </a:solidFill>
-                <a:latin typeface="Pretendard" pitchFamily="34" charset="0"/>
-                <a:ea typeface="Pretendard" pitchFamily="34" charset="-122"/>
-                <a:cs typeface="Pretendard" pitchFamily="34" charset="-120"/>
+                <a:latin typeface="Pretendard Black" pitchFamily="34" charset="0"/>
+                <a:ea typeface="Pretendard Black" pitchFamily="34" charset="-122"/>
+                <a:cs typeface="Pretendard Black" pitchFamily="34" charset="-120"/>
               </a:rPr>
               <a:t>컬러 적용</a:t>
             </a:r>
-            <a:endParaRPr lang="en-US" sz="4200" dirty="0"/>
-          </a:p>
-        </p:txBody>
-      </p:sp>
-      <p:sp>
-        <p:nvSpPr>
-          <p:cNvPr id="5" name="Text 3"/>
-          <p:cNvSpPr/>
-          <p:nvPr/>
-        </p:nvSpPr>
-        <p:spPr>
-          <a:xfrm>
-            <a:off x="640080" y="3657600"/>
-            <a:ext cx="6766560" cy="640080"/>
+            <a:endParaRPr lang="en-US" sz="4600" dirty="0"/>
+          </a:p>
+        </p:txBody>
+      </p:sp>
+      <p:sp>
+        <p:nvSpPr>
+          <p:cNvPr id="12" name="Shape 10"/>
+          <p:cNvSpPr/>
+          <p:nvPr/>
+        </p:nvSpPr>
+        <p:spPr>
+          <a:xfrm>
+            <a:off x="640080" y="3803904"/>
+            <a:ext cx="2194560" cy="7315"/>
+          </a:xfrm>
+          <a:prstGeom prst="rect">
+            <a:avLst/>
+          </a:prstGeom>
+          <a:solidFill>
+            <a:srgbClr val="FFFFFF"/>
+          </a:solidFill>
+          <a:ln w="12700">
+            <a:solidFill>
+              <a:srgbClr val="FFFFFF"/>
+            </a:solidFill>
+            <a:prstDash val="solid"/>
+          </a:ln>
+        </p:spPr>
+      </p:sp>
+      <p:sp>
+        <p:nvSpPr>
+          <p:cNvPr id="13" name="Text 11"/>
+          <p:cNvSpPr/>
+          <p:nvPr/>
+        </p:nvSpPr>
+        <p:spPr>
+          <a:xfrm>
+            <a:off x="640080" y="4005072"/>
+            <a:ext cx="6949440" cy="731520"/>
           </a:xfrm>
           <a:prstGeom prst="rect">
             <a:avLst/>
@@ -4705,22 +5774,61 @@
           <a:p>
             <a:pPr indent="0" marL="0">
               <a:lnSpc>
-                <a:spcPct val="130000"/>
+                <a:spcPct val="134000"/>
               </a:lnSpc>
               <a:buNone/>
             </a:pPr>
             <a:r>
               <a:rPr lang="en-US" sz="1350" dirty="0">
                 <a:solidFill>
-                  <a:srgbClr val="AEB4BF"/>
-                </a:solidFill>
-                <a:latin typeface="Pretendard" pitchFamily="34" charset="0"/>
-                <a:ea typeface="Pretendard" pitchFamily="34" charset="-122"/>
-                <a:cs typeface="Pretendard" pitchFamily="34" charset="-120"/>
+                  <a:srgbClr val="B8B8B8"/>
+                </a:solidFill>
+                <a:latin typeface="Pretendard Light" pitchFamily="34" charset="0"/>
+                <a:ea typeface="Pretendard Light" pitchFamily="34" charset="-122"/>
+                <a:cs typeface="Pretendard Light" pitchFamily="34" charset="-120"/>
               </a:rPr>
               <a:t>20분. 정한 규칙을 지키는 것이 전부입니다.</a:t>
             </a:r>
             <a:endParaRPr lang="en-US" sz="1350" dirty="0"/>
+          </a:p>
+        </p:txBody>
+      </p:sp>
+      <p:sp>
+        <p:nvSpPr>
+          <p:cNvPr id="14" name="Text 12"/>
+          <p:cNvSpPr/>
+          <p:nvPr/>
+        </p:nvSpPr>
+        <p:spPr>
+          <a:xfrm rot="16200000">
+            <a:off x="10436047" y="3291840"/>
+            <a:ext cx="2743200" cy="274320"/>
+          </a:xfrm>
+          <a:prstGeom prst="rect">
+            <a:avLst/>
+          </a:prstGeom>
+          <a:noFill/>
+          <a:ln/>
+        </p:spPr>
+        <p:txBody>
+          <a:bodyPr wrap="square" lIns="0" tIns="0" rIns="0" bIns="0" rtlCol="0" anchor="ctr"/>
+          <a:lstStyle/>
+          <a:p>
+            <a:pPr algn="ctr" indent="0" marL="0">
+              <a:buNone/>
+            </a:pPr>
+            <a:r>
+              <a:rPr lang="en-US" sz="850" spc="260" kern="0" dirty="0">
+                <a:solidFill>
+                  <a:srgbClr val="7A7A7A"/>
+                </a:solidFill>
+                <a:latin typeface="Pretendard" pitchFamily="34" charset="0"/>
+                <a:ea typeface="Pretendard" pitchFamily="34" charset="-122"/>
+                <a:cs typeface="Pretendard" pitchFamily="34" charset="-120"/>
+              </a:rPr>
+              <a:t>SECTION 01</a:t>
+            </a:r>
+            <a:endParaRPr lang="en-US" sz="850" dirty="0"/>
           </a:p>
         </p:txBody>
       </p:sp>
@@ -4764,34 +5872,34 @@
         </p:nvSpPr>
         <p:spPr>
           <a:xfrm>
-            <a:off x="640080" y="566928"/>
-            <a:ext cx="10911535" cy="237744"/>
-          </a:xfrm>
-          <a:prstGeom prst="rect">
-            <a:avLst/>
-          </a:prstGeom>
-          <a:noFill/>
-          <a:ln/>
-        </p:spPr>
-        <p:txBody>
-          <a:bodyPr wrap="square" lIns="0" tIns="0" rIns="0" bIns="0" rtlCol="0" anchor="ctr"/>
-          <a:lstStyle/>
-          <a:p>
-            <a:pPr indent="0" marL="0">
-              <a:buNone/>
-            </a:pPr>
-            <a:r>
-              <a:rPr lang="en-US" sz="1100" b="1" spc="140" kern="0" dirty="0">
-                <a:solidFill>
-                  <a:srgbClr val="FF4A1C"/>
-                </a:solidFill>
-                <a:latin typeface="Pretendard" pitchFamily="34" charset="0"/>
-                <a:ea typeface="Pretendard" pitchFamily="34" charset="-122"/>
-                <a:cs typeface="Pretendard" pitchFamily="34" charset="-120"/>
-              </a:rPr>
-              <a:t>RULE</a:t>
-            </a:r>
-            <a:endParaRPr lang="en-US" sz="1100" dirty="0"/>
+            <a:off x="640080" y="274320"/>
+            <a:ext cx="3657600" cy="219456"/>
+          </a:xfrm>
+          <a:prstGeom prst="rect">
+            <a:avLst/>
+          </a:prstGeom>
+          <a:noFill/>
+          <a:ln/>
+        </p:spPr>
+        <p:txBody>
+          <a:bodyPr wrap="square" lIns="0" tIns="0" rIns="0" bIns="0" rtlCol="0" anchor="ctr"/>
+          <a:lstStyle/>
+          <a:p>
+            <a:pPr indent="0" marL="0">
+              <a:buNone/>
+            </a:pPr>
+            <a:r>
+              <a:rPr lang="en-US" sz="900" spc="120" kern="0" dirty="0">
+                <a:solidFill>
+                  <a:srgbClr val="8A8A8A"/>
+                </a:solidFill>
+                <a:latin typeface="Pretendard" pitchFamily="34" charset="0"/>
+                <a:ea typeface="Pretendard" pitchFamily="34" charset="-122"/>
+                <a:cs typeface="Pretendard" pitchFamily="34" charset="-120"/>
+              </a:rPr>
+              <a:t>포트폴리오제작</a:t>
+            </a:r>
+            <a:endParaRPr lang="en-US" sz="900" dirty="0"/>
           </a:p>
         </p:txBody>
       </p:sp>
@@ -4803,34 +5911,34 @@
         </p:nvSpPr>
         <p:spPr>
           <a:xfrm>
-            <a:off x="640080" y="859536"/>
-            <a:ext cx="10911535" cy="512064"/>
-          </a:xfrm>
-          <a:prstGeom prst="rect">
-            <a:avLst/>
-          </a:prstGeom>
-          <a:noFill/>
-          <a:ln/>
-        </p:spPr>
-        <p:txBody>
-          <a:bodyPr wrap="square" lIns="0" tIns="0" rIns="0" bIns="0" rtlCol="0" anchor="ctr"/>
-          <a:lstStyle/>
-          <a:p>
-            <a:pPr indent="0" marL="0">
-              <a:buNone/>
-            </a:pPr>
-            <a:r>
-              <a:rPr lang="en-US" sz="2800" b="1" dirty="0">
-                <a:solidFill>
-                  <a:srgbClr val="14161B"/>
-                </a:solidFill>
-                <a:latin typeface="Pretendard" pitchFamily="34" charset="0"/>
-                <a:ea typeface="Pretendard" pitchFamily="34" charset="-122"/>
-                <a:cs typeface="Pretendard" pitchFamily="34" charset="-120"/>
-              </a:rPr>
-              <a:t>컬러 적용 세 원칙</a:t>
-            </a:r>
-            <a:endParaRPr lang="en-US" sz="2800" dirty="0"/>
+            <a:off x="4480560" y="274320"/>
+            <a:ext cx="4572000" cy="219456"/>
+          </a:xfrm>
+          <a:prstGeom prst="rect">
+            <a:avLst/>
+          </a:prstGeom>
+          <a:noFill/>
+          <a:ln/>
+        </p:spPr>
+        <p:txBody>
+          <a:bodyPr wrap="square" lIns="0" tIns="0" rIns="0" bIns="0" rtlCol="0" anchor="ctr"/>
+          <a:lstStyle/>
+          <a:p>
+            <a:pPr algn="ctr" indent="0" marL="0">
+              <a:buNone/>
+            </a:pPr>
+            <a:r>
+              <a:rPr lang="en-US" sz="900" spc="120" kern="0" dirty="0">
+                <a:solidFill>
+                  <a:srgbClr val="8A8A8A"/>
+                </a:solidFill>
+                <a:latin typeface="Pretendard" pitchFamily="34" charset="0"/>
+                <a:ea typeface="Pretendard" pitchFamily="34" charset="-122"/>
+                <a:cs typeface="Pretendard" pitchFamily="34" charset="-120"/>
+              </a:rPr>
+              <a:t>PHASE 3 완성과 발표</a:t>
+            </a:r>
+            <a:endParaRPr lang="en-US" sz="900" dirty="0"/>
           </a:p>
         </p:txBody>
       </p:sp>
@@ -4842,34 +5950,34 @@
         </p:nvSpPr>
         <p:spPr>
           <a:xfrm>
-            <a:off x="640080" y="1371600"/>
-            <a:ext cx="10911535" cy="237744"/>
-          </a:xfrm>
-          <a:prstGeom prst="rect">
-            <a:avLst/>
-          </a:prstGeom>
-          <a:noFill/>
-          <a:ln/>
-        </p:spPr>
-        <p:txBody>
-          <a:bodyPr wrap="square" lIns="0" tIns="0" rIns="0" bIns="0" rtlCol="0" anchor="ctr"/>
-          <a:lstStyle/>
-          <a:p>
-            <a:pPr indent="0" marL="0">
-              <a:buNone/>
-            </a:pPr>
-            <a:r>
-              <a:rPr lang="en-US" sz="1200" dirty="0">
-                <a:solidFill>
-                  <a:srgbClr val="6B7280"/>
-                </a:solidFill>
-                <a:latin typeface="Pretendard" pitchFamily="34" charset="0"/>
-                <a:ea typeface="Pretendard" pitchFamily="34" charset="-122"/>
-                <a:cs typeface="Pretendard" pitchFamily="34" charset="-120"/>
-              </a:rPr>
-              <a:t>지키기 어려운 것이 아니라 잊기 쉬운 것들입니다.</a:t>
-            </a:r>
-            <a:endParaRPr lang="en-US" sz="1200" dirty="0"/>
+            <a:off x="8808415" y="274320"/>
+            <a:ext cx="2743200" cy="219456"/>
+          </a:xfrm>
+          <a:prstGeom prst="rect">
+            <a:avLst/>
+          </a:prstGeom>
+          <a:noFill/>
+          <a:ln/>
+        </p:spPr>
+        <p:txBody>
+          <a:bodyPr wrap="square" lIns="0" tIns="0" rIns="0" bIns="0" rtlCol="0" anchor="ctr"/>
+          <a:lstStyle/>
+          <a:p>
+            <a:pPr algn="r" indent="0" marL="0">
+              <a:buNone/>
+            </a:pPr>
+            <a:r>
+              <a:rPr lang="en-US" sz="900" spc="200" kern="0" dirty="0">
+                <a:solidFill>
+                  <a:srgbClr val="8A8A8A"/>
+                </a:solidFill>
+                <a:latin typeface="Pretendard" pitchFamily="34" charset="0"/>
+                <a:ea typeface="Pretendard" pitchFamily="34" charset="-122"/>
+                <a:cs typeface="Pretendard" pitchFamily="34" charset="-120"/>
+              </a:rPr>
+              <a:t>WEEK 11</a:t>
+            </a:r>
+            <a:endParaRPr lang="en-US" sz="900" dirty="0"/>
           </a:p>
         </p:txBody>
       </p:sp>
@@ -4881,20 +5989,18 @@
         </p:nvSpPr>
         <p:spPr>
           <a:xfrm>
-            <a:off x="640080" y="1737360"/>
-            <a:ext cx="3393338" cy="3035808"/>
-          </a:xfrm>
-          <a:prstGeom prst="roundRect">
-            <a:avLst>
-              <a:gd name="adj" fmla="val 2410"/>
-            </a:avLst>
+            <a:off x="640080" y="548640"/>
+            <a:ext cx="10911535" cy="7315"/>
+          </a:xfrm>
+          <a:prstGeom prst="rect">
+            <a:avLst/>
           </a:prstGeom>
           <a:solidFill>
-            <a:srgbClr val="F4F5F7"/>
+            <a:srgbClr val="DCDCDC"/>
           </a:solidFill>
           <a:ln w="12700">
             <a:solidFill>
-              <a:srgbClr val="E4E6EB"/>
+              <a:srgbClr val="DCDCDC"/>
             </a:solidFill>
             <a:prstDash val="solid"/>
           </a:ln>
@@ -4902,26 +6008,141 @@
       </p:sp>
       <p:sp>
         <p:nvSpPr>
-          <p:cNvPr id="6" name="Shape 4"/>
-          <p:cNvSpPr/>
-          <p:nvPr/>
-        </p:nvSpPr>
-        <p:spPr>
-          <a:xfrm>
-            <a:off x="1024128" y="2011680"/>
-            <a:ext cx="365760" cy="365760"/>
-          </a:xfrm>
-          <a:prstGeom prst="roundRect">
-            <a:avLst>
-              <a:gd name="adj" fmla="val 15000"/>
-            </a:avLst>
+          <p:cNvPr id="6" name="Text 4"/>
+          <p:cNvSpPr/>
+          <p:nvPr/>
+        </p:nvSpPr>
+        <p:spPr>
+          <a:xfrm>
+            <a:off x="640080" y="640080"/>
+            <a:ext cx="10911535" cy="219456"/>
+          </a:xfrm>
+          <a:prstGeom prst="rect">
+            <a:avLst/>
+          </a:prstGeom>
+          <a:noFill/>
+          <a:ln/>
+        </p:spPr>
+        <p:txBody>
+          <a:bodyPr wrap="square" lIns="0" tIns="0" rIns="0" bIns="0" rtlCol="0" anchor="ctr"/>
+          <a:lstStyle/>
+          <a:p>
+            <a:pPr indent="0" marL="0">
+              <a:buNone/>
+            </a:pPr>
+            <a:r>
+              <a:rPr lang="en-US" sz="950" spc="260" kern="0" dirty="0">
+                <a:solidFill>
+                  <a:srgbClr val="8A8A8A"/>
+                </a:solidFill>
+                <a:latin typeface="Pretendard" pitchFamily="34" charset="0"/>
+                <a:ea typeface="Pretendard" pitchFamily="34" charset="-122"/>
+                <a:cs typeface="Pretendard" pitchFamily="34" charset="-120"/>
+              </a:rPr>
+              <a:t>RULE</a:t>
+            </a:r>
+            <a:endParaRPr lang="en-US" sz="950" dirty="0"/>
+          </a:p>
+        </p:txBody>
+      </p:sp>
+      <p:sp>
+        <p:nvSpPr>
+          <p:cNvPr id="7" name="Text 5"/>
+          <p:cNvSpPr/>
+          <p:nvPr/>
+        </p:nvSpPr>
+        <p:spPr>
+          <a:xfrm>
+            <a:off x="640080" y="859536"/>
+            <a:ext cx="10911535" cy="475488"/>
+          </a:xfrm>
+          <a:prstGeom prst="rect">
+            <a:avLst/>
+          </a:prstGeom>
+          <a:noFill/>
+          <a:ln/>
+        </p:spPr>
+        <p:txBody>
+          <a:bodyPr wrap="square" lIns="0" tIns="0" rIns="0" bIns="0" rtlCol="0" anchor="ctr"/>
+          <a:lstStyle/>
+          <a:p>
+            <a:pPr indent="0" marL="0">
+              <a:buNone/>
+            </a:pPr>
+            <a:r>
+              <a:rPr lang="en-US" sz="3000" dirty="0">
+                <a:solidFill>
+                  <a:srgbClr val="111111"/>
+                </a:solidFill>
+                <a:latin typeface="Pretendard Black" pitchFamily="34" charset="0"/>
+                <a:ea typeface="Pretendard Black" pitchFamily="34" charset="-122"/>
+                <a:cs typeface="Pretendard Black" pitchFamily="34" charset="-120"/>
+              </a:rPr>
+              <a:t>컬러 적용 세 원칙</a:t>
+            </a:r>
+            <a:endParaRPr lang="en-US" sz="3000" dirty="0"/>
+          </a:p>
+        </p:txBody>
+      </p:sp>
+      <p:sp>
+        <p:nvSpPr>
+          <p:cNvPr id="8" name="Text 6"/>
+          <p:cNvSpPr/>
+          <p:nvPr/>
+        </p:nvSpPr>
+        <p:spPr>
+          <a:xfrm>
+            <a:off x="640080" y="1371600"/>
+            <a:ext cx="10911535" cy="219456"/>
+          </a:xfrm>
+          <a:prstGeom prst="rect">
+            <a:avLst/>
+          </a:prstGeom>
+          <a:noFill/>
+          <a:ln/>
+        </p:spPr>
+        <p:txBody>
+          <a:bodyPr wrap="square" lIns="0" tIns="0" rIns="0" bIns="0" rtlCol="0" anchor="ctr"/>
+          <a:lstStyle/>
+          <a:p>
+            <a:pPr indent="0" marL="0">
+              <a:buNone/>
+            </a:pPr>
+            <a:r>
+              <a:rPr lang="en-US" sz="1150" dirty="0">
+                <a:solidFill>
+                  <a:srgbClr val="6E6E6E"/>
+                </a:solidFill>
+                <a:latin typeface="Pretendard" pitchFamily="34" charset="0"/>
+                <a:ea typeface="Pretendard" pitchFamily="34" charset="-122"/>
+                <a:cs typeface="Pretendard" pitchFamily="34" charset="-120"/>
+              </a:rPr>
+              <a:t>지키기 어려운 것이 아니라 잊기 쉬운 것들입니다.</a:t>
+            </a:r>
+            <a:endParaRPr lang="en-US" sz="1150" dirty="0"/>
+          </a:p>
+        </p:txBody>
+      </p:sp>
+      <p:sp>
+        <p:nvSpPr>
+          <p:cNvPr id="9" name="Shape 7"/>
+          <p:cNvSpPr/>
+          <p:nvPr/>
+        </p:nvSpPr>
+        <p:spPr>
+          <a:xfrm>
+            <a:off x="640080" y="1737360"/>
+            <a:ext cx="3393338" cy="3035808"/>
+          </a:xfrm>
+          <a:prstGeom prst="rect">
+            <a:avLst/>
           </a:prstGeom>
           <a:solidFill>
-            <a:srgbClr val="14161B"/>
+            <a:srgbClr val="FFFFFF"/>
           </a:solidFill>
-          <a:ln w="6350">
+          <a:ln w="12700">
             <a:solidFill>
-              <a:srgbClr val="14161B"/>
+              <a:srgbClr val="DCDCDC"/>
             </a:solidFill>
             <a:prstDash val="solid"/>
           </a:ln>
@@ -4929,7 +6150,7 @@
       </p:sp>
       <p:sp>
         <p:nvSpPr>
-          <p:cNvPr id="7" name="Text 5"/>
+          <p:cNvPr id="10" name="Shape 8"/>
           <p:cNvSpPr/>
           <p:nvPr/>
         </p:nvSpPr>
@@ -4938,6 +6159,31 @@
             <a:off x="1024128" y="2011680"/>
             <a:ext cx="365760" cy="365760"/>
           </a:xfrm>
+          <a:prstGeom prst="ellipse">
+            <a:avLst/>
+          </a:prstGeom>
+          <a:solidFill>
+            <a:srgbClr val="FFFFFF"/>
+          </a:solidFill>
+          <a:ln w="12700">
+            <a:solidFill>
+              <a:srgbClr val="111111"/>
+            </a:solidFill>
+            <a:prstDash val="solid"/>
+          </a:ln>
+        </p:spPr>
+      </p:sp>
+      <p:sp>
+        <p:nvSpPr>
+          <p:cNvPr id="11" name="Text 9"/>
+          <p:cNvSpPr/>
+          <p:nvPr/>
+        </p:nvSpPr>
+        <p:spPr>
+          <a:xfrm>
+            <a:off x="1024128" y="2011680"/>
+            <a:ext cx="365760" cy="365760"/>
+          </a:xfrm>
           <a:prstGeom prst="rect">
             <a:avLst/>
           </a:prstGeom>
@@ -4952,9 +6198,9 @@
               <a:buNone/>
             </a:pPr>
             <a:r>
-              <a:rPr lang="en-US" sz="1200" b="1" dirty="0">
-                <a:solidFill>
-                  <a:srgbClr val="FFFFFF"/>
+              <a:rPr lang="en-US" sz="1150" b="1" dirty="0">
+                <a:solidFill>
+                  <a:srgbClr val="111111"/>
                 </a:solidFill>
                 <a:latin typeface="Pretendard" pitchFamily="34" charset="0"/>
                 <a:ea typeface="Pretendard" pitchFamily="34" charset="-122"/>
@@ -4962,13 +6208,13 @@
               </a:rPr>
               <a:t>01</a:t>
             </a:r>
-            <a:endParaRPr lang="en-US" sz="1200" dirty="0"/>
-          </a:p>
-        </p:txBody>
-      </p:sp>
-      <p:sp>
-        <p:nvSpPr>
-          <p:cNvPr id="8" name="Text 6"/>
+            <a:endParaRPr lang="en-US" sz="1150" dirty="0"/>
+          </a:p>
+        </p:txBody>
+      </p:sp>
+      <p:sp>
+        <p:nvSpPr>
+          <p:cNvPr id="12" name="Text 10"/>
           <p:cNvSpPr/>
           <p:nvPr/>
         </p:nvSpPr>
@@ -4994,13 +6240,13 @@
               <a:buNone/>
             </a:pPr>
             <a:r>
-              <a:rPr lang="en-US" sz="1700" b="1" dirty="0">
-                <a:solidFill>
-                  <a:srgbClr val="14161B"/>
-                </a:solidFill>
-                <a:latin typeface="Pretendard" pitchFamily="34" charset="0"/>
-                <a:ea typeface="Pretendard" pitchFamily="34" charset="-122"/>
-                <a:cs typeface="Pretendard" pitchFamily="34" charset="-120"/>
+              <a:rPr lang="en-US" sz="1700" dirty="0">
+                <a:solidFill>
+                  <a:srgbClr val="111111"/>
+                </a:solidFill>
+                <a:latin typeface="Pretendard Black" pitchFamily="34" charset="0"/>
+                <a:ea typeface="Pretendard Black" pitchFamily="34" charset="-122"/>
+                <a:cs typeface="Pretendard Black" pitchFamily="34" charset="-120"/>
               </a:rPr>
               <a:t>강조색은 한 지면에 한 번</a:t>
             </a:r>
@@ -5010,7 +6256,7 @@
       </p:sp>
       <p:sp>
         <p:nvSpPr>
-          <p:cNvPr id="9" name="Text 7"/>
+          <p:cNvPr id="13" name="Text 11"/>
           <p:cNvSpPr/>
           <p:nvPr/>
         </p:nvSpPr>
@@ -5038,7 +6284,7 @@
             <a:r>
               <a:rPr lang="en-US" sz="1150" dirty="0">
                 <a:solidFill>
-                  <a:srgbClr val="6B7280"/>
+                  <a:srgbClr val="6E6E6E"/>
                 </a:solidFill>
                 <a:latin typeface="Pretendard" pitchFamily="34" charset="0"/>
                 <a:ea typeface="Pretendard" pitchFamily="34" charset="-122"/>
@@ -5052,7 +6298,7 @@
       </p:sp>
       <p:sp>
         <p:nvSpPr>
-          <p:cNvPr id="10" name="Shape 8"/>
+          <p:cNvPr id="14" name="Shape 12"/>
           <p:cNvSpPr/>
           <p:nvPr/>
         </p:nvSpPr>
@@ -5061,17 +6307,15 @@
             <a:off x="4399178" y="1737360"/>
             <a:ext cx="3393338" cy="3035808"/>
           </a:xfrm>
-          <a:prstGeom prst="roundRect">
-            <a:avLst>
-              <a:gd name="adj" fmla="val 2410"/>
-            </a:avLst>
+          <a:prstGeom prst="rect">
+            <a:avLst/>
           </a:prstGeom>
           <a:solidFill>
-            <a:srgbClr val="F4F5F7"/>
+            <a:srgbClr val="FFFFFF"/>
           </a:solidFill>
           <a:ln w="12700">
             <a:solidFill>
-              <a:srgbClr val="E4E6EB"/>
+              <a:srgbClr val="DCDCDC"/>
             </a:solidFill>
             <a:prstDash val="solid"/>
           </a:ln>
@@ -5079,7 +6323,7 @@
       </p:sp>
       <p:sp>
         <p:nvSpPr>
-          <p:cNvPr id="11" name="Shape 9"/>
+          <p:cNvPr id="15" name="Shape 13"/>
           <p:cNvSpPr/>
           <p:nvPr/>
         </p:nvSpPr>
@@ -5088,17 +6332,15 @@
             <a:off x="4783226" y="2011680"/>
             <a:ext cx="365760" cy="365760"/>
           </a:xfrm>
-          <a:prstGeom prst="roundRect">
-            <a:avLst>
-              <a:gd name="adj" fmla="val 15000"/>
-            </a:avLst>
+          <a:prstGeom prst="ellipse">
+            <a:avLst/>
           </a:prstGeom>
           <a:solidFill>
-            <a:srgbClr val="14161B"/>
+            <a:srgbClr val="FFFFFF"/>
           </a:solidFill>
-          <a:ln w="6350">
+          <a:ln w="12700">
             <a:solidFill>
-              <a:srgbClr val="14161B"/>
+              <a:srgbClr val="111111"/>
             </a:solidFill>
             <a:prstDash val="solid"/>
           </a:ln>
@@ -5106,7 +6348,7 @@
       </p:sp>
       <p:sp>
         <p:nvSpPr>
-          <p:cNvPr id="12" name="Text 10"/>
+          <p:cNvPr id="16" name="Text 14"/>
           <p:cNvSpPr/>
           <p:nvPr/>
         </p:nvSpPr>
@@ -5129,9 +6371,9 @@
               <a:buNone/>
             </a:pPr>
             <a:r>
-              <a:rPr lang="en-US" sz="1200" b="1" dirty="0">
-                <a:solidFill>
-                  <a:srgbClr val="FFFFFF"/>
+              <a:rPr lang="en-US" sz="1150" b="1" dirty="0">
+                <a:solidFill>
+                  <a:srgbClr val="111111"/>
                 </a:solidFill>
                 <a:latin typeface="Pretendard" pitchFamily="34" charset="0"/>
                 <a:ea typeface="Pretendard" pitchFamily="34" charset="-122"/>
@@ -5139,13 +6381,13 @@
               </a:rPr>
               <a:t>02</a:t>
             </a:r>
-            <a:endParaRPr lang="en-US" sz="1200" dirty="0"/>
-          </a:p>
-        </p:txBody>
-      </p:sp>
-      <p:sp>
-        <p:nvSpPr>
-          <p:cNvPr id="13" name="Text 11"/>
+            <a:endParaRPr lang="en-US" sz="1150" dirty="0"/>
+          </a:p>
+        </p:txBody>
+      </p:sp>
+      <p:sp>
+        <p:nvSpPr>
+          <p:cNvPr id="17" name="Text 15"/>
           <p:cNvSpPr/>
           <p:nvPr/>
         </p:nvSpPr>
@@ -5171,13 +6413,13 @@
               <a:buNone/>
             </a:pPr>
             <a:r>
-              <a:rPr lang="en-US" sz="1700" b="1" dirty="0">
-                <a:solidFill>
-                  <a:srgbClr val="14161B"/>
-                </a:solidFill>
-                <a:latin typeface="Pretendard" pitchFamily="34" charset="0"/>
-                <a:ea typeface="Pretendard" pitchFamily="34" charset="-122"/>
-                <a:cs typeface="Pretendard" pitchFamily="34" charset="-120"/>
+              <a:rPr lang="en-US" sz="1700" dirty="0">
+                <a:solidFill>
+                  <a:srgbClr val="111111"/>
+                </a:solidFill>
+                <a:latin typeface="Pretendard Black" pitchFamily="34" charset="0"/>
+                <a:ea typeface="Pretendard Black" pitchFamily="34" charset="-122"/>
+                <a:cs typeface="Pretendard Black" pitchFamily="34" charset="-120"/>
               </a:rPr>
               <a:t>작업 이미지의 색과 부딪히지 않게</a:t>
             </a:r>
@@ -5187,7 +6429,7 @@
       </p:sp>
       <p:sp>
         <p:nvSpPr>
-          <p:cNvPr id="14" name="Text 12"/>
+          <p:cNvPr id="18" name="Text 16"/>
           <p:cNvSpPr/>
           <p:nvPr/>
         </p:nvSpPr>
@@ -5215,7 +6457,7 @@
             <a:r>
               <a:rPr lang="en-US" sz="1150" dirty="0">
                 <a:solidFill>
-                  <a:srgbClr val="6B7280"/>
+                  <a:srgbClr val="6E6E6E"/>
                 </a:solidFill>
                 <a:latin typeface="Pretendard" pitchFamily="34" charset="0"/>
                 <a:ea typeface="Pretendard" pitchFamily="34" charset="-122"/>
@@ -5229,7 +6471,7 @@
       </p:sp>
       <p:sp>
         <p:nvSpPr>
-          <p:cNvPr id="15" name="Shape 13"/>
+          <p:cNvPr id="19" name="Shape 17"/>
           <p:cNvSpPr/>
           <p:nvPr/>
         </p:nvSpPr>
@@ -5238,17 +6480,15 @@
             <a:off x="8158277" y="1737360"/>
             <a:ext cx="3393338" cy="3035808"/>
           </a:xfrm>
-          <a:prstGeom prst="roundRect">
-            <a:avLst>
-              <a:gd name="adj" fmla="val 2410"/>
-            </a:avLst>
+          <a:prstGeom prst="rect">
+            <a:avLst/>
           </a:prstGeom>
           <a:solidFill>
-            <a:srgbClr val="F4F5F7"/>
+            <a:srgbClr val="FFFFFF"/>
           </a:solidFill>
           <a:ln w="12700">
             <a:solidFill>
-              <a:srgbClr val="E4E6EB"/>
+              <a:srgbClr val="DCDCDC"/>
             </a:solidFill>
             <a:prstDash val="solid"/>
           </a:ln>
@@ -5256,7 +6496,7 @@
       </p:sp>
       <p:sp>
         <p:nvSpPr>
-          <p:cNvPr id="16" name="Shape 14"/>
+          <p:cNvPr id="20" name="Shape 18"/>
           <p:cNvSpPr/>
           <p:nvPr/>
         </p:nvSpPr>
@@ -5265,17 +6505,15 @@
             <a:off x="8542325" y="2011680"/>
             <a:ext cx="365760" cy="365760"/>
           </a:xfrm>
-          <a:prstGeom prst="roundRect">
-            <a:avLst>
-              <a:gd name="adj" fmla="val 15000"/>
-            </a:avLst>
+          <a:prstGeom prst="ellipse">
+            <a:avLst/>
           </a:prstGeom>
           <a:solidFill>
-            <a:srgbClr val="14161B"/>
+            <a:srgbClr val="FFFFFF"/>
           </a:solidFill>
-          <a:ln w="6350">
+          <a:ln w="12700">
             <a:solidFill>
-              <a:srgbClr val="14161B"/>
+              <a:srgbClr val="111111"/>
             </a:solidFill>
             <a:prstDash val="solid"/>
           </a:ln>
@@ -5283,7 +6521,7 @@
       </p:sp>
       <p:sp>
         <p:nvSpPr>
-          <p:cNvPr id="17" name="Text 15"/>
+          <p:cNvPr id="21" name="Text 19"/>
           <p:cNvSpPr/>
           <p:nvPr/>
         </p:nvSpPr>
@@ -5306,9 +6544,9 @@
               <a:buNone/>
             </a:pPr>
             <a:r>
-              <a:rPr lang="en-US" sz="1200" b="1" dirty="0">
-                <a:solidFill>
-                  <a:srgbClr val="FFFFFF"/>
+              <a:rPr lang="en-US" sz="1150" b="1" dirty="0">
+                <a:solidFill>
+                  <a:srgbClr val="111111"/>
                 </a:solidFill>
                 <a:latin typeface="Pretendard" pitchFamily="34" charset="0"/>
                 <a:ea typeface="Pretendard" pitchFamily="34" charset="-122"/>
@@ -5316,13 +6554,13 @@
               </a:rPr>
               <a:t>03</a:t>
             </a:r>
-            <a:endParaRPr lang="en-US" sz="1200" dirty="0"/>
-          </a:p>
-        </p:txBody>
-      </p:sp>
-      <p:sp>
-        <p:nvSpPr>
-          <p:cNvPr id="18" name="Text 16"/>
+            <a:endParaRPr lang="en-US" sz="1150" dirty="0"/>
+          </a:p>
+        </p:txBody>
+      </p:sp>
+      <p:sp>
+        <p:nvSpPr>
+          <p:cNvPr id="22" name="Text 20"/>
           <p:cNvSpPr/>
           <p:nvPr/>
         </p:nvSpPr>
@@ -5348,13 +6586,13 @@
               <a:buNone/>
             </a:pPr>
             <a:r>
-              <a:rPr lang="en-US" sz="1700" b="1" dirty="0">
-                <a:solidFill>
-                  <a:srgbClr val="14161B"/>
-                </a:solidFill>
-                <a:latin typeface="Pretendard" pitchFamily="34" charset="0"/>
-                <a:ea typeface="Pretendard" pitchFamily="34" charset="-122"/>
-                <a:cs typeface="Pretendard" pitchFamily="34" charset="-120"/>
+              <a:rPr lang="en-US" sz="1700" dirty="0">
+                <a:solidFill>
+                  <a:srgbClr val="111111"/>
+                </a:solidFill>
+                <a:latin typeface="Pretendard Black" pitchFamily="34" charset="0"/>
+                <a:ea typeface="Pretendard Black" pitchFamily="34" charset="-122"/>
+                <a:cs typeface="Pretendard Black" pitchFamily="34" charset="-120"/>
               </a:rPr>
               <a:t>화면과 인쇄를 함께 확인</a:t>
             </a:r>
@@ -5364,7 +6602,7 @@
       </p:sp>
       <p:sp>
         <p:nvSpPr>
-          <p:cNvPr id="19" name="Text 17"/>
+          <p:cNvPr id="23" name="Text 21"/>
           <p:cNvSpPr/>
           <p:nvPr/>
         </p:nvSpPr>
@@ -5392,7 +6630,7 @@
             <a:r>
               <a:rPr lang="en-US" sz="1150" dirty="0">
                 <a:solidFill>
-                  <a:srgbClr val="6B7280"/>
+                  <a:srgbClr val="6E6E6E"/>
                 </a:solidFill>
                 <a:latin typeface="Pretendard" pitchFamily="34" charset="0"/>
                 <a:ea typeface="Pretendard" pitchFamily="34" charset="-122"/>
@@ -5406,13 +6644,38 @@
       </p:sp>
       <p:sp>
         <p:nvSpPr>
-          <p:cNvPr id="20" name="Text 18"/>
-          <p:cNvSpPr/>
-          <p:nvPr/>
-        </p:nvSpPr>
-        <p:spPr>
-          <a:xfrm>
-            <a:off x="640080" y="5138928"/>
+          <p:cNvPr id="24" name="Shape 22"/>
+          <p:cNvSpPr/>
+          <p:nvPr/>
+        </p:nvSpPr>
+        <p:spPr>
+          <a:xfrm>
+            <a:off x="640080" y="5084064"/>
+            <a:ext cx="10911535" cy="7315"/>
+          </a:xfrm>
+          <a:prstGeom prst="rect">
+            <a:avLst/>
+          </a:prstGeom>
+          <a:solidFill>
+            <a:srgbClr val="111111"/>
+          </a:solidFill>
+          <a:ln w="12700">
+            <a:solidFill>
+              <a:srgbClr val="111111"/>
+            </a:solidFill>
+            <a:prstDash val="solid"/>
+          </a:ln>
+        </p:spPr>
+      </p:sp>
+      <p:sp>
+        <p:nvSpPr>
+          <p:cNvPr id="25" name="Text 23"/>
+          <p:cNvSpPr/>
+          <p:nvPr/>
+        </p:nvSpPr>
+        <p:spPr>
+          <a:xfrm>
+            <a:off x="640080" y="5193792"/>
             <a:ext cx="10911535" cy="438912"/>
           </a:xfrm>
           <a:prstGeom prst="rect">
@@ -5434,7 +6697,7 @@
             <a:r>
               <a:rPr lang="en-US" sz="1300" b="1" dirty="0">
                 <a:solidFill>
-                  <a:srgbClr val="FF4A1C"/>
+                  <a:srgbClr val="111111"/>
                 </a:solidFill>
                 <a:latin typeface="Pretendard" pitchFamily="34" charset="0"/>
                 <a:ea typeface="Pretendard" pitchFamily="34" charset="-122"/>
@@ -5448,32 +6711,57 @@
       </p:sp>
       <p:sp>
         <p:nvSpPr>
-          <p:cNvPr id="21" name="Text 19"/>
-          <p:cNvSpPr/>
-          <p:nvPr/>
-        </p:nvSpPr>
-        <p:spPr>
-          <a:xfrm>
-            <a:off x="640080" y="6345936"/>
-            <a:ext cx="7772400" cy="256032"/>
-          </a:xfrm>
-          <a:prstGeom prst="rect">
-            <a:avLst/>
-          </a:prstGeom>
-          <a:noFill/>
-          <a:ln/>
-        </p:spPr>
-        <p:txBody>
-          <a:bodyPr wrap="square" lIns="0" tIns="0" rIns="0" bIns="0" rtlCol="0" anchor="ctr"/>
-          <a:lstStyle/>
-          <a:p>
-            <a:pPr indent="0" marL="0">
-              <a:buNone/>
-            </a:pPr>
-            <a:r>
-              <a:rPr lang="en-US" sz="900" dirty="0">
-                <a:solidFill>
-                  <a:srgbClr val="9AA0AA"/>
+          <p:cNvPr id="26" name="Shape 24"/>
+          <p:cNvSpPr/>
+          <p:nvPr/>
+        </p:nvSpPr>
+        <p:spPr>
+          <a:xfrm>
+            <a:off x="640080" y="6291072"/>
+            <a:ext cx="10911535" cy="7315"/>
+          </a:xfrm>
+          <a:prstGeom prst="rect">
+            <a:avLst/>
+          </a:prstGeom>
+          <a:solidFill>
+            <a:srgbClr val="DCDCDC"/>
+          </a:solidFill>
+          <a:ln w="12700">
+            <a:solidFill>
+              <a:srgbClr val="DCDCDC"/>
+            </a:solidFill>
+            <a:prstDash val="solid"/>
+          </a:ln>
+        </p:spPr>
+      </p:sp>
+      <p:sp>
+        <p:nvSpPr>
+          <p:cNvPr id="27" name="Text 25"/>
+          <p:cNvSpPr/>
+          <p:nvPr/>
+        </p:nvSpPr>
+        <p:spPr>
+          <a:xfrm>
+            <a:off x="640080" y="6382512"/>
+            <a:ext cx="7772400" cy="237744"/>
+          </a:xfrm>
+          <a:prstGeom prst="rect">
+            <a:avLst/>
+          </a:prstGeom>
+          <a:noFill/>
+          <a:ln/>
+        </p:spPr>
+        <p:txBody>
+          <a:bodyPr wrap="square" lIns="0" tIns="0" rIns="0" bIns="0" rtlCol="0" anchor="ctr"/>
+          <a:lstStyle/>
+          <a:p>
+            <a:pPr indent="0" marL="0">
+              <a:buNone/>
+            </a:pPr>
+            <a:r>
+              <a:rPr lang="en-US" sz="850" spc="40" kern="0" dirty="0">
+                <a:solidFill>
+                  <a:srgbClr val="9B9B9B"/>
                 </a:solidFill>
                 <a:latin typeface="Pretendard" pitchFamily="34" charset="0"/>
                 <a:ea typeface="Pretendard" pitchFamily="34" charset="-122"/>
@@ -5481,20 +6769,20 @@
               </a:rPr>
               <a:t>포트폴리오제작 · 11주차 편집디자인 실습 Ⅱ</a:t>
             </a:r>
-            <a:endParaRPr lang="en-US" sz="900" dirty="0"/>
-          </a:p>
-        </p:txBody>
-      </p:sp>
-      <p:sp>
-        <p:nvSpPr>
-          <p:cNvPr id="22" name="Text 20"/>
-          <p:cNvSpPr/>
-          <p:nvPr/>
-        </p:nvSpPr>
-        <p:spPr>
-          <a:xfrm>
-            <a:off x="10454335" y="6345936"/>
-            <a:ext cx="1097280" cy="256032"/>
+            <a:endParaRPr lang="en-US" sz="850" dirty="0"/>
+          </a:p>
+        </p:txBody>
+      </p:sp>
+      <p:sp>
+        <p:nvSpPr>
+          <p:cNvPr id="28" name="Text 26"/>
+          <p:cNvSpPr/>
+          <p:nvPr/>
+        </p:nvSpPr>
+        <p:spPr>
+          <a:xfrm>
+            <a:off x="10271455" y="6382512"/>
+            <a:ext cx="1280160" cy="237744"/>
           </a:xfrm>
           <a:prstGeom prst="rect">
             <a:avLst/>
@@ -5510,17 +6798,17 @@
               <a:buNone/>
             </a:pPr>
             <a:r>
-              <a:rPr lang="en-US" sz="900" dirty="0">
-                <a:solidFill>
-                  <a:srgbClr val="9AA0AA"/>
-                </a:solidFill>
-                <a:latin typeface="Pretendard" pitchFamily="34" charset="0"/>
-                <a:ea typeface="Pretendard" pitchFamily="34" charset="-122"/>
-                <a:cs typeface="Pretendard" pitchFamily="34" charset="-120"/>
-              </a:rPr>
-              <a:t>03</a:t>
-            </a:r>
-            <a:endParaRPr lang="en-US" sz="900" dirty="0"/>
+              <a:rPr lang="en-US" sz="850" spc="140" kern="0" dirty="0">
+                <a:solidFill>
+                  <a:srgbClr val="9B9B9B"/>
+                </a:solidFill>
+                <a:latin typeface="Pretendard" pitchFamily="34" charset="0"/>
+                <a:ea typeface="Pretendard" pitchFamily="34" charset="-122"/>
+                <a:cs typeface="Pretendard" pitchFamily="34" charset="-120"/>
+              </a:rPr>
+              <a:t>P.03</a:t>
+            </a:r>
+            <a:endParaRPr lang="en-US" sz="850" dirty="0"/>
           </a:p>
         </p:txBody>
       </p:sp>
@@ -5538,7 +6826,7 @@
     <p:bg>
       <p:bgPr>
         <a:solidFill>
-          <a:srgbClr val="14161B"/>
+          <a:srgbClr val="111111"/>
         </a:solidFill>
       </p:bgPr>
     </p:bg>
@@ -5564,8 +6852,86 @@
         </p:nvSpPr>
         <p:spPr>
           <a:xfrm>
-            <a:off x="7711135" y="914400"/>
-            <a:ext cx="3840480" cy="5029200"/>
+            <a:off x="640080" y="274320"/>
+            <a:ext cx="3657600" cy="219456"/>
+          </a:xfrm>
+          <a:prstGeom prst="rect">
+            <a:avLst/>
+          </a:prstGeom>
+          <a:noFill/>
+          <a:ln/>
+        </p:spPr>
+        <p:txBody>
+          <a:bodyPr wrap="square" lIns="0" tIns="0" rIns="0" bIns="0" rtlCol="0" anchor="ctr"/>
+          <a:lstStyle/>
+          <a:p>
+            <a:pPr indent="0" marL="0">
+              <a:buNone/>
+            </a:pPr>
+            <a:r>
+              <a:rPr lang="en-US" sz="900" spc="120" kern="0" dirty="0">
+                <a:solidFill>
+                  <a:srgbClr val="9A9A9A"/>
+                </a:solidFill>
+                <a:latin typeface="Pretendard" pitchFamily="34" charset="0"/>
+                <a:ea typeface="Pretendard" pitchFamily="34" charset="-122"/>
+                <a:cs typeface="Pretendard" pitchFamily="34" charset="-120"/>
+              </a:rPr>
+              <a:t>포트폴리오제작</a:t>
+            </a:r>
+            <a:endParaRPr lang="en-US" sz="900" dirty="0"/>
+          </a:p>
+        </p:txBody>
+      </p:sp>
+      <p:sp>
+        <p:nvSpPr>
+          <p:cNvPr id="3" name="Text 1"/>
+          <p:cNvSpPr/>
+          <p:nvPr/>
+        </p:nvSpPr>
+        <p:spPr>
+          <a:xfrm>
+            <a:off x="4480560" y="274320"/>
+            <a:ext cx="4572000" cy="219456"/>
+          </a:xfrm>
+          <a:prstGeom prst="rect">
+            <a:avLst/>
+          </a:prstGeom>
+          <a:noFill/>
+          <a:ln/>
+        </p:spPr>
+        <p:txBody>
+          <a:bodyPr wrap="square" lIns="0" tIns="0" rIns="0" bIns="0" rtlCol="0" anchor="ctr"/>
+          <a:lstStyle/>
+          <a:p>
+            <a:pPr algn="ctr" indent="0" marL="0">
+              <a:buNone/>
+            </a:pPr>
+            <a:r>
+              <a:rPr lang="en-US" sz="900" spc="120" kern="0" dirty="0">
+                <a:solidFill>
+                  <a:srgbClr val="9A9A9A"/>
+                </a:solidFill>
+                <a:latin typeface="Pretendard" pitchFamily="34" charset="0"/>
+                <a:ea typeface="Pretendard" pitchFamily="34" charset="-122"/>
+                <a:cs typeface="Pretendard" pitchFamily="34" charset="-120"/>
+              </a:rPr>
+              <a:t>PHASE 3 완성과 발표</a:t>
+            </a:r>
+            <a:endParaRPr lang="en-US" sz="900" dirty="0"/>
+          </a:p>
+        </p:txBody>
+      </p:sp>
+      <p:sp>
+        <p:nvSpPr>
+          <p:cNvPr id="4" name="Text 2"/>
+          <p:cNvSpPr/>
+          <p:nvPr/>
+        </p:nvSpPr>
+        <p:spPr>
+          <a:xfrm>
+            <a:off x="8808415" y="274320"/>
+            <a:ext cx="2743200" cy="219456"/>
           </a:xfrm>
           <a:prstGeom prst="rect">
             <a:avLst/>
@@ -5581,48 +6947,181 @@
               <a:buNone/>
             </a:pPr>
             <a:r>
-              <a:rPr lang="en-US" sz="25500" dirty="0">
-                <a:solidFill>
-                  <a:srgbClr val="262A33"/>
-                </a:solidFill>
-                <a:latin typeface="Pretendard Thin" pitchFamily="34" charset="0"/>
-                <a:ea typeface="Pretendard Thin" pitchFamily="34" charset="-122"/>
-                <a:cs typeface="Pretendard Thin" pitchFamily="34" charset="-120"/>
+              <a:rPr lang="en-US" sz="900" spc="200" kern="0" dirty="0">
+                <a:solidFill>
+                  <a:srgbClr val="9A9A9A"/>
+                </a:solidFill>
+                <a:latin typeface="Pretendard" pitchFamily="34" charset="0"/>
+                <a:ea typeface="Pretendard" pitchFamily="34" charset="-122"/>
+                <a:cs typeface="Pretendard" pitchFamily="34" charset="-120"/>
+              </a:rPr>
+              <a:t>WEEK 11</a:t>
+            </a:r>
+            <a:endParaRPr lang="en-US" sz="900" dirty="0"/>
+          </a:p>
+        </p:txBody>
+      </p:sp>
+      <p:sp>
+        <p:nvSpPr>
+          <p:cNvPr id="5" name="Shape 3"/>
+          <p:cNvSpPr/>
+          <p:nvPr/>
+        </p:nvSpPr>
+        <p:spPr>
+          <a:xfrm>
+            <a:off x="640080" y="548640"/>
+            <a:ext cx="10911535" cy="7315"/>
+          </a:xfrm>
+          <a:prstGeom prst="rect">
+            <a:avLst/>
+          </a:prstGeom>
+          <a:solidFill>
+            <a:srgbClr val="333333"/>
+          </a:solidFill>
+          <a:ln w="12700">
+            <a:solidFill>
+              <a:srgbClr val="333333"/>
+            </a:solidFill>
+            <a:prstDash val="solid"/>
+          </a:ln>
+        </p:spPr>
+      </p:sp>
+      <p:sp>
+        <p:nvSpPr>
+          <p:cNvPr id="6" name="Text 4"/>
+          <p:cNvSpPr/>
+          <p:nvPr/>
+        </p:nvSpPr>
+        <p:spPr>
+          <a:xfrm>
+            <a:off x="7345375" y="1737360"/>
+            <a:ext cx="4206240" cy="3291840"/>
+          </a:xfrm>
+          <a:prstGeom prst="rect">
+            <a:avLst/>
+          </a:prstGeom>
+          <a:noFill/>
+          <a:ln/>
+        </p:spPr>
+        <p:txBody>
+          <a:bodyPr wrap="square" lIns="0" tIns="0" rIns="0" bIns="0" rtlCol="0" anchor="ctr"/>
+          <a:lstStyle/>
+          <a:p>
+            <a:pPr algn="r" indent="0" marL="0">
+              <a:buNone/>
+            </a:pPr>
+            <a:r>
+              <a:rPr lang="en-US" sz="20000" dirty="0">
+                <a:solidFill>
+                  <a:srgbClr val="1B1B1B"/>
+                </a:solidFill>
+                <a:latin typeface="Pretendard Black" pitchFamily="34" charset="0"/>
+                <a:ea typeface="Pretendard Black" pitchFamily="34" charset="-122"/>
+                <a:cs typeface="Pretendard Black" pitchFamily="34" charset="-120"/>
               </a:rPr>
               <a:t>02</a:t>
             </a:r>
-            <a:endParaRPr lang="en-US" sz="25500" dirty="0"/>
-          </a:p>
-        </p:txBody>
-      </p:sp>
-      <p:sp>
-        <p:nvSpPr>
-          <p:cNvPr id="3" name="Text 1"/>
-          <p:cNvSpPr/>
-          <p:nvPr/>
-        </p:nvSpPr>
-        <p:spPr>
-          <a:xfrm>
-            <a:off x="640080" y="2487168"/>
-            <a:ext cx="7315200" cy="274320"/>
-          </a:xfrm>
-          <a:prstGeom prst="rect">
-            <a:avLst/>
-          </a:prstGeom>
-          <a:noFill/>
-          <a:ln/>
-        </p:spPr>
-        <p:txBody>
-          <a:bodyPr wrap="square" lIns="0" tIns="0" rIns="0" bIns="0" rtlCol="0" anchor="ctr"/>
-          <a:lstStyle/>
-          <a:p>
-            <a:pPr indent="0" marL="0">
-              <a:buNone/>
-            </a:pPr>
-            <a:r>
-              <a:rPr lang="en-US" sz="1100" b="1" spc="200" kern="0" dirty="0">
-                <a:solidFill>
-                  <a:srgbClr val="FF4A1C"/>
+            <a:endParaRPr lang="en-US" sz="20000" dirty="0"/>
+          </a:p>
+        </p:txBody>
+      </p:sp>
+      <p:sp>
+        <p:nvSpPr>
+          <p:cNvPr id="7" name="Shape 5"/>
+          <p:cNvSpPr/>
+          <p:nvPr/>
+        </p:nvSpPr>
+        <p:spPr>
+          <a:xfrm>
+            <a:off x="941832" y="1371600"/>
+            <a:ext cx="0" cy="603504"/>
+          </a:xfrm>
+          <a:prstGeom prst="line">
+            <a:avLst/>
+          </a:prstGeom>
+          <a:noFill/>
+          <a:ln w="15875">
+            <a:solidFill>
+              <a:srgbClr val="FFFFFF"/>
+            </a:solidFill>
+            <a:prstDash val="solid"/>
+          </a:ln>
+        </p:spPr>
+      </p:sp>
+      <p:sp>
+        <p:nvSpPr>
+          <p:cNvPr id="8" name="Shape 6"/>
+          <p:cNvSpPr/>
+          <p:nvPr/>
+        </p:nvSpPr>
+        <p:spPr>
+          <a:xfrm>
+            <a:off x="640080" y="1733702"/>
+            <a:ext cx="301752" cy="241402"/>
+          </a:xfrm>
+          <a:prstGeom prst="line">
+            <a:avLst/>
+          </a:prstGeom>
+          <a:noFill/>
+          <a:ln w="15875">
+            <a:solidFill>
+              <a:srgbClr val="FFFFFF"/>
+            </a:solidFill>
+            <a:prstDash val="solid"/>
+          </a:ln>
+        </p:spPr>
+      </p:sp>
+      <p:sp>
+        <p:nvSpPr>
+          <p:cNvPr id="9" name="Shape 7"/>
+          <p:cNvSpPr/>
+          <p:nvPr/>
+        </p:nvSpPr>
+        <p:spPr>
+          <a:xfrm flipV="1">
+            <a:off x="941832" y="1733702"/>
+            <a:ext cx="301752" cy="241402"/>
+          </a:xfrm>
+          <a:prstGeom prst="line">
+            <a:avLst/>
+          </a:prstGeom>
+          <a:noFill/>
+          <a:ln w="15875">
+            <a:solidFill>
+              <a:srgbClr val="FFFFFF"/>
+            </a:solidFill>
+            <a:prstDash val="solid"/>
+          </a:ln>
+        </p:spPr>
+      </p:sp>
+      <p:sp>
+        <p:nvSpPr>
+          <p:cNvPr id="10" name="Text 8"/>
+          <p:cNvSpPr/>
+          <p:nvPr/>
+        </p:nvSpPr>
+        <p:spPr>
+          <a:xfrm>
+            <a:off x="640080" y="2615184"/>
+            <a:ext cx="7863840" cy="256032"/>
+          </a:xfrm>
+          <a:prstGeom prst="rect">
+            <a:avLst/>
+          </a:prstGeom>
+          <a:noFill/>
+          <a:ln/>
+        </p:spPr>
+        <p:txBody>
+          <a:bodyPr wrap="square" lIns="0" tIns="0" rIns="0" bIns="0" rtlCol="0" anchor="ctr"/>
+          <a:lstStyle/>
+          <a:p>
+            <a:pPr indent="0" marL="0">
+              <a:buNone/>
+            </a:pPr>
+            <a:r>
+              <a:rPr lang="en-US" sz="950" spc="280" kern="0" dirty="0">
+                <a:solidFill>
+                  <a:srgbClr val="9A9A9A"/>
                 </a:solidFill>
                 <a:latin typeface="Pretendard" pitchFamily="34" charset="0"/>
                 <a:ea typeface="Pretendard" pitchFamily="34" charset="-122"/>
@@ -5630,59 +7129,84 @@
               </a:rPr>
               <a:t>PART 02</a:t>
             </a:r>
-            <a:endParaRPr lang="en-US" sz="1100" dirty="0"/>
-          </a:p>
-        </p:txBody>
-      </p:sp>
-      <p:sp>
-        <p:nvSpPr>
-          <p:cNvPr id="4" name="Text 2"/>
-          <p:cNvSpPr/>
-          <p:nvPr/>
-        </p:nvSpPr>
-        <p:spPr>
-          <a:xfrm>
-            <a:off x="640080" y="2834640"/>
-            <a:ext cx="7315200" cy="731520"/>
-          </a:xfrm>
-          <a:prstGeom prst="rect">
-            <a:avLst/>
-          </a:prstGeom>
-          <a:noFill/>
-          <a:ln/>
-        </p:spPr>
-        <p:txBody>
-          <a:bodyPr wrap="square" lIns="0" tIns="0" rIns="0" bIns="0" rtlCol="0" anchor="ctr"/>
-          <a:lstStyle/>
-          <a:p>
-            <a:pPr indent="0" marL="0">
-              <a:buNone/>
-            </a:pPr>
-            <a:r>
-              <a:rPr lang="en-US" sz="4200" b="1" dirty="0">
+            <a:endParaRPr lang="en-US" sz="950" dirty="0"/>
+          </a:p>
+        </p:txBody>
+      </p:sp>
+      <p:sp>
+        <p:nvSpPr>
+          <p:cNvPr id="11" name="Text 9"/>
+          <p:cNvSpPr/>
+          <p:nvPr/>
+        </p:nvSpPr>
+        <p:spPr>
+          <a:xfrm>
+            <a:off x="640080" y="2889504"/>
+            <a:ext cx="7863840" cy="786384"/>
+          </a:xfrm>
+          <a:prstGeom prst="rect">
+            <a:avLst/>
+          </a:prstGeom>
+          <a:noFill/>
+          <a:ln/>
+        </p:spPr>
+        <p:txBody>
+          <a:bodyPr wrap="square" lIns="0" tIns="0" rIns="0" bIns="0" rtlCol="0" anchor="ctr"/>
+          <a:lstStyle/>
+          <a:p>
+            <a:pPr indent="0" marL="0">
+              <a:buNone/>
+            </a:pPr>
+            <a:r>
+              <a:rPr lang="en-US" sz="4600" dirty="0">
                 <a:solidFill>
                   <a:srgbClr val="FFFFFF"/>
                 </a:solidFill>
-                <a:latin typeface="Pretendard" pitchFamily="34" charset="0"/>
-                <a:ea typeface="Pretendard" pitchFamily="34" charset="-122"/>
-                <a:cs typeface="Pretendard" pitchFamily="34" charset="-120"/>
+                <a:latin typeface="Pretendard Black" pitchFamily="34" charset="0"/>
+                <a:ea typeface="Pretendard Black" pitchFamily="34" charset="-122"/>
+                <a:cs typeface="Pretendard Black" pitchFamily="34" charset="-120"/>
               </a:rPr>
               <a:t>이미지 다루기</a:t>
             </a:r>
-            <a:endParaRPr lang="en-US" sz="4200" dirty="0"/>
-          </a:p>
-        </p:txBody>
-      </p:sp>
-      <p:sp>
-        <p:nvSpPr>
-          <p:cNvPr id="5" name="Text 3"/>
-          <p:cNvSpPr/>
-          <p:nvPr/>
-        </p:nvSpPr>
-        <p:spPr>
-          <a:xfrm>
-            <a:off x="640080" y="3657600"/>
-            <a:ext cx="6766560" cy="640080"/>
+            <a:endParaRPr lang="en-US" sz="4600" dirty="0"/>
+          </a:p>
+        </p:txBody>
+      </p:sp>
+      <p:sp>
+        <p:nvSpPr>
+          <p:cNvPr id="12" name="Shape 10"/>
+          <p:cNvSpPr/>
+          <p:nvPr/>
+        </p:nvSpPr>
+        <p:spPr>
+          <a:xfrm>
+            <a:off x="640080" y="3803904"/>
+            <a:ext cx="2194560" cy="7315"/>
+          </a:xfrm>
+          <a:prstGeom prst="rect">
+            <a:avLst/>
+          </a:prstGeom>
+          <a:solidFill>
+            <a:srgbClr val="FFFFFF"/>
+          </a:solidFill>
+          <a:ln w="12700">
+            <a:solidFill>
+              <a:srgbClr val="FFFFFF"/>
+            </a:solidFill>
+            <a:prstDash val="solid"/>
+          </a:ln>
+        </p:spPr>
+      </p:sp>
+      <p:sp>
+        <p:nvSpPr>
+          <p:cNvPr id="13" name="Text 11"/>
+          <p:cNvSpPr/>
+          <p:nvPr/>
+        </p:nvSpPr>
+        <p:spPr>
+          <a:xfrm>
+            <a:off x="640080" y="4005072"/>
+            <a:ext cx="6949440" cy="731520"/>
           </a:xfrm>
           <a:prstGeom prst="rect">
             <a:avLst/>
@@ -5696,22 +7220,61 @@
           <a:p>
             <a:pPr indent="0" marL="0">
               <a:lnSpc>
-                <a:spcPct val="130000"/>
+                <a:spcPct val="134000"/>
               </a:lnSpc>
               <a:buNone/>
             </a:pPr>
             <a:r>
               <a:rPr lang="en-US" sz="1350" dirty="0">
                 <a:solidFill>
-                  <a:srgbClr val="AEB4BF"/>
-                </a:solidFill>
-                <a:latin typeface="Pretendard" pitchFamily="34" charset="0"/>
-                <a:ea typeface="Pretendard" pitchFamily="34" charset="-122"/>
-                <a:cs typeface="Pretendard" pitchFamily="34" charset="-120"/>
+                  <a:srgbClr val="B8B8B8"/>
+                </a:solidFill>
+                <a:latin typeface="Pretendard Light" pitchFamily="34" charset="0"/>
+                <a:ea typeface="Pretendard Light" pitchFamily="34" charset="-122"/>
+                <a:cs typeface="Pretendard Light" pitchFamily="34" charset="-120"/>
               </a:rPr>
               <a:t>보정의 목적은 예쁘게가 아니라 톤을 맞추는 것입니다.</a:t>
             </a:r>
             <a:endParaRPr lang="en-US" sz="1350" dirty="0"/>
+          </a:p>
+        </p:txBody>
+      </p:sp>
+      <p:sp>
+        <p:nvSpPr>
+          <p:cNvPr id="14" name="Text 12"/>
+          <p:cNvSpPr/>
+          <p:nvPr/>
+        </p:nvSpPr>
+        <p:spPr>
+          <a:xfrm rot="16200000">
+            <a:off x="10436047" y="3291840"/>
+            <a:ext cx="2743200" cy="274320"/>
+          </a:xfrm>
+          <a:prstGeom prst="rect">
+            <a:avLst/>
+          </a:prstGeom>
+          <a:noFill/>
+          <a:ln/>
+        </p:spPr>
+        <p:txBody>
+          <a:bodyPr wrap="square" lIns="0" tIns="0" rIns="0" bIns="0" rtlCol="0" anchor="ctr"/>
+          <a:lstStyle/>
+          <a:p>
+            <a:pPr algn="ctr" indent="0" marL="0">
+              <a:buNone/>
+            </a:pPr>
+            <a:r>
+              <a:rPr lang="en-US" sz="850" spc="260" kern="0" dirty="0">
+                <a:solidFill>
+                  <a:srgbClr val="7A7A7A"/>
+                </a:solidFill>
+                <a:latin typeface="Pretendard" pitchFamily="34" charset="0"/>
+                <a:ea typeface="Pretendard" pitchFamily="34" charset="-122"/>
+                <a:cs typeface="Pretendard" pitchFamily="34" charset="-120"/>
+              </a:rPr>
+              <a:t>SECTION 02</a:t>
+            </a:r>
+            <a:endParaRPr lang="en-US" sz="850" dirty="0"/>
           </a:p>
         </p:txBody>
       </p:sp>
@@ -5755,34 +7318,34 @@
         </p:nvSpPr>
         <p:spPr>
           <a:xfrm>
-            <a:off x="640080" y="566928"/>
-            <a:ext cx="10911535" cy="237744"/>
-          </a:xfrm>
-          <a:prstGeom prst="rect">
-            <a:avLst/>
-          </a:prstGeom>
-          <a:noFill/>
-          <a:ln/>
-        </p:spPr>
-        <p:txBody>
-          <a:bodyPr wrap="square" lIns="0" tIns="0" rIns="0" bIns="0" rtlCol="0" anchor="ctr"/>
-          <a:lstStyle/>
-          <a:p>
-            <a:pPr indent="0" marL="0">
-              <a:buNone/>
-            </a:pPr>
-            <a:r>
-              <a:rPr lang="en-US" sz="1100" b="1" spc="140" kern="0" dirty="0">
-                <a:solidFill>
-                  <a:srgbClr val="FF4A1C"/>
-                </a:solidFill>
-                <a:latin typeface="Pretendard" pitchFamily="34" charset="0"/>
-                <a:ea typeface="Pretendard" pitchFamily="34" charset="-122"/>
-                <a:cs typeface="Pretendard" pitchFamily="34" charset="-120"/>
-              </a:rPr>
-              <a:t>IMAGE</a:t>
-            </a:r>
-            <a:endParaRPr lang="en-US" sz="1100" dirty="0"/>
+            <a:off x="640080" y="274320"/>
+            <a:ext cx="3657600" cy="219456"/>
+          </a:xfrm>
+          <a:prstGeom prst="rect">
+            <a:avLst/>
+          </a:prstGeom>
+          <a:noFill/>
+          <a:ln/>
+        </p:spPr>
+        <p:txBody>
+          <a:bodyPr wrap="square" lIns="0" tIns="0" rIns="0" bIns="0" rtlCol="0" anchor="ctr"/>
+          <a:lstStyle/>
+          <a:p>
+            <a:pPr indent="0" marL="0">
+              <a:buNone/>
+            </a:pPr>
+            <a:r>
+              <a:rPr lang="en-US" sz="900" spc="120" kern="0" dirty="0">
+                <a:solidFill>
+                  <a:srgbClr val="8A8A8A"/>
+                </a:solidFill>
+                <a:latin typeface="Pretendard" pitchFamily="34" charset="0"/>
+                <a:ea typeface="Pretendard" pitchFamily="34" charset="-122"/>
+                <a:cs typeface="Pretendard" pitchFamily="34" charset="-120"/>
+              </a:rPr>
+              <a:t>포트폴리오제작</a:t>
+            </a:r>
+            <a:endParaRPr lang="en-US" sz="900" dirty="0"/>
           </a:p>
         </p:txBody>
       </p:sp>
@@ -5794,34 +7357,34 @@
         </p:nvSpPr>
         <p:spPr>
           <a:xfrm>
-            <a:off x="640080" y="859536"/>
-            <a:ext cx="10911535" cy="512064"/>
-          </a:xfrm>
-          <a:prstGeom prst="rect">
-            <a:avLst/>
-          </a:prstGeom>
-          <a:noFill/>
-          <a:ln/>
-        </p:spPr>
-        <p:txBody>
-          <a:bodyPr wrap="square" lIns="0" tIns="0" rIns="0" bIns="0" rtlCol="0" anchor="ctr"/>
-          <a:lstStyle/>
-          <a:p>
-            <a:pPr indent="0" marL="0">
-              <a:buNone/>
-            </a:pPr>
-            <a:r>
-              <a:rPr lang="en-US" sz="2800" b="1" dirty="0">
-                <a:solidFill>
-                  <a:srgbClr val="14161B"/>
-                </a:solidFill>
-                <a:latin typeface="Pretendard" pitchFamily="34" charset="0"/>
-                <a:ea typeface="Pretendard" pitchFamily="34" charset="-122"/>
-                <a:cs typeface="Pretendard" pitchFamily="34" charset="-120"/>
-              </a:rPr>
-              <a:t>이미지 보정 — 이 셋만</a:t>
-            </a:r>
-            <a:endParaRPr lang="en-US" sz="2800" dirty="0"/>
+            <a:off x="4480560" y="274320"/>
+            <a:ext cx="4572000" cy="219456"/>
+          </a:xfrm>
+          <a:prstGeom prst="rect">
+            <a:avLst/>
+          </a:prstGeom>
+          <a:noFill/>
+          <a:ln/>
+        </p:spPr>
+        <p:txBody>
+          <a:bodyPr wrap="square" lIns="0" tIns="0" rIns="0" bIns="0" rtlCol="0" anchor="ctr"/>
+          <a:lstStyle/>
+          <a:p>
+            <a:pPr algn="ctr" indent="0" marL="0">
+              <a:buNone/>
+            </a:pPr>
+            <a:r>
+              <a:rPr lang="en-US" sz="900" spc="120" kern="0" dirty="0">
+                <a:solidFill>
+                  <a:srgbClr val="8A8A8A"/>
+                </a:solidFill>
+                <a:latin typeface="Pretendard" pitchFamily="34" charset="0"/>
+                <a:ea typeface="Pretendard" pitchFamily="34" charset="-122"/>
+                <a:cs typeface="Pretendard" pitchFamily="34" charset="-120"/>
+              </a:rPr>
+              <a:t>PHASE 3 완성과 발표</a:t>
+            </a:r>
+            <a:endParaRPr lang="en-US" sz="900" dirty="0"/>
           </a:p>
         </p:txBody>
       </p:sp>
@@ -5833,34 +7396,34 @@
         </p:nvSpPr>
         <p:spPr>
           <a:xfrm>
-            <a:off x="640080" y="1371600"/>
-            <a:ext cx="10911535" cy="237744"/>
-          </a:xfrm>
-          <a:prstGeom prst="rect">
-            <a:avLst/>
-          </a:prstGeom>
-          <a:noFill/>
-          <a:ln/>
-        </p:spPr>
-        <p:txBody>
-          <a:bodyPr wrap="square" lIns="0" tIns="0" rIns="0" bIns="0" rtlCol="0" anchor="ctr"/>
-          <a:lstStyle/>
-          <a:p>
-            <a:pPr indent="0" marL="0">
-              <a:buNone/>
-            </a:pPr>
-            <a:r>
-              <a:rPr lang="en-US" sz="1200" dirty="0">
-                <a:solidFill>
-                  <a:srgbClr val="6B7280"/>
-                </a:solidFill>
-                <a:latin typeface="Pretendard" pitchFamily="34" charset="0"/>
-                <a:ea typeface="Pretendard" pitchFamily="34" charset="-122"/>
-                <a:cs typeface="Pretendard" pitchFamily="34" charset="-120"/>
-              </a:rPr>
-              <a:t>복잡한 리터칭은 필요 없습니다. 톤이 맞으면 충분합니다.</a:t>
-            </a:r>
-            <a:endParaRPr lang="en-US" sz="1200" dirty="0"/>
+            <a:off x="8808415" y="274320"/>
+            <a:ext cx="2743200" cy="219456"/>
+          </a:xfrm>
+          <a:prstGeom prst="rect">
+            <a:avLst/>
+          </a:prstGeom>
+          <a:noFill/>
+          <a:ln/>
+        </p:spPr>
+        <p:txBody>
+          <a:bodyPr wrap="square" lIns="0" tIns="0" rIns="0" bIns="0" rtlCol="0" anchor="ctr"/>
+          <a:lstStyle/>
+          <a:p>
+            <a:pPr algn="r" indent="0" marL="0">
+              <a:buNone/>
+            </a:pPr>
+            <a:r>
+              <a:rPr lang="en-US" sz="900" spc="200" kern="0" dirty="0">
+                <a:solidFill>
+                  <a:srgbClr val="8A8A8A"/>
+                </a:solidFill>
+                <a:latin typeface="Pretendard" pitchFamily="34" charset="0"/>
+                <a:ea typeface="Pretendard" pitchFamily="34" charset="-122"/>
+                <a:cs typeface="Pretendard" pitchFamily="34" charset="-120"/>
+              </a:rPr>
+              <a:t>WEEK 11</a:t>
+            </a:r>
+            <a:endParaRPr lang="en-US" sz="900" dirty="0"/>
           </a:p>
         </p:txBody>
       </p:sp>
@@ -5872,20 +7435,18 @@
         </p:nvSpPr>
         <p:spPr>
           <a:xfrm>
-            <a:off x="640080" y="1737360"/>
-            <a:ext cx="3393338" cy="3035808"/>
-          </a:xfrm>
-          <a:prstGeom prst="roundRect">
-            <a:avLst>
-              <a:gd name="adj" fmla="val 2410"/>
-            </a:avLst>
+            <a:off x="640080" y="548640"/>
+            <a:ext cx="10911535" cy="7315"/>
+          </a:xfrm>
+          <a:prstGeom prst="rect">
+            <a:avLst/>
           </a:prstGeom>
           <a:solidFill>
-            <a:srgbClr val="F4F5F7"/>
+            <a:srgbClr val="DCDCDC"/>
           </a:solidFill>
           <a:ln w="12700">
             <a:solidFill>
-              <a:srgbClr val="E4E6EB"/>
+              <a:srgbClr val="DCDCDC"/>
             </a:solidFill>
             <a:prstDash val="solid"/>
           </a:ln>
@@ -5893,26 +7454,141 @@
       </p:sp>
       <p:sp>
         <p:nvSpPr>
-          <p:cNvPr id="6" name="Shape 4"/>
-          <p:cNvSpPr/>
-          <p:nvPr/>
-        </p:nvSpPr>
-        <p:spPr>
-          <a:xfrm>
-            <a:off x="1024128" y="2011680"/>
-            <a:ext cx="365760" cy="365760"/>
-          </a:xfrm>
-          <a:prstGeom prst="roundRect">
-            <a:avLst>
-              <a:gd name="adj" fmla="val 15000"/>
-            </a:avLst>
+          <p:cNvPr id="6" name="Text 4"/>
+          <p:cNvSpPr/>
+          <p:nvPr/>
+        </p:nvSpPr>
+        <p:spPr>
+          <a:xfrm>
+            <a:off x="640080" y="640080"/>
+            <a:ext cx="10911535" cy="219456"/>
+          </a:xfrm>
+          <a:prstGeom prst="rect">
+            <a:avLst/>
+          </a:prstGeom>
+          <a:noFill/>
+          <a:ln/>
+        </p:spPr>
+        <p:txBody>
+          <a:bodyPr wrap="square" lIns="0" tIns="0" rIns="0" bIns="0" rtlCol="0" anchor="ctr"/>
+          <a:lstStyle/>
+          <a:p>
+            <a:pPr indent="0" marL="0">
+              <a:buNone/>
+            </a:pPr>
+            <a:r>
+              <a:rPr lang="en-US" sz="950" spc="260" kern="0" dirty="0">
+                <a:solidFill>
+                  <a:srgbClr val="8A8A8A"/>
+                </a:solidFill>
+                <a:latin typeface="Pretendard" pitchFamily="34" charset="0"/>
+                <a:ea typeface="Pretendard" pitchFamily="34" charset="-122"/>
+                <a:cs typeface="Pretendard" pitchFamily="34" charset="-120"/>
+              </a:rPr>
+              <a:t>IMAGE</a:t>
+            </a:r>
+            <a:endParaRPr lang="en-US" sz="950" dirty="0"/>
+          </a:p>
+        </p:txBody>
+      </p:sp>
+      <p:sp>
+        <p:nvSpPr>
+          <p:cNvPr id="7" name="Text 5"/>
+          <p:cNvSpPr/>
+          <p:nvPr/>
+        </p:nvSpPr>
+        <p:spPr>
+          <a:xfrm>
+            <a:off x="640080" y="859536"/>
+            <a:ext cx="10911535" cy="475488"/>
+          </a:xfrm>
+          <a:prstGeom prst="rect">
+            <a:avLst/>
+          </a:prstGeom>
+          <a:noFill/>
+          <a:ln/>
+        </p:spPr>
+        <p:txBody>
+          <a:bodyPr wrap="square" lIns="0" tIns="0" rIns="0" bIns="0" rtlCol="0" anchor="ctr"/>
+          <a:lstStyle/>
+          <a:p>
+            <a:pPr indent="0" marL="0">
+              <a:buNone/>
+            </a:pPr>
+            <a:r>
+              <a:rPr lang="en-US" sz="3000" dirty="0">
+                <a:solidFill>
+                  <a:srgbClr val="111111"/>
+                </a:solidFill>
+                <a:latin typeface="Pretendard Black" pitchFamily="34" charset="0"/>
+                <a:ea typeface="Pretendard Black" pitchFamily="34" charset="-122"/>
+                <a:cs typeface="Pretendard Black" pitchFamily="34" charset="-120"/>
+              </a:rPr>
+              <a:t>이미지 보정 — 이 셋만</a:t>
+            </a:r>
+            <a:endParaRPr lang="en-US" sz="3000" dirty="0"/>
+          </a:p>
+        </p:txBody>
+      </p:sp>
+      <p:sp>
+        <p:nvSpPr>
+          <p:cNvPr id="8" name="Text 6"/>
+          <p:cNvSpPr/>
+          <p:nvPr/>
+        </p:nvSpPr>
+        <p:spPr>
+          <a:xfrm>
+            <a:off x="640080" y="1371600"/>
+            <a:ext cx="10911535" cy="219456"/>
+          </a:xfrm>
+          <a:prstGeom prst="rect">
+            <a:avLst/>
+          </a:prstGeom>
+          <a:noFill/>
+          <a:ln/>
+        </p:spPr>
+        <p:txBody>
+          <a:bodyPr wrap="square" lIns="0" tIns="0" rIns="0" bIns="0" rtlCol="0" anchor="ctr"/>
+          <a:lstStyle/>
+          <a:p>
+            <a:pPr indent="0" marL="0">
+              <a:buNone/>
+            </a:pPr>
+            <a:r>
+              <a:rPr lang="en-US" sz="1150" dirty="0">
+                <a:solidFill>
+                  <a:srgbClr val="6E6E6E"/>
+                </a:solidFill>
+                <a:latin typeface="Pretendard" pitchFamily="34" charset="0"/>
+                <a:ea typeface="Pretendard" pitchFamily="34" charset="-122"/>
+                <a:cs typeface="Pretendard" pitchFamily="34" charset="-120"/>
+              </a:rPr>
+              <a:t>복잡한 리터칭은 필요 없습니다. 톤이 맞으면 충분합니다.</a:t>
+            </a:r>
+            <a:endParaRPr lang="en-US" sz="1150" dirty="0"/>
+          </a:p>
+        </p:txBody>
+      </p:sp>
+      <p:sp>
+        <p:nvSpPr>
+          <p:cNvPr id="9" name="Shape 7"/>
+          <p:cNvSpPr/>
+          <p:nvPr/>
+        </p:nvSpPr>
+        <p:spPr>
+          <a:xfrm>
+            <a:off x="640080" y="1737360"/>
+            <a:ext cx="3393338" cy="3035808"/>
+          </a:xfrm>
+          <a:prstGeom prst="rect">
+            <a:avLst/>
           </a:prstGeom>
           <a:solidFill>
-            <a:srgbClr val="14161B"/>
+            <a:srgbClr val="FFFFFF"/>
           </a:solidFill>
-          <a:ln w="6350">
+          <a:ln w="12700">
             <a:solidFill>
-              <a:srgbClr val="14161B"/>
+              <a:srgbClr val="DCDCDC"/>
             </a:solidFill>
             <a:prstDash val="solid"/>
           </a:ln>
@@ -5920,7 +7596,7 @@
       </p:sp>
       <p:sp>
         <p:nvSpPr>
-          <p:cNvPr id="7" name="Text 5"/>
+          <p:cNvPr id="10" name="Shape 8"/>
           <p:cNvSpPr/>
           <p:nvPr/>
         </p:nvSpPr>
@@ -5929,6 +7605,31 @@
             <a:off x="1024128" y="2011680"/>
             <a:ext cx="365760" cy="365760"/>
           </a:xfrm>
+          <a:prstGeom prst="ellipse">
+            <a:avLst/>
+          </a:prstGeom>
+          <a:solidFill>
+            <a:srgbClr val="FFFFFF"/>
+          </a:solidFill>
+          <a:ln w="12700">
+            <a:solidFill>
+              <a:srgbClr val="111111"/>
+            </a:solidFill>
+            <a:prstDash val="solid"/>
+          </a:ln>
+        </p:spPr>
+      </p:sp>
+      <p:sp>
+        <p:nvSpPr>
+          <p:cNvPr id="11" name="Text 9"/>
+          <p:cNvSpPr/>
+          <p:nvPr/>
+        </p:nvSpPr>
+        <p:spPr>
+          <a:xfrm>
+            <a:off x="1024128" y="2011680"/>
+            <a:ext cx="365760" cy="365760"/>
+          </a:xfrm>
           <a:prstGeom prst="rect">
             <a:avLst/>
           </a:prstGeom>
@@ -5943,9 +7644,9 @@
               <a:buNone/>
             </a:pPr>
             <a:r>
-              <a:rPr lang="en-US" sz="1200" b="1" dirty="0">
-                <a:solidFill>
-                  <a:srgbClr val="FFFFFF"/>
+              <a:rPr lang="en-US" sz="1150" b="1" dirty="0">
+                <a:solidFill>
+                  <a:srgbClr val="111111"/>
                 </a:solidFill>
                 <a:latin typeface="Pretendard" pitchFamily="34" charset="0"/>
                 <a:ea typeface="Pretendard" pitchFamily="34" charset="-122"/>
@@ -5953,13 +7654,13 @@
               </a:rPr>
               <a:t>01</a:t>
             </a:r>
-            <a:endParaRPr lang="en-US" sz="1200" dirty="0"/>
-          </a:p>
-        </p:txBody>
-      </p:sp>
-      <p:sp>
-        <p:nvSpPr>
-          <p:cNvPr id="8" name="Text 6"/>
+            <a:endParaRPr lang="en-US" sz="1150" dirty="0"/>
+          </a:p>
+        </p:txBody>
+      </p:sp>
+      <p:sp>
+        <p:nvSpPr>
+          <p:cNvPr id="12" name="Text 10"/>
           <p:cNvSpPr/>
           <p:nvPr/>
         </p:nvSpPr>
@@ -5985,13 +7686,13 @@
               <a:buNone/>
             </a:pPr>
             <a:r>
-              <a:rPr lang="en-US" sz="1700" b="1" dirty="0">
-                <a:solidFill>
-                  <a:srgbClr val="14161B"/>
-                </a:solidFill>
-                <a:latin typeface="Pretendard" pitchFamily="34" charset="0"/>
-                <a:ea typeface="Pretendard" pitchFamily="34" charset="-122"/>
-                <a:cs typeface="Pretendard" pitchFamily="34" charset="-120"/>
+              <a:rPr lang="en-US" sz="1700" dirty="0">
+                <a:solidFill>
+                  <a:srgbClr val="111111"/>
+                </a:solidFill>
+                <a:latin typeface="Pretendard Black" pitchFamily="34" charset="0"/>
+                <a:ea typeface="Pretendard Black" pitchFamily="34" charset="-122"/>
+                <a:cs typeface="Pretendard Black" pitchFamily="34" charset="-120"/>
               </a:rPr>
               <a:t>밝기와 대비 맞추기</a:t>
             </a:r>
@@ -6001,7 +7702,7 @@
       </p:sp>
       <p:sp>
         <p:nvSpPr>
-          <p:cNvPr id="9" name="Text 7"/>
+          <p:cNvPr id="13" name="Text 11"/>
           <p:cNvSpPr/>
           <p:nvPr/>
         </p:nvSpPr>
@@ -6029,7 +7730,7 @@
             <a:r>
               <a:rPr lang="en-US" sz="1150" dirty="0">
                 <a:solidFill>
-                  <a:srgbClr val="6B7280"/>
+                  <a:srgbClr val="6E6E6E"/>
                 </a:solidFill>
                 <a:latin typeface="Pretendard" pitchFamily="34" charset="0"/>
                 <a:ea typeface="Pretendard" pitchFamily="34" charset="-122"/>
@@ -6043,7 +7744,7 @@
       </p:sp>
       <p:sp>
         <p:nvSpPr>
-          <p:cNvPr id="10" name="Shape 8"/>
+          <p:cNvPr id="14" name="Shape 12"/>
           <p:cNvSpPr/>
           <p:nvPr/>
         </p:nvSpPr>
@@ -6052,17 +7753,15 @@
             <a:off x="4399178" y="1737360"/>
             <a:ext cx="3393338" cy="3035808"/>
           </a:xfrm>
-          <a:prstGeom prst="roundRect">
-            <a:avLst>
-              <a:gd name="adj" fmla="val 2410"/>
-            </a:avLst>
+          <a:prstGeom prst="rect">
+            <a:avLst/>
           </a:prstGeom>
           <a:solidFill>
-            <a:srgbClr val="14161B"/>
+            <a:srgbClr val="111111"/>
           </a:solidFill>
           <a:ln w="12700">
             <a:solidFill>
-              <a:srgbClr val="14161B"/>
+              <a:srgbClr val="111111"/>
             </a:solidFill>
             <a:prstDash val="solid"/>
           </a:ln>
@@ -6070,7 +7769,7 @@
       </p:sp>
       <p:sp>
         <p:nvSpPr>
-          <p:cNvPr id="11" name="Shape 9"/>
+          <p:cNvPr id="15" name="Shape 13"/>
           <p:cNvSpPr/>
           <p:nvPr/>
         </p:nvSpPr>
@@ -6079,17 +7778,15 @@
             <a:off x="4783226" y="2011680"/>
             <a:ext cx="365760" cy="365760"/>
           </a:xfrm>
-          <a:prstGeom prst="roundRect">
-            <a:avLst>
-              <a:gd name="adj" fmla="val 15000"/>
-            </a:avLst>
+          <a:prstGeom prst="ellipse">
+            <a:avLst/>
           </a:prstGeom>
           <a:solidFill>
-            <a:srgbClr val="FF4A1C"/>
+            <a:srgbClr val="111111"/>
           </a:solidFill>
-          <a:ln w="6350">
+          <a:ln w="12700">
             <a:solidFill>
-              <a:srgbClr val="FF4A1C"/>
+              <a:srgbClr val="FFFFFF"/>
             </a:solidFill>
             <a:prstDash val="solid"/>
           </a:ln>
@@ -6097,7 +7794,7 @@
       </p:sp>
       <p:sp>
         <p:nvSpPr>
-          <p:cNvPr id="12" name="Text 10"/>
+          <p:cNvPr id="16" name="Text 14"/>
           <p:cNvSpPr/>
           <p:nvPr/>
         </p:nvSpPr>
@@ -6120,7 +7817,7 @@
               <a:buNone/>
             </a:pPr>
             <a:r>
-              <a:rPr lang="en-US" sz="1200" b="1" dirty="0">
+              <a:rPr lang="en-US" sz="1150" b="1" dirty="0">
                 <a:solidFill>
                   <a:srgbClr val="FFFFFF"/>
                 </a:solidFill>
@@ -6130,13 +7827,13 @@
               </a:rPr>
               <a:t>02</a:t>
             </a:r>
-            <a:endParaRPr lang="en-US" sz="1200" dirty="0"/>
-          </a:p>
-        </p:txBody>
-      </p:sp>
-      <p:sp>
-        <p:nvSpPr>
-          <p:cNvPr id="13" name="Text 11"/>
+            <a:endParaRPr lang="en-US" sz="1150" dirty="0"/>
+          </a:p>
+        </p:txBody>
+      </p:sp>
+      <p:sp>
+        <p:nvSpPr>
+          <p:cNvPr id="17" name="Text 15"/>
           <p:cNvSpPr/>
           <p:nvPr/>
         </p:nvSpPr>
@@ -6162,13 +7859,13 @@
               <a:buNone/>
             </a:pPr>
             <a:r>
-              <a:rPr lang="en-US" sz="1700" b="1" dirty="0">
+              <a:rPr lang="en-US" sz="1700" dirty="0">
                 <a:solidFill>
                   <a:srgbClr val="FFFFFF"/>
                 </a:solidFill>
-                <a:latin typeface="Pretendard" pitchFamily="34" charset="0"/>
-                <a:ea typeface="Pretendard" pitchFamily="34" charset="-122"/>
-                <a:cs typeface="Pretendard" pitchFamily="34" charset="-120"/>
+                <a:latin typeface="Pretendard Black" pitchFamily="34" charset="0"/>
+                <a:ea typeface="Pretendard Black" pitchFamily="34" charset="-122"/>
+                <a:cs typeface="Pretendard Black" pitchFamily="34" charset="-120"/>
               </a:rPr>
               <a:t>색온도 통일</a:t>
             </a:r>
@@ -6178,7 +7875,7 @@
       </p:sp>
       <p:sp>
         <p:nvSpPr>
-          <p:cNvPr id="14" name="Text 12"/>
+          <p:cNvPr id="18" name="Text 16"/>
           <p:cNvSpPr/>
           <p:nvPr/>
         </p:nvSpPr>
@@ -6206,7 +7903,7 @@
             <a:r>
               <a:rPr lang="en-US" sz="1150" dirty="0">
                 <a:solidFill>
-                  <a:srgbClr val="AEB4BF"/>
+                  <a:srgbClr val="B8B8B8"/>
                 </a:solidFill>
                 <a:latin typeface="Pretendard" pitchFamily="34" charset="0"/>
                 <a:ea typeface="Pretendard" pitchFamily="34" charset="-122"/>
@@ -6220,7 +7917,7 @@
       </p:sp>
       <p:sp>
         <p:nvSpPr>
-          <p:cNvPr id="15" name="Shape 13"/>
+          <p:cNvPr id="19" name="Shape 17"/>
           <p:cNvSpPr/>
           <p:nvPr/>
         </p:nvSpPr>
@@ -6229,17 +7926,15 @@
             <a:off x="8158277" y="1737360"/>
             <a:ext cx="3393338" cy="3035808"/>
           </a:xfrm>
-          <a:prstGeom prst="roundRect">
-            <a:avLst>
-              <a:gd name="adj" fmla="val 2410"/>
-            </a:avLst>
+          <a:prstGeom prst="rect">
+            <a:avLst/>
           </a:prstGeom>
           <a:solidFill>
-            <a:srgbClr val="F4F5F7"/>
+            <a:srgbClr val="FFFFFF"/>
           </a:solidFill>
           <a:ln w="12700">
             <a:solidFill>
-              <a:srgbClr val="E4E6EB"/>
+              <a:srgbClr val="DCDCDC"/>
             </a:solidFill>
             <a:prstDash val="solid"/>
           </a:ln>
@@ -6247,7 +7942,7 @@
       </p:sp>
       <p:sp>
         <p:nvSpPr>
-          <p:cNvPr id="16" name="Shape 14"/>
+          <p:cNvPr id="20" name="Shape 18"/>
           <p:cNvSpPr/>
           <p:nvPr/>
         </p:nvSpPr>
@@ -6256,17 +7951,15 @@
             <a:off x="8542325" y="2011680"/>
             <a:ext cx="365760" cy="365760"/>
           </a:xfrm>
-          <a:prstGeom prst="roundRect">
-            <a:avLst>
-              <a:gd name="adj" fmla="val 15000"/>
-            </a:avLst>
+          <a:prstGeom prst="ellipse">
+            <a:avLst/>
           </a:prstGeom>
           <a:solidFill>
-            <a:srgbClr val="14161B"/>
+            <a:srgbClr val="FFFFFF"/>
           </a:solidFill>
-          <a:ln w="6350">
+          <a:ln w="12700">
             <a:solidFill>
-              <a:srgbClr val="14161B"/>
+              <a:srgbClr val="111111"/>
             </a:solidFill>
             <a:prstDash val="solid"/>
           </a:ln>
@@ -6274,7 +7967,7 @@
       </p:sp>
       <p:sp>
         <p:nvSpPr>
-          <p:cNvPr id="17" name="Text 15"/>
+          <p:cNvPr id="21" name="Text 19"/>
           <p:cNvSpPr/>
           <p:nvPr/>
         </p:nvSpPr>
@@ -6297,9 +7990,9 @@
               <a:buNone/>
             </a:pPr>
             <a:r>
-              <a:rPr lang="en-US" sz="1200" b="1" dirty="0">
-                <a:solidFill>
-                  <a:srgbClr val="FFFFFF"/>
+              <a:rPr lang="en-US" sz="1150" b="1" dirty="0">
+                <a:solidFill>
+                  <a:srgbClr val="111111"/>
                 </a:solidFill>
                 <a:latin typeface="Pretendard" pitchFamily="34" charset="0"/>
                 <a:ea typeface="Pretendard" pitchFamily="34" charset="-122"/>
@@ -6307,13 +8000,13 @@
               </a:rPr>
               <a:t>03</a:t>
             </a:r>
-            <a:endParaRPr lang="en-US" sz="1200" dirty="0"/>
-          </a:p>
-        </p:txBody>
-      </p:sp>
-      <p:sp>
-        <p:nvSpPr>
-          <p:cNvPr id="18" name="Text 16"/>
+            <a:endParaRPr lang="en-US" sz="1150" dirty="0"/>
+          </a:p>
+        </p:txBody>
+      </p:sp>
+      <p:sp>
+        <p:nvSpPr>
+          <p:cNvPr id="22" name="Text 20"/>
           <p:cNvSpPr/>
           <p:nvPr/>
         </p:nvSpPr>
@@ -6339,13 +8032,13 @@
               <a:buNone/>
             </a:pPr>
             <a:r>
-              <a:rPr lang="en-US" sz="1700" b="1" dirty="0">
-                <a:solidFill>
-                  <a:srgbClr val="14161B"/>
-                </a:solidFill>
-                <a:latin typeface="Pretendard" pitchFamily="34" charset="0"/>
-                <a:ea typeface="Pretendard" pitchFamily="34" charset="-122"/>
-                <a:cs typeface="Pretendard" pitchFamily="34" charset="-120"/>
+              <a:rPr lang="en-US" sz="1700" dirty="0">
+                <a:solidFill>
+                  <a:srgbClr val="111111"/>
+                </a:solidFill>
+                <a:latin typeface="Pretendard Black" pitchFamily="34" charset="0"/>
+                <a:ea typeface="Pretendard Black" pitchFamily="34" charset="-122"/>
+                <a:cs typeface="Pretendard Black" pitchFamily="34" charset="-120"/>
               </a:rPr>
               <a:t>크롭과 배경 정리</a:t>
             </a:r>
@@ -6355,7 +8048,7 @@
       </p:sp>
       <p:sp>
         <p:nvSpPr>
-          <p:cNvPr id="19" name="Text 17"/>
+          <p:cNvPr id="23" name="Text 21"/>
           <p:cNvSpPr/>
           <p:nvPr/>
         </p:nvSpPr>
@@ -6383,7 +8076,7 @@
             <a:r>
               <a:rPr lang="en-US" sz="1150" dirty="0">
                 <a:solidFill>
-                  <a:srgbClr val="6B7280"/>
+                  <a:srgbClr val="6E6E6E"/>
                 </a:solidFill>
                 <a:latin typeface="Pretendard" pitchFamily="34" charset="0"/>
                 <a:ea typeface="Pretendard" pitchFamily="34" charset="-122"/>
@@ -6397,13 +8090,38 @@
       </p:sp>
       <p:sp>
         <p:nvSpPr>
-          <p:cNvPr id="20" name="Text 18"/>
-          <p:cNvSpPr/>
-          <p:nvPr/>
-        </p:nvSpPr>
-        <p:spPr>
-          <a:xfrm>
-            <a:off x="640080" y="5138928"/>
+          <p:cNvPr id="24" name="Shape 22"/>
+          <p:cNvSpPr/>
+          <p:nvPr/>
+        </p:nvSpPr>
+        <p:spPr>
+          <a:xfrm>
+            <a:off x="640080" y="5084064"/>
+            <a:ext cx="10911535" cy="7315"/>
+          </a:xfrm>
+          <a:prstGeom prst="rect">
+            <a:avLst/>
+          </a:prstGeom>
+          <a:solidFill>
+            <a:srgbClr val="111111"/>
+          </a:solidFill>
+          <a:ln w="12700">
+            <a:solidFill>
+              <a:srgbClr val="111111"/>
+            </a:solidFill>
+            <a:prstDash val="solid"/>
+          </a:ln>
+        </p:spPr>
+      </p:sp>
+      <p:sp>
+        <p:nvSpPr>
+          <p:cNvPr id="25" name="Text 23"/>
+          <p:cNvSpPr/>
+          <p:nvPr/>
+        </p:nvSpPr>
+        <p:spPr>
+          <a:xfrm>
+            <a:off x="640080" y="5193792"/>
             <a:ext cx="10911535" cy="438912"/>
           </a:xfrm>
           <a:prstGeom prst="rect">
@@ -6425,7 +8143,7 @@
             <a:r>
               <a:rPr lang="en-US" sz="1300" b="1" dirty="0">
                 <a:solidFill>
-                  <a:srgbClr val="FF4A1C"/>
+                  <a:srgbClr val="111111"/>
                 </a:solidFill>
                 <a:latin typeface="Pretendard" pitchFamily="34" charset="0"/>
                 <a:ea typeface="Pretendard" pitchFamily="34" charset="-122"/>
@@ -6439,32 +8157,57 @@
       </p:sp>
       <p:sp>
         <p:nvSpPr>
-          <p:cNvPr id="21" name="Text 19"/>
-          <p:cNvSpPr/>
-          <p:nvPr/>
-        </p:nvSpPr>
-        <p:spPr>
-          <a:xfrm>
-            <a:off x="640080" y="6345936"/>
-            <a:ext cx="7772400" cy="256032"/>
-          </a:xfrm>
-          <a:prstGeom prst="rect">
-            <a:avLst/>
-          </a:prstGeom>
-          <a:noFill/>
-          <a:ln/>
-        </p:spPr>
-        <p:txBody>
-          <a:bodyPr wrap="square" lIns="0" tIns="0" rIns="0" bIns="0" rtlCol="0" anchor="ctr"/>
-          <a:lstStyle/>
-          <a:p>
-            <a:pPr indent="0" marL="0">
-              <a:buNone/>
-            </a:pPr>
-            <a:r>
-              <a:rPr lang="en-US" sz="900" dirty="0">
-                <a:solidFill>
-                  <a:srgbClr val="9AA0AA"/>
+          <p:cNvPr id="26" name="Shape 24"/>
+          <p:cNvSpPr/>
+          <p:nvPr/>
+        </p:nvSpPr>
+        <p:spPr>
+          <a:xfrm>
+            <a:off x="640080" y="6291072"/>
+            <a:ext cx="10911535" cy="7315"/>
+          </a:xfrm>
+          <a:prstGeom prst="rect">
+            <a:avLst/>
+          </a:prstGeom>
+          <a:solidFill>
+            <a:srgbClr val="DCDCDC"/>
+          </a:solidFill>
+          <a:ln w="12700">
+            <a:solidFill>
+              <a:srgbClr val="DCDCDC"/>
+            </a:solidFill>
+            <a:prstDash val="solid"/>
+          </a:ln>
+        </p:spPr>
+      </p:sp>
+      <p:sp>
+        <p:nvSpPr>
+          <p:cNvPr id="27" name="Text 25"/>
+          <p:cNvSpPr/>
+          <p:nvPr/>
+        </p:nvSpPr>
+        <p:spPr>
+          <a:xfrm>
+            <a:off x="640080" y="6382512"/>
+            <a:ext cx="7772400" cy="237744"/>
+          </a:xfrm>
+          <a:prstGeom prst="rect">
+            <a:avLst/>
+          </a:prstGeom>
+          <a:noFill/>
+          <a:ln/>
+        </p:spPr>
+        <p:txBody>
+          <a:bodyPr wrap="square" lIns="0" tIns="0" rIns="0" bIns="0" rtlCol="0" anchor="ctr"/>
+          <a:lstStyle/>
+          <a:p>
+            <a:pPr indent="0" marL="0">
+              <a:buNone/>
+            </a:pPr>
+            <a:r>
+              <a:rPr lang="en-US" sz="850" spc="40" kern="0" dirty="0">
+                <a:solidFill>
+                  <a:srgbClr val="9B9B9B"/>
                 </a:solidFill>
                 <a:latin typeface="Pretendard" pitchFamily="34" charset="0"/>
                 <a:ea typeface="Pretendard" pitchFamily="34" charset="-122"/>
@@ -6472,20 +8215,20 @@
               </a:rPr>
               <a:t>포트폴리오제작 · 11주차 편집디자인 실습 Ⅱ</a:t>
             </a:r>
-            <a:endParaRPr lang="en-US" sz="900" dirty="0"/>
-          </a:p>
-        </p:txBody>
-      </p:sp>
-      <p:sp>
-        <p:nvSpPr>
-          <p:cNvPr id="22" name="Text 20"/>
-          <p:cNvSpPr/>
-          <p:nvPr/>
-        </p:nvSpPr>
-        <p:spPr>
-          <a:xfrm>
-            <a:off x="10454335" y="6345936"/>
-            <a:ext cx="1097280" cy="256032"/>
+            <a:endParaRPr lang="en-US" sz="850" dirty="0"/>
+          </a:p>
+        </p:txBody>
+      </p:sp>
+      <p:sp>
+        <p:nvSpPr>
+          <p:cNvPr id="28" name="Text 26"/>
+          <p:cNvSpPr/>
+          <p:nvPr/>
+        </p:nvSpPr>
+        <p:spPr>
+          <a:xfrm>
+            <a:off x="10271455" y="6382512"/>
+            <a:ext cx="1280160" cy="237744"/>
           </a:xfrm>
           <a:prstGeom prst="rect">
             <a:avLst/>
@@ -6501,17 +8244,17 @@
               <a:buNone/>
             </a:pPr>
             <a:r>
-              <a:rPr lang="en-US" sz="900" dirty="0">
-                <a:solidFill>
-                  <a:srgbClr val="9AA0AA"/>
-                </a:solidFill>
-                <a:latin typeface="Pretendard" pitchFamily="34" charset="0"/>
-                <a:ea typeface="Pretendard" pitchFamily="34" charset="-122"/>
-                <a:cs typeface="Pretendard" pitchFamily="34" charset="-120"/>
-              </a:rPr>
-              <a:t>04</a:t>
-            </a:r>
-            <a:endParaRPr lang="en-US" sz="900" dirty="0"/>
+              <a:rPr lang="en-US" sz="850" spc="140" kern="0" dirty="0">
+                <a:solidFill>
+                  <a:srgbClr val="9B9B9B"/>
+                </a:solidFill>
+                <a:latin typeface="Pretendard" pitchFamily="34" charset="0"/>
+                <a:ea typeface="Pretendard" pitchFamily="34" charset="-122"/>
+                <a:cs typeface="Pretendard" pitchFamily="34" charset="-120"/>
+              </a:rPr>
+              <a:t>P.04</a:t>
+            </a:r>
+            <a:endParaRPr lang="en-US" sz="850" dirty="0"/>
           </a:p>
         </p:txBody>
       </p:sp>
@@ -6555,34 +8298,34 @@
         </p:nvSpPr>
         <p:spPr>
           <a:xfrm>
-            <a:off x="640080" y="566928"/>
-            <a:ext cx="10911535" cy="237744"/>
-          </a:xfrm>
-          <a:prstGeom prst="rect">
-            <a:avLst/>
-          </a:prstGeom>
-          <a:noFill/>
-          <a:ln/>
-        </p:spPr>
-        <p:txBody>
-          <a:bodyPr wrap="square" lIns="0" tIns="0" rIns="0" bIns="0" rtlCol="0" anchor="ctr"/>
-          <a:lstStyle/>
-          <a:p>
-            <a:pPr indent="0" marL="0">
-              <a:buNone/>
-            </a:pPr>
-            <a:r>
-              <a:rPr lang="en-US" sz="1100" b="1" spc="140" kern="0" dirty="0">
-                <a:solidFill>
-                  <a:srgbClr val="FF4A1C"/>
-                </a:solidFill>
-                <a:latin typeface="Pretendard" pitchFamily="34" charset="0"/>
-                <a:ea typeface="Pretendard" pitchFamily="34" charset="-122"/>
-                <a:cs typeface="Pretendard" pitchFamily="34" charset="-120"/>
-              </a:rPr>
-              <a:t>BALANCE</a:t>
-            </a:r>
-            <a:endParaRPr lang="en-US" sz="1100" dirty="0"/>
+            <a:off x="640080" y="274320"/>
+            <a:ext cx="3657600" cy="219456"/>
+          </a:xfrm>
+          <a:prstGeom prst="rect">
+            <a:avLst/>
+          </a:prstGeom>
+          <a:noFill/>
+          <a:ln/>
+        </p:spPr>
+        <p:txBody>
+          <a:bodyPr wrap="square" lIns="0" tIns="0" rIns="0" bIns="0" rtlCol="0" anchor="ctr"/>
+          <a:lstStyle/>
+          <a:p>
+            <a:pPr indent="0" marL="0">
+              <a:buNone/>
+            </a:pPr>
+            <a:r>
+              <a:rPr lang="en-US" sz="900" spc="120" kern="0" dirty="0">
+                <a:solidFill>
+                  <a:srgbClr val="8A8A8A"/>
+                </a:solidFill>
+                <a:latin typeface="Pretendard" pitchFamily="34" charset="0"/>
+                <a:ea typeface="Pretendard" pitchFamily="34" charset="-122"/>
+                <a:cs typeface="Pretendard" pitchFamily="34" charset="-120"/>
+              </a:rPr>
+              <a:t>포트폴리오제작</a:t>
+            </a:r>
+            <a:endParaRPr lang="en-US" sz="900" dirty="0"/>
           </a:p>
         </p:txBody>
       </p:sp>
@@ -6594,34 +8337,34 @@
         </p:nvSpPr>
         <p:spPr>
           <a:xfrm>
-            <a:off x="640080" y="859536"/>
-            <a:ext cx="10911535" cy="512064"/>
-          </a:xfrm>
-          <a:prstGeom prst="rect">
-            <a:avLst/>
-          </a:prstGeom>
-          <a:noFill/>
-          <a:ln/>
-        </p:spPr>
-        <p:txBody>
-          <a:bodyPr wrap="square" lIns="0" tIns="0" rIns="0" bIns="0" rtlCol="0" anchor="ctr"/>
-          <a:lstStyle/>
-          <a:p>
-            <a:pPr indent="0" marL="0">
-              <a:buNone/>
-            </a:pPr>
-            <a:r>
-              <a:rPr lang="en-US" sz="2800" b="1" dirty="0">
-                <a:solidFill>
-                  <a:srgbClr val="14161B"/>
-                </a:solidFill>
-                <a:latin typeface="Pretendard" pitchFamily="34" charset="0"/>
-                <a:ea typeface="Pretendard" pitchFamily="34" charset="-122"/>
-                <a:cs typeface="Pretendard" pitchFamily="34" charset="-120"/>
-              </a:rPr>
-              <a:t>이미지와 텍스트의 균형</a:t>
-            </a:r>
-            <a:endParaRPr lang="en-US" sz="2800" dirty="0"/>
+            <a:off x="4480560" y="274320"/>
+            <a:ext cx="4572000" cy="219456"/>
+          </a:xfrm>
+          <a:prstGeom prst="rect">
+            <a:avLst/>
+          </a:prstGeom>
+          <a:noFill/>
+          <a:ln/>
+        </p:spPr>
+        <p:txBody>
+          <a:bodyPr wrap="square" lIns="0" tIns="0" rIns="0" bIns="0" rtlCol="0" anchor="ctr"/>
+          <a:lstStyle/>
+          <a:p>
+            <a:pPr algn="ctr" indent="0" marL="0">
+              <a:buNone/>
+            </a:pPr>
+            <a:r>
+              <a:rPr lang="en-US" sz="900" spc="120" kern="0" dirty="0">
+                <a:solidFill>
+                  <a:srgbClr val="8A8A8A"/>
+                </a:solidFill>
+                <a:latin typeface="Pretendard" pitchFamily="34" charset="0"/>
+                <a:ea typeface="Pretendard" pitchFamily="34" charset="-122"/>
+                <a:cs typeface="Pretendard" pitchFamily="34" charset="-120"/>
+              </a:rPr>
+              <a:t>PHASE 3 완성과 발표</a:t>
+            </a:r>
+            <a:endParaRPr lang="en-US" sz="900" dirty="0"/>
           </a:p>
         </p:txBody>
       </p:sp>
@@ -6633,34 +8376,34 @@
         </p:nvSpPr>
         <p:spPr>
           <a:xfrm>
-            <a:off x="640080" y="1371600"/>
-            <a:ext cx="10911535" cy="237744"/>
-          </a:xfrm>
-          <a:prstGeom prst="rect">
-            <a:avLst/>
-          </a:prstGeom>
-          <a:noFill/>
-          <a:ln/>
-        </p:spPr>
-        <p:txBody>
-          <a:bodyPr wrap="square" lIns="0" tIns="0" rIns="0" bIns="0" rtlCol="0" anchor="ctr"/>
-          <a:lstStyle/>
-          <a:p>
-            <a:pPr indent="0" marL="0">
-              <a:buNone/>
-            </a:pPr>
-            <a:r>
-              <a:rPr lang="en-US" sz="1200" dirty="0">
-                <a:solidFill>
-                  <a:srgbClr val="6B7280"/>
-                </a:solidFill>
-                <a:latin typeface="Pretendard" pitchFamily="34" charset="0"/>
-                <a:ea typeface="Pretendard" pitchFamily="34" charset="-122"/>
-                <a:cs typeface="Pretendard" pitchFamily="34" charset="-120"/>
-              </a:rPr>
-              <a:t>지면이 불안정해 보이는 이유는 대개 이 넷 중 하나입니다.</a:t>
-            </a:r>
-            <a:endParaRPr lang="en-US" sz="1200" dirty="0"/>
+            <a:off x="8808415" y="274320"/>
+            <a:ext cx="2743200" cy="219456"/>
+          </a:xfrm>
+          <a:prstGeom prst="rect">
+            <a:avLst/>
+          </a:prstGeom>
+          <a:noFill/>
+          <a:ln/>
+        </p:spPr>
+        <p:txBody>
+          <a:bodyPr wrap="square" lIns="0" tIns="0" rIns="0" bIns="0" rtlCol="0" anchor="ctr"/>
+          <a:lstStyle/>
+          <a:p>
+            <a:pPr algn="r" indent="0" marL="0">
+              <a:buNone/>
+            </a:pPr>
+            <a:r>
+              <a:rPr lang="en-US" sz="900" spc="200" kern="0" dirty="0">
+                <a:solidFill>
+                  <a:srgbClr val="8A8A8A"/>
+                </a:solidFill>
+                <a:latin typeface="Pretendard" pitchFamily="34" charset="0"/>
+                <a:ea typeface="Pretendard" pitchFamily="34" charset="-122"/>
+                <a:cs typeface="Pretendard" pitchFamily="34" charset="-120"/>
+              </a:rPr>
+              <a:t>WEEK 11</a:t>
+            </a:r>
+            <a:endParaRPr lang="en-US" sz="900" dirty="0"/>
           </a:p>
         </p:txBody>
       </p:sp>
@@ -6672,20 +8415,18 @@
         </p:nvSpPr>
         <p:spPr>
           <a:xfrm>
-            <a:off x="640080" y="1810512"/>
-            <a:ext cx="310896" cy="310896"/>
-          </a:xfrm>
-          <a:prstGeom prst="roundRect">
-            <a:avLst>
-              <a:gd name="adj" fmla="val 17647"/>
-            </a:avLst>
+            <a:off x="640080" y="548640"/>
+            <a:ext cx="10911535" cy="7315"/>
+          </a:xfrm>
+          <a:prstGeom prst="rect">
+            <a:avLst/>
           </a:prstGeom>
           <a:solidFill>
-            <a:srgbClr val="14161B"/>
+            <a:srgbClr val="DCDCDC"/>
           </a:solidFill>
-          <a:ln w="6350">
+          <a:ln w="12700">
             <a:solidFill>
-              <a:srgbClr val="14161B"/>
+              <a:srgbClr val="DCDCDC"/>
             </a:solidFill>
             <a:prstDash val="solid"/>
           </a:ln>
@@ -6699,34 +8440,34 @@
         </p:nvSpPr>
         <p:spPr>
           <a:xfrm>
-            <a:off x="640080" y="1810512"/>
-            <a:ext cx="310896" cy="310896"/>
-          </a:xfrm>
-          <a:prstGeom prst="rect">
-            <a:avLst/>
-          </a:prstGeom>
-          <a:noFill/>
-          <a:ln/>
-        </p:spPr>
-        <p:txBody>
-          <a:bodyPr wrap="square" lIns="0" tIns="0" rIns="0" bIns="0" rtlCol="0" anchor="ctr"/>
-          <a:lstStyle/>
-          <a:p>
-            <a:pPr algn="ctr" indent="0" marL="0">
-              <a:buNone/>
-            </a:pPr>
-            <a:r>
-              <a:rPr lang="en-US" sz="1050" b="1" dirty="0">
-                <a:solidFill>
-                  <a:srgbClr val="FFFFFF"/>
-                </a:solidFill>
-                <a:latin typeface="Pretendard" pitchFamily="34" charset="0"/>
-                <a:ea typeface="Pretendard" pitchFamily="34" charset="-122"/>
-                <a:cs typeface="Pretendard" pitchFamily="34" charset="-120"/>
-              </a:rPr>
-              <a:t>1</a:t>
-            </a:r>
-            <a:endParaRPr lang="en-US" sz="1050" dirty="0"/>
+            <a:off x="640080" y="640080"/>
+            <a:ext cx="10911535" cy="219456"/>
+          </a:xfrm>
+          <a:prstGeom prst="rect">
+            <a:avLst/>
+          </a:prstGeom>
+          <a:noFill/>
+          <a:ln/>
+        </p:spPr>
+        <p:txBody>
+          <a:bodyPr wrap="square" lIns="0" tIns="0" rIns="0" bIns="0" rtlCol="0" anchor="ctr"/>
+          <a:lstStyle/>
+          <a:p>
+            <a:pPr indent="0" marL="0">
+              <a:buNone/>
+            </a:pPr>
+            <a:r>
+              <a:rPr lang="en-US" sz="950" spc="260" kern="0" dirty="0">
+                <a:solidFill>
+                  <a:srgbClr val="8A8A8A"/>
+                </a:solidFill>
+                <a:latin typeface="Pretendard" pitchFamily="34" charset="0"/>
+                <a:ea typeface="Pretendard" pitchFamily="34" charset="-122"/>
+                <a:cs typeface="Pretendard" pitchFamily="34" charset="-120"/>
+              </a:rPr>
+              <a:t>BALANCE</a:t>
+            </a:r>
+            <a:endParaRPr lang="en-US" sz="950" dirty="0"/>
           </a:p>
         </p:txBody>
       </p:sp>
@@ -6738,34 +8479,34 @@
         </p:nvSpPr>
         <p:spPr>
           <a:xfrm>
-            <a:off x="1188720" y="1719072"/>
-            <a:ext cx="9875520" cy="310896"/>
-          </a:xfrm>
-          <a:prstGeom prst="rect">
-            <a:avLst/>
-          </a:prstGeom>
-          <a:noFill/>
-          <a:ln/>
-        </p:spPr>
-        <p:txBody>
-          <a:bodyPr wrap="square" lIns="0" tIns="0" rIns="0" bIns="0" rtlCol="0" anchor="ctr"/>
-          <a:lstStyle/>
-          <a:p>
-            <a:pPr indent="0" marL="0">
-              <a:buNone/>
-            </a:pPr>
-            <a:r>
-              <a:rPr lang="en-US" sz="1450" b="1" dirty="0">
-                <a:solidFill>
-                  <a:srgbClr val="14161B"/>
-                </a:solidFill>
-                <a:latin typeface="Pretendard" pitchFamily="34" charset="0"/>
-                <a:ea typeface="Pretendard" pitchFamily="34" charset="-122"/>
-                <a:cs typeface="Pretendard" pitchFamily="34" charset="-120"/>
-              </a:rPr>
-              <a:t>이미지 크기에 위계가 없다</a:t>
-            </a:r>
-            <a:endParaRPr lang="en-US" sz="1450" dirty="0"/>
+            <a:off x="640080" y="859536"/>
+            <a:ext cx="10911535" cy="475488"/>
+          </a:xfrm>
+          <a:prstGeom prst="rect">
+            <a:avLst/>
+          </a:prstGeom>
+          <a:noFill/>
+          <a:ln/>
+        </p:spPr>
+        <p:txBody>
+          <a:bodyPr wrap="square" lIns="0" tIns="0" rIns="0" bIns="0" rtlCol="0" anchor="ctr"/>
+          <a:lstStyle/>
+          <a:p>
+            <a:pPr indent="0" marL="0">
+              <a:buNone/>
+            </a:pPr>
+            <a:r>
+              <a:rPr lang="en-US" sz="3000" dirty="0">
+                <a:solidFill>
+                  <a:srgbClr val="111111"/>
+                </a:solidFill>
+                <a:latin typeface="Pretendard Black" pitchFamily="34" charset="0"/>
+                <a:ea typeface="Pretendard Black" pitchFamily="34" charset="-122"/>
+                <a:cs typeface="Pretendard Black" pitchFamily="34" charset="-120"/>
+              </a:rPr>
+              <a:t>이미지와 텍스트의 균형</a:t>
+            </a:r>
+            <a:endParaRPr lang="en-US" sz="3000" dirty="0"/>
           </a:p>
         </p:txBody>
       </p:sp>
@@ -6777,34 +8518,34 @@
         </p:nvSpPr>
         <p:spPr>
           <a:xfrm>
-            <a:off x="1188720" y="2029968"/>
-            <a:ext cx="9875520" cy="292608"/>
-          </a:xfrm>
-          <a:prstGeom prst="rect">
-            <a:avLst/>
-          </a:prstGeom>
-          <a:noFill/>
-          <a:ln/>
-        </p:spPr>
-        <p:txBody>
-          <a:bodyPr wrap="square" lIns="0" tIns="0" rIns="0" bIns="0" rtlCol="0" anchor="ctr"/>
-          <a:lstStyle/>
-          <a:p>
-            <a:pPr indent="0" marL="0">
-              <a:buNone/>
-            </a:pPr>
-            <a:r>
-              <a:rPr lang="en-US" sz="1100" dirty="0">
-                <a:solidFill>
-                  <a:srgbClr val="6B7280"/>
-                </a:solidFill>
-                <a:latin typeface="Pretendard" pitchFamily="34" charset="0"/>
-                <a:ea typeface="Pretendard" pitchFamily="34" charset="-122"/>
-                <a:cs typeface="Pretendard" pitchFamily="34" charset="-120"/>
-              </a:rPr>
-              <a:t>같은 크기 여러 장 대신, 대표 하나를 크게 나머지를 작게</a:t>
-            </a:r>
-            <a:endParaRPr lang="en-US" sz="1100" dirty="0"/>
+            <a:off x="640080" y="1371600"/>
+            <a:ext cx="10911535" cy="219456"/>
+          </a:xfrm>
+          <a:prstGeom prst="rect">
+            <a:avLst/>
+          </a:prstGeom>
+          <a:noFill/>
+          <a:ln/>
+        </p:spPr>
+        <p:txBody>
+          <a:bodyPr wrap="square" lIns="0" tIns="0" rIns="0" bIns="0" rtlCol="0" anchor="ctr"/>
+          <a:lstStyle/>
+          <a:p>
+            <a:pPr indent="0" marL="0">
+              <a:buNone/>
+            </a:pPr>
+            <a:r>
+              <a:rPr lang="en-US" sz="1150" dirty="0">
+                <a:solidFill>
+                  <a:srgbClr val="6E6E6E"/>
+                </a:solidFill>
+                <a:latin typeface="Pretendard" pitchFamily="34" charset="0"/>
+                <a:ea typeface="Pretendard" pitchFamily="34" charset="-122"/>
+                <a:cs typeface="Pretendard" pitchFamily="34" charset="-120"/>
+              </a:rPr>
+              <a:t>지면이 불안정해 보이는 이유는 대개 이 넷 중 하나입니다.</a:t>
+            </a:r>
+            <a:endParaRPr lang="en-US" sz="1150" dirty="0"/>
           </a:p>
         </p:txBody>
       </p:sp>
@@ -6816,18 +8557,18 @@
         </p:nvSpPr>
         <p:spPr>
           <a:xfrm>
-            <a:off x="640080" y="2505456"/>
-            <a:ext cx="10911535" cy="9144"/>
+            <a:off x="640080" y="1664208"/>
+            <a:ext cx="10911535" cy="7315"/>
           </a:xfrm>
           <a:prstGeom prst="rect">
             <a:avLst/>
           </a:prstGeom>
           <a:solidFill>
-            <a:srgbClr val="E4E6EB"/>
+            <a:srgbClr val="111111"/>
           </a:solidFill>
           <a:ln w="12700">
             <a:solidFill>
-              <a:srgbClr val="E4E6EB"/>
+              <a:srgbClr val="111111"/>
             </a:solidFill>
             <a:prstDash val="solid"/>
           </a:ln>
@@ -6841,20 +8582,18 @@
         </p:nvSpPr>
         <p:spPr>
           <a:xfrm>
-            <a:off x="640080" y="2670048"/>
+            <a:off x="640080" y="1810512"/>
             <a:ext cx="310896" cy="310896"/>
           </a:xfrm>
-          <a:prstGeom prst="roundRect">
-            <a:avLst>
-              <a:gd name="adj" fmla="val 17647"/>
-            </a:avLst>
+          <a:prstGeom prst="ellipse">
+            <a:avLst/>
           </a:prstGeom>
           <a:solidFill>
-            <a:srgbClr val="14161B"/>
+            <a:srgbClr val="FFFFFF"/>
           </a:solidFill>
-          <a:ln w="6350">
+          <a:ln w="12700">
             <a:solidFill>
-              <a:srgbClr val="14161B"/>
+              <a:srgbClr val="111111"/>
             </a:solidFill>
             <a:prstDash val="solid"/>
           </a:ln>
@@ -6868,7 +8607,7 @@
         </p:nvSpPr>
         <p:spPr>
           <a:xfrm>
-            <a:off x="640080" y="2670048"/>
+            <a:off x="640080" y="1810512"/>
             <a:ext cx="310896" cy="310896"/>
           </a:xfrm>
           <a:prstGeom prst="rect">
@@ -6885,17 +8624,17 @@
               <a:buNone/>
             </a:pPr>
             <a:r>
-              <a:rPr lang="en-US" sz="1050" b="1" dirty="0">
-                <a:solidFill>
-                  <a:srgbClr val="FFFFFF"/>
-                </a:solidFill>
-                <a:latin typeface="Pretendard" pitchFamily="34" charset="0"/>
-                <a:ea typeface="Pretendard" pitchFamily="34" charset="-122"/>
-                <a:cs typeface="Pretendard" pitchFamily="34" charset="-120"/>
-              </a:rPr>
-              <a:t>2</a:t>
-            </a:r>
-            <a:endParaRPr lang="en-US" sz="1050" dirty="0"/>
+              <a:rPr lang="en-US" sz="1000" b="1" dirty="0">
+                <a:solidFill>
+                  <a:srgbClr val="111111"/>
+                </a:solidFill>
+                <a:latin typeface="Pretendard" pitchFamily="34" charset="0"/>
+                <a:ea typeface="Pretendard" pitchFamily="34" charset="-122"/>
+                <a:cs typeface="Pretendard" pitchFamily="34" charset="-120"/>
+              </a:rPr>
+              <a:t>1</a:t>
+            </a:r>
+            <a:endParaRPr lang="en-US" sz="1000" dirty="0"/>
           </a:p>
         </p:txBody>
       </p:sp>
@@ -6907,7 +8646,7 @@
         </p:nvSpPr>
         <p:spPr>
           <a:xfrm>
-            <a:off x="1188720" y="2578608"/>
+            <a:off x="1188720" y="1719072"/>
             <a:ext cx="9875520" cy="310896"/>
           </a:xfrm>
           <a:prstGeom prst="rect">
@@ -6924,15 +8663,15 @@
               <a:buNone/>
             </a:pPr>
             <a:r>
-              <a:rPr lang="en-US" sz="1450" b="1" dirty="0">
-                <a:solidFill>
-                  <a:srgbClr val="14161B"/>
-                </a:solidFill>
-                <a:latin typeface="Pretendard" pitchFamily="34" charset="0"/>
-                <a:ea typeface="Pretendard" pitchFamily="34" charset="-122"/>
-                <a:cs typeface="Pretendard" pitchFamily="34" charset="-120"/>
-              </a:rPr>
-              <a:t>글과 이미지가 서로 안 맞물린다</a:t>
+              <a:rPr lang="en-US" sz="1450" dirty="0">
+                <a:solidFill>
+                  <a:srgbClr val="111111"/>
+                </a:solidFill>
+                <a:latin typeface="Pretendard Black" pitchFamily="34" charset="0"/>
+                <a:ea typeface="Pretendard Black" pitchFamily="34" charset="-122"/>
+                <a:cs typeface="Pretendard Black" pitchFamily="34" charset="-120"/>
+              </a:rPr>
+              <a:t>이미지 크기에 위계가 없다</a:t>
             </a:r>
             <a:endParaRPr lang="en-US" sz="1450" dirty="0"/>
           </a:p>
@@ -6946,7 +8685,7 @@
         </p:nvSpPr>
         <p:spPr>
           <a:xfrm>
-            <a:off x="1188720" y="2889504"/>
+            <a:off x="1188720" y="2029968"/>
             <a:ext cx="9875520" cy="292608"/>
           </a:xfrm>
           <a:prstGeom prst="rect">
@@ -6965,13 +8704,13 @@
             <a:r>
               <a:rPr lang="en-US" sz="1100" dirty="0">
                 <a:solidFill>
-                  <a:srgbClr val="6B7280"/>
-                </a:solidFill>
-                <a:latin typeface="Pretendard" pitchFamily="34" charset="0"/>
-                <a:ea typeface="Pretendard" pitchFamily="34" charset="-122"/>
-                <a:cs typeface="Pretendard" pitchFamily="34" charset="-120"/>
-              </a:rPr>
-              <a:t>캡션은 설명하는 이미지에 붙이고, 본문은 관련 이미지와 같은 단에</a:t>
+                  <a:srgbClr val="6E6E6E"/>
+                </a:solidFill>
+                <a:latin typeface="Pretendard" pitchFamily="34" charset="0"/>
+                <a:ea typeface="Pretendard" pitchFamily="34" charset="-122"/>
+                <a:cs typeface="Pretendard" pitchFamily="34" charset="-120"/>
+              </a:rPr>
+              <a:t>같은 크기 여러 장 대신, 대표 하나를 크게 나머지를 작게</a:t>
             </a:r>
             <a:endParaRPr lang="en-US" sz="1100" dirty="0"/>
           </a:p>
@@ -6985,18 +8724,18 @@
         </p:nvSpPr>
         <p:spPr>
           <a:xfrm>
-            <a:off x="640080" y="3364992"/>
-            <a:ext cx="10911535" cy="9144"/>
+            <a:off x="640080" y="2596896"/>
+            <a:ext cx="10911535" cy="7315"/>
           </a:xfrm>
           <a:prstGeom prst="rect">
             <a:avLst/>
           </a:prstGeom>
           <a:solidFill>
-            <a:srgbClr val="E4E6EB"/>
+            <a:srgbClr val="DCDCDC"/>
           </a:solidFill>
           <a:ln w="12700">
             <a:solidFill>
-              <a:srgbClr val="E4E6EB"/>
+              <a:srgbClr val="DCDCDC"/>
             </a:solidFill>
             <a:prstDash val="solid"/>
           </a:ln>
@@ -7010,20 +8749,18 @@
         </p:nvSpPr>
         <p:spPr>
           <a:xfrm>
-            <a:off x="640080" y="3529584"/>
+            <a:off x="640080" y="2761488"/>
             <a:ext cx="310896" cy="310896"/>
           </a:xfrm>
-          <a:prstGeom prst="roundRect">
-            <a:avLst>
-              <a:gd name="adj" fmla="val 17647"/>
-            </a:avLst>
+          <a:prstGeom prst="ellipse">
+            <a:avLst/>
           </a:prstGeom>
           <a:solidFill>
-            <a:srgbClr val="14161B"/>
+            <a:srgbClr val="FFFFFF"/>
           </a:solidFill>
-          <a:ln w="6350">
+          <a:ln w="12700">
             <a:solidFill>
-              <a:srgbClr val="14161B"/>
+              <a:srgbClr val="111111"/>
             </a:solidFill>
             <a:prstDash val="solid"/>
           </a:ln>
@@ -7037,7 +8774,7 @@
         </p:nvSpPr>
         <p:spPr>
           <a:xfrm>
-            <a:off x="640080" y="3529584"/>
+            <a:off x="640080" y="2761488"/>
             <a:ext cx="310896" cy="310896"/>
           </a:xfrm>
           <a:prstGeom prst="rect">
@@ -7054,17 +8791,17 @@
               <a:buNone/>
             </a:pPr>
             <a:r>
-              <a:rPr lang="en-US" sz="1050" b="1" dirty="0">
-                <a:solidFill>
-                  <a:srgbClr val="FFFFFF"/>
-                </a:solidFill>
-                <a:latin typeface="Pretendard" pitchFamily="34" charset="0"/>
-                <a:ea typeface="Pretendard" pitchFamily="34" charset="-122"/>
-                <a:cs typeface="Pretendard" pitchFamily="34" charset="-120"/>
-              </a:rPr>
-              <a:t>3</a:t>
-            </a:r>
-            <a:endParaRPr lang="en-US" sz="1050" dirty="0"/>
+              <a:rPr lang="en-US" sz="1000" b="1" dirty="0">
+                <a:solidFill>
+                  <a:srgbClr val="111111"/>
+                </a:solidFill>
+                <a:latin typeface="Pretendard" pitchFamily="34" charset="0"/>
+                <a:ea typeface="Pretendard" pitchFamily="34" charset="-122"/>
+                <a:cs typeface="Pretendard" pitchFamily="34" charset="-120"/>
+              </a:rPr>
+              <a:t>2</a:t>
+            </a:r>
+            <a:endParaRPr lang="en-US" sz="1000" dirty="0"/>
           </a:p>
         </p:txBody>
       </p:sp>
@@ -7076,7 +8813,7 @@
         </p:nvSpPr>
         <p:spPr>
           <a:xfrm>
-            <a:off x="1188720" y="3438144"/>
+            <a:off x="1188720" y="2670048"/>
             <a:ext cx="9875520" cy="310896"/>
           </a:xfrm>
           <a:prstGeom prst="rect">
@@ -7093,15 +8830,15 @@
               <a:buNone/>
             </a:pPr>
             <a:r>
-              <a:rPr lang="en-US" sz="1450" b="1" dirty="0">
-                <a:solidFill>
-                  <a:srgbClr val="14161B"/>
-                </a:solidFill>
-                <a:latin typeface="Pretendard" pitchFamily="34" charset="0"/>
-                <a:ea typeface="Pretendard" pitchFamily="34" charset="-122"/>
-                <a:cs typeface="Pretendard" pitchFamily="34" charset="-120"/>
-              </a:rPr>
-              <a:t>정렬 기준이 섞여 있다</a:t>
+              <a:rPr lang="en-US" sz="1450" dirty="0">
+                <a:solidFill>
+                  <a:srgbClr val="111111"/>
+                </a:solidFill>
+                <a:latin typeface="Pretendard Black" pitchFamily="34" charset="0"/>
+                <a:ea typeface="Pretendard Black" pitchFamily="34" charset="-122"/>
+                <a:cs typeface="Pretendard Black" pitchFamily="34" charset="-120"/>
+              </a:rPr>
+              <a:t>글과 이미지가 서로 안 맞물린다</a:t>
             </a:r>
             <a:endParaRPr lang="en-US" sz="1450" dirty="0"/>
           </a:p>
@@ -7115,7 +8852,7 @@
         </p:nvSpPr>
         <p:spPr>
           <a:xfrm>
-            <a:off x="1188720" y="3749040"/>
+            <a:off x="1188720" y="2980944"/>
             <a:ext cx="9875520" cy="292608"/>
           </a:xfrm>
           <a:prstGeom prst="rect">
@@ -7134,13 +8871,13 @@
             <a:r>
               <a:rPr lang="en-US" sz="1100" dirty="0">
                 <a:solidFill>
-                  <a:srgbClr val="6B7280"/>
-                </a:solidFill>
-                <a:latin typeface="Pretendard" pitchFamily="34" charset="0"/>
-                <a:ea typeface="Pretendard" pitchFamily="34" charset="-122"/>
-                <a:cs typeface="Pretendard" pitchFamily="34" charset="-120"/>
-              </a:rPr>
-              <a:t>왼쪽 정렬과 가운데 정렬이 한 지면에 섞이면 산만합니다. 하나로 통일</a:t>
+                  <a:srgbClr val="6E6E6E"/>
+                </a:solidFill>
+                <a:latin typeface="Pretendard" pitchFamily="34" charset="0"/>
+                <a:ea typeface="Pretendard" pitchFamily="34" charset="-122"/>
+                <a:cs typeface="Pretendard" pitchFamily="34" charset="-120"/>
+              </a:rPr>
+              <a:t>캡션은 설명하는 이미지에 붙이고, 본문은 관련 이미지와 같은 단에</a:t>
             </a:r>
             <a:endParaRPr lang="en-US" sz="1100" dirty="0"/>
           </a:p>
@@ -7154,18 +8891,18 @@
         </p:nvSpPr>
         <p:spPr>
           <a:xfrm>
-            <a:off x="640080" y="4224528"/>
-            <a:ext cx="10911535" cy="9144"/>
+            <a:off x="640080" y="3547872"/>
+            <a:ext cx="10911535" cy="7315"/>
           </a:xfrm>
           <a:prstGeom prst="rect">
             <a:avLst/>
           </a:prstGeom>
           <a:solidFill>
-            <a:srgbClr val="E4E6EB"/>
+            <a:srgbClr val="DCDCDC"/>
           </a:solidFill>
           <a:ln w="12700">
             <a:solidFill>
-              <a:srgbClr val="E4E6EB"/>
+              <a:srgbClr val="DCDCDC"/>
             </a:solidFill>
             <a:prstDash val="solid"/>
           </a:ln>
@@ -7179,20 +8916,18 @@
         </p:nvSpPr>
         <p:spPr>
           <a:xfrm>
-            <a:off x="640080" y="4389120"/>
+            <a:off x="640080" y="3712464"/>
             <a:ext cx="310896" cy="310896"/>
           </a:xfrm>
-          <a:prstGeom prst="roundRect">
-            <a:avLst>
-              <a:gd name="adj" fmla="val 17647"/>
-            </a:avLst>
+          <a:prstGeom prst="ellipse">
+            <a:avLst/>
           </a:prstGeom>
           <a:solidFill>
-            <a:srgbClr val="14161B"/>
+            <a:srgbClr val="FFFFFF"/>
           </a:solidFill>
-          <a:ln w="6350">
+          <a:ln w="12700">
             <a:solidFill>
-              <a:srgbClr val="14161B"/>
+              <a:srgbClr val="111111"/>
             </a:solidFill>
             <a:prstDash val="solid"/>
           </a:ln>
@@ -7206,7 +8941,7 @@
         </p:nvSpPr>
         <p:spPr>
           <a:xfrm>
-            <a:off x="640080" y="4389120"/>
+            <a:off x="640080" y="3712464"/>
             <a:ext cx="310896" cy="310896"/>
           </a:xfrm>
           <a:prstGeom prst="rect">
@@ -7223,9 +8958,176 @@
               <a:buNone/>
             </a:pPr>
             <a:r>
-              <a:rPr lang="en-US" sz="1050" b="1" dirty="0">
-                <a:solidFill>
-                  <a:srgbClr val="FFFFFF"/>
+              <a:rPr lang="en-US" sz="1000" b="1" dirty="0">
+                <a:solidFill>
+                  <a:srgbClr val="111111"/>
+                </a:solidFill>
+                <a:latin typeface="Pretendard" pitchFamily="34" charset="0"/>
+                <a:ea typeface="Pretendard" pitchFamily="34" charset="-122"/>
+                <a:cs typeface="Pretendard" pitchFamily="34" charset="-120"/>
+              </a:rPr>
+              <a:t>3</a:t>
+            </a:r>
+            <a:endParaRPr lang="en-US" sz="1000" dirty="0"/>
+          </a:p>
+        </p:txBody>
+      </p:sp>
+      <p:sp>
+        <p:nvSpPr>
+          <p:cNvPr id="22" name="Text 20"/>
+          <p:cNvSpPr/>
+          <p:nvPr/>
+        </p:nvSpPr>
+        <p:spPr>
+          <a:xfrm>
+            <a:off x="1188720" y="3621024"/>
+            <a:ext cx="9875520" cy="310896"/>
+          </a:xfrm>
+          <a:prstGeom prst="rect">
+            <a:avLst/>
+          </a:prstGeom>
+          <a:noFill/>
+          <a:ln/>
+        </p:spPr>
+        <p:txBody>
+          <a:bodyPr wrap="square" lIns="0" tIns="0" rIns="0" bIns="0" rtlCol="0" anchor="ctr"/>
+          <a:lstStyle/>
+          <a:p>
+            <a:pPr indent="0" marL="0">
+              <a:buNone/>
+            </a:pPr>
+            <a:r>
+              <a:rPr lang="en-US" sz="1450" dirty="0">
+                <a:solidFill>
+                  <a:srgbClr val="111111"/>
+                </a:solidFill>
+                <a:latin typeface="Pretendard Black" pitchFamily="34" charset="0"/>
+                <a:ea typeface="Pretendard Black" pitchFamily="34" charset="-122"/>
+                <a:cs typeface="Pretendard Black" pitchFamily="34" charset="-120"/>
+              </a:rPr>
+              <a:t>정렬 기준이 섞여 있다</a:t>
+            </a:r>
+            <a:endParaRPr lang="en-US" sz="1450" dirty="0"/>
+          </a:p>
+        </p:txBody>
+      </p:sp>
+      <p:sp>
+        <p:nvSpPr>
+          <p:cNvPr id="23" name="Text 21"/>
+          <p:cNvSpPr/>
+          <p:nvPr/>
+        </p:nvSpPr>
+        <p:spPr>
+          <a:xfrm>
+            <a:off x="1188720" y="3931920"/>
+            <a:ext cx="9875520" cy="292608"/>
+          </a:xfrm>
+          <a:prstGeom prst="rect">
+            <a:avLst/>
+          </a:prstGeom>
+          <a:noFill/>
+          <a:ln/>
+        </p:spPr>
+        <p:txBody>
+          <a:bodyPr wrap="square" lIns="0" tIns="0" rIns="0" bIns="0" rtlCol="0" anchor="ctr"/>
+          <a:lstStyle/>
+          <a:p>
+            <a:pPr indent="0" marL="0">
+              <a:buNone/>
+            </a:pPr>
+            <a:r>
+              <a:rPr lang="en-US" sz="1100" dirty="0">
+                <a:solidFill>
+                  <a:srgbClr val="6E6E6E"/>
+                </a:solidFill>
+                <a:latin typeface="Pretendard" pitchFamily="34" charset="0"/>
+                <a:ea typeface="Pretendard" pitchFamily="34" charset="-122"/>
+                <a:cs typeface="Pretendard" pitchFamily="34" charset="-120"/>
+              </a:rPr>
+              <a:t>왼쪽 정렬과 가운데 정렬이 한 지면에 섞이면 산만합니다. 하나로 통일</a:t>
+            </a:r>
+            <a:endParaRPr lang="en-US" sz="1100" dirty="0"/>
+          </a:p>
+        </p:txBody>
+      </p:sp>
+      <p:sp>
+        <p:nvSpPr>
+          <p:cNvPr id="24" name="Shape 22"/>
+          <p:cNvSpPr/>
+          <p:nvPr/>
+        </p:nvSpPr>
+        <p:spPr>
+          <a:xfrm>
+            <a:off x="640080" y="4498848"/>
+            <a:ext cx="10911535" cy="7315"/>
+          </a:xfrm>
+          <a:prstGeom prst="rect">
+            <a:avLst/>
+          </a:prstGeom>
+          <a:solidFill>
+            <a:srgbClr val="DCDCDC"/>
+          </a:solidFill>
+          <a:ln w="12700">
+            <a:solidFill>
+              <a:srgbClr val="DCDCDC"/>
+            </a:solidFill>
+            <a:prstDash val="solid"/>
+          </a:ln>
+        </p:spPr>
+      </p:sp>
+      <p:sp>
+        <p:nvSpPr>
+          <p:cNvPr id="25" name="Shape 23"/>
+          <p:cNvSpPr/>
+          <p:nvPr/>
+        </p:nvSpPr>
+        <p:spPr>
+          <a:xfrm>
+            <a:off x="640080" y="4663440"/>
+            <a:ext cx="310896" cy="310896"/>
+          </a:xfrm>
+          <a:prstGeom prst="ellipse">
+            <a:avLst/>
+          </a:prstGeom>
+          <a:solidFill>
+            <a:srgbClr val="FFFFFF"/>
+          </a:solidFill>
+          <a:ln w="12700">
+            <a:solidFill>
+              <a:srgbClr val="111111"/>
+            </a:solidFill>
+            <a:prstDash val="solid"/>
+          </a:ln>
+        </p:spPr>
+      </p:sp>
+      <p:sp>
+        <p:nvSpPr>
+          <p:cNvPr id="26" name="Text 24"/>
+          <p:cNvSpPr/>
+          <p:nvPr/>
+        </p:nvSpPr>
+        <p:spPr>
+          <a:xfrm>
+            <a:off x="640080" y="4663440"/>
+            <a:ext cx="310896" cy="310896"/>
+          </a:xfrm>
+          <a:prstGeom prst="rect">
+            <a:avLst/>
+          </a:prstGeom>
+          <a:noFill/>
+          <a:ln/>
+        </p:spPr>
+        <p:txBody>
+          <a:bodyPr wrap="square" lIns="0" tIns="0" rIns="0" bIns="0" rtlCol="0" anchor="ctr"/>
+          <a:lstStyle/>
+          <a:p>
+            <a:pPr algn="ctr" indent="0" marL="0">
+              <a:buNone/>
+            </a:pPr>
+            <a:r>
+              <a:rPr lang="en-US" sz="1000" b="1" dirty="0">
+                <a:solidFill>
+                  <a:srgbClr val="111111"/>
                 </a:solidFill>
                 <a:latin typeface="Pretendard" pitchFamily="34" charset="0"/>
                 <a:ea typeface="Pretendard" pitchFamily="34" charset="-122"/>
@@ -7233,19 +9135,19 @@
               </a:rPr>
               <a:t>4</a:t>
             </a:r>
-            <a:endParaRPr lang="en-US" sz="1050" dirty="0"/>
-          </a:p>
-        </p:txBody>
-      </p:sp>
-      <p:sp>
-        <p:nvSpPr>
-          <p:cNvPr id="22" name="Text 20"/>
-          <p:cNvSpPr/>
-          <p:nvPr/>
-        </p:nvSpPr>
-        <p:spPr>
-          <a:xfrm>
-            <a:off x="1188720" y="4297680"/>
+            <a:endParaRPr lang="en-US" sz="1000" dirty="0"/>
+          </a:p>
+        </p:txBody>
+      </p:sp>
+      <p:sp>
+        <p:nvSpPr>
+          <p:cNvPr id="27" name="Text 25"/>
+          <p:cNvSpPr/>
+          <p:nvPr/>
+        </p:nvSpPr>
+        <p:spPr>
+          <a:xfrm>
+            <a:off x="1188720" y="4572000"/>
             <a:ext cx="9875520" cy="310896"/>
           </a:xfrm>
           <a:prstGeom prst="rect">
@@ -7262,13 +9164,13 @@
               <a:buNone/>
             </a:pPr>
             <a:r>
-              <a:rPr lang="en-US" sz="1450" b="1" dirty="0">
-                <a:solidFill>
-                  <a:srgbClr val="14161B"/>
-                </a:solidFill>
-                <a:latin typeface="Pretendard" pitchFamily="34" charset="0"/>
-                <a:ea typeface="Pretendard" pitchFamily="34" charset="-122"/>
-                <a:cs typeface="Pretendard" pitchFamily="34" charset="-120"/>
+              <a:rPr lang="en-US" sz="1450" dirty="0">
+                <a:solidFill>
+                  <a:srgbClr val="111111"/>
+                </a:solidFill>
+                <a:latin typeface="Pretendard Black" pitchFamily="34" charset="0"/>
+                <a:ea typeface="Pretendard Black" pitchFamily="34" charset="-122"/>
+                <a:cs typeface="Pretendard Black" pitchFamily="34" charset="-120"/>
               </a:rPr>
               <a:t>여백이 한쪽에 몰려 있다</a:t>
             </a:r>
@@ -7278,13 +9180,13 @@
       </p:sp>
       <p:sp>
         <p:nvSpPr>
-          <p:cNvPr id="23" name="Text 21"/>
-          <p:cNvSpPr/>
-          <p:nvPr/>
-        </p:nvSpPr>
-        <p:spPr>
-          <a:xfrm>
-            <a:off x="1188720" y="4608576"/>
+          <p:cNvPr id="28" name="Text 26"/>
+          <p:cNvSpPr/>
+          <p:nvPr/>
+        </p:nvSpPr>
+        <p:spPr>
+          <a:xfrm>
+            <a:off x="1188720" y="4882896"/>
             <a:ext cx="9875520" cy="292608"/>
           </a:xfrm>
           <a:prstGeom prst="rect">
@@ -7303,7 +9205,7 @@
             <a:r>
               <a:rPr lang="en-US" sz="1100" dirty="0">
                 <a:solidFill>
-                  <a:srgbClr val="6B7280"/>
+                  <a:srgbClr val="6E6E6E"/>
                 </a:solidFill>
                 <a:latin typeface="Pretendard" pitchFamily="34" charset="0"/>
                 <a:ea typeface="Pretendard" pitchFamily="34" charset="-122"/>
@@ -7317,13 +9219,38 @@
       </p:sp>
       <p:sp>
         <p:nvSpPr>
-          <p:cNvPr id="24" name="Text 22"/>
-          <p:cNvSpPr/>
-          <p:nvPr/>
-        </p:nvSpPr>
-        <p:spPr>
-          <a:xfrm>
-            <a:off x="640080" y="5266944"/>
+          <p:cNvPr id="29" name="Shape 27"/>
+          <p:cNvSpPr/>
+          <p:nvPr/>
+        </p:nvSpPr>
+        <p:spPr>
+          <a:xfrm>
+            <a:off x="640080" y="5522976"/>
+            <a:ext cx="10911535" cy="7315"/>
+          </a:xfrm>
+          <a:prstGeom prst="rect">
+            <a:avLst/>
+          </a:prstGeom>
+          <a:solidFill>
+            <a:srgbClr val="111111"/>
+          </a:solidFill>
+          <a:ln w="12700">
+            <a:solidFill>
+              <a:srgbClr val="111111"/>
+            </a:solidFill>
+            <a:prstDash val="solid"/>
+          </a:ln>
+        </p:spPr>
+      </p:sp>
+      <p:sp>
+        <p:nvSpPr>
+          <p:cNvPr id="30" name="Text 28"/>
+          <p:cNvSpPr/>
+          <p:nvPr/>
+        </p:nvSpPr>
+        <p:spPr>
+          <a:xfrm>
+            <a:off x="640080" y="5632704"/>
             <a:ext cx="10911535" cy="402336"/>
           </a:xfrm>
           <a:prstGeom prst="rect">
@@ -7345,7 +9272,7 @@
             <a:r>
               <a:rPr lang="en-US" sz="1250" b="1" dirty="0">
                 <a:solidFill>
-                  <a:srgbClr val="14161B"/>
+                  <a:srgbClr val="111111"/>
                 </a:solidFill>
                 <a:latin typeface="Pretendard" pitchFamily="34" charset="0"/>
                 <a:ea typeface="Pretendard" pitchFamily="34" charset="-122"/>
@@ -7359,32 +9286,57 @@
       </p:sp>
       <p:sp>
         <p:nvSpPr>
-          <p:cNvPr id="25" name="Text 23"/>
-          <p:cNvSpPr/>
-          <p:nvPr/>
-        </p:nvSpPr>
-        <p:spPr>
-          <a:xfrm>
-            <a:off x="640080" y="6345936"/>
-            <a:ext cx="7772400" cy="256032"/>
-          </a:xfrm>
-          <a:prstGeom prst="rect">
-            <a:avLst/>
-          </a:prstGeom>
-          <a:noFill/>
-          <a:ln/>
-        </p:spPr>
-        <p:txBody>
-          <a:bodyPr wrap="square" lIns="0" tIns="0" rIns="0" bIns="0" rtlCol="0" anchor="ctr"/>
-          <a:lstStyle/>
-          <a:p>
-            <a:pPr indent="0" marL="0">
-              <a:buNone/>
-            </a:pPr>
-            <a:r>
-              <a:rPr lang="en-US" sz="900" dirty="0">
-                <a:solidFill>
-                  <a:srgbClr val="9AA0AA"/>
+          <p:cNvPr id="31" name="Shape 29"/>
+          <p:cNvSpPr/>
+          <p:nvPr/>
+        </p:nvSpPr>
+        <p:spPr>
+          <a:xfrm>
+            <a:off x="640080" y="6291072"/>
+            <a:ext cx="10911535" cy="7315"/>
+          </a:xfrm>
+          <a:prstGeom prst="rect">
+            <a:avLst/>
+          </a:prstGeom>
+          <a:solidFill>
+            <a:srgbClr val="DCDCDC"/>
+          </a:solidFill>
+          <a:ln w="12700">
+            <a:solidFill>
+              <a:srgbClr val="DCDCDC"/>
+            </a:solidFill>
+            <a:prstDash val="solid"/>
+          </a:ln>
+        </p:spPr>
+      </p:sp>
+      <p:sp>
+        <p:nvSpPr>
+          <p:cNvPr id="32" name="Text 30"/>
+          <p:cNvSpPr/>
+          <p:nvPr/>
+        </p:nvSpPr>
+        <p:spPr>
+          <a:xfrm>
+            <a:off x="640080" y="6382512"/>
+            <a:ext cx="7772400" cy="237744"/>
+          </a:xfrm>
+          <a:prstGeom prst="rect">
+            <a:avLst/>
+          </a:prstGeom>
+          <a:noFill/>
+          <a:ln/>
+        </p:spPr>
+        <p:txBody>
+          <a:bodyPr wrap="square" lIns="0" tIns="0" rIns="0" bIns="0" rtlCol="0" anchor="ctr"/>
+          <a:lstStyle/>
+          <a:p>
+            <a:pPr indent="0" marL="0">
+              <a:buNone/>
+            </a:pPr>
+            <a:r>
+              <a:rPr lang="en-US" sz="850" spc="40" kern="0" dirty="0">
+                <a:solidFill>
+                  <a:srgbClr val="9B9B9B"/>
                 </a:solidFill>
                 <a:latin typeface="Pretendard" pitchFamily="34" charset="0"/>
                 <a:ea typeface="Pretendard" pitchFamily="34" charset="-122"/>
@@ -7392,20 +9344,20 @@
               </a:rPr>
               <a:t>포트폴리오제작 · 11주차 편집디자인 실습 Ⅱ</a:t>
             </a:r>
-            <a:endParaRPr lang="en-US" sz="900" dirty="0"/>
-          </a:p>
-        </p:txBody>
-      </p:sp>
-      <p:sp>
-        <p:nvSpPr>
-          <p:cNvPr id="26" name="Text 24"/>
-          <p:cNvSpPr/>
-          <p:nvPr/>
-        </p:nvSpPr>
-        <p:spPr>
-          <a:xfrm>
-            <a:off x="10454335" y="6345936"/>
-            <a:ext cx="1097280" cy="256032"/>
+            <a:endParaRPr lang="en-US" sz="850" dirty="0"/>
+          </a:p>
+        </p:txBody>
+      </p:sp>
+      <p:sp>
+        <p:nvSpPr>
+          <p:cNvPr id="33" name="Text 31"/>
+          <p:cNvSpPr/>
+          <p:nvPr/>
+        </p:nvSpPr>
+        <p:spPr>
+          <a:xfrm>
+            <a:off x="10271455" y="6382512"/>
+            <a:ext cx="1280160" cy="237744"/>
           </a:xfrm>
           <a:prstGeom prst="rect">
             <a:avLst/>
@@ -7421,17 +9373,17 @@
               <a:buNone/>
             </a:pPr>
             <a:r>
-              <a:rPr lang="en-US" sz="900" dirty="0">
-                <a:solidFill>
-                  <a:srgbClr val="9AA0AA"/>
-                </a:solidFill>
-                <a:latin typeface="Pretendard" pitchFamily="34" charset="0"/>
-                <a:ea typeface="Pretendard" pitchFamily="34" charset="-122"/>
-                <a:cs typeface="Pretendard" pitchFamily="34" charset="-120"/>
-              </a:rPr>
-              <a:t>05</a:t>
-            </a:r>
-            <a:endParaRPr lang="en-US" sz="900" dirty="0"/>
+              <a:rPr lang="en-US" sz="850" spc="140" kern="0" dirty="0">
+                <a:solidFill>
+                  <a:srgbClr val="9B9B9B"/>
+                </a:solidFill>
+                <a:latin typeface="Pretendard" pitchFamily="34" charset="0"/>
+                <a:ea typeface="Pretendard" pitchFamily="34" charset="-122"/>
+                <a:cs typeface="Pretendard" pitchFamily="34" charset="-120"/>
+              </a:rPr>
+              <a:t>P.05</a:t>
+            </a:r>
+            <a:endParaRPr lang="en-US" sz="850" dirty="0"/>
           </a:p>
         </p:txBody>
       </p:sp>
@@ -7475,34 +9427,34 @@
         </p:nvSpPr>
         <p:spPr>
           <a:xfrm>
-            <a:off x="640080" y="566928"/>
-            <a:ext cx="10911535" cy="237744"/>
-          </a:xfrm>
-          <a:prstGeom prst="rect">
-            <a:avLst/>
-          </a:prstGeom>
-          <a:noFill/>
-          <a:ln/>
-        </p:spPr>
-        <p:txBody>
-          <a:bodyPr wrap="square" lIns="0" tIns="0" rIns="0" bIns="0" rtlCol="0" anchor="ctr"/>
-          <a:lstStyle/>
-          <a:p>
-            <a:pPr indent="0" marL="0">
-              <a:buNone/>
-            </a:pPr>
-            <a:r>
-              <a:rPr lang="en-US" sz="1100" b="1" spc="140" kern="0" dirty="0">
-                <a:solidFill>
-                  <a:srgbClr val="FF4A1C"/>
-                </a:solidFill>
-                <a:latin typeface="Pretendard" pitchFamily="34" charset="0"/>
-                <a:ea typeface="Pretendard" pitchFamily="34" charset="-122"/>
-                <a:cs typeface="Pretendard" pitchFamily="34" charset="-120"/>
-              </a:rPr>
-              <a:t>WORKSHOP</a:t>
-            </a:r>
-            <a:endParaRPr lang="en-US" sz="1100" dirty="0"/>
+            <a:off x="640080" y="274320"/>
+            <a:ext cx="3657600" cy="219456"/>
+          </a:xfrm>
+          <a:prstGeom prst="rect">
+            <a:avLst/>
+          </a:prstGeom>
+          <a:noFill/>
+          <a:ln/>
+        </p:spPr>
+        <p:txBody>
+          <a:bodyPr wrap="square" lIns="0" tIns="0" rIns="0" bIns="0" rtlCol="0" anchor="ctr"/>
+          <a:lstStyle/>
+          <a:p>
+            <a:pPr indent="0" marL="0">
+              <a:buNone/>
+            </a:pPr>
+            <a:r>
+              <a:rPr lang="en-US" sz="900" spc="120" kern="0" dirty="0">
+                <a:solidFill>
+                  <a:srgbClr val="8A8A8A"/>
+                </a:solidFill>
+                <a:latin typeface="Pretendard" pitchFamily="34" charset="0"/>
+                <a:ea typeface="Pretendard" pitchFamily="34" charset="-122"/>
+                <a:cs typeface="Pretendard" pitchFamily="34" charset="-120"/>
+              </a:rPr>
+              <a:t>포트폴리오제작</a:t>
+            </a:r>
+            <a:endParaRPr lang="en-US" sz="900" dirty="0"/>
           </a:p>
         </p:txBody>
       </p:sp>
@@ -7514,34 +9466,34 @@
         </p:nvSpPr>
         <p:spPr>
           <a:xfrm>
-            <a:off x="640080" y="859536"/>
-            <a:ext cx="10911535" cy="512064"/>
-          </a:xfrm>
-          <a:prstGeom prst="rect">
-            <a:avLst/>
-          </a:prstGeom>
-          <a:noFill/>
-          <a:ln/>
-        </p:spPr>
-        <p:txBody>
-          <a:bodyPr wrap="square" lIns="0" tIns="0" rIns="0" bIns="0" rtlCol="0" anchor="ctr"/>
-          <a:lstStyle/>
-          <a:p>
-            <a:pPr indent="0" marL="0">
-              <a:buNone/>
-            </a:pPr>
-            <a:r>
-              <a:rPr lang="en-US" sz="2800" b="1" dirty="0">
-                <a:solidFill>
-                  <a:srgbClr val="14161B"/>
-                </a:solidFill>
-                <a:latin typeface="Pretendard" pitchFamily="34" charset="0"/>
-                <a:ea typeface="Pretendard" pitchFamily="34" charset="-122"/>
-                <a:cs typeface="Pretendard" pitchFamily="34" charset="-120"/>
-              </a:rPr>
-              <a:t>실습 · 보정과 배치</a:t>
-            </a:r>
-            <a:endParaRPr lang="en-US" sz="2800" dirty="0"/>
+            <a:off x="4480560" y="274320"/>
+            <a:ext cx="4572000" cy="219456"/>
+          </a:xfrm>
+          <a:prstGeom prst="rect">
+            <a:avLst/>
+          </a:prstGeom>
+          <a:noFill/>
+          <a:ln/>
+        </p:spPr>
+        <p:txBody>
+          <a:bodyPr wrap="square" lIns="0" tIns="0" rIns="0" bIns="0" rtlCol="0" anchor="ctr"/>
+          <a:lstStyle/>
+          <a:p>
+            <a:pPr algn="ctr" indent="0" marL="0">
+              <a:buNone/>
+            </a:pPr>
+            <a:r>
+              <a:rPr lang="en-US" sz="900" spc="120" kern="0" dirty="0">
+                <a:solidFill>
+                  <a:srgbClr val="8A8A8A"/>
+                </a:solidFill>
+                <a:latin typeface="Pretendard" pitchFamily="34" charset="0"/>
+                <a:ea typeface="Pretendard" pitchFamily="34" charset="-122"/>
+                <a:cs typeface="Pretendard" pitchFamily="34" charset="-120"/>
+              </a:rPr>
+              <a:t>PHASE 3 완성과 발표</a:t>
+            </a:r>
+            <a:endParaRPr lang="en-US" sz="900" dirty="0"/>
           </a:p>
         </p:txBody>
       </p:sp>
@@ -7553,34 +9505,34 @@
         </p:nvSpPr>
         <p:spPr>
           <a:xfrm>
-            <a:off x="640080" y="1371600"/>
-            <a:ext cx="10911535" cy="237744"/>
-          </a:xfrm>
-          <a:prstGeom prst="rect">
-            <a:avLst/>
-          </a:prstGeom>
-          <a:noFill/>
-          <a:ln/>
-        </p:spPr>
-        <p:txBody>
-          <a:bodyPr wrap="square" lIns="0" tIns="0" rIns="0" bIns="0" rtlCol="0" anchor="ctr"/>
-          <a:lstStyle/>
-          <a:p>
-            <a:pPr indent="0" marL="0">
-              <a:buNone/>
-            </a:pPr>
-            <a:r>
-              <a:rPr lang="en-US" sz="1200" dirty="0">
-                <a:solidFill>
-                  <a:srgbClr val="6B7280"/>
-                </a:solidFill>
-                <a:latin typeface="Pretendard" pitchFamily="34" charset="0"/>
-                <a:ea typeface="Pretendard" pitchFamily="34" charset="-122"/>
-                <a:cs typeface="Pretendard" pitchFamily="34" charset="-120"/>
-              </a:rPr>
-              <a:t>60분 · 개인 — 이미지 정리부터 시작합니다.</a:t>
-            </a:r>
-            <a:endParaRPr lang="en-US" sz="1200" dirty="0"/>
+            <a:off x="8808415" y="274320"/>
+            <a:ext cx="2743200" cy="219456"/>
+          </a:xfrm>
+          <a:prstGeom prst="rect">
+            <a:avLst/>
+          </a:prstGeom>
+          <a:noFill/>
+          <a:ln/>
+        </p:spPr>
+        <p:txBody>
+          <a:bodyPr wrap="square" lIns="0" tIns="0" rIns="0" bIns="0" rtlCol="0" anchor="ctr"/>
+          <a:lstStyle/>
+          <a:p>
+            <a:pPr algn="r" indent="0" marL="0">
+              <a:buNone/>
+            </a:pPr>
+            <a:r>
+              <a:rPr lang="en-US" sz="900" spc="200" kern="0" dirty="0">
+                <a:solidFill>
+                  <a:srgbClr val="8A8A8A"/>
+                </a:solidFill>
+                <a:latin typeface="Pretendard" pitchFamily="34" charset="0"/>
+                <a:ea typeface="Pretendard" pitchFamily="34" charset="-122"/>
+                <a:cs typeface="Pretendard" pitchFamily="34" charset="-120"/>
+              </a:rPr>
+              <a:t>WEEK 11</a:t>
+            </a:r>
+            <a:endParaRPr lang="en-US" sz="900" dirty="0"/>
           </a:p>
         </p:txBody>
       </p:sp>
@@ -7592,20 +9544,18 @@
         </p:nvSpPr>
         <p:spPr>
           <a:xfrm>
-            <a:off x="640080" y="1719072"/>
-            <a:ext cx="10911535" cy="822960"/>
-          </a:xfrm>
-          <a:prstGeom prst="roundRect">
-            <a:avLst>
-              <a:gd name="adj" fmla="val 8889"/>
-            </a:avLst>
+            <a:off x="640080" y="548640"/>
+            <a:ext cx="10911535" cy="7315"/>
+          </a:xfrm>
+          <a:prstGeom prst="rect">
+            <a:avLst/>
           </a:prstGeom>
           <a:solidFill>
-            <a:srgbClr val="F4F5F7"/>
+            <a:srgbClr val="DCDCDC"/>
           </a:solidFill>
           <a:ln w="12700">
             <a:solidFill>
-              <a:srgbClr val="E4E6EB"/>
+              <a:srgbClr val="DCDCDC"/>
             </a:solidFill>
             <a:prstDash val="solid"/>
           </a:ln>
@@ -7619,26 +9569,168 @@
         </p:nvSpPr>
         <p:spPr>
           <a:xfrm>
+            <a:off x="640080" y="640080"/>
+            <a:ext cx="10911535" cy="219456"/>
+          </a:xfrm>
+          <a:prstGeom prst="rect">
+            <a:avLst/>
+          </a:prstGeom>
+          <a:noFill/>
+          <a:ln/>
+        </p:spPr>
+        <p:txBody>
+          <a:bodyPr wrap="square" lIns="0" tIns="0" rIns="0" bIns="0" rtlCol="0" anchor="ctr"/>
+          <a:lstStyle/>
+          <a:p>
+            <a:pPr indent="0" marL="0">
+              <a:buNone/>
+            </a:pPr>
+            <a:r>
+              <a:rPr lang="en-US" sz="950" spc="260" kern="0" dirty="0">
+                <a:solidFill>
+                  <a:srgbClr val="8A8A8A"/>
+                </a:solidFill>
+                <a:latin typeface="Pretendard" pitchFamily="34" charset="0"/>
+                <a:ea typeface="Pretendard" pitchFamily="34" charset="-122"/>
+                <a:cs typeface="Pretendard" pitchFamily="34" charset="-120"/>
+              </a:rPr>
+              <a:t>WORKSHOP</a:t>
+            </a:r>
+            <a:endParaRPr lang="en-US" sz="950" dirty="0"/>
+          </a:p>
+        </p:txBody>
+      </p:sp>
+      <p:sp>
+        <p:nvSpPr>
+          <p:cNvPr id="7" name="Text 5"/>
+          <p:cNvSpPr/>
+          <p:nvPr/>
+        </p:nvSpPr>
+        <p:spPr>
+          <a:xfrm>
+            <a:off x="640080" y="859536"/>
+            <a:ext cx="10911535" cy="475488"/>
+          </a:xfrm>
+          <a:prstGeom prst="rect">
+            <a:avLst/>
+          </a:prstGeom>
+          <a:noFill/>
+          <a:ln/>
+        </p:spPr>
+        <p:txBody>
+          <a:bodyPr wrap="square" lIns="0" tIns="0" rIns="0" bIns="0" rtlCol="0" anchor="ctr"/>
+          <a:lstStyle/>
+          <a:p>
+            <a:pPr indent="0" marL="0">
+              <a:buNone/>
+            </a:pPr>
+            <a:r>
+              <a:rPr lang="en-US" sz="3000" dirty="0">
+                <a:solidFill>
+                  <a:srgbClr val="111111"/>
+                </a:solidFill>
+                <a:latin typeface="Pretendard Black" pitchFamily="34" charset="0"/>
+                <a:ea typeface="Pretendard Black" pitchFamily="34" charset="-122"/>
+                <a:cs typeface="Pretendard Black" pitchFamily="34" charset="-120"/>
+              </a:rPr>
+              <a:t>실습 · 보정과 배치</a:t>
+            </a:r>
+            <a:endParaRPr lang="en-US" sz="3000" dirty="0"/>
+          </a:p>
+        </p:txBody>
+      </p:sp>
+      <p:sp>
+        <p:nvSpPr>
+          <p:cNvPr id="8" name="Text 6"/>
+          <p:cNvSpPr/>
+          <p:nvPr/>
+        </p:nvSpPr>
+        <p:spPr>
+          <a:xfrm>
+            <a:off x="640080" y="1371600"/>
+            <a:ext cx="10911535" cy="219456"/>
+          </a:xfrm>
+          <a:prstGeom prst="rect">
+            <a:avLst/>
+          </a:prstGeom>
+          <a:noFill/>
+          <a:ln/>
+        </p:spPr>
+        <p:txBody>
+          <a:bodyPr wrap="square" lIns="0" tIns="0" rIns="0" bIns="0" rtlCol="0" anchor="ctr"/>
+          <a:lstStyle/>
+          <a:p>
+            <a:pPr indent="0" marL="0">
+              <a:buNone/>
+            </a:pPr>
+            <a:r>
+              <a:rPr lang="en-US" sz="1150" dirty="0">
+                <a:solidFill>
+                  <a:srgbClr val="6E6E6E"/>
+                </a:solidFill>
+                <a:latin typeface="Pretendard" pitchFamily="34" charset="0"/>
+                <a:ea typeface="Pretendard" pitchFamily="34" charset="-122"/>
+                <a:cs typeface="Pretendard" pitchFamily="34" charset="-120"/>
+              </a:rPr>
+              <a:t>60분 · 개인 — 이미지 정리부터 시작합니다.</a:t>
+            </a:r>
+            <a:endParaRPr lang="en-US" sz="1150" dirty="0"/>
+          </a:p>
+        </p:txBody>
+      </p:sp>
+      <p:sp>
+        <p:nvSpPr>
+          <p:cNvPr id="9" name="Shape 7"/>
+          <p:cNvSpPr/>
+          <p:nvPr/>
+        </p:nvSpPr>
+        <p:spPr>
+          <a:xfrm>
+            <a:off x="640080" y="1719072"/>
+            <a:ext cx="10911535" cy="822960"/>
+          </a:xfrm>
+          <a:prstGeom prst="rect">
+            <a:avLst/>
+          </a:prstGeom>
+          <a:solidFill>
+            <a:srgbClr val="FFFFFF"/>
+          </a:solidFill>
+          <a:ln w="12700">
+            <a:solidFill>
+              <a:srgbClr val="DCDCDC"/>
+            </a:solidFill>
+            <a:prstDash val="solid"/>
+          </a:ln>
+        </p:spPr>
+      </p:sp>
+      <p:sp>
+        <p:nvSpPr>
+          <p:cNvPr id="10" name="Text 8"/>
+          <p:cNvSpPr/>
+          <p:nvPr/>
+        </p:nvSpPr>
+        <p:spPr>
+          <a:xfrm>
             <a:off x="1005840" y="1810512"/>
-            <a:ext cx="1097280" cy="640080"/>
-          </a:xfrm>
-          <a:prstGeom prst="rect">
-            <a:avLst/>
-          </a:prstGeom>
-          <a:noFill/>
-          <a:ln/>
-        </p:spPr>
-        <p:txBody>
-          <a:bodyPr wrap="square" lIns="0" tIns="0" rIns="0" bIns="0" rtlCol="0" anchor="ctr"/>
-          <a:lstStyle/>
-          <a:p>
-            <a:pPr indent="0" marL="0">
-              <a:buNone/>
-            </a:pPr>
-            <a:r>
-              <a:rPr lang="en-US" sz="2000" dirty="0">
-                <a:solidFill>
-                  <a:srgbClr val="FF4A1C"/>
+            <a:ext cx="1188720" cy="640080"/>
+          </a:xfrm>
+          <a:prstGeom prst="rect">
+            <a:avLst/>
+          </a:prstGeom>
+          <a:noFill/>
+          <a:ln/>
+        </p:spPr>
+        <p:txBody>
+          <a:bodyPr wrap="square" lIns="0" tIns="0" rIns="0" bIns="0" rtlCol="0" anchor="ctr"/>
+          <a:lstStyle/>
+          <a:p>
+            <a:pPr indent="0" marL="0">
+              <a:buNone/>
+            </a:pPr>
+            <a:r>
+              <a:rPr lang="en-US" sz="2200" dirty="0">
+                <a:solidFill>
+                  <a:srgbClr val="111111"/>
                 </a:solidFill>
                 <a:latin typeface="Pretendard Light" pitchFamily="34" charset="0"/>
                 <a:ea typeface="Pretendard Light" pitchFamily="34" charset="-122"/>
@@ -7646,19 +9738,19 @@
               </a:rPr>
               <a:t>10분</a:t>
             </a:r>
-            <a:endParaRPr lang="en-US" sz="2000" dirty="0"/>
-          </a:p>
-        </p:txBody>
-      </p:sp>
-      <p:sp>
-        <p:nvSpPr>
-          <p:cNvPr id="7" name="Text 5"/>
-          <p:cNvSpPr/>
-          <p:nvPr/>
-        </p:nvSpPr>
-        <p:spPr>
-          <a:xfrm>
-            <a:off x="2194560" y="1810512"/>
+            <a:endParaRPr lang="en-US" sz="2200" dirty="0"/>
+          </a:p>
+        </p:txBody>
+      </p:sp>
+      <p:sp>
+        <p:nvSpPr>
+          <p:cNvPr id="11" name="Text 9"/>
+          <p:cNvSpPr/>
+          <p:nvPr/>
+        </p:nvSpPr>
+        <p:spPr>
+          <a:xfrm>
+            <a:off x="2286000" y="1810512"/>
             <a:ext cx="3291840" cy="640080"/>
           </a:xfrm>
           <a:prstGeom prst="rect">
@@ -7675,13 +9767,13 @@
               <a:buNone/>
             </a:pPr>
             <a:r>
-              <a:rPr lang="en-US" sz="1450" b="1" dirty="0">
-                <a:solidFill>
-                  <a:srgbClr val="14161B"/>
-                </a:solidFill>
-                <a:latin typeface="Pretendard" pitchFamily="34" charset="0"/>
-                <a:ea typeface="Pretendard" pitchFamily="34" charset="-122"/>
-                <a:cs typeface="Pretendard" pitchFamily="34" charset="-120"/>
+              <a:rPr lang="en-US" sz="1450" dirty="0">
+                <a:solidFill>
+                  <a:srgbClr val="111111"/>
+                </a:solidFill>
+                <a:latin typeface="Pretendard Black" pitchFamily="34" charset="0"/>
+                <a:ea typeface="Pretendard Black" pitchFamily="34" charset="-122"/>
+                <a:cs typeface="Pretendard Black" pitchFamily="34" charset="-120"/>
               </a:rPr>
               <a:t>이미지 점검</a:t>
             </a:r>
@@ -7691,7 +9783,7 @@
       </p:sp>
       <p:sp>
         <p:nvSpPr>
-          <p:cNvPr id="8" name="Text 6"/>
+          <p:cNvPr id="12" name="Text 10"/>
           <p:cNvSpPr/>
           <p:nvPr/>
         </p:nvSpPr>
@@ -7719,7 +9811,7 @@
             <a:r>
               <a:rPr lang="en-US" sz="1150" dirty="0">
                 <a:solidFill>
-                  <a:srgbClr val="6B7280"/>
+                  <a:srgbClr val="6E6E6E"/>
                 </a:solidFill>
                 <a:latin typeface="Pretendard" pitchFamily="34" charset="0"/>
                 <a:ea typeface="Pretendard" pitchFamily="34" charset="-122"/>
@@ -7733,7 +9825,7 @@
       </p:sp>
       <p:sp>
         <p:nvSpPr>
-          <p:cNvPr id="9" name="Shape 7"/>
+          <p:cNvPr id="13" name="Shape 11"/>
           <p:cNvSpPr/>
           <p:nvPr/>
         </p:nvSpPr>
@@ -7742,17 +9834,15 @@
             <a:off x="640080" y="2688336"/>
             <a:ext cx="10911535" cy="822960"/>
           </a:xfrm>
-          <a:prstGeom prst="roundRect">
-            <a:avLst>
-              <a:gd name="adj" fmla="val 8889"/>
-            </a:avLst>
+          <a:prstGeom prst="rect">
+            <a:avLst/>
           </a:prstGeom>
           <a:solidFill>
-            <a:srgbClr val="F4F5F7"/>
+            <a:srgbClr val="FFFFFF"/>
           </a:solidFill>
           <a:ln w="12700">
             <a:solidFill>
-              <a:srgbClr val="E4E6EB"/>
+              <a:srgbClr val="DCDCDC"/>
             </a:solidFill>
             <a:prstDash val="solid"/>
           </a:ln>
@@ -7760,32 +9850,32 @@
       </p:sp>
       <p:sp>
         <p:nvSpPr>
-          <p:cNvPr id="10" name="Text 8"/>
+          <p:cNvPr id="14" name="Text 12"/>
           <p:cNvSpPr/>
           <p:nvPr/>
         </p:nvSpPr>
         <p:spPr>
           <a:xfrm>
             <a:off x="1005840" y="2779776"/>
-            <a:ext cx="1097280" cy="640080"/>
-          </a:xfrm>
-          <a:prstGeom prst="rect">
-            <a:avLst/>
-          </a:prstGeom>
-          <a:noFill/>
-          <a:ln/>
-        </p:spPr>
-        <p:txBody>
-          <a:bodyPr wrap="square" lIns="0" tIns="0" rIns="0" bIns="0" rtlCol="0" anchor="ctr"/>
-          <a:lstStyle/>
-          <a:p>
-            <a:pPr indent="0" marL="0">
-              <a:buNone/>
-            </a:pPr>
-            <a:r>
-              <a:rPr lang="en-US" sz="2000" dirty="0">
-                <a:solidFill>
-                  <a:srgbClr val="FF4A1C"/>
+            <a:ext cx="1188720" cy="640080"/>
+          </a:xfrm>
+          <a:prstGeom prst="rect">
+            <a:avLst/>
+          </a:prstGeom>
+          <a:noFill/>
+          <a:ln/>
+        </p:spPr>
+        <p:txBody>
+          <a:bodyPr wrap="square" lIns="0" tIns="0" rIns="0" bIns="0" rtlCol="0" anchor="ctr"/>
+          <a:lstStyle/>
+          <a:p>
+            <a:pPr indent="0" marL="0">
+              <a:buNone/>
+            </a:pPr>
+            <a:r>
+              <a:rPr lang="en-US" sz="2200" dirty="0">
+                <a:solidFill>
+                  <a:srgbClr val="111111"/>
                 </a:solidFill>
                 <a:latin typeface="Pretendard Light" pitchFamily="34" charset="0"/>
                 <a:ea typeface="Pretendard Light" pitchFamily="34" charset="-122"/>
@@ -7793,19 +9883,19 @@
               </a:rPr>
               <a:t>20분</a:t>
             </a:r>
-            <a:endParaRPr lang="en-US" sz="2000" dirty="0"/>
-          </a:p>
-        </p:txBody>
-      </p:sp>
-      <p:sp>
-        <p:nvSpPr>
-          <p:cNvPr id="11" name="Text 9"/>
-          <p:cNvSpPr/>
-          <p:nvPr/>
-        </p:nvSpPr>
-        <p:spPr>
-          <a:xfrm>
-            <a:off x="2194560" y="2779776"/>
+            <a:endParaRPr lang="en-US" sz="2200" dirty="0"/>
+          </a:p>
+        </p:txBody>
+      </p:sp>
+      <p:sp>
+        <p:nvSpPr>
+          <p:cNvPr id="15" name="Text 13"/>
+          <p:cNvSpPr/>
+          <p:nvPr/>
+        </p:nvSpPr>
+        <p:spPr>
+          <a:xfrm>
+            <a:off x="2286000" y="2779776"/>
             <a:ext cx="3291840" cy="640080"/>
           </a:xfrm>
           <a:prstGeom prst="rect">
@@ -7822,13 +9912,13 @@
               <a:buNone/>
             </a:pPr>
             <a:r>
-              <a:rPr lang="en-US" sz="1450" b="1" dirty="0">
-                <a:solidFill>
-                  <a:srgbClr val="14161B"/>
-                </a:solidFill>
-                <a:latin typeface="Pretendard" pitchFamily="34" charset="0"/>
-                <a:ea typeface="Pretendard" pitchFamily="34" charset="-122"/>
-                <a:cs typeface="Pretendard" pitchFamily="34" charset="-120"/>
+              <a:rPr lang="en-US" sz="1450" dirty="0">
+                <a:solidFill>
+                  <a:srgbClr val="111111"/>
+                </a:solidFill>
+                <a:latin typeface="Pretendard Black" pitchFamily="34" charset="0"/>
+                <a:ea typeface="Pretendard Black" pitchFamily="34" charset="-122"/>
+                <a:cs typeface="Pretendard Black" pitchFamily="34" charset="-120"/>
               </a:rPr>
               <a:t>톤 통일</a:t>
             </a:r>
@@ -7838,7 +9928,7 @@
       </p:sp>
       <p:sp>
         <p:nvSpPr>
-          <p:cNvPr id="12" name="Text 10"/>
+          <p:cNvPr id="16" name="Text 14"/>
           <p:cNvSpPr/>
           <p:nvPr/>
         </p:nvSpPr>
@@ -7866,7 +9956,7 @@
             <a:r>
               <a:rPr lang="en-US" sz="1150" dirty="0">
                 <a:solidFill>
-                  <a:srgbClr val="6B7280"/>
+                  <a:srgbClr val="6E6E6E"/>
                 </a:solidFill>
                 <a:latin typeface="Pretendard" pitchFamily="34" charset="0"/>
                 <a:ea typeface="Pretendard" pitchFamily="34" charset="-122"/>
@@ -7880,7 +9970,7 @@
       </p:sp>
       <p:sp>
         <p:nvSpPr>
-          <p:cNvPr id="13" name="Shape 11"/>
+          <p:cNvPr id="17" name="Shape 15"/>
           <p:cNvSpPr/>
           <p:nvPr/>
         </p:nvSpPr>
@@ -7889,17 +9979,15 @@
             <a:off x="640080" y="3657600"/>
             <a:ext cx="10911535" cy="822960"/>
           </a:xfrm>
-          <a:prstGeom prst="roundRect">
-            <a:avLst>
-              <a:gd name="adj" fmla="val 8889"/>
-            </a:avLst>
+          <a:prstGeom prst="rect">
+            <a:avLst/>
           </a:prstGeom>
           <a:solidFill>
-            <a:srgbClr val="F4F5F7"/>
+            <a:srgbClr val="FFFFFF"/>
           </a:solidFill>
           <a:ln w="12700">
             <a:solidFill>
-              <a:srgbClr val="E4E6EB"/>
+              <a:srgbClr val="DCDCDC"/>
             </a:solidFill>
             <a:prstDash val="solid"/>
           </a:ln>
@@ -7907,32 +9995,32 @@
       </p:sp>
       <p:sp>
         <p:nvSpPr>
-          <p:cNvPr id="14" name="Text 12"/>
+          <p:cNvPr id="18" name="Text 16"/>
           <p:cNvSpPr/>
           <p:nvPr/>
         </p:nvSpPr>
         <p:spPr>
           <a:xfrm>
             <a:off x="1005840" y="3749040"/>
-            <a:ext cx="1097280" cy="640080"/>
-          </a:xfrm>
-          <a:prstGeom prst="rect">
-            <a:avLst/>
-          </a:prstGeom>
-          <a:noFill/>
-          <a:ln/>
-        </p:spPr>
-        <p:txBody>
-          <a:bodyPr wrap="square" lIns="0" tIns="0" rIns="0" bIns="0" rtlCol="0" anchor="ctr"/>
-          <a:lstStyle/>
-          <a:p>
-            <a:pPr indent="0" marL="0">
-              <a:buNone/>
-            </a:pPr>
-            <a:r>
-              <a:rPr lang="en-US" sz="2000" dirty="0">
-                <a:solidFill>
-                  <a:srgbClr val="FF4A1C"/>
+            <a:ext cx="1188720" cy="640080"/>
+          </a:xfrm>
+          <a:prstGeom prst="rect">
+            <a:avLst/>
+          </a:prstGeom>
+          <a:noFill/>
+          <a:ln/>
+        </p:spPr>
+        <p:txBody>
+          <a:bodyPr wrap="square" lIns="0" tIns="0" rIns="0" bIns="0" rtlCol="0" anchor="ctr"/>
+          <a:lstStyle/>
+          <a:p>
+            <a:pPr indent="0" marL="0">
+              <a:buNone/>
+            </a:pPr>
+            <a:r>
+              <a:rPr lang="en-US" sz="2200" dirty="0">
+                <a:solidFill>
+                  <a:srgbClr val="111111"/>
                 </a:solidFill>
                 <a:latin typeface="Pretendard Light" pitchFamily="34" charset="0"/>
                 <a:ea typeface="Pretendard Light" pitchFamily="34" charset="-122"/>
@@ -7940,19 +10028,19 @@
               </a:rPr>
               <a:t>20분</a:t>
             </a:r>
-            <a:endParaRPr lang="en-US" sz="2000" dirty="0"/>
-          </a:p>
-        </p:txBody>
-      </p:sp>
-      <p:sp>
-        <p:nvSpPr>
-          <p:cNvPr id="15" name="Text 13"/>
-          <p:cNvSpPr/>
-          <p:nvPr/>
-        </p:nvSpPr>
-        <p:spPr>
-          <a:xfrm>
-            <a:off x="2194560" y="3749040"/>
+            <a:endParaRPr lang="en-US" sz="2200" dirty="0"/>
+          </a:p>
+        </p:txBody>
+      </p:sp>
+      <p:sp>
+        <p:nvSpPr>
+          <p:cNvPr id="19" name="Text 17"/>
+          <p:cNvSpPr/>
+          <p:nvPr/>
+        </p:nvSpPr>
+        <p:spPr>
+          <a:xfrm>
+            <a:off x="2286000" y="3749040"/>
             <a:ext cx="3291840" cy="640080"/>
           </a:xfrm>
           <a:prstGeom prst="rect">
@@ -7969,13 +10057,13 @@
               <a:buNone/>
             </a:pPr>
             <a:r>
-              <a:rPr lang="en-US" sz="1450" b="1" dirty="0">
-                <a:solidFill>
-                  <a:srgbClr val="14161B"/>
-                </a:solidFill>
-                <a:latin typeface="Pretendard" pitchFamily="34" charset="0"/>
-                <a:ea typeface="Pretendard" pitchFamily="34" charset="-122"/>
-                <a:cs typeface="Pretendard" pitchFamily="34" charset="-120"/>
+              <a:rPr lang="en-US" sz="1450" dirty="0">
+                <a:solidFill>
+                  <a:srgbClr val="111111"/>
+                </a:solidFill>
+                <a:latin typeface="Pretendard Black" pitchFamily="34" charset="0"/>
+                <a:ea typeface="Pretendard Black" pitchFamily="34" charset="-122"/>
+                <a:cs typeface="Pretendard Black" pitchFamily="34" charset="-120"/>
               </a:rPr>
               <a:t>결과 페이지</a:t>
             </a:r>
@@ -7985,7 +10073,7 @@
       </p:sp>
       <p:sp>
         <p:nvSpPr>
-          <p:cNvPr id="16" name="Text 14"/>
+          <p:cNvPr id="20" name="Text 18"/>
           <p:cNvSpPr/>
           <p:nvPr/>
         </p:nvSpPr>
@@ -8013,7 +10101,7 @@
             <a:r>
               <a:rPr lang="en-US" sz="1150" dirty="0">
                 <a:solidFill>
-                  <a:srgbClr val="6B7280"/>
+                  <a:srgbClr val="6E6E6E"/>
                 </a:solidFill>
                 <a:latin typeface="Pretendard" pitchFamily="34" charset="0"/>
                 <a:ea typeface="Pretendard" pitchFamily="34" charset="-122"/>
@@ -8027,7 +10115,7 @@
       </p:sp>
       <p:sp>
         <p:nvSpPr>
-          <p:cNvPr id="17" name="Shape 15"/>
+          <p:cNvPr id="21" name="Shape 19"/>
           <p:cNvSpPr/>
           <p:nvPr/>
         </p:nvSpPr>
@@ -8036,17 +10124,15 @@
             <a:off x="640080" y="4626864"/>
             <a:ext cx="10911535" cy="822960"/>
           </a:xfrm>
-          <a:prstGeom prst="roundRect">
-            <a:avLst>
-              <a:gd name="adj" fmla="val 8889"/>
-            </a:avLst>
+          <a:prstGeom prst="rect">
+            <a:avLst/>
           </a:prstGeom>
           <a:solidFill>
-            <a:srgbClr val="14161B"/>
+            <a:srgbClr val="111111"/>
           </a:solidFill>
           <a:ln w="12700">
             <a:solidFill>
-              <a:srgbClr val="14161B"/>
+              <a:srgbClr val="111111"/>
             </a:solidFill>
             <a:prstDash val="solid"/>
           </a:ln>
@@ -8054,32 +10140,32 @@
       </p:sp>
       <p:sp>
         <p:nvSpPr>
-          <p:cNvPr id="18" name="Text 16"/>
+          <p:cNvPr id="22" name="Text 20"/>
           <p:cNvSpPr/>
           <p:nvPr/>
         </p:nvSpPr>
         <p:spPr>
           <a:xfrm>
             <a:off x="1005840" y="4718304"/>
-            <a:ext cx="1097280" cy="640080"/>
-          </a:xfrm>
-          <a:prstGeom prst="rect">
-            <a:avLst/>
-          </a:prstGeom>
-          <a:noFill/>
-          <a:ln/>
-        </p:spPr>
-        <p:txBody>
-          <a:bodyPr wrap="square" lIns="0" tIns="0" rIns="0" bIns="0" rtlCol="0" anchor="ctr"/>
-          <a:lstStyle/>
-          <a:p>
-            <a:pPr indent="0" marL="0">
-              <a:buNone/>
-            </a:pPr>
-            <a:r>
-              <a:rPr lang="en-US" sz="2000" dirty="0">
-                <a:solidFill>
-                  <a:srgbClr val="FF4A1C"/>
+            <a:ext cx="1188720" cy="640080"/>
+          </a:xfrm>
+          <a:prstGeom prst="rect">
+            <a:avLst/>
+          </a:prstGeom>
+          <a:noFill/>
+          <a:ln/>
+        </p:spPr>
+        <p:txBody>
+          <a:bodyPr wrap="square" lIns="0" tIns="0" rIns="0" bIns="0" rtlCol="0" anchor="ctr"/>
+          <a:lstStyle/>
+          <a:p>
+            <a:pPr indent="0" marL="0">
+              <a:buNone/>
+            </a:pPr>
+            <a:r>
+              <a:rPr lang="en-US" sz="2200" dirty="0">
+                <a:solidFill>
+                  <a:srgbClr val="FFFFFF"/>
                 </a:solidFill>
                 <a:latin typeface="Pretendard Light" pitchFamily="34" charset="0"/>
                 <a:ea typeface="Pretendard Light" pitchFamily="34" charset="-122"/>
@@ -8087,19 +10173,19 @@
               </a:rPr>
               <a:t>10분</a:t>
             </a:r>
-            <a:endParaRPr lang="en-US" sz="2000" dirty="0"/>
-          </a:p>
-        </p:txBody>
-      </p:sp>
-      <p:sp>
-        <p:nvSpPr>
-          <p:cNvPr id="19" name="Text 17"/>
-          <p:cNvSpPr/>
-          <p:nvPr/>
-        </p:nvSpPr>
-        <p:spPr>
-          <a:xfrm>
-            <a:off x="2194560" y="4718304"/>
+            <a:endParaRPr lang="en-US" sz="2200" dirty="0"/>
+          </a:p>
+        </p:txBody>
+      </p:sp>
+      <p:sp>
+        <p:nvSpPr>
+          <p:cNvPr id="23" name="Text 21"/>
+          <p:cNvSpPr/>
+          <p:nvPr/>
+        </p:nvSpPr>
+        <p:spPr>
+          <a:xfrm>
+            <a:off x="2286000" y="4718304"/>
             <a:ext cx="3291840" cy="640080"/>
           </a:xfrm>
           <a:prstGeom prst="rect">
@@ -8116,13 +10202,13 @@
               <a:buNone/>
             </a:pPr>
             <a:r>
-              <a:rPr lang="en-US" sz="1450" b="1" dirty="0">
+              <a:rPr lang="en-US" sz="1450" dirty="0">
                 <a:solidFill>
                   <a:srgbClr val="FFFFFF"/>
                 </a:solidFill>
-                <a:latin typeface="Pretendard" pitchFamily="34" charset="0"/>
-                <a:ea typeface="Pretendard" pitchFamily="34" charset="-122"/>
-                <a:cs typeface="Pretendard" pitchFamily="34" charset="-120"/>
+                <a:latin typeface="Pretendard Black" pitchFamily="34" charset="0"/>
+                <a:ea typeface="Pretendard Black" pitchFamily="34" charset="-122"/>
+                <a:cs typeface="Pretendard Black" pitchFamily="34" charset="-120"/>
               </a:rPr>
               <a:t>전체 훑기</a:t>
             </a:r>
@@ -8132,7 +10218,7 @@
       </p:sp>
       <p:sp>
         <p:nvSpPr>
-          <p:cNvPr id="20" name="Text 18"/>
+          <p:cNvPr id="24" name="Text 22"/>
           <p:cNvSpPr/>
           <p:nvPr/>
         </p:nvSpPr>
@@ -8160,7 +10246,7 @@
             <a:r>
               <a:rPr lang="en-US" sz="1150" dirty="0">
                 <a:solidFill>
-                  <a:srgbClr val="AEB4BF"/>
+                  <a:srgbClr val="B8B8B8"/>
                 </a:solidFill>
                 <a:latin typeface="Pretendard" pitchFamily="34" charset="0"/>
                 <a:ea typeface="Pretendard" pitchFamily="34" charset="-122"/>
@@ -8174,32 +10260,57 @@
       </p:sp>
       <p:sp>
         <p:nvSpPr>
-          <p:cNvPr id="21" name="Text 19"/>
-          <p:cNvSpPr/>
-          <p:nvPr/>
-        </p:nvSpPr>
-        <p:spPr>
-          <a:xfrm>
-            <a:off x="640080" y="6345936"/>
-            <a:ext cx="7772400" cy="256032"/>
-          </a:xfrm>
-          <a:prstGeom prst="rect">
-            <a:avLst/>
-          </a:prstGeom>
-          <a:noFill/>
-          <a:ln/>
-        </p:spPr>
-        <p:txBody>
-          <a:bodyPr wrap="square" lIns="0" tIns="0" rIns="0" bIns="0" rtlCol="0" anchor="ctr"/>
-          <a:lstStyle/>
-          <a:p>
-            <a:pPr indent="0" marL="0">
-              <a:buNone/>
-            </a:pPr>
-            <a:r>
-              <a:rPr lang="en-US" sz="900" dirty="0">
-                <a:solidFill>
-                  <a:srgbClr val="9AA0AA"/>
+          <p:cNvPr id="25" name="Shape 23"/>
+          <p:cNvSpPr/>
+          <p:nvPr/>
+        </p:nvSpPr>
+        <p:spPr>
+          <a:xfrm>
+            <a:off x="640080" y="6291072"/>
+            <a:ext cx="10911535" cy="7315"/>
+          </a:xfrm>
+          <a:prstGeom prst="rect">
+            <a:avLst/>
+          </a:prstGeom>
+          <a:solidFill>
+            <a:srgbClr val="DCDCDC"/>
+          </a:solidFill>
+          <a:ln w="12700">
+            <a:solidFill>
+              <a:srgbClr val="DCDCDC"/>
+            </a:solidFill>
+            <a:prstDash val="solid"/>
+          </a:ln>
+        </p:spPr>
+      </p:sp>
+      <p:sp>
+        <p:nvSpPr>
+          <p:cNvPr id="26" name="Text 24"/>
+          <p:cNvSpPr/>
+          <p:nvPr/>
+        </p:nvSpPr>
+        <p:spPr>
+          <a:xfrm>
+            <a:off x="640080" y="6382512"/>
+            <a:ext cx="7772400" cy="237744"/>
+          </a:xfrm>
+          <a:prstGeom prst="rect">
+            <a:avLst/>
+          </a:prstGeom>
+          <a:noFill/>
+          <a:ln/>
+        </p:spPr>
+        <p:txBody>
+          <a:bodyPr wrap="square" lIns="0" tIns="0" rIns="0" bIns="0" rtlCol="0" anchor="ctr"/>
+          <a:lstStyle/>
+          <a:p>
+            <a:pPr indent="0" marL="0">
+              <a:buNone/>
+            </a:pPr>
+            <a:r>
+              <a:rPr lang="en-US" sz="850" spc="40" kern="0" dirty="0">
+                <a:solidFill>
+                  <a:srgbClr val="9B9B9B"/>
                 </a:solidFill>
                 <a:latin typeface="Pretendard" pitchFamily="34" charset="0"/>
                 <a:ea typeface="Pretendard" pitchFamily="34" charset="-122"/>
@@ -8207,20 +10318,20 @@
               </a:rPr>
               <a:t>포트폴리오제작 · 11주차 편집디자인 실습 Ⅱ</a:t>
             </a:r>
-            <a:endParaRPr lang="en-US" sz="900" dirty="0"/>
-          </a:p>
-        </p:txBody>
-      </p:sp>
-      <p:sp>
-        <p:nvSpPr>
-          <p:cNvPr id="22" name="Text 20"/>
-          <p:cNvSpPr/>
-          <p:nvPr/>
-        </p:nvSpPr>
-        <p:spPr>
-          <a:xfrm>
-            <a:off x="10454335" y="6345936"/>
-            <a:ext cx="1097280" cy="256032"/>
+            <a:endParaRPr lang="en-US" sz="850" dirty="0"/>
+          </a:p>
+        </p:txBody>
+      </p:sp>
+      <p:sp>
+        <p:nvSpPr>
+          <p:cNvPr id="27" name="Text 25"/>
+          <p:cNvSpPr/>
+          <p:nvPr/>
+        </p:nvSpPr>
+        <p:spPr>
+          <a:xfrm>
+            <a:off x="10271455" y="6382512"/>
+            <a:ext cx="1280160" cy="237744"/>
           </a:xfrm>
           <a:prstGeom prst="rect">
             <a:avLst/>
@@ -8236,17 +10347,17 @@
               <a:buNone/>
             </a:pPr>
             <a:r>
-              <a:rPr lang="en-US" sz="900" dirty="0">
-                <a:solidFill>
-                  <a:srgbClr val="9AA0AA"/>
-                </a:solidFill>
-                <a:latin typeface="Pretendard" pitchFamily="34" charset="0"/>
-                <a:ea typeface="Pretendard" pitchFamily="34" charset="-122"/>
-                <a:cs typeface="Pretendard" pitchFamily="34" charset="-120"/>
-              </a:rPr>
-              <a:t>06</a:t>
-            </a:r>
-            <a:endParaRPr lang="en-US" sz="900" dirty="0"/>
+              <a:rPr lang="en-US" sz="850" spc="140" kern="0" dirty="0">
+                <a:solidFill>
+                  <a:srgbClr val="9B9B9B"/>
+                </a:solidFill>
+                <a:latin typeface="Pretendard" pitchFamily="34" charset="0"/>
+                <a:ea typeface="Pretendard" pitchFamily="34" charset="-122"/>
+                <a:cs typeface="Pretendard" pitchFamily="34" charset="-120"/>
+              </a:rPr>
+              <a:t>P.06</a:t>
+            </a:r>
+            <a:endParaRPr lang="en-US" sz="850" dirty="0"/>
           </a:p>
         </p:txBody>
       </p:sp>

--- a/dist/weeks-포트폴리오제작/포트폴리오제작_11주차_편집디자인2.pptx
+++ b/dist/weeks-포트폴리오제작/포트폴리오제작_11주차_편집디자인2.pptx
@@ -2244,7 +2244,7 @@
                 <a:ea typeface="Pretendard" pitchFamily="34" charset="-122"/>
                 <a:cs typeface="Pretendard" pitchFamily="34" charset="-120"/>
               </a:rPr>
-              <a:t>90분 — 강의 20분 · 이미지 보정·배치 실습 60분</a:t>
+              <a:t>120분 — 강의 20분 · 이미지 보정·배치 실습 80분 · 정리 10분</a:t>
             </a:r>
             <a:endParaRPr lang="en-US" sz="1200" dirty="0"/>
           </a:p>
@@ -3830,7 +3830,7 @@
                 <a:ea typeface="Pretendard Black" pitchFamily="34" charset="-122"/>
                 <a:cs typeface="Pretendard Black" pitchFamily="34" charset="-120"/>
               </a:rPr>
-              <a:t>오늘의 90분</a:t>
+              <a:t>오늘의 120분</a:t>
             </a:r>
             <a:endParaRPr lang="en-US" sz="3000" dirty="0"/>
           </a:p>
@@ -3869,7 +3869,7 @@
                 <a:ea typeface="Pretendard" pitchFamily="34" charset="-122"/>
                 <a:cs typeface="Pretendard" pitchFamily="34" charset="-120"/>
               </a:rPr>
-              <a:t>강의 20분 · 이미지 보정·배치 실습 60분</a:t>
+              <a:t>강의 20분 · 이미지 보정·배치 실습 80분 · 정리 10분</a:t>
             </a:r>
             <a:endParaRPr lang="en-US" sz="1150" dirty="0"/>
           </a:p>
@@ -3909,7 +3909,7 @@
         <p:spPr>
           <a:xfrm>
             <a:off x="640080" y="1719072"/>
-            <a:ext cx="1600200" cy="932688"/>
+            <a:ext cx="1600200" cy="830275"/>
           </a:xfrm>
           <a:prstGeom prst="rect">
             <a:avLst/>
@@ -3948,7 +3948,7 @@
         <p:spPr>
           <a:xfrm>
             <a:off x="2377440" y="1719072"/>
-            <a:ext cx="6888175" cy="932688"/>
+            <a:ext cx="6888175" cy="830275"/>
           </a:xfrm>
           <a:prstGeom prst="rect">
             <a:avLst/>
@@ -3987,7 +3987,7 @@
         <p:spPr>
           <a:xfrm>
             <a:off x="9265615" y="1719072"/>
-            <a:ext cx="2286000" cy="932688"/>
+            <a:ext cx="2286000" cy="830275"/>
           </a:xfrm>
           <a:prstGeom prst="rect">
             <a:avLst/>
@@ -4025,7 +4025,7 @@
         </p:nvSpPr>
         <p:spPr>
           <a:xfrm>
-            <a:off x="640080" y="2633472"/>
+            <a:off x="640080" y="2531059"/>
             <a:ext cx="10911535" cy="7315"/>
           </a:xfrm>
           <a:prstGeom prst="rect">
@@ -4050,8 +4050,8 @@
         </p:nvSpPr>
         <p:spPr>
           <a:xfrm>
-            <a:off x="640080" y="2651760"/>
-            <a:ext cx="1600200" cy="932688"/>
+            <a:off x="640080" y="2549347"/>
+            <a:ext cx="1600200" cy="830275"/>
           </a:xfrm>
           <a:prstGeom prst="rect">
             <a:avLst/>
@@ -4075,7 +4075,7 @@
                 <a:ea typeface="Pretendard" pitchFamily="34" charset="-122"/>
                 <a:cs typeface="Pretendard" pitchFamily="34" charset="-120"/>
               </a:rPr>
-              <a:t>00:20–01:20</a:t>
+              <a:t>00:20–01:05</a:t>
             </a:r>
             <a:endParaRPr lang="en-US" sz="1050" dirty="0"/>
           </a:p>
@@ -4089,8 +4089,8 @@
         </p:nvSpPr>
         <p:spPr>
           <a:xfrm>
-            <a:off x="2377440" y="2651760"/>
-            <a:ext cx="6888175" cy="932688"/>
+            <a:off x="2377440" y="2549347"/>
+            <a:ext cx="6888175" cy="830275"/>
           </a:xfrm>
           <a:prstGeom prst="rect">
             <a:avLst/>
@@ -4114,7 +4114,7 @@
                 <a:ea typeface="Pretendard" pitchFamily="34" charset="-122"/>
                 <a:cs typeface="Pretendard" pitchFamily="34" charset="-120"/>
               </a:rPr>
-              <a:t>이미지 보정 · 배치 실습</a:t>
+              <a:t>이미지 보정 · 배치 실습 (1)</a:t>
             </a:r>
             <a:endParaRPr lang="en-US" sz="1300" dirty="0"/>
           </a:p>
@@ -4128,8 +4128,8 @@
         </p:nvSpPr>
         <p:spPr>
           <a:xfrm>
-            <a:off x="9265615" y="2651760"/>
-            <a:ext cx="2286000" cy="932688"/>
+            <a:off x="9265615" y="2549347"/>
+            <a:ext cx="2286000" cy="830275"/>
           </a:xfrm>
           <a:prstGeom prst="rect">
             <a:avLst/>
@@ -4167,7 +4167,7 @@
         </p:nvSpPr>
         <p:spPr>
           <a:xfrm>
-            <a:off x="640080" y="3566160"/>
+            <a:off x="640080" y="3361334"/>
             <a:ext cx="10911535" cy="7315"/>
           </a:xfrm>
           <a:prstGeom prst="rect">
@@ -4192,8 +4192,111 @@
         </p:nvSpPr>
         <p:spPr>
           <a:xfrm>
-            <a:off x="640080" y="3584448"/>
-            <a:ext cx="1600200" cy="932688"/>
+            <a:off x="640080" y="3379622"/>
+            <a:ext cx="1600200" cy="830275"/>
+          </a:xfrm>
+          <a:prstGeom prst="rect">
+            <a:avLst/>
+          </a:prstGeom>
+          <a:noFill/>
+          <a:ln/>
+        </p:spPr>
+        <p:txBody>
+          <a:bodyPr wrap="square" lIns="0" tIns="0" rIns="0" bIns="0" rtlCol="0" anchor="ctr"/>
+          <a:lstStyle/>
+          <a:p>
+            <a:pPr indent="0" marL="0">
+              <a:buNone/>
+            </a:pPr>
+            <a:r>
+              <a:rPr lang="en-US" sz="1050" spc="60" kern="0" dirty="0">
+                <a:solidFill>
+                  <a:srgbClr val="9B9B9B"/>
+                </a:solidFill>
+                <a:latin typeface="Pretendard" pitchFamily="34" charset="0"/>
+                <a:ea typeface="Pretendard" pitchFamily="34" charset="-122"/>
+                <a:cs typeface="Pretendard" pitchFamily="34" charset="-120"/>
+              </a:rPr>
+              <a:t>01:05–01:15</a:t>
+            </a:r>
+            <a:endParaRPr lang="en-US" sz="1050" dirty="0"/>
+          </a:p>
+        </p:txBody>
+      </p:sp>
+      <p:sp>
+        <p:nvSpPr>
+          <p:cNvPr id="19" name="Text 17"/>
+          <p:cNvSpPr/>
+          <p:nvPr/>
+        </p:nvSpPr>
+        <p:spPr>
+          <a:xfrm>
+            <a:off x="2377440" y="3379622"/>
+            <a:ext cx="6888175" cy="830275"/>
+          </a:xfrm>
+          <a:prstGeom prst="rect">
+            <a:avLst/>
+          </a:prstGeom>
+          <a:noFill/>
+          <a:ln/>
+        </p:spPr>
+        <p:txBody>
+          <a:bodyPr wrap="square" lIns="0" tIns="0" rIns="0" bIns="0" rtlCol="0" anchor="ctr"/>
+          <a:lstStyle/>
+          <a:p>
+            <a:pPr indent="0" marL="0">
+              <a:buNone/>
+            </a:pPr>
+            <a:r>
+              <a:rPr lang="en-US" sz="1100" dirty="0">
+                <a:solidFill>
+                  <a:srgbClr val="9B9B9B"/>
+                </a:solidFill>
+                <a:latin typeface="Pretendard" pitchFamily="34" charset="0"/>
+                <a:ea typeface="Pretendard" pitchFamily="34" charset="-122"/>
+                <a:cs typeface="Pretendard" pitchFamily="34" charset="-120"/>
+              </a:rPr>
+              <a:t>휴식</a:t>
+            </a:r>
+            <a:endParaRPr lang="en-US" sz="1100" dirty="0"/>
+          </a:p>
+        </p:txBody>
+      </p:sp>
+      <p:sp>
+        <p:nvSpPr>
+          <p:cNvPr id="20" name="Shape 18"/>
+          <p:cNvSpPr/>
+          <p:nvPr/>
+        </p:nvSpPr>
+        <p:spPr>
+          <a:xfrm>
+            <a:off x="640080" y="4191610"/>
+            <a:ext cx="10911535" cy="7315"/>
+          </a:xfrm>
+          <a:prstGeom prst="rect">
+            <a:avLst/>
+          </a:prstGeom>
+          <a:solidFill>
+            <a:srgbClr val="EFEFEF"/>
+          </a:solidFill>
+          <a:ln w="12700">
+            <a:solidFill>
+              <a:srgbClr val="EFEFEF"/>
+            </a:solidFill>
+            <a:prstDash val="solid"/>
+          </a:ln>
+        </p:spPr>
+      </p:sp>
+      <p:sp>
+        <p:nvSpPr>
+          <p:cNvPr id="21" name="Text 19"/>
+          <p:cNvSpPr/>
+          <p:nvPr/>
+        </p:nvSpPr>
+        <p:spPr>
+          <a:xfrm>
+            <a:off x="640080" y="4209898"/>
+            <a:ext cx="1600200" cy="830275"/>
           </a:xfrm>
           <a:prstGeom prst="rect">
             <a:avLst/>
@@ -4217,7 +4320,7 @@
                 <a:ea typeface="Pretendard" pitchFamily="34" charset="-122"/>
                 <a:cs typeface="Pretendard" pitchFamily="34" charset="-120"/>
               </a:rPr>
-              <a:t>01:20–01:30</a:t>
+              <a:t>01:15–01:50</a:t>
             </a:r>
             <a:endParaRPr lang="en-US" sz="1050" dirty="0"/>
           </a:p>
@@ -4225,14 +4328,14 @@
       </p:sp>
       <p:sp>
         <p:nvSpPr>
-          <p:cNvPr id="19" name="Text 17"/>
-          <p:cNvSpPr/>
-          <p:nvPr/>
-        </p:nvSpPr>
-        <p:spPr>
-          <a:xfrm>
-            <a:off x="2377440" y="3584448"/>
-            <a:ext cx="6888175" cy="932688"/>
+          <p:cNvPr id="22" name="Text 20"/>
+          <p:cNvSpPr/>
+          <p:nvPr/>
+        </p:nvSpPr>
+        <p:spPr>
+          <a:xfrm>
+            <a:off x="2377440" y="4209898"/>
+            <a:ext cx="6888175" cy="830275"/>
           </a:xfrm>
           <a:prstGeom prst="rect">
             <a:avLst/>
@@ -4256,6 +4359,148 @@
                 <a:ea typeface="Pretendard" pitchFamily="34" charset="-122"/>
                 <a:cs typeface="Pretendard" pitchFamily="34" charset="-120"/>
               </a:rPr>
+              <a:t>이미지 보정 · 배치 실습 (2)</a:t>
+            </a:r>
+            <a:endParaRPr lang="en-US" sz="1300" dirty="0"/>
+          </a:p>
+        </p:txBody>
+      </p:sp>
+      <p:sp>
+        <p:nvSpPr>
+          <p:cNvPr id="23" name="Text 21"/>
+          <p:cNvSpPr/>
+          <p:nvPr/>
+        </p:nvSpPr>
+        <p:spPr>
+          <a:xfrm>
+            <a:off x="9265615" y="4209898"/>
+            <a:ext cx="2286000" cy="830275"/>
+          </a:xfrm>
+          <a:prstGeom prst="rect">
+            <a:avLst/>
+          </a:prstGeom>
+          <a:noFill/>
+          <a:ln/>
+        </p:spPr>
+        <p:txBody>
+          <a:bodyPr wrap="square" lIns="0" tIns="0" rIns="0" bIns="0" rtlCol="0" anchor="ctr"/>
+          <a:lstStyle/>
+          <a:p>
+            <a:pPr algn="r" indent="0" marL="0">
+              <a:buNone/>
+            </a:pPr>
+            <a:r>
+              <a:rPr lang="en-US" sz="1050" dirty="0">
+                <a:solidFill>
+                  <a:srgbClr val="6E6E6E"/>
+                </a:solidFill>
+                <a:latin typeface="Pretendard" pitchFamily="34" charset="0"/>
+                <a:ea typeface="Pretendard" pitchFamily="34" charset="-122"/>
+                <a:cs typeface="Pretendard" pitchFamily="34" charset="-120"/>
+              </a:rPr>
+              <a:t>개인 워크 + 순회</a:t>
+            </a:r>
+            <a:endParaRPr lang="en-US" sz="1050" dirty="0"/>
+          </a:p>
+        </p:txBody>
+      </p:sp>
+      <p:sp>
+        <p:nvSpPr>
+          <p:cNvPr id="24" name="Shape 22"/>
+          <p:cNvSpPr/>
+          <p:nvPr/>
+        </p:nvSpPr>
+        <p:spPr>
+          <a:xfrm>
+            <a:off x="640080" y="5021885"/>
+            <a:ext cx="10911535" cy="7315"/>
+          </a:xfrm>
+          <a:prstGeom prst="rect">
+            <a:avLst/>
+          </a:prstGeom>
+          <a:solidFill>
+            <a:srgbClr val="DCDCDC"/>
+          </a:solidFill>
+          <a:ln w="12700">
+            <a:solidFill>
+              <a:srgbClr val="DCDCDC"/>
+            </a:solidFill>
+            <a:prstDash val="solid"/>
+          </a:ln>
+        </p:spPr>
+      </p:sp>
+      <p:sp>
+        <p:nvSpPr>
+          <p:cNvPr id="25" name="Text 23"/>
+          <p:cNvSpPr/>
+          <p:nvPr/>
+        </p:nvSpPr>
+        <p:spPr>
+          <a:xfrm>
+            <a:off x="640080" y="5040173"/>
+            <a:ext cx="1600200" cy="830275"/>
+          </a:xfrm>
+          <a:prstGeom prst="rect">
+            <a:avLst/>
+          </a:prstGeom>
+          <a:noFill/>
+          <a:ln/>
+        </p:spPr>
+        <p:txBody>
+          <a:bodyPr wrap="square" lIns="0" tIns="0" rIns="0" bIns="0" rtlCol="0" anchor="ctr"/>
+          <a:lstStyle/>
+          <a:p>
+            <a:pPr indent="0" marL="0">
+              <a:buNone/>
+            </a:pPr>
+            <a:r>
+              <a:rPr lang="en-US" sz="1050" b="1" spc="60" kern="0" dirty="0">
+                <a:solidFill>
+                  <a:srgbClr val="111111"/>
+                </a:solidFill>
+                <a:latin typeface="Pretendard" pitchFamily="34" charset="0"/>
+                <a:ea typeface="Pretendard" pitchFamily="34" charset="-122"/>
+                <a:cs typeface="Pretendard" pitchFamily="34" charset="-120"/>
+              </a:rPr>
+              <a:t>01:50–02:00</a:t>
+            </a:r>
+            <a:endParaRPr lang="en-US" sz="1050" dirty="0"/>
+          </a:p>
+        </p:txBody>
+      </p:sp>
+      <p:sp>
+        <p:nvSpPr>
+          <p:cNvPr id="26" name="Text 24"/>
+          <p:cNvSpPr/>
+          <p:nvPr/>
+        </p:nvSpPr>
+        <p:spPr>
+          <a:xfrm>
+            <a:off x="2377440" y="5040173"/>
+            <a:ext cx="6888175" cy="830275"/>
+          </a:xfrm>
+          <a:prstGeom prst="rect">
+            <a:avLst/>
+          </a:prstGeom>
+          <a:noFill/>
+          <a:ln/>
+        </p:spPr>
+        <p:txBody>
+          <a:bodyPr wrap="square" lIns="0" tIns="0" rIns="0" bIns="0" rtlCol="0" anchor="ctr"/>
+          <a:lstStyle/>
+          <a:p>
+            <a:pPr indent="0" marL="0">
+              <a:buNone/>
+            </a:pPr>
+            <a:r>
+              <a:rPr lang="en-US" sz="1300" b="1" dirty="0">
+                <a:solidFill>
+                  <a:srgbClr val="111111"/>
+                </a:solidFill>
+                <a:latin typeface="Pretendard" pitchFamily="34" charset="0"/>
+                <a:ea typeface="Pretendard" pitchFamily="34" charset="-122"/>
+                <a:cs typeface="Pretendard" pitchFamily="34" charset="-120"/>
+              </a:rPr>
               <a:t>진행 확인 · 과제 안내</a:t>
             </a:r>
             <a:endParaRPr lang="en-US" sz="1300" dirty="0"/>
@@ -4264,14 +4509,14 @@
       </p:sp>
       <p:sp>
         <p:nvSpPr>
-          <p:cNvPr id="20" name="Text 18"/>
-          <p:cNvSpPr/>
-          <p:nvPr/>
-        </p:nvSpPr>
-        <p:spPr>
-          <a:xfrm>
-            <a:off x="9265615" y="3584448"/>
-            <a:ext cx="2286000" cy="932688"/>
+          <p:cNvPr id="27" name="Text 25"/>
+          <p:cNvSpPr/>
+          <p:nvPr/>
+        </p:nvSpPr>
+        <p:spPr>
+          <a:xfrm>
+            <a:off x="9265615" y="5040173"/>
+            <a:ext cx="2286000" cy="830275"/>
           </a:xfrm>
           <a:prstGeom prst="rect">
             <a:avLst/>
@@ -4303,14 +4548,14 @@
       </p:sp>
       <p:sp>
         <p:nvSpPr>
-          <p:cNvPr id="21" name="Shape 19"/>
-          <p:cNvSpPr/>
-          <p:nvPr/>
-        </p:nvSpPr>
-        <p:spPr>
-          <a:xfrm>
-            <a:off x="640080" y="4828032"/>
-            <a:ext cx="10911535" cy="969264"/>
+          <p:cNvPr id="28" name="Shape 26"/>
+          <p:cNvSpPr/>
+          <p:nvPr/>
+        </p:nvSpPr>
+        <p:spPr>
+          <a:xfrm>
+            <a:off x="640080" y="5852160"/>
+            <a:ext cx="10911535" cy="7315"/>
           </a:xfrm>
           <a:prstGeom prst="rect">
             <a:avLst/>
@@ -4328,88 +4573,7 @@
       </p:sp>
       <p:sp>
         <p:nvSpPr>
-          <p:cNvPr id="22" name="Text 20"/>
-          <p:cNvSpPr/>
-          <p:nvPr/>
-        </p:nvSpPr>
-        <p:spPr>
-          <a:xfrm>
-            <a:off x="1097280" y="5010912"/>
-            <a:ext cx="2743200" cy="256032"/>
-          </a:xfrm>
-          <a:prstGeom prst="rect">
-            <a:avLst/>
-          </a:prstGeom>
-          <a:noFill/>
-          <a:ln/>
-        </p:spPr>
-        <p:txBody>
-          <a:bodyPr wrap="square" lIns="0" tIns="0" rIns="0" bIns="0" rtlCol="0" anchor="ctr"/>
-          <a:lstStyle/>
-          <a:p>
-            <a:pPr indent="0" marL="0">
-              <a:buNone/>
-            </a:pPr>
-            <a:r>
-              <a:rPr lang="en-US" sz="950" spc="240" kern="0" dirty="0">
-                <a:solidFill>
-                  <a:srgbClr val="9A9A9A"/>
-                </a:solidFill>
-                <a:latin typeface="Pretendard" pitchFamily="34" charset="0"/>
-                <a:ea typeface="Pretendard" pitchFamily="34" charset="-122"/>
-                <a:cs typeface="Pretendard" pitchFamily="34" charset="-120"/>
-              </a:rPr>
-              <a:t>오늘 끝나면</a:t>
-            </a:r>
-            <a:endParaRPr lang="en-US" sz="950" dirty="0"/>
-          </a:p>
-        </p:txBody>
-      </p:sp>
-      <p:sp>
-        <p:nvSpPr>
-          <p:cNvPr id="23" name="Text 21"/>
-          <p:cNvSpPr/>
-          <p:nvPr/>
-        </p:nvSpPr>
-        <p:spPr>
-          <a:xfrm>
-            <a:off x="1097280" y="5285232"/>
-            <a:ext cx="9997135" cy="365760"/>
-          </a:xfrm>
-          <a:prstGeom prst="rect">
-            <a:avLst/>
-          </a:prstGeom>
-          <a:noFill/>
-          <a:ln/>
-        </p:spPr>
-        <p:txBody>
-          <a:bodyPr wrap="square" lIns="0" tIns="0" rIns="0" bIns="0" rtlCol="0" anchor="ctr"/>
-          <a:lstStyle/>
-          <a:p>
-            <a:pPr indent="0" marL="0">
-              <a:lnSpc>
-                <a:spcPct val="126000"/>
-              </a:lnSpc>
-              <a:buNone/>
-            </a:pPr>
-            <a:r>
-              <a:rPr lang="en-US" sz="1600" dirty="0">
-                <a:solidFill>
-                  <a:srgbClr val="FFFFFF"/>
-                </a:solidFill>
-                <a:latin typeface="Pretendard Black" pitchFamily="34" charset="0"/>
-                <a:ea typeface="Pretendard Black" pitchFamily="34" charset="-122"/>
-                <a:cs typeface="Pretendard Black" pitchFamily="34" charset="-120"/>
-              </a:rPr>
-              <a:t>이미지 톤이 정리되고, 페이지가 한 벌로 보이기 시작합니다.</a:t>
-            </a:r>
-            <a:endParaRPr lang="en-US" sz="1600" dirty="0"/>
-          </a:p>
-        </p:txBody>
-      </p:sp>
-      <p:sp>
-        <p:nvSpPr>
-          <p:cNvPr id="24" name="Shape 22"/>
+          <p:cNvPr id="29" name="Shape 27"/>
           <p:cNvSpPr/>
           <p:nvPr/>
         </p:nvSpPr>
@@ -4434,7 +4598,7 @@
       </p:sp>
       <p:sp>
         <p:nvSpPr>
-          <p:cNvPr id="25" name="Text 23"/>
+          <p:cNvPr id="30" name="Text 28"/>
           <p:cNvSpPr/>
           <p:nvPr/>
         </p:nvSpPr>
@@ -4473,7 +4637,7 @@
       </p:sp>
       <p:sp>
         <p:nvSpPr>
-          <p:cNvPr id="26" name="Text 24"/>
+          <p:cNvPr id="31" name="Text 29"/>
           <p:cNvSpPr/>
           <p:nvPr/>
         </p:nvSpPr>
@@ -9672,7 +9836,7 @@
                 <a:ea typeface="Pretendard" pitchFamily="34" charset="-122"/>
                 <a:cs typeface="Pretendard" pitchFamily="34" charset="-120"/>
               </a:rPr>
-              <a:t>60분 · 개인 — 이미지 정리부터 시작합니다.</a:t>
+              <a:t>80분 · 개인 — 이미지 정리부터 시작합니다. 중간에 휴식이 한 번 들어갑니다.</a:t>
             </a:r>
             <a:endParaRPr lang="en-US" sz="1150" dirty="0"/>
           </a:p>
@@ -9736,7 +9900,7 @@
                 <a:ea typeface="Pretendard Light" pitchFamily="34" charset="-122"/>
                 <a:cs typeface="Pretendard Light" pitchFamily="34" charset="-120"/>
               </a:rPr>
-              <a:t>10분</a:t>
+              <a:t>12분</a:t>
             </a:r>
             <a:endParaRPr lang="en-US" sz="2200" dirty="0"/>
           </a:p>
@@ -9881,7 +10045,7 @@
                 <a:ea typeface="Pretendard Light" pitchFamily="34" charset="-122"/>
                 <a:cs typeface="Pretendard Light" pitchFamily="34" charset="-120"/>
               </a:rPr>
-              <a:t>20분</a:t>
+              <a:t>26분</a:t>
             </a:r>
             <a:endParaRPr lang="en-US" sz="2200" dirty="0"/>
           </a:p>
@@ -10026,7 +10190,7 @@
                 <a:ea typeface="Pretendard Light" pitchFamily="34" charset="-122"/>
                 <a:cs typeface="Pretendard Light" pitchFamily="34" charset="-120"/>
               </a:rPr>
-              <a:t>20분</a:t>
+              <a:t>28분</a:t>
             </a:r>
             <a:endParaRPr lang="en-US" sz="2200" dirty="0"/>
           </a:p>
@@ -10171,7 +10335,7 @@
                 <a:ea typeface="Pretendard Light" pitchFamily="34" charset="-122"/>
                 <a:cs typeface="Pretendard Light" pitchFamily="34" charset="-120"/>
               </a:rPr>
-              <a:t>10분</a:t>
+              <a:t>14분</a:t>
             </a:r>
             <a:endParaRPr lang="en-US" sz="2200" dirty="0"/>
           </a:p>

--- a/dist/weeks-포트폴리오제작/포트폴리오제작_11주차_편집디자인2.pptx
+++ b/dist/weeks-포트폴리오제작/포트폴리오제작_11주차_편집디자인2.pptx
@@ -511,7 +511,8 @@
           <a:p>
             <a:r>
               <a:rPr lang="en-US" dirty="0"/>
-              <a:t>이미지 보정은 툴 사용법 수업이 아니다. '왜 보정하는가'(톤 통일)에 초점을 두고, 조작법은 짧게 시연만 할 것.</a:t>
+              <a:t>[운영 메모]
+이미지 보정은 툴 사용법 수업이 아니다. '왜 보정하는가'(톤 통일)에 초점을 두고, 조작법은 짧게 시연만 할 것.</a:t>
             </a:r>
             <a:endParaRPr lang="en-US" dirty="0"/>
           </a:p>
@@ -599,7 +600,8 @@
           <a:p>
             <a:r>
               <a:rPr lang="en-US" dirty="0"/>
-              <a:t>플랫폼을 수업 시간에 고르기 시작하면 60분을 다 쓴다. 미리 정해 오게 할 것.</a:t>
+              <a:t>[운영 메모]
+플랫폼을 수업 시간에 고르기 시작하면 60분을 다 쓴다. 미리 정해 오게 할 것.</a:t>
             </a:r>
             <a:endParaRPr lang="en-US" dirty="0"/>
           </a:p>
@@ -687,7 +689,8 @@
           <a:p>
             <a:r>
               <a:rPr lang="en-US" dirty="0"/>
-              <a:t>해상도가 부족한 이미지를 가져온 학생이 반드시 있다. 대체 방법(재촬영·크롭·작게 배치)을 미리 준비해 둘 것.</a:t>
+              <a:t>[운영 메모]
+해상도가 부족한 이미지를 가져온 학생이 반드시 있다. 대체 방법(재촬영·크롭·작게 배치)을 미리 준비해 둘 것.</a:t>
             </a:r>
             <a:endParaRPr lang="en-US" dirty="0"/>
           </a:p>
@@ -775,7 +778,8 @@
           <a:p>
             <a:r>
               <a:rPr lang="en-US" dirty="0"/>
-              <a:t>2번이 오늘의 실질적 성과다. 톤이 통일되면 완성도가 눈에 띄게 올라간다.</a:t>
+              <a:t>[운영 메모]
+2번이 오늘의 실질적 성과다. 톤이 통일되면 완성도가 눈에 띄게 올라간다.</a:t>
             </a:r>
             <a:endParaRPr lang="en-US" dirty="0"/>
           </a:p>
@@ -863,7 +867,8 @@
           <a:p>
             <a:r>
               <a:rPr lang="en-US" dirty="0"/>
-              <a:t>9주차 무드보드를 각자 띄워놓고 시작하게 할 것.</a:t>
+              <a:t>[운영 메모]
+9주차 무드보드를 각자 띄워놓고 시작하게 할 것.</a:t>
             </a:r>
             <a:endParaRPr lang="en-US" dirty="0"/>
           </a:p>
@@ -951,7 +956,8 @@
           <a:p>
             <a:r>
               <a:rPr lang="en-US" dirty="0"/>
-              <a:t>03은 학과 특성상 인쇄 포트폴리오를 내는 학생이 있으므로 반드시 짚을 것.</a:t>
+              <a:t>[운영 메모]
+03은 학과 특성상 인쇄 포트폴리오를 내는 학생이 있으므로 반드시 짚을 것.</a:t>
             </a:r>
             <a:endParaRPr lang="en-US" dirty="0"/>
           </a:p>
@@ -1039,7 +1045,8 @@
           <a:p>
             <a:r>
               <a:rPr lang="en-US" dirty="0"/>
-              <a:t>짧은 시연 위주로.</a:t>
+              <a:t>[운영 메모]
+짧은 시연 위주로.</a:t>
             </a:r>
             <a:endParaRPr lang="en-US" dirty="0"/>
           </a:p>
@@ -1127,7 +1134,8 @@
           <a:p>
             <a:r>
               <a:rPr lang="en-US" dirty="0"/>
-              <a:t>해상도 문제는 매년 나온다. '작게 배치'라는 현실적 대안을 제시할 것.</a:t>
+              <a:t>[운영 메모]
+해상도 문제는 매년 나온다. '작게 배치'라는 현실적 대안을 제시할 것.</a:t>
             </a:r>
             <a:endParaRPr lang="en-US" dirty="0"/>
           </a:p>
@@ -1215,7 +1223,8 @@
           <a:p>
             <a:r>
               <a:rPr lang="en-US" dirty="0"/>
-              <a:t>이 네 항목을 순회 지도의 체크리스트로 쓰면 빠르게 봐줄 수 있다.</a:t>
+              <a:t>[운영 메모]
+이 네 항목을 순회 지도의 체크리스트로 쓰면 빠르게 봐줄 수 있다.</a:t>
             </a:r>
             <a:endParaRPr lang="en-US" dirty="0"/>
           </a:p>
@@ -1303,7 +1312,8 @@
           <a:p>
             <a:r>
               <a:rPr lang="en-US" dirty="0"/>
-              <a:t>마지막 전체 훑기가 중요하다. 페이지 단위로만 보면 일관성 문제가 안 보인다.</a:t>
+              <a:t>[운영 메모]
+마지막 전체 훑기가 중요하다. 페이지 단위로만 보면 일관성 문제가 안 보인다.</a:t>
             </a:r>
             <a:endParaRPr lang="en-US" dirty="0"/>
           </a:p>
